--- a/presentacion/mando.pptx
+++ b/presentacion/mando.pptx
@@ -19,9 +19,10 @@
     <p:sldId id="267" r:id="rId13"/>
     <p:sldId id="268" r:id="rId14"/>
     <p:sldId id="269" r:id="rId15"/>
+    <p:sldId id="270" r:id="rId16"/>
   </p:sldIdLst>
   <p:notesMasterIdLst>
-    <p:notesMasterId r:id="rId16"/>
+    <p:notesMasterId r:id="rId17"/>
   </p:notesMasterIdLst>
   <p:sldSz cx="12192000" cy="6858000"/>
   <p:notesSz cx="6858000" cy="12192000"/>
@@ -120,7 +121,7 @@
   <p:extLst>
     <p:ext uri="{521415D9-36F7-43E2-AB2F-B90AF26B5E84}">
       <p14:sectionLst xmlns:p14="http://schemas.microsoft.com/office/powerpoint/2010/main">
-        <p14:section name="Introducción" id="{5c25ac77-7568-d370-7954-3341fb984dbc}">
+        <p14:section name="Introducción" id="{06db4df0-0b89-3d8a-8a21-2f684eb23efb}">
           <p14:sldIdLst>
             <p14:sldId id="256"/>
             <p14:sldId id="257"/>
@@ -128,30 +129,31 @@
             <p14:sldId id="259"/>
           </p14:sldIdLst>
         </p14:section>
-        <p14:section name="Funciones" id="{0ca03b19-8774-d9e2-38a4-4e37c98ba6a2}">
+        <p14:section name="Funciones" id="{c196b939-49c5-fca3-f3e2-cad589d2b8c8}">
           <p14:sldIdLst>
             <p14:sldId id="260"/>
             <p14:sldId id="261"/>
             <p14:sldId id="262"/>
           </p14:sldIdLst>
         </p14:section>
-        <p14:section name="Valor" id="{480b05e0-8dea-014e-bf79-174b6c827c50}">
+        <p14:section name="Valor" id="{552fc145-2c25-bfea-19c9-1c515cfce813}">
           <p14:sldIdLst>
             <p14:sldId id="263"/>
             <p14:sldId id="264"/>
           </p14:sldIdLst>
         </p14:section>
-        <p14:section name="Tecnología" id="{81db7a37-642f-0e7d-2d7a-03639b6b71a9}">
+        <p14:section name="Tecnología" id="{dcec37d4-004a-6025-fbc3-056e0e3a43af}">
           <p14:sldIdLst>
             <p14:sldId id="265"/>
             <p14:sldId id="266"/>
             <p14:sldId id="267"/>
           </p14:sldIdLst>
         </p14:section>
-        <p14:section name="Cierre" id="{9c22b923-ec6e-2c16-4db9-c040ef75aea6}">
+        <p14:section name="Cierre" id="{c957a61e-37c1-aac5-90f1-28f1f74aab92}">
           <p14:sldIdLst>
             <p14:sldId id="268"/>
             <p14:sldId id="269"/>
+            <p14:sldId id="270"/>
           </p14:sldIdLst>
         </p14:section>
       </p14:sectionLst>
@@ -646,7 +648,7 @@
           <a:p>
             <a:r>
               <a:rPr lang="en-US" dirty="0"/>
-              <a:t>El celular y la computadora se comunican de forma directa mediante WebRTC, cifrado de punto a punto. Un servidor de señalización gratuito solo se usa para que los dos dispositivos se encuentren; después ya no participa. La clave secreta viaja dentro del QR y nunca se envía al servidor.</a:t>
+              <a:t>El celular y la computadora se comunican de forma directa mediante WebRTC, cifrado de punto a punto. Un servidor de señalización gratuito solo se usa para que los dos dispositivos se encuentren; después ya no participa. Si la red bloquea la conexión directa, el tráfico, todavía cifrado, pasa por el servidor de retransmisión de Cloudflare. La clave secreta viaja dentro del QR y nunca se envía al servidor.</a:t>
             </a:r>
             <a:endParaRPr lang="en-US" dirty="0"/>
           </a:p>
@@ -822,7 +824,7 @@
           <a:p>
             <a:r>
               <a:rPr lang="en-US" dirty="0"/>
-              <a:t>Mando se probó de punta a punta con pruebas automáticas que conectan la extensión y el celular de verdad: 38 de 38 comprobaciones superadas. La interfaz se revisó en 28 combinaciones de pantalla y vista. Si se corta el servidor, se reconecta solo en unos 3 segundos sin desconectar al celular.</a:t>
+              <a:t>Mando se probó de punta a punta con pruebas automáticas que conectan la extensión y el celular de verdad: 42 de 42 comprobaciones superadas. La interfaz se revisó en 28 combinaciones de pantalla y vista. Si se corta el servidor, se reconecta solo en unos 3 segundos sin desconectar al celular.</a:t>
             </a:r>
             <a:endParaRPr lang="en-US" dirty="0"/>
           </a:p>
@@ -910,7 +912,7 @@
           <a:p>
             <a:r>
               <a:rPr lang="en-US" dirty="0"/>
-              <a:t>Hoy hay tres límites conocidos: redes muy restrictivas que bloquean la conexión directa, páginas internas de Chrome donde las extensiones no pueden actuar, y programas fuera del navegador. Los próximos pasos son publicar en la Chrome Web Store, sumar un servidor de retransmisión con Cloudflare, ofrecer un QR nuevo por sesión y evaluar una app para Apple Watch.</a:t>
+              <a:t>Hoy hay tres límites conocidos: se necesita internet para enlazar los dispositivos, Chrome no permite extensiones en sus páginas internas, y Mando no controla programas fuera del navegador. Ya están listos la retransmisión con Cloudflare para redes restrictivas y el QR nuevo en cada sesión. La versión 1.0 está en revisión en la Chrome Web Store y la 1.1 está preparada; queda por evaluar una app para Apple Watch.</a:t>
             </a:r>
             <a:endParaRPr lang="en-US" dirty="0"/>
           </a:p>
@@ -1040,6 +1042,94 @@
 </p:notes>
 </file>
 
+<file path=ppt/notesSlides/notesSlide15.xml><?xml version="1.0" encoding="utf-8"?>
+<p:notes xmlns:a="http://schemas.openxmlformats.org/drawingml/2006/main" xmlns:r="http://schemas.openxmlformats.org/officeDocument/2006/relationships" xmlns:p="http://schemas.openxmlformats.org/presentationml/2006/main">
+  <p:cSld>
+    <p:spTree>
+      <p:nvGrpSpPr>
+        <p:cNvPr id="1" name=""/>
+        <p:cNvGrpSpPr/>
+        <p:nvPr/>
+      </p:nvGrpSpPr>
+      <p:grpSpPr>
+        <a:xfrm>
+          <a:off x="0" y="0"/>
+          <a:ext cx="0" cy="0"/>
+          <a:chOff x="0" y="0"/>
+          <a:chExt cx="0" cy="0"/>
+        </a:xfrm>
+      </p:grpSpPr>
+      <p:sp>
+        <p:nvSpPr>
+          <p:cNvPr id="2" name="Slide Image Placeholder 1"/>
+          <p:cNvSpPr>
+            <a:spLocks noGrp="1" noRot="1" noChangeAspect="1"/>
+          </p:cNvSpPr>
+          <p:nvPr>
+            <p:ph type="sldImg"/>
+          </p:nvPr>
+        </p:nvSpPr>
+        <p:spPr/>
+      </p:sp>
+      <p:sp>
+        <p:nvSpPr>
+          <p:cNvPr id="3" name="Notes Placeholder 2"/>
+          <p:cNvSpPr>
+            <a:spLocks noGrp="1"/>
+          </p:cNvSpPr>
+          <p:nvPr>
+            <p:ph type="body" idx="1"/>
+          </p:nvPr>
+        </p:nvSpPr>
+        <p:spPr/>
+        <p:txBody>
+          <a:bodyPr/>
+          <a:lstStyle/>
+          <a:p>
+            <a:r>
+              <a:rPr lang="en-US" dirty="0"/>
+              <a:t>Cierre: agradecer al público y abrir el espacio de preguntas. Si alguien quiere probarlo, puede escanear el código de la diapositiva anterior para ver el proyecto en GitHub.</a:t>
+            </a:r>
+            <a:endParaRPr lang="en-US" dirty="0"/>
+          </a:p>
+        </p:txBody>
+      </p:sp>
+      <p:sp>
+        <p:nvSpPr>
+          <p:cNvPr id="4" name="Slide Number Placeholder 3"/>
+          <p:cNvSpPr>
+            <a:spLocks noGrp="1"/>
+          </p:cNvSpPr>
+          <p:nvPr>
+            <p:ph type="sldNum" sz="quarter" idx="10"/>
+          </p:nvPr>
+        </p:nvSpPr>
+        <p:spPr/>
+        <p:txBody>
+          <a:bodyPr/>
+          <a:lstStyle/>
+          <a:p>
+            <a:fld id="{F7021451-1387-4CA6-816F-3879F97B5CBC}" type="slidenum">
+              <a:rPr lang="en-US"/>
+              <a:t>15</a:t>
+            </a:fld>
+            <a:endParaRPr lang="en-US"/>
+          </a:p>
+        </p:txBody>
+      </p:sp>
+    </p:spTree>
+    <p:extLst>
+      <p:ext uri="{BB962C8B-B14F-4D97-AF65-F5344CB8AC3E}">
+        <p14:creationId xmlns:p14="http://schemas.microsoft.com/office/powerpoint/2010/main" val="1024086991"/>
+      </p:ext>
+    </p:extLst>
+  </p:cSld>
+  <p:clrMapOvr>
+    <a:masterClrMapping/>
+  </p:clrMapOvr>
+</p:notes>
+</file>
+
 <file path=ppt/notesSlides/notesSlide2.xml><?xml version="1.0" encoding="utf-8"?>
 <p:notes xmlns:a="http://schemas.openxmlformats.org/drawingml/2006/main" xmlns:r="http://schemas.openxmlformats.org/officeDocument/2006/relationships" xmlns:p="http://schemas.openxmlformats.org/presentationml/2006/main">
   <p:cSld>
@@ -1262,7 +1352,7 @@
           <a:p>
             <a:r>
               <a:rPr lang="en-US" dirty="0"/>
-              <a:t>Paso 1: abrir la presentación en Chrome. Paso 2: hacer clic en el ícono de Mando o pulsar Alt+Shift+M y escanear el QR con la cámara. Paso 3: presentar desde el celular. El celular recuerda la conexión y se reconecta solo la próxima vez.</a:t>
+              <a:t>Paso 1: abrir la presentación en Chrome. Paso 2: hacer clic en el ícono de Mando o pulsar Alt+Shift+M y escanear el QR con la cámara. Paso 3: presentar desde el celular. Por seguridad, cada sesión genera un código QR nuevo.</a:t>
             </a:r>
             <a:endParaRPr lang="en-US" dirty="0"/>
           </a:p>
@@ -1820,7 +1910,7 @@
         <p:txBody>
           <a:bodyPr wrap="square" rtlCol="0"/>
           <a:lstStyle>
-            <a:lvl1pPr indent="0" marL="0">
+            <a:lvl1pPr algn="l" indent="0" marL="0">
               <a:buNone/>
               <a:defRPr lang="en-US" sz="6600" b="1" dirty="0">
                 <a:solidFill>
@@ -1830,7 +1920,7 @@
             </a:lvl1pPr>
           </a:lstStyle>
           <a:p>
-            <a:pPr indent="0" marL="0">
+            <a:pPr algn="l" indent="0" marL="0">
               <a:buNone/>
             </a:pPr>
             <a:endParaRPr lang="en-US" sz="6600" dirty="0"/>
@@ -1848,7 +1938,7 @@
         <p:spPr>
           <a:xfrm>
             <a:off x="822960" y="3977640"/>
-            <a:ext cx="4754880" cy="914400"/>
+            <a:ext cx="5120640" cy="914400"/>
           </a:xfrm>
           <a:prstGeom prst="rect">
             <a:avLst/>
@@ -1859,9 +1949,9 @@
         <p:txBody>
           <a:bodyPr wrap="square" rtlCol="0"/>
           <a:lstStyle>
-            <a:lvl1pPr indent="0" marL="0">
-              <a:buNone/>
-              <a:defRPr lang="en-US" sz="2200" dirty="0">
+            <a:lvl1pPr algn="l" indent="0" marL="0">
+              <a:buNone/>
+              <a:defRPr lang="en-US" sz="2000" dirty="0">
                 <a:solidFill>
                   <a:schemeClr val="accent5"/>
                 </a:solidFill>
@@ -1869,10 +1959,10 @@
             </a:lvl1pPr>
           </a:lstStyle>
           <a:p>
-            <a:pPr indent="0" marL="0">
-              <a:buNone/>
-            </a:pPr>
-            <a:endParaRPr lang="en-US" sz="2200" dirty="0"/>
+            <a:pPr algn="l" indent="0" marL="0">
+              <a:buNone/>
+            </a:pPr>
+            <a:endParaRPr lang="en-US" sz="2000" dirty="0"/>
           </a:p>
         </p:txBody>
       </p:sp>
@@ -1898,7 +1988,7 @@
         <p:txBody>
           <a:bodyPr wrap="square" rtlCol="0"/>
           <a:lstStyle>
-            <a:lvl1pPr indent="0" marL="0">
+            <a:lvl1pPr algn="l" indent="0" marL="0">
               <a:buNone/>
               <a:defRPr lang="en-US" sz="1200" dirty="0">
                 <a:solidFill>
@@ -1908,7 +1998,7 @@
             </a:lvl1pPr>
           </a:lstStyle>
           <a:p>
-            <a:pPr indent="0" marL="0">
+            <a:pPr algn="l" indent="0" marL="0">
               <a:buNone/>
             </a:pPr>
             <a:endParaRPr lang="en-US" sz="1200" dirty="0"/>
@@ -1969,7 +2059,7 @@
         <p:txBody>
           <a:bodyPr wrap="square" rtlCol="0"/>
           <a:lstStyle>
-            <a:lvl1pPr indent="0" marL="0">
+            <a:lvl1pPr algn="l" indent="0" marL="0">
               <a:buNone/>
               <a:defRPr lang="en-US" sz="1200" b="1" spc="200" kern="0" dirty="0">
                 <a:solidFill>
@@ -1979,7 +2069,7 @@
             </a:lvl1pPr>
           </a:lstStyle>
           <a:p>
-            <a:pPr indent="0" marL="0">
+            <a:pPr algn="l" indent="0" marL="0">
               <a:buNone/>
             </a:pPr>
             <a:endParaRPr lang="en-US" sz="1200" dirty="0"/>
@@ -2008,7 +2098,7 @@
         <p:txBody>
           <a:bodyPr wrap="square" rtlCol="0"/>
           <a:lstStyle>
-            <a:lvl1pPr indent="0" marL="0">
+            <a:lvl1pPr algn="l" indent="0" marL="0">
               <a:buNone/>
               <a:defRPr lang="en-US" sz="3600" b="1" dirty="0">
                 <a:solidFill>
@@ -2018,7 +2108,7 @@
             </a:lvl1pPr>
           </a:lstStyle>
           <a:p>
-            <a:pPr indent="0" marL="0">
+            <a:pPr algn="l" indent="0" marL="0">
               <a:buNone/>
             </a:pPr>
             <a:endParaRPr lang="en-US" sz="3600" dirty="0"/>
@@ -2160,7 +2250,7 @@
         <p:txBody>
           <a:bodyPr wrap="square" rtlCol="0"/>
           <a:lstStyle>
-            <a:lvl1pPr indent="0" marL="0">
+            <a:lvl1pPr algn="l" indent="0" marL="0">
               <a:buNone/>
               <a:defRPr lang="en-US" sz="1200" b="1" spc="200" kern="0" dirty="0">
                 <a:solidFill>
@@ -2170,7 +2260,7 @@
             </a:lvl1pPr>
           </a:lstStyle>
           <a:p>
-            <a:pPr indent="0" marL="0">
+            <a:pPr algn="l" indent="0" marL="0">
               <a:buNone/>
             </a:pPr>
             <a:endParaRPr lang="en-US" sz="1200" dirty="0"/>
@@ -2199,7 +2289,7 @@
         <p:txBody>
           <a:bodyPr wrap="square" rtlCol="0"/>
           <a:lstStyle>
-            <a:lvl1pPr indent="0" marL="0">
+            <a:lvl1pPr algn="l" indent="0" marL="0">
               <a:buNone/>
               <a:defRPr lang="en-US" sz="3600" b="1" dirty="0">
                 <a:solidFill>
@@ -2209,7 +2299,7 @@
             </a:lvl1pPr>
           </a:lstStyle>
           <a:p>
-            <a:pPr indent="0" marL="0">
+            <a:pPr algn="l" indent="0" marL="0">
               <a:buNone/>
             </a:pPr>
             <a:endParaRPr lang="en-US" sz="3600" dirty="0"/>
@@ -2351,7 +2441,7 @@
         <p:txBody>
           <a:bodyPr wrap="square" rtlCol="0"/>
           <a:lstStyle>
-            <a:lvl1pPr indent="0" marL="0">
+            <a:lvl1pPr algn="l" indent="0" marL="0">
               <a:buNone/>
               <a:defRPr lang="en-US" sz="5200" b="1" dirty="0">
                 <a:solidFill>
@@ -2361,7 +2451,7 @@
             </a:lvl1pPr>
           </a:lstStyle>
           <a:p>
-            <a:pPr indent="0" marL="0">
+            <a:pPr algn="l" indent="0" marL="0">
               <a:buNone/>
             </a:pPr>
             <a:endParaRPr lang="en-US" sz="5200" dirty="0"/>
@@ -2390,7 +2480,7 @@
         <p:txBody>
           <a:bodyPr wrap="square" rtlCol="0"/>
           <a:lstStyle>
-            <a:lvl1pPr indent="0" marL="0">
+            <a:lvl1pPr algn="l" indent="0" marL="0">
               <a:buNone/>
               <a:defRPr lang="en-US" sz="2000" dirty="0">
                 <a:solidFill>
@@ -2400,7 +2490,7 @@
             </a:lvl1pPr>
           </a:lstStyle>
           <a:p>
-            <a:pPr indent="0" marL="0">
+            <a:pPr algn="l" indent="0" marL="0">
               <a:buNone/>
             </a:pPr>
             <a:endParaRPr lang="en-US" sz="2000" dirty="0"/>
@@ -2805,7 +2895,7 @@
           <a:bodyPr wrap="square" lIns="0" tIns="0" rIns="0" bIns="0" rtlCol="0" anchor="b"/>
           <a:lstStyle/>
           <a:p>
-            <a:pPr indent="0" marL="0">
+            <a:pPr algn="l" indent="0" marL="0">
               <a:buNone/>
             </a:pPr>
             <a:r>
@@ -2831,7 +2921,7 @@
         <p:spPr>
           <a:xfrm>
             <a:off x="822960" y="3977640"/>
-            <a:ext cx="4754880" cy="914400"/>
+            <a:ext cx="5120640" cy="914400"/>
           </a:xfrm>
           <a:prstGeom prst="rect">
             <a:avLst/>
@@ -2843,18 +2933,18 @@
           <a:bodyPr wrap="square" lIns="0" tIns="0" rIns="0" bIns="0" rtlCol="0" anchor="t"/>
           <a:lstStyle/>
           <a:p>
-            <a:pPr indent="0" marL="0">
-              <a:buNone/>
-            </a:pPr>
-            <a:r>
-              <a:rPr lang="en-US" sz="2200" dirty="0">
+            <a:pPr algn="l" indent="0" marL="0">
+              <a:buNone/>
+            </a:pPr>
+            <a:r>
+              <a:rPr lang="en-US" sz="2000" dirty="0">
                 <a:solidFill>
                   <a:schemeClr val="accent5"/>
                 </a:solidFill>
               </a:rPr>
               <a:t>Controla tus presentaciones desde el celular</a:t>
             </a:r>
-            <a:endParaRPr lang="en-US" sz="2200" dirty="0"/>
+            <a:endParaRPr lang="en-US" sz="2000" dirty="0"/>
           </a:p>
         </p:txBody>
       </p:sp>
@@ -2881,7 +2971,7 @@
           <a:bodyPr wrap="square" lIns="0" tIns="0" rIns="0" bIns="0" rtlCol="0" anchor="ctr"/>
           <a:lstStyle/>
           <a:p>
-            <a:pPr indent="0" marL="0">
+            <a:pPr algn="l" indent="0" marL="0">
               <a:buNone/>
             </a:pPr>
             <a:r>
@@ -3017,7 +3107,7 @@
           <a:bodyPr wrap="square" lIns="0" tIns="0" rIns="0" bIns="0" rtlCol="0" anchor="ctr"/>
           <a:lstStyle/>
           <a:p>
-            <a:pPr indent="0" marL="0">
+            <a:pPr algn="l" indent="0" marL="0">
               <a:buNone/>
             </a:pPr>
             <a:r>
@@ -3055,7 +3145,7 @@
           <a:bodyPr wrap="square" lIns="0" tIns="0" rIns="0" bIns="0" rtlCol="0" anchor="t"/>
           <a:lstStyle/>
           <a:p>
-            <a:pPr indent="0" marL="0">
+            <a:pPr algn="l" indent="0" marL="0">
               <a:buNone/>
             </a:pPr>
             <a:r>
@@ -3064,7 +3154,7 @@
                   <a:schemeClr val="tx1"/>
                 </a:solidFill>
               </a:rPr>
-              <a:t>Conexión directa entre tu celular y tu computadora</a:t>
+              <a:t>Una conexión directa y cifrada</a:t>
             </a:r>
             <a:endParaRPr lang="en-US" sz="3600" dirty="0"/>
           </a:p>
@@ -3072,7 +3162,7 @@
       </p:sp>
       <p:sp>
         <p:nvSpPr>
-          <p:cNvPr id="4" name="tarjeta-142"/>
+          <p:cNvPr id="4" name="tarjeta-143"/>
           <p:cNvSpPr/>
           <p:nvPr/>
         </p:nvSpPr>
@@ -3094,7 +3184,7 @@
       </p:sp>
       <p:sp>
         <p:nvSpPr>
-          <p:cNvPr id="5" name="icono-fondo-143"/>
+          <p:cNvPr id="5" name="icono-fondo-144"/>
           <p:cNvSpPr/>
           <p:nvPr/>
         </p:nvSpPr>
@@ -3116,7 +3206,7 @@
       </p:sp>
       <p:pic>
         <p:nvPicPr>
-          <p:cNvPr id="6" name="icono-LuServer-144" descr="preencoded.png">    </p:cNvPr>
+          <p:cNvPr id="6" name="icono-LuServer-145" descr="preencoded.png">    </p:cNvPr>
           <p:cNvPicPr>
             <a:picLocks noChangeAspect="1"/>
           </p:cNvPicPr>
@@ -3140,7 +3230,7 @@
       </p:pic>
       <p:sp>
         <p:nvSpPr>
-          <p:cNvPr id="7" name="texto-145"/>
+          <p:cNvPr id="7" name="texto-146"/>
           <p:cNvSpPr txBox="1"/>
           <p:nvPr/>
         </p:nvSpPr>
@@ -3285,7 +3375,7 @@
       </p:sp>
       <p:sp>
         <p:nvSpPr>
-          <p:cNvPr id="12" name="tarjeta-146"/>
+          <p:cNvPr id="12" name="tarjeta-147"/>
           <p:cNvSpPr/>
           <p:nvPr/>
         </p:nvSpPr>
@@ -3307,7 +3397,7 @@
       </p:sp>
       <p:sp>
         <p:nvSpPr>
-          <p:cNvPr id="13" name="icono-fondo-147"/>
+          <p:cNvPr id="13" name="icono-fondo-148"/>
           <p:cNvSpPr/>
           <p:nvPr/>
         </p:nvSpPr>
@@ -3329,7 +3419,7 @@
       </p:sp>
       <p:pic>
         <p:nvPicPr>
-          <p:cNvPr id="14" name="icono-LuSmartphone-148" descr="preencoded.png">    </p:cNvPr>
+          <p:cNvPr id="14" name="icono-LuSmartphone-149" descr="preencoded.png">    </p:cNvPr>
           <p:cNvPicPr>
             <a:picLocks noChangeAspect="1"/>
           </p:cNvPicPr>
@@ -3353,7 +3443,7 @@
       </p:pic>
       <p:sp>
         <p:nvSpPr>
-          <p:cNvPr id="15" name="texto-149"/>
+          <p:cNvPr id="15" name="texto-150"/>
           <p:cNvSpPr txBox="1"/>
           <p:nvPr/>
         </p:nvSpPr>
@@ -3406,7 +3496,7 @@
       </p:sp>
       <p:sp>
         <p:nvSpPr>
-          <p:cNvPr id="16" name="tarjeta-150"/>
+          <p:cNvPr id="16" name="tarjeta-151"/>
           <p:cNvSpPr/>
           <p:nvPr/>
         </p:nvSpPr>
@@ -3428,7 +3518,7 @@
       </p:sp>
       <p:sp>
         <p:nvSpPr>
-          <p:cNvPr id="17" name="icono-fondo-151"/>
+          <p:cNvPr id="17" name="icono-fondo-152"/>
           <p:cNvSpPr/>
           <p:nvPr/>
         </p:nvSpPr>
@@ -3450,7 +3540,7 @@
       </p:sp>
       <p:pic>
         <p:nvPicPr>
-          <p:cNvPr id="18" name="icono-LuLaptop-152" descr="preencoded.png">    </p:cNvPr>
+          <p:cNvPr id="18" name="icono-LuLaptop-153" descr="preencoded.png">    </p:cNvPr>
           <p:cNvPicPr>
             <a:picLocks noChangeAspect="1"/>
           </p:cNvPicPr>
@@ -3474,7 +3564,7 @@
       </p:pic>
       <p:sp>
         <p:nvSpPr>
-          <p:cNvPr id="19" name="texto-153"/>
+          <p:cNvPr id="19" name="texto-154"/>
           <p:cNvSpPr txBox="1"/>
           <p:nvPr/>
         </p:nvSpPr>
@@ -3594,7 +3684,7 @@
                   <a:schemeClr val="accent6"/>
                 </a:solidFill>
               </a:rPr>
-              <a:t>Avanzar, láser, mouse y texto</a:t>
+              <a:t>Si la red lo bloquea, pasa cifrado por Cloudflare</a:t>
             </a:r>
             <a:endParaRPr lang="en-US" sz="1500" dirty="0"/>
           </a:p>
@@ -3602,7 +3692,7 @@
       </p:sp>
       <p:sp>
         <p:nvSpPr>
-          <p:cNvPr id="22" name="paso-154"/>
+          <p:cNvPr id="22" name="paso-155"/>
           <p:cNvSpPr/>
           <p:nvPr/>
         </p:nvSpPr>
@@ -3622,7 +3712,7 @@
       </p:sp>
       <p:sp>
         <p:nvSpPr>
-          <p:cNvPr id="23" name="paso-n-155"/>
+          <p:cNvPr id="23" name="paso-n-156"/>
           <p:cNvSpPr txBox="1"/>
           <p:nvPr/>
         </p:nvSpPr>
@@ -3658,7 +3748,7 @@
       </p:sp>
       <p:sp>
         <p:nvSpPr>
-          <p:cNvPr id="24" name="paso-texto-156"/>
+          <p:cNvPr id="24" name="paso-texto-157"/>
           <p:cNvSpPr txBox="1"/>
           <p:nvPr/>
         </p:nvSpPr>
@@ -3694,7 +3784,7 @@
       </p:sp>
       <p:sp>
         <p:nvSpPr>
-          <p:cNvPr id="25" name="paso-157"/>
+          <p:cNvPr id="25" name="paso-158"/>
           <p:cNvSpPr/>
           <p:nvPr/>
         </p:nvSpPr>
@@ -3714,7 +3804,7 @@
       </p:sp>
       <p:sp>
         <p:nvSpPr>
-          <p:cNvPr id="26" name="paso-n-158"/>
+          <p:cNvPr id="26" name="paso-n-159"/>
           <p:cNvSpPr txBox="1"/>
           <p:nvPr/>
         </p:nvSpPr>
@@ -3750,7 +3840,7 @@
       </p:sp>
       <p:sp>
         <p:nvSpPr>
-          <p:cNvPr id="27" name="paso-texto-159"/>
+          <p:cNvPr id="27" name="paso-texto-160"/>
           <p:cNvSpPr txBox="1"/>
           <p:nvPr/>
         </p:nvSpPr>
@@ -3786,7 +3876,7 @@
       </p:sp>
       <p:sp>
         <p:nvSpPr>
-          <p:cNvPr id="28" name="paso-160"/>
+          <p:cNvPr id="28" name="paso-161"/>
           <p:cNvSpPr/>
           <p:nvPr/>
         </p:nvSpPr>
@@ -3806,7 +3896,7 @@
       </p:sp>
       <p:sp>
         <p:nvSpPr>
-          <p:cNvPr id="29" name="paso-n-161"/>
+          <p:cNvPr id="29" name="paso-n-162"/>
           <p:cNvSpPr txBox="1"/>
           <p:nvPr/>
         </p:nvSpPr>
@@ -3842,7 +3932,7 @@
       </p:sp>
       <p:sp>
         <p:nvSpPr>
-          <p:cNvPr id="30" name="paso-texto-162"/>
+          <p:cNvPr id="30" name="paso-texto-163"/>
           <p:cNvSpPr txBox="1"/>
           <p:nvPr/>
         </p:nvSpPr>
@@ -3969,7 +4059,7 @@
           <a:bodyPr wrap="square" lIns="0" tIns="0" rIns="0" bIns="0" rtlCol="0" anchor="ctr"/>
           <a:lstStyle/>
           <a:p>
-            <a:pPr indent="0" marL="0">
+            <a:pPr algn="l" indent="0" marL="0">
               <a:buNone/>
             </a:pPr>
             <a:r>
@@ -4007,7 +4097,7 @@
           <a:bodyPr wrap="square" lIns="0" tIns="0" rIns="0" bIns="0" rtlCol="0" anchor="t"/>
           <a:lstStyle/>
           <a:p>
-            <a:pPr indent="0" marL="0">
+            <a:pPr algn="l" indent="0" marL="0">
               <a:buNone/>
             </a:pPr>
             <a:r>
@@ -4024,7 +4114,7 @@
       </p:sp>
       <p:sp>
         <p:nvSpPr>
-          <p:cNvPr id="4" name="icono-fondo-163"/>
+          <p:cNvPr id="4" name="icono-fondo-164"/>
           <p:cNvSpPr/>
           <p:nvPr/>
         </p:nvSpPr>
@@ -4046,7 +4136,7 @@
       </p:sp>
       <p:pic>
         <p:nvPicPr>
-          <p:cNvPr id="5" name="icono-LuLock-164" descr="preencoded.png">    </p:cNvPr>
+          <p:cNvPr id="5" name="icono-LuLock-165" descr="preencoded.png">    </p:cNvPr>
           <p:cNvPicPr>
             <a:picLocks noChangeAspect="1"/>
           </p:cNvPicPr>
@@ -4070,7 +4160,7 @@
       </p:pic>
       <p:sp>
         <p:nvSpPr>
-          <p:cNvPr id="6" name="texto-165"/>
+          <p:cNvPr id="6" name="texto-166"/>
           <p:cNvSpPr txBox="1"/>
           <p:nvPr/>
         </p:nvSpPr>
@@ -4123,7 +4213,7 @@
       </p:sp>
       <p:sp>
         <p:nvSpPr>
-          <p:cNvPr id="7" name="icono-fondo-166"/>
+          <p:cNvPr id="7" name="icono-fondo-167"/>
           <p:cNvSpPr/>
           <p:nvPr/>
         </p:nvSpPr>
@@ -4145,7 +4235,7 @@
       </p:sp>
       <p:pic>
         <p:nvPicPr>
-          <p:cNvPr id="8" name="icono-LuPower-167" descr="preencoded.png">    </p:cNvPr>
+          <p:cNvPr id="8" name="icono-LuPower-168" descr="preencoded.png">    </p:cNvPr>
           <p:cNvPicPr>
             <a:picLocks noChangeAspect="1"/>
           </p:cNvPicPr>
@@ -4169,7 +4259,7 @@
       </p:pic>
       <p:sp>
         <p:nvSpPr>
-          <p:cNvPr id="9" name="texto-168"/>
+          <p:cNvPr id="9" name="texto-169"/>
           <p:cNvSpPr txBox="1"/>
           <p:nvPr/>
         </p:nvSpPr>
@@ -4222,7 +4312,7 @@
       </p:sp>
       <p:sp>
         <p:nvSpPr>
-          <p:cNvPr id="10" name="icono-fondo-169"/>
+          <p:cNvPr id="10" name="icono-fondo-170"/>
           <p:cNvSpPr/>
           <p:nvPr/>
         </p:nvSpPr>
@@ -4244,7 +4334,7 @@
       </p:sp>
       <p:pic>
         <p:nvPicPr>
-          <p:cNvPr id="11" name="icono-LuKeyRound-170" descr="preencoded.png">    </p:cNvPr>
+          <p:cNvPr id="11" name="icono-LuKeyRound-171" descr="preencoded.png">    </p:cNvPr>
           <p:cNvPicPr>
             <a:picLocks noChangeAspect="1"/>
           </p:cNvPicPr>
@@ -4268,7 +4358,7 @@
       </p:pic>
       <p:sp>
         <p:nvSpPr>
-          <p:cNvPr id="12" name="texto-171"/>
+          <p:cNvPr id="12" name="texto-172"/>
           <p:cNvSpPr txBox="1"/>
           <p:nvPr/>
         </p:nvSpPr>
@@ -4321,7 +4411,7 @@
       </p:sp>
       <p:sp>
         <p:nvSpPr>
-          <p:cNvPr id="13" name="icono-fondo-172"/>
+          <p:cNvPr id="13" name="icono-fondo-173"/>
           <p:cNvSpPr/>
           <p:nvPr/>
         </p:nvSpPr>
@@ -4343,7 +4433,7 @@
       </p:sp>
       <p:pic>
         <p:nvPicPr>
-          <p:cNvPr id="14" name="icono-LuEyeOff-173" descr="preencoded.png">    </p:cNvPr>
+          <p:cNvPr id="14" name="icono-LuEyeOff-174" descr="preencoded.png">    </p:cNvPr>
           <p:cNvPicPr>
             <a:picLocks noChangeAspect="1"/>
           </p:cNvPicPr>
@@ -4367,7 +4457,7 @@
       </p:pic>
       <p:sp>
         <p:nvSpPr>
-          <p:cNvPr id="15" name="texto-174"/>
+          <p:cNvPr id="15" name="texto-175"/>
           <p:cNvSpPr txBox="1"/>
           <p:nvPr/>
         </p:nvSpPr>
@@ -4420,7 +4510,7 @@
       </p:sp>
       <p:sp>
         <p:nvSpPr>
-          <p:cNvPr id="16" name="icono-fondo-175"/>
+          <p:cNvPr id="16" name="icono-fondo-176"/>
           <p:cNvSpPr/>
           <p:nvPr/>
         </p:nvSpPr>
@@ -4442,7 +4532,7 @@
       </p:sp>
       <p:pic>
         <p:nvPicPr>
-          <p:cNvPr id="17" name="icono-LuRefreshCw-176" descr="preencoded.png">    </p:cNvPr>
+          <p:cNvPr id="17" name="icono-LuRefreshCw-177" descr="preencoded.png">    </p:cNvPr>
           <p:cNvPicPr>
             <a:picLocks noChangeAspect="1"/>
           </p:cNvPicPr>
@@ -4466,7 +4556,7 @@
       </p:pic>
       <p:sp>
         <p:nvSpPr>
-          <p:cNvPr id="18" name="texto-177"/>
+          <p:cNvPr id="18" name="texto-178"/>
           <p:cNvSpPr txBox="1"/>
           <p:nvPr/>
         </p:nvSpPr>
@@ -4497,7 +4587,7 @@
                   <a:schemeClr val="bg1"/>
                 </a:solidFill>
               </a:rPr>
-              <a:t>Código renovable</a:t>
+              <a:t>Código nuevo en cada sesión</a:t>
             </a:r>
             <a:endParaRPr lang="en-US" sz="1700" dirty="0"/>
           </a:p>
@@ -4511,7 +4601,7 @@
                   <a:schemeClr val="accent5"/>
                 </a:solidFill>
               </a:rPr>
-              <a:t>«Nuevo código» invalida el QR anterior y desconecta a todos.</a:t>
+              <a:t>El QR cambia en cada sesión y puedes renovarlo cuando quieras.</a:t>
             </a:r>
             <a:endParaRPr lang="en-US" sz="1700" dirty="0"/>
           </a:p>
@@ -4519,7 +4609,7 @@
       </p:sp>
       <p:sp>
         <p:nvSpPr>
-          <p:cNvPr id="19" name="icono-fondo-178"/>
+          <p:cNvPr id="19" name="icono-fondo-179"/>
           <p:cNvSpPr/>
           <p:nvPr/>
         </p:nvSpPr>
@@ -4541,7 +4631,7 @@
       </p:sp>
       <p:pic>
         <p:nvPicPr>
-          <p:cNvPr id="20" name="icono-LuGithub-179" descr="preencoded.png">    </p:cNvPr>
+          <p:cNvPr id="20" name="icono-LuGithub-180" descr="preencoded.png">    </p:cNvPr>
           <p:cNvPicPr>
             <a:picLocks noChangeAspect="1"/>
           </p:cNvPicPr>
@@ -4565,7 +4655,7 @@
       </p:pic>
       <p:sp>
         <p:nvSpPr>
-          <p:cNvPr id="21" name="texto-180"/>
+          <p:cNvPr id="21" name="texto-181"/>
           <p:cNvSpPr txBox="1"/>
           <p:nvPr/>
         </p:nvSpPr>
@@ -4709,7 +4799,7 @@
           <a:bodyPr wrap="square" lIns="0" tIns="0" rIns="0" bIns="0" rtlCol="0" anchor="ctr"/>
           <a:lstStyle/>
           <a:p>
-            <a:pPr indent="0" marL="0">
+            <a:pPr algn="l" indent="0" marL="0">
               <a:buNone/>
             </a:pPr>
             <a:r>
@@ -4747,7 +4837,7 @@
           <a:bodyPr wrap="square" lIns="0" tIns="0" rIns="0" bIns="0" rtlCol="0" anchor="t"/>
           <a:lstStyle/>
           <a:p>
-            <a:pPr indent="0" marL="0">
+            <a:pPr algn="l" indent="0" marL="0">
               <a:buNone/>
             </a:pPr>
             <a:r>
@@ -4764,7 +4854,7 @@
       </p:sp>
       <p:sp>
         <p:nvSpPr>
-          <p:cNvPr id="4" name="cifra-181"/>
+          <p:cNvPr id="4" name="cifra-182"/>
           <p:cNvSpPr txBox="1"/>
           <p:nvPr/>
         </p:nvSpPr>
@@ -4795,7 +4885,7 @@
                 <a:ea typeface="Arial" pitchFamily="34" charset="-122"/>
                 <a:cs typeface="Arial" pitchFamily="34" charset="-120"/>
               </a:rPr>
-              <a:t>38/38</a:t>
+              <a:t>42/42</a:t>
             </a:r>
             <a:endParaRPr lang="en-US" sz="5400" dirty="0"/>
           </a:p>
@@ -4803,7 +4893,7 @@
       </p:sp>
       <p:sp>
         <p:nvSpPr>
-          <p:cNvPr id="5" name="texto-182"/>
+          <p:cNvPr id="5" name="texto-183"/>
           <p:cNvSpPr txBox="1"/>
           <p:nvPr/>
         </p:nvSpPr>
@@ -4856,7 +4946,7 @@
       </p:sp>
       <p:sp>
         <p:nvSpPr>
-          <p:cNvPr id="6" name="cifra-183"/>
+          <p:cNvPr id="6" name="cifra-184"/>
           <p:cNvSpPr txBox="1"/>
           <p:nvPr/>
         </p:nvSpPr>
@@ -4895,7 +4985,7 @@
       </p:sp>
       <p:sp>
         <p:nvSpPr>
-          <p:cNvPr id="7" name="texto-184"/>
+          <p:cNvPr id="7" name="texto-185"/>
           <p:cNvSpPr txBox="1"/>
           <p:nvPr/>
         </p:nvSpPr>
@@ -4948,7 +5038,7 @@
       </p:sp>
       <p:sp>
         <p:nvSpPr>
-          <p:cNvPr id="8" name="cifra-185"/>
+          <p:cNvPr id="8" name="cifra-186"/>
           <p:cNvSpPr txBox="1"/>
           <p:nvPr/>
         </p:nvSpPr>
@@ -4987,7 +5077,7 @@
       </p:sp>
       <p:sp>
         <p:nvSpPr>
-          <p:cNvPr id="9" name="texto-186"/>
+          <p:cNvPr id="9" name="texto-187"/>
           <p:cNvSpPr txBox="1"/>
           <p:nvPr/>
         </p:nvSpPr>
@@ -5040,7 +5130,7 @@
       </p:sp>
       <p:sp>
         <p:nvSpPr>
-          <p:cNvPr id="10" name="cifra-187"/>
+          <p:cNvPr id="10" name="cifra-188"/>
           <p:cNvSpPr txBox="1"/>
           <p:nvPr/>
         </p:nvSpPr>
@@ -5079,7 +5169,7 @@
       </p:sp>
       <p:sp>
         <p:nvSpPr>
-          <p:cNvPr id="11" name="texto-188"/>
+          <p:cNvPr id="11" name="texto-189"/>
           <p:cNvSpPr txBox="1"/>
           <p:nvPr/>
         </p:nvSpPr>
@@ -5132,18 +5222,18 @@
       </p:sp>
       <p:sp>
         <p:nvSpPr>
-          <p:cNvPr id="12" name="tarjeta-189"/>
-          <p:cNvSpPr/>
-          <p:nvPr/>
-        </p:nvSpPr>
-        <p:spPr>
-          <a:xfrm>
-            <a:off x="640080" y="4434840"/>
-            <a:ext cx="10911535" cy="1463040"/>
+          <p:cNvPr id="12" name="tarjeta-190"/>
+          <p:cNvSpPr/>
+          <p:nvPr/>
+        </p:nvSpPr>
+        <p:spPr>
+          <a:xfrm>
+            <a:off x="640080" y="4480560"/>
+            <a:ext cx="10911535" cy="1097280"/>
           </a:xfrm>
           <a:prstGeom prst="roundRect">
             <a:avLst>
-              <a:gd name="adj" fmla="val 10000"/>
+              <a:gd name="adj" fmla="val 13333"/>
             </a:avLst>
           </a:prstGeom>
           <a:solidFill>
@@ -5154,7 +5244,7 @@
       </p:sp>
       <p:pic>
         <p:nvPicPr>
-          <p:cNvPr id="13" name="check-190" descr="preencoded.png">    </p:cNvPr>
+          <p:cNvPr id="13" name="check-191" descr="preencoded.png">    </p:cNvPr>
           <p:cNvPicPr>
             <a:picLocks noChangeAspect="1"/>
           </p:cNvPicPr>
@@ -5178,14 +5268,14 @@
       </p:pic>
       <p:sp>
         <p:nvSpPr>
-          <p:cNvPr id="14" name="texto-191"/>
+          <p:cNvPr id="14" name="texto-192"/>
           <p:cNvSpPr txBox="1"/>
           <p:nvPr/>
         </p:nvSpPr>
         <p:spPr>
           <a:xfrm>
             <a:off x="1508760" y="4690872"/>
-            <a:ext cx="4495648" cy="1005840"/>
+            <a:ext cx="4495648" cy="777240"/>
           </a:xfrm>
           <a:prstGeom prst="rect">
             <a:avLst/>
@@ -5231,7 +5321,7 @@
       </p:sp>
       <p:pic>
         <p:nvPicPr>
-          <p:cNvPr id="15" name="check-192" descr="preencoded.png">    </p:cNvPr>
+          <p:cNvPr id="15" name="check-193" descr="preencoded.png">    </p:cNvPr>
           <p:cNvPicPr>
             <a:picLocks noChangeAspect="1"/>
           </p:cNvPicPr>
@@ -5255,14 +5345,14 @@
       </p:pic>
       <p:sp>
         <p:nvSpPr>
-          <p:cNvPr id="16" name="texto-193"/>
+          <p:cNvPr id="16" name="texto-194"/>
           <p:cNvSpPr txBox="1"/>
           <p:nvPr/>
         </p:nvSpPr>
         <p:spPr>
           <a:xfrm>
             <a:off x="6964528" y="4690872"/>
-            <a:ext cx="4495648" cy="1005840"/>
+            <a:ext cx="4495648" cy="777240"/>
           </a:xfrm>
           <a:prstGeom prst="rect">
             <a:avLst/>
@@ -5399,7 +5489,7 @@
           <a:bodyPr wrap="square" lIns="0" tIns="0" rIns="0" bIns="0" rtlCol="0" anchor="ctr"/>
           <a:lstStyle/>
           <a:p>
-            <a:pPr indent="0" marL="0">
+            <a:pPr algn="l" indent="0" marL="0">
               <a:buNone/>
             </a:pPr>
             <a:r>
@@ -5437,7 +5527,7 @@
           <a:bodyPr wrap="square" lIns="0" tIns="0" rIns="0" bIns="0" rtlCol="0" anchor="t"/>
           <a:lstStyle/>
           <a:p>
-            <a:pPr indent="0" marL="0">
+            <a:pPr algn="l" indent="0" marL="0">
               <a:buNone/>
             </a:pPr>
             <a:r>
@@ -5454,7 +5544,7 @@
       </p:sp>
       <p:sp>
         <p:nvSpPr>
-          <p:cNvPr id="4" name="tarjeta-194"/>
+          <p:cNvPr id="4" name="tarjeta-195"/>
           <p:cNvSpPr/>
           <p:nvPr/>
         </p:nvSpPr>
@@ -5476,7 +5566,7 @@
       </p:sp>
       <p:sp>
         <p:nvSpPr>
-          <p:cNvPr id="5" name="icono-fondo-195"/>
+          <p:cNvPr id="5" name="icono-fondo-196"/>
           <p:cNvSpPr/>
           <p:nvPr/>
         </p:nvSpPr>
@@ -5498,7 +5588,7 @@
       </p:sp>
       <p:pic>
         <p:nvPicPr>
-          <p:cNvPr id="6" name="icono-LuTriangleAlert-196" descr="preencoded.png">    </p:cNvPr>
+          <p:cNvPr id="6" name="icono-LuTriangleAlert-197" descr="preencoded.png">    </p:cNvPr>
           <p:cNvPicPr>
             <a:picLocks noChangeAspect="1"/>
           </p:cNvPicPr>
@@ -5558,7 +5648,7 @@
       </p:sp>
       <p:sp>
         <p:nvSpPr>
-          <p:cNvPr id="8" name="punto-197"/>
+          <p:cNvPr id="8" name="punto-198"/>
           <p:cNvSpPr/>
           <p:nvPr/>
         </p:nvSpPr>
@@ -5578,7 +5668,7 @@
       </p:sp>
       <p:sp>
         <p:nvSpPr>
-          <p:cNvPr id="9" name="texto-198"/>
+          <p:cNvPr id="9" name="texto-199"/>
           <p:cNvSpPr txBox="1"/>
           <p:nvPr/>
         </p:nvSpPr>
@@ -5609,7 +5699,7 @@
                   <a:schemeClr val="tx1"/>
                 </a:solidFill>
               </a:rPr>
-              <a:t>Redes muy restrictivas</a:t>
+              <a:t>Necesita internet</a:t>
             </a:r>
             <a:endParaRPr lang="en-US" sz="1600" dirty="0"/>
           </a:p>
@@ -5623,7 +5713,7 @@
                   <a:schemeClr val="accent6"/>
                 </a:solidFill>
               </a:rPr>
-              <a:t>Algunas redes de empresa o Wi-Fi públicos bloquean la conexión directa.</a:t>
+              <a:t>El celular y la computadora se enlazan a través de internet.</a:t>
             </a:r>
             <a:endParaRPr lang="en-US" sz="1600" dirty="0"/>
           </a:p>
@@ -5631,7 +5721,7 @@
       </p:sp>
       <p:sp>
         <p:nvSpPr>
-          <p:cNvPr id="10" name="punto-199"/>
+          <p:cNvPr id="10" name="punto-200"/>
           <p:cNvSpPr/>
           <p:nvPr/>
         </p:nvSpPr>
@@ -5651,7 +5741,7 @@
       </p:sp>
       <p:sp>
         <p:nvSpPr>
-          <p:cNvPr id="11" name="texto-200"/>
+          <p:cNvPr id="11" name="texto-201"/>
           <p:cNvSpPr txBox="1"/>
           <p:nvPr/>
         </p:nvSpPr>
@@ -5704,7 +5794,7 @@
       </p:sp>
       <p:sp>
         <p:nvSpPr>
-          <p:cNvPr id="12" name="punto-201"/>
+          <p:cNvPr id="12" name="punto-202"/>
           <p:cNvSpPr/>
           <p:nvPr/>
         </p:nvSpPr>
@@ -5724,7 +5814,7 @@
       </p:sp>
       <p:sp>
         <p:nvSpPr>
-          <p:cNvPr id="13" name="texto-202"/>
+          <p:cNvPr id="13" name="texto-203"/>
           <p:cNvSpPr txBox="1"/>
           <p:nvPr/>
         </p:nvSpPr>
@@ -5805,7 +5895,7 @@
                   <a:schemeClr val="tx1"/>
                 </a:solidFill>
               </a:rPr>
-              <a:t>Próximos pasos</a:t>
+              <a:t>Avances y próximos pasos</a:t>
             </a:r>
             <a:endParaRPr lang="en-US" sz="1800" dirty="0"/>
           </a:p>
@@ -5813,7 +5903,7 @@
       </p:sp>
       <p:sp>
         <p:nvSpPr>
-          <p:cNvPr id="15" name="icono-fondo-203"/>
+          <p:cNvPr id="15" name="icono-fondo-204"/>
           <p:cNvSpPr/>
           <p:nvPr/>
         </p:nvSpPr>
@@ -5828,14 +5918,14 @@
             </a:avLst>
           </a:prstGeom>
           <a:solidFill>
-            <a:schemeClr val="accent1"/>
+            <a:schemeClr val="accent2"/>
           </a:solidFill>
           <a:ln/>
         </p:spPr>
       </p:sp>
       <p:pic>
         <p:nvPicPr>
-          <p:cNvPr id="16" name="icono-LuRocket-204" descr="preencoded.png">    </p:cNvPr>
+          <p:cNvPr id="16" name="icono-LuCircleCheck-205" descr="preencoded.png">    </p:cNvPr>
           <p:cNvPicPr>
             <a:picLocks noChangeAspect="1"/>
           </p:cNvPicPr>
@@ -5859,7 +5949,7 @@
       </p:pic>
       <p:sp>
         <p:nvSpPr>
-          <p:cNvPr id="17" name="texto-205"/>
+          <p:cNvPr id="17" name="texto-206"/>
           <p:cNvSpPr txBox="1"/>
           <p:nvPr/>
         </p:nvSpPr>
@@ -5890,7 +5980,7 @@
                   <a:schemeClr val="tx1"/>
                 </a:solidFill>
               </a:rPr>
-              <a:t>Publicar en la Chrome Web Store</a:t>
+              <a:t>Retransmisión con Cloudflare · lista</a:t>
             </a:r>
             <a:endParaRPr lang="en-US" sz="1600" dirty="0"/>
           </a:p>
@@ -5904,7 +5994,7 @@
                   <a:schemeClr val="accent6"/>
                 </a:solidFill>
               </a:rPr>
-              <a:t>Verificar el correo de contacto y enviar a revisión.</a:t>
+              <a:t>Funciona en redes restrictivas; gratis hasta 1.000 GB al mes.</a:t>
             </a:r>
             <a:endParaRPr lang="en-US" sz="1600" dirty="0"/>
           </a:p>
@@ -5912,7 +6002,7 @@
       </p:sp>
       <p:sp>
         <p:nvSpPr>
-          <p:cNvPr id="18" name="icono-fondo-206"/>
+          <p:cNvPr id="18" name="icono-fondo-207"/>
           <p:cNvSpPr/>
           <p:nvPr/>
         </p:nvSpPr>
@@ -5927,14 +6017,14 @@
             </a:avLst>
           </a:prstGeom>
           <a:solidFill>
-            <a:schemeClr val="accent1"/>
+            <a:schemeClr val="accent2"/>
           </a:solidFill>
           <a:ln/>
         </p:spPr>
       </p:sp>
       <p:pic>
         <p:nvPicPr>
-          <p:cNvPr id="19" name="icono-LuCloud-207" descr="preencoded.png">    </p:cNvPr>
+          <p:cNvPr id="19" name="icono-LuCircleCheck-208" descr="preencoded.png">    </p:cNvPr>
           <p:cNvPicPr>
             <a:picLocks noChangeAspect="1"/>
           </p:cNvPicPr>
@@ -5958,7 +6048,7 @@
       </p:pic>
       <p:sp>
         <p:nvSpPr>
-          <p:cNvPr id="20" name="texto-208"/>
+          <p:cNvPr id="20" name="texto-209"/>
           <p:cNvSpPr txBox="1"/>
           <p:nvPr/>
         </p:nvSpPr>
@@ -5989,7 +6079,7 @@
                   <a:schemeClr val="tx1"/>
                 </a:solidFill>
               </a:rPr>
-              <a:t>Retransmisión con Cloudflare</a:t>
+              <a:t>QR nuevo en cada sesión · listo</a:t>
             </a:r>
             <a:endParaRPr lang="en-US" sz="1600" dirty="0"/>
           </a:p>
@@ -6003,7 +6093,7 @@
                   <a:schemeClr val="accent6"/>
                 </a:solidFill>
               </a:rPr>
-              <a:t>Para redes restrictivas; gratis hasta 1.000 GB al mes.</a:t>
+              <a:t>Activado por defecto; se puede desactivar en Ajustes.</a:t>
             </a:r>
             <a:endParaRPr lang="en-US" sz="1600" dirty="0"/>
           </a:p>
@@ -6011,7 +6101,7 @@
       </p:sp>
       <p:sp>
         <p:nvSpPr>
-          <p:cNvPr id="21" name="icono-fondo-209"/>
+          <p:cNvPr id="21" name="icono-fondo-210"/>
           <p:cNvSpPr/>
           <p:nvPr/>
         </p:nvSpPr>
@@ -6033,7 +6123,7 @@
       </p:sp>
       <p:pic>
         <p:nvPicPr>
-          <p:cNvPr id="22" name="icono-LuQrCode-210" descr="preencoded.png">    </p:cNvPr>
+          <p:cNvPr id="22" name="icono-LuHourglass-211" descr="preencoded.png">    </p:cNvPr>
           <p:cNvPicPr>
             <a:picLocks noChangeAspect="1"/>
           </p:cNvPicPr>
@@ -6057,7 +6147,7 @@
       </p:pic>
       <p:sp>
         <p:nvSpPr>
-          <p:cNvPr id="23" name="texto-211"/>
+          <p:cNvPr id="23" name="texto-212"/>
           <p:cNvSpPr txBox="1"/>
           <p:nvPr/>
         </p:nvSpPr>
@@ -6088,7 +6178,7 @@
                   <a:schemeClr val="tx1"/>
                 </a:solidFill>
               </a:rPr>
-              <a:t>QR nuevo en cada sesión</a:t>
+              <a:t>Chrome Web Store</a:t>
             </a:r>
             <a:endParaRPr lang="en-US" sz="1600" dirty="0"/>
           </a:p>
@@ -6102,7 +6192,7 @@
                   <a:schemeClr val="accent6"/>
                 </a:solidFill>
               </a:rPr>
-              <a:t>Una opción en Ajustes para más seguridad.</a:t>
+              <a:t>La versión 1.0 está en revisión; la 1.1 ya está preparada.</a:t>
             </a:r>
             <a:endParaRPr lang="en-US" sz="1600" dirty="0"/>
           </a:p>
@@ -6110,7 +6200,7 @@
       </p:sp>
       <p:sp>
         <p:nvSpPr>
-          <p:cNvPr id="24" name="icono-fondo-212"/>
+          <p:cNvPr id="24" name="icono-fondo-213"/>
           <p:cNvSpPr/>
           <p:nvPr/>
         </p:nvSpPr>
@@ -6132,7 +6222,7 @@
       </p:sp>
       <p:pic>
         <p:nvPicPr>
-          <p:cNvPr id="25" name="icono-LuWatch-213" descr="preencoded.png">    </p:cNvPr>
+          <p:cNvPr id="25" name="icono-LuWatch-214" descr="preencoded.png">    </p:cNvPr>
           <p:cNvPicPr>
             <a:picLocks noChangeAspect="1"/>
           </p:cNvPicPr>
@@ -6156,7 +6246,7 @@
       </p:pic>
       <p:sp>
         <p:nvSpPr>
-          <p:cNvPr id="26" name="texto-214"/>
+          <p:cNvPr id="26" name="texto-215"/>
           <p:cNvSpPr txBox="1"/>
           <p:nvPr/>
         </p:nvSpPr>
@@ -6324,7 +6414,7 @@
           <a:bodyPr wrap="square" lIns="0" tIns="0" rIns="0" bIns="0" rtlCol="0" anchor="b"/>
           <a:lstStyle/>
           <a:p>
-            <a:pPr indent="0" marL="0">
+            <a:pPr algn="l" indent="0" marL="0">
               <a:buNone/>
             </a:pPr>
             <a:r>
@@ -6362,7 +6452,7 @@
           <a:bodyPr wrap="square" lIns="0" tIns="0" rIns="0" bIns="0" rtlCol="0" anchor="t"/>
           <a:lstStyle/>
           <a:p>
-            <a:pPr indent="0" marL="0">
+            <a:pPr algn="l" indent="0" marL="0">
               <a:buNone/>
             </a:pPr>
             <a:r>
@@ -6379,7 +6469,7 @@
       </p:sp>
       <p:pic>
         <p:nvPicPr>
-          <p:cNvPr id="5" name="enlace-icono-215" descr="preencoded.png">    </p:cNvPr>
+          <p:cNvPr id="5" name="enlace-icono-216" descr="preencoded.png">    </p:cNvPr>
           <p:cNvPicPr>
             <a:picLocks noChangeAspect="1"/>
           </p:cNvPicPr>
@@ -6403,7 +6493,7 @@
       </p:pic>
       <p:sp>
         <p:nvSpPr>
-          <p:cNvPr id="6" name="enlace-216"/>
+          <p:cNvPr id="6" name="enlace-217"/>
           <p:cNvSpPr txBox="1"/>
           <p:nvPr/>
         </p:nvSpPr>
@@ -6439,7 +6529,7 @@
       </p:sp>
       <p:pic>
         <p:nvPicPr>
-          <p:cNvPr id="7" name="enlace-icono-217" descr="preencoded.png">    </p:cNvPr>
+          <p:cNvPr id="7" name="enlace-icono-218" descr="preencoded.png">    </p:cNvPr>
           <p:cNvPicPr>
             <a:picLocks noChangeAspect="1"/>
           </p:cNvPicPr>
@@ -6463,7 +6553,7 @@
       </p:pic>
       <p:sp>
         <p:nvSpPr>
-          <p:cNvPr id="8" name="enlace-218"/>
+          <p:cNvPr id="8" name="enlace-219"/>
           <p:cNvSpPr txBox="1"/>
           <p:nvPr/>
         </p:nvSpPr>
@@ -6499,7 +6589,7 @@
       </p:sp>
       <p:pic>
         <p:nvPicPr>
-          <p:cNvPr id="9" name="enlace-icono-219" descr="preencoded.png">    </p:cNvPr>
+          <p:cNvPr id="9" name="enlace-icono-220" descr="preencoded.png">    </p:cNvPr>
           <p:cNvPicPr>
             <a:picLocks noChangeAspect="1"/>
           </p:cNvPicPr>
@@ -6523,7 +6613,7 @@
       </p:pic>
       <p:sp>
         <p:nvSpPr>
-          <p:cNvPr id="10" name="enlace-220"/>
+          <p:cNvPr id="10" name="enlace-221"/>
           <p:cNvSpPr txBox="1"/>
           <p:nvPr/>
         </p:nvSpPr>
@@ -6639,6 +6729,242 @@
           </a:p>
         </p:txBody>
       </p:sp>
+    </p:spTree>
+  </p:cSld>
+  <p:clrMapOvr>
+    <a:masterClrMapping/>
+  </p:clrMapOvr>
+</p:sld>
+</file>
+
+<file path=ppt/slides/slide15.xml><?xml version="1.0" encoding="utf-8"?>
+<p:sld xmlns:a="http://schemas.openxmlformats.org/drawingml/2006/main" xmlns:r="http://schemas.openxmlformats.org/officeDocument/2006/relationships" xmlns:p="http://schemas.openxmlformats.org/presentationml/2006/main">
+  <p:cSld name="Slide 15">
+    <p:spTree>
+      <p:nvGrpSpPr>
+        <p:cNvPr id="1" name=""/>
+        <p:cNvGrpSpPr/>
+        <p:nvPr/>
+      </p:nvGrpSpPr>
+      <p:grpSpPr>
+        <a:xfrm>
+          <a:off x="0" y="0"/>
+          <a:ext cx="0" cy="0"/>
+          <a:chOff x="0" y="0"/>
+          <a:chExt cx="0" cy="0"/>
+        </a:xfrm>
+      </p:grpSpPr>
+      <p:pic>
+        <p:nvPicPr>
+          <p:cNvPr id="2" name="logo-final" descr="Logo de Mando">    </p:cNvPr>
+          <p:cNvPicPr>
+            <a:picLocks noChangeAspect="1"/>
+          </p:cNvPicPr>
+          <p:nvPr/>
+        </p:nvPicPr>
+        <p:blipFill>
+          <a:blip r:embed="rId1"/>
+          <a:stretch>
+            <a:fillRect/>
+          </a:stretch>
+        </p:blipFill>
+        <p:spPr>
+          <a:xfrm>
+            <a:off x="680314" y="1417320"/>
+            <a:ext cx="1143000" cy="1143000"/>
+          </a:xfrm>
+          <a:prstGeom prst="rect">
+            <a:avLst/>
+          </a:prstGeom>
+        </p:spPr>
+      </p:pic>
+      <p:sp>
+        <p:nvSpPr>
+          <p:cNvPr id="3" name="Text 0"/>
+          <p:cNvSpPr/>
+          <p:nvPr>
+            <p:ph idx="100" type="title" hasCustomPrompt="1"/>
+          </p:nvPr>
+        </p:nvSpPr>
+        <p:spPr>
+          <a:xfrm>
+            <a:off x="822960" y="2788920"/>
+            <a:ext cx="4937760" cy="1051560"/>
+          </a:xfrm>
+          <a:prstGeom prst="rect">
+            <a:avLst/>
+          </a:prstGeom>
+          <a:noFill/>
+          <a:ln/>
+        </p:spPr>
+        <p:txBody>
+          <a:bodyPr wrap="square" lIns="0" tIns="0" rIns="0" bIns="0" rtlCol="0" anchor="b"/>
+          <a:lstStyle/>
+          <a:p>
+            <a:pPr algn="l" indent="0" marL="0">
+              <a:buNone/>
+            </a:pPr>
+            <a:r>
+              <a:rPr lang="en-US" sz="6600" b="1" dirty="0">
+                <a:solidFill>
+                  <a:schemeClr val="bg1"/>
+                </a:solidFill>
+              </a:rPr>
+              <a:t>Gracias</a:t>
+            </a:r>
+            <a:endParaRPr lang="en-US" sz="6600" dirty="0"/>
+          </a:p>
+        </p:txBody>
+      </p:sp>
+      <p:sp>
+        <p:nvSpPr>
+          <p:cNvPr id="4" name="Text 0"/>
+          <p:cNvSpPr/>
+          <p:nvPr>
+            <p:ph idx="101" type="body" hasCustomPrompt="1"/>
+          </p:nvPr>
+        </p:nvSpPr>
+        <p:spPr>
+          <a:xfrm>
+            <a:off x="822960" y="3977640"/>
+            <a:ext cx="5120640" cy="914400"/>
+          </a:xfrm>
+          <a:prstGeom prst="rect">
+            <a:avLst/>
+          </a:prstGeom>
+          <a:noFill/>
+          <a:ln/>
+        </p:spPr>
+        <p:txBody>
+          <a:bodyPr wrap="square" lIns="0" tIns="0" rIns="0" bIns="0" rtlCol="0" anchor="t"/>
+          <a:lstStyle/>
+          <a:p>
+            <a:pPr algn="l" indent="0" marL="0">
+              <a:buNone/>
+            </a:pPr>
+            <a:r>
+              <a:rPr lang="en-US" sz="2000" dirty="0">
+                <a:solidFill>
+                  <a:schemeClr val="accent5"/>
+                </a:solidFill>
+              </a:rPr>
+              <a:t>¿Preguntas?</a:t>
+            </a:r>
+            <a:endParaRPr lang="en-US" sz="2000" dirty="0"/>
+          </a:p>
+        </p:txBody>
+      </p:sp>
+      <p:sp>
+        <p:nvSpPr>
+          <p:cNvPr id="5" name="Text 0"/>
+          <p:cNvSpPr/>
+          <p:nvPr>
+            <p:ph idx="102" type="body" hasCustomPrompt="1"/>
+          </p:nvPr>
+        </p:nvSpPr>
+        <p:spPr>
+          <a:xfrm>
+            <a:off x="822960" y="5760720"/>
+            <a:ext cx="4754880" cy="365760"/>
+          </a:xfrm>
+          <a:prstGeom prst="rect">
+            <a:avLst/>
+          </a:prstGeom>
+          <a:noFill/>
+          <a:ln/>
+        </p:spPr>
+        <p:txBody>
+          <a:bodyPr wrap="square" lIns="0" tIns="0" rIns="0" bIns="0" rtlCol="0" anchor="ctr"/>
+          <a:lstStyle/>
+          <a:p>
+            <a:pPr algn="l" indent="0" marL="0">
+              <a:buNone/>
+            </a:pPr>
+            <a:r>
+              <a:rPr lang="en-US" sz="1200" dirty="0">
+                <a:solidFill>
+                  <a:schemeClr val="accent5"/>
+                </a:solidFill>
+              </a:rPr>
+              <a:t>Miguel Mogrovejo · github.com/mjmc4498/mando</a:t>
+            </a:r>
+            <a:endParaRPr lang="en-US" sz="1200" dirty="0"/>
+          </a:p>
+        </p:txBody>
+      </p:sp>
+      <p:sp>
+        <p:nvSpPr>
+          <p:cNvPr id="6" name="marco-222"/>
+          <p:cNvSpPr/>
+          <p:nvPr/>
+        </p:nvSpPr>
+        <p:spPr>
+          <a:xfrm>
+            <a:off x="6126480" y="1691640"/>
+            <a:ext cx="4754880" cy="2674620"/>
+          </a:xfrm>
+          <a:prstGeom prst="rect">
+            <a:avLst/>
+          </a:prstGeom>
+          <a:solidFill>
+            <a:schemeClr val="bg1"/>
+          </a:solidFill>
+          <a:ln w="12700">
+            <a:solidFill>
+              <a:srgbClr val="3A3A3C"/>
+            </a:solidFill>
+            <a:prstDash val="solid"/>
+          </a:ln>
+        </p:spPr>
+      </p:sp>
+      <p:pic>
+        <p:nvPicPr>
+          <p:cNvPr id="7" name="captura-223" descr="Diapositiva con anotaciones del lápiz de Mando">    </p:cNvPr>
+          <p:cNvPicPr>
+            <a:picLocks noChangeAspect="1"/>
+          </p:cNvPicPr>
+          <p:nvPr/>
+        </p:nvPicPr>
+        <p:blipFill>
+          <a:blip r:embed="rId2"/>
+          <a:stretch>
+            <a:fillRect/>
+          </a:stretch>
+        </p:blipFill>
+        <p:spPr>
+          <a:xfrm>
+            <a:off x="6126480" y="1691640"/>
+            <a:ext cx="4754880" cy="2674620"/>
+          </a:xfrm>
+          <a:prstGeom prst="rect">
+            <a:avLst/>
+          </a:prstGeom>
+        </p:spPr>
+      </p:pic>
+      <p:pic>
+        <p:nvPicPr>
+          <p:cNvPr id="8" name="celular-224" descr="Pantalla del lápiz en el control">    </p:cNvPr>
+          <p:cNvPicPr>
+            <a:picLocks noChangeAspect="1"/>
+          </p:cNvPicPr>
+          <p:nvPr/>
+        </p:nvPicPr>
+        <p:blipFill>
+          <a:blip r:embed="rId3"/>
+          <a:stretch>
+            <a:fillRect/>
+          </a:stretch>
+        </p:blipFill>
+        <p:spPr>
+          <a:xfrm>
+            <a:off x="9326880" y="960120"/>
+            <a:ext cx="2349142" cy="4937760"/>
+          </a:xfrm>
+          <a:prstGeom prst="rect">
+            <a:avLst/>
+          </a:prstGeom>
+        </p:spPr>
+      </p:pic>
     </p:spTree>
   </p:cSld>
   <p:clrMapOvr>
@@ -6687,7 +7013,7 @@
           <a:bodyPr wrap="square" lIns="0" tIns="0" rIns="0" bIns="0" rtlCol="0" anchor="ctr"/>
           <a:lstStyle/>
           <a:p>
-            <a:pPr indent="0" marL="0">
+            <a:pPr algn="l" indent="0" marL="0">
               <a:buNone/>
             </a:pPr>
             <a:r>
@@ -6725,7 +7051,7 @@
           <a:bodyPr wrap="square" lIns="0" tIns="0" rIns="0" bIns="0" rtlCol="0" anchor="t"/>
           <a:lstStyle/>
           <a:p>
-            <a:pPr indent="0" marL="0">
+            <a:pPr algn="l" indent="0" marL="0">
               <a:buNone/>
             </a:pPr>
             <a:r>
@@ -6749,7 +7075,7 @@
         <p:spPr>
           <a:xfrm>
             <a:off x="640080" y="1920240"/>
-            <a:ext cx="2522144" cy="3840480"/>
+            <a:ext cx="2522144" cy="3017520"/>
           </a:xfrm>
           <a:prstGeom prst="roundRect">
             <a:avLst>
@@ -6817,7 +7143,7 @@
         <p:spPr>
           <a:xfrm>
             <a:off x="960120" y="3200400"/>
-            <a:ext cx="1882064" cy="2286000"/>
+            <a:ext cx="1882064" cy="1554480"/>
           </a:xfrm>
           <a:prstGeom prst="rect">
             <a:avLst/>
@@ -6870,7 +7196,7 @@
         <p:spPr>
           <a:xfrm>
             <a:off x="3436544" y="1920240"/>
-            <a:ext cx="2522144" cy="3840480"/>
+            <a:ext cx="2522144" cy="3017520"/>
           </a:xfrm>
           <a:prstGeom prst="roundRect">
             <a:avLst>
@@ -6938,7 +7264,7 @@
         <p:spPr>
           <a:xfrm>
             <a:off x="3756584" y="3200400"/>
-            <a:ext cx="1882064" cy="2286000"/>
+            <a:ext cx="1882064" cy="1554480"/>
           </a:xfrm>
           <a:prstGeom prst="rect">
             <a:avLst/>
@@ -6991,7 +7317,7 @@
         <p:spPr>
           <a:xfrm>
             <a:off x="6233008" y="1920240"/>
-            <a:ext cx="2522144" cy="3840480"/>
+            <a:ext cx="2522144" cy="3017520"/>
           </a:xfrm>
           <a:prstGeom prst="roundRect">
             <a:avLst>
@@ -7059,7 +7385,7 @@
         <p:spPr>
           <a:xfrm>
             <a:off x="6553048" y="3200400"/>
-            <a:ext cx="1882064" cy="2286000"/>
+            <a:ext cx="1882064" cy="1554480"/>
           </a:xfrm>
           <a:prstGeom prst="rect">
             <a:avLst/>
@@ -7112,7 +7438,7 @@
         <p:spPr>
           <a:xfrm>
             <a:off x="9029471" y="1920240"/>
-            <a:ext cx="2522144" cy="3840480"/>
+            <a:ext cx="2522144" cy="3017520"/>
           </a:xfrm>
           <a:prstGeom prst="roundRect">
             <a:avLst>
@@ -7180,7 +7506,7 @@
         <p:spPr>
           <a:xfrm>
             <a:off x="9349511" y="3200400"/>
-            <a:ext cx="1882064" cy="2286000"/>
+            <a:ext cx="1882064" cy="1554480"/>
           </a:xfrm>
           <a:prstGeom prst="rect">
             <a:avLst/>
@@ -7221,6 +7547,84 @@
               <a:t>Hacer clic o escribir algo corta el ritmo de la charla.</a:t>
             </a:r>
             <a:endParaRPr lang="en-US" sz="1800" dirty="0"/>
+          </a:p>
+        </p:txBody>
+      </p:sp>
+      <p:sp>
+        <p:nvSpPr>
+          <p:cNvPr id="20" name="tarjeta-20"/>
+          <p:cNvSpPr/>
+          <p:nvPr/>
+        </p:nvSpPr>
+        <p:spPr>
+          <a:xfrm>
+            <a:off x="640080" y="5257800"/>
+            <a:ext cx="10911535" cy="777240"/>
+          </a:xfrm>
+          <a:prstGeom prst="roundRect">
+            <a:avLst>
+              <a:gd name="adj" fmla="val 18824"/>
+            </a:avLst>
+          </a:prstGeom>
+          <a:solidFill>
+            <a:schemeClr val="tx1"/>
+          </a:solidFill>
+          <a:ln/>
+        </p:spPr>
+      </p:sp>
+      <p:sp>
+        <p:nvSpPr>
+          <p:cNvPr id="21" name="punto-laser"/>
+          <p:cNvSpPr/>
+          <p:nvPr/>
+        </p:nvSpPr>
+        <p:spPr>
+          <a:xfrm>
+            <a:off x="1005840" y="5564124"/>
+            <a:ext cx="164592" cy="164592"/>
+          </a:xfrm>
+          <a:prstGeom prst="ellipse">
+            <a:avLst/>
+          </a:prstGeom>
+          <a:solidFill>
+            <a:schemeClr val="accent1"/>
+          </a:solidFill>
+          <a:ln/>
+        </p:spPr>
+      </p:sp>
+      <p:sp>
+        <p:nvSpPr>
+          <p:cNvPr id="22" name="puente"/>
+          <p:cNvSpPr txBox="1"/>
+          <p:nvPr/>
+        </p:nvSpPr>
+        <p:spPr>
+          <a:xfrm>
+            <a:off x="1371600" y="5257800"/>
+            <a:ext cx="9905695" cy="777240"/>
+          </a:xfrm>
+          <a:prstGeom prst="rect">
+            <a:avLst/>
+          </a:prstGeom>
+          <a:noFill/>
+          <a:ln/>
+        </p:spPr>
+        <p:txBody>
+          <a:bodyPr wrap="square" lIns="0" tIns="0" rIns="0" bIns="0" rtlCol="0" anchor="ctr"/>
+          <a:lstStyle/>
+          <a:p>
+            <a:pPr indent="0" marL="0">
+              <a:buNone/>
+            </a:pPr>
+            <a:r>
+              <a:rPr lang="en-US" sz="1700" b="1" dirty="0">
+                <a:solidFill>
+                  <a:schemeClr val="bg1"/>
+                </a:solidFill>
+              </a:rPr>
+              <a:t>Con Mando, todo eso se resuelve desde el celular que ya llevas en el bolsillo.</a:t>
+            </a:r>
+            <a:endParaRPr lang="en-US" sz="1700" dirty="0"/>
           </a:p>
         </p:txBody>
       </p:sp>
@@ -7317,7 +7721,7 @@
           <a:bodyPr wrap="square" lIns="0" tIns="0" rIns="0" bIns="0" rtlCol="0" anchor="ctr"/>
           <a:lstStyle/>
           <a:p>
-            <a:pPr indent="0" marL="0">
+            <a:pPr algn="l" indent="0" marL="0">
               <a:buNone/>
             </a:pPr>
             <a:r>
@@ -7355,7 +7759,7 @@
           <a:bodyPr wrap="square" lIns="0" tIns="0" rIns="0" bIns="0" rtlCol="0" anchor="t"/>
           <a:lstStyle/>
           <a:p>
-            <a:pPr indent="0" marL="0">
+            <a:pPr algn="l" indent="0" marL="0">
               <a:buNone/>
             </a:pPr>
             <a:r>
@@ -7408,7 +7812,7 @@
       </p:sp>
       <p:sp>
         <p:nvSpPr>
-          <p:cNvPr id="5" name="icono-fondo-20"/>
+          <p:cNvPr id="5" name="icono-fondo-21"/>
           <p:cNvSpPr/>
           <p:nvPr/>
         </p:nvSpPr>
@@ -7430,7 +7834,7 @@
       </p:sp>
       <p:pic>
         <p:nvPicPr>
-          <p:cNvPr id="6" name="icono-LuQrCode-21" descr="preencoded.png">    </p:cNvPr>
+          <p:cNvPr id="6" name="icono-LuQrCode-22" descr="preencoded.png">    </p:cNvPr>
           <p:cNvPicPr>
             <a:picLocks noChangeAspect="1"/>
           </p:cNvPicPr>
@@ -7454,7 +7858,7 @@
       </p:pic>
       <p:sp>
         <p:nvSpPr>
-          <p:cNvPr id="7" name="texto-22"/>
+          <p:cNvPr id="7" name="texto-23"/>
           <p:cNvSpPr txBox="1"/>
           <p:nvPr/>
         </p:nvSpPr>
@@ -7507,7 +7911,7 @@
       </p:sp>
       <p:sp>
         <p:nvSpPr>
-          <p:cNvPr id="8" name="icono-fondo-23"/>
+          <p:cNvPr id="8" name="icono-fondo-24"/>
           <p:cNvSpPr/>
           <p:nvPr/>
         </p:nvSpPr>
@@ -7529,7 +7933,7 @@
       </p:sp>
       <p:pic>
         <p:nvPicPr>
-          <p:cNvPr id="9" name="icono-LuLayers-24" descr="preencoded.png">    </p:cNvPr>
+          <p:cNvPr id="9" name="icono-LuLayers-25" descr="preencoded.png">    </p:cNvPr>
           <p:cNvPicPr>
             <a:picLocks noChangeAspect="1"/>
           </p:cNvPicPr>
@@ -7553,7 +7957,7 @@
       </p:pic>
       <p:sp>
         <p:nvSpPr>
-          <p:cNvPr id="10" name="texto-25"/>
+          <p:cNvPr id="10" name="texto-26"/>
           <p:cNvSpPr txBox="1"/>
           <p:nvPr/>
         </p:nvSpPr>
@@ -7606,7 +8010,7 @@
       </p:sp>
       <p:sp>
         <p:nvSpPr>
-          <p:cNvPr id="11" name="icono-fondo-26"/>
+          <p:cNvPr id="11" name="icono-fondo-27"/>
           <p:cNvSpPr/>
           <p:nvPr/>
         </p:nvSpPr>
@@ -7628,7 +8032,7 @@
       </p:sp>
       <p:pic>
         <p:nvPicPr>
-          <p:cNvPr id="12" name="icono-LuShieldCheck-27" descr="preencoded.png">    </p:cNvPr>
+          <p:cNvPr id="12" name="icono-LuShieldCheck-28" descr="preencoded.png">    </p:cNvPr>
           <p:cNvPicPr>
             <a:picLocks noChangeAspect="1"/>
           </p:cNvPicPr>
@@ -7652,7 +8056,7 @@
       </p:pic>
       <p:sp>
         <p:nvSpPr>
-          <p:cNvPr id="13" name="texto-28"/>
+          <p:cNvPr id="13" name="texto-29"/>
           <p:cNvSpPr txBox="1"/>
           <p:nvPr/>
         </p:nvSpPr>
@@ -7705,7 +8109,7 @@
       </p:sp>
       <p:sp>
         <p:nvSpPr>
-          <p:cNvPr id="14" name="marco-29"/>
+          <p:cNvPr id="14" name="marco-30"/>
           <p:cNvSpPr/>
           <p:nvPr/>
         </p:nvSpPr>
@@ -7737,7 +8141,7 @@
       </p:sp>
       <p:pic>
         <p:nvPicPr>
-          <p:cNvPr id="15" name="captura-30" descr="Panel de la extensión con el código QR">    </p:cNvPr>
+          <p:cNvPr id="15" name="captura-31" descr="Panel de la extensión con el código QR">    </p:cNvPr>
           <p:cNvPicPr>
             <a:picLocks noChangeAspect="1"/>
           </p:cNvPicPr>
@@ -7785,7 +8189,7 @@
       </p:pic>
       <p:pic>
         <p:nvPicPr>
-          <p:cNvPr id="17" name="celular-31" descr="Control en el celular">    </p:cNvPr>
+          <p:cNvPr id="17" name="celular-32" descr="Control en el celular">    </p:cNvPr>
           <p:cNvPicPr>
             <a:picLocks noChangeAspect="1"/>
           </p:cNvPicPr>
@@ -7900,7 +8304,7 @@
           <a:bodyPr wrap="square" lIns="0" tIns="0" rIns="0" bIns="0" rtlCol="0" anchor="ctr"/>
           <a:lstStyle/>
           <a:p>
-            <a:pPr indent="0" marL="0">
+            <a:pPr algn="l" indent="0" marL="0">
               <a:buNone/>
             </a:pPr>
             <a:r>
@@ -7938,7 +8342,7 @@
           <a:bodyPr wrap="square" lIns="0" tIns="0" rIns="0" bIns="0" rtlCol="0" anchor="t"/>
           <a:lstStyle/>
           <a:p>
-            <a:pPr indent="0" marL="0">
+            <a:pPr algn="l" indent="0" marL="0">
               <a:buNone/>
             </a:pPr>
             <a:r>
@@ -7955,7 +8359,7 @@
       </p:sp>
       <p:sp>
         <p:nvSpPr>
-          <p:cNvPr id="4" name="tarjeta-32"/>
+          <p:cNvPr id="4" name="tarjeta-33"/>
           <p:cNvSpPr/>
           <p:nvPr/>
         </p:nvSpPr>
@@ -7977,7 +8381,7 @@
       </p:sp>
       <p:sp>
         <p:nvSpPr>
-          <p:cNvPr id="5" name="marco-33"/>
+          <p:cNvPr id="5" name="marco-34"/>
           <p:cNvSpPr/>
           <p:nvPr/>
         </p:nvSpPr>
@@ -8009,7 +8413,7 @@
       </p:sp>
       <p:pic>
         <p:nvPicPr>
-          <p:cNvPr id="6" name="captura-34" descr="Presentación abierta en Chrome">    </p:cNvPr>
+          <p:cNvPr id="6" name="captura-35" descr="Presentación abierta en Chrome">    </p:cNvPr>
           <p:cNvPicPr>
             <a:picLocks noChangeAspect="1"/>
           </p:cNvPicPr>
@@ -8033,7 +8437,7 @@
       </p:pic>
       <p:sp>
         <p:nvSpPr>
-          <p:cNvPr id="7" name="numero-35"/>
+          <p:cNvPr id="7" name="numero-36"/>
           <p:cNvSpPr/>
           <p:nvPr/>
         </p:nvSpPr>
@@ -8053,7 +8457,7 @@
       </p:sp>
       <p:sp>
         <p:nvSpPr>
-          <p:cNvPr id="8" name="numero-texto-36"/>
+          <p:cNvPr id="8" name="numero-texto-37"/>
           <p:cNvSpPr txBox="1"/>
           <p:nvPr/>
         </p:nvSpPr>
@@ -8089,7 +8493,7 @@
       </p:sp>
       <p:sp>
         <p:nvSpPr>
-          <p:cNvPr id="9" name="texto-37"/>
+          <p:cNvPr id="9" name="texto-38"/>
           <p:cNvSpPr txBox="1"/>
           <p:nvPr/>
         </p:nvSpPr>
@@ -8142,7 +8546,7 @@
       </p:sp>
       <p:pic>
         <p:nvPicPr>
-          <p:cNvPr id="10" name="flecha-38" descr="preencoded.png">    </p:cNvPr>
+          <p:cNvPr id="10" name="flecha-39" descr="preencoded.png">    </p:cNvPr>
           <p:cNvPicPr>
             <a:picLocks noChangeAspect="1"/>
           </p:cNvPicPr>
@@ -8166,7 +8570,7 @@
       </p:pic>
       <p:sp>
         <p:nvSpPr>
-          <p:cNvPr id="11" name="tarjeta-39"/>
+          <p:cNvPr id="11" name="tarjeta-40"/>
           <p:cNvSpPr/>
           <p:nvPr/>
         </p:nvSpPr>
@@ -8188,7 +8592,7 @@
       </p:sp>
       <p:sp>
         <p:nvSpPr>
-          <p:cNvPr id="12" name="marco-40"/>
+          <p:cNvPr id="12" name="marco-41"/>
           <p:cNvSpPr/>
           <p:nvPr/>
         </p:nvSpPr>
@@ -8220,7 +8624,7 @@
       </p:sp>
       <p:pic>
         <p:nvPicPr>
-          <p:cNvPr id="13" name="captura-41" descr="Código QR de Mando">    </p:cNvPr>
+          <p:cNvPr id="13" name="captura-42" descr="Código QR de Mando">    </p:cNvPr>
           <p:cNvPicPr>
             <a:picLocks noChangeAspect="1"/>
           </p:cNvPicPr>
@@ -8244,7 +8648,7 @@
       </p:pic>
       <p:sp>
         <p:nvSpPr>
-          <p:cNvPr id="14" name="numero-42"/>
+          <p:cNvPr id="14" name="numero-43"/>
           <p:cNvSpPr/>
           <p:nvPr/>
         </p:nvSpPr>
@@ -8264,7 +8668,7 @@
       </p:sp>
       <p:sp>
         <p:nvSpPr>
-          <p:cNvPr id="15" name="numero-texto-43"/>
+          <p:cNvPr id="15" name="numero-texto-44"/>
           <p:cNvSpPr txBox="1"/>
           <p:nvPr/>
         </p:nvSpPr>
@@ -8300,7 +8704,7 @@
       </p:sp>
       <p:sp>
         <p:nvSpPr>
-          <p:cNvPr id="16" name="texto-44"/>
+          <p:cNvPr id="16" name="texto-45"/>
           <p:cNvSpPr txBox="1"/>
           <p:nvPr/>
         </p:nvSpPr>
@@ -8353,7 +8757,7 @@
       </p:sp>
       <p:pic>
         <p:nvPicPr>
-          <p:cNvPr id="17" name="flecha-45" descr="preencoded.png">    </p:cNvPr>
+          <p:cNvPr id="17" name="flecha-46" descr="preencoded.png">    </p:cNvPr>
           <p:cNvPicPr>
             <a:picLocks noChangeAspect="1"/>
           </p:cNvPicPr>
@@ -8377,7 +8781,7 @@
       </p:pic>
       <p:sp>
         <p:nvSpPr>
-          <p:cNvPr id="18" name="tarjeta-46"/>
+          <p:cNvPr id="18" name="tarjeta-47"/>
           <p:cNvSpPr/>
           <p:nvPr/>
         </p:nvSpPr>
@@ -8399,7 +8803,7 @@
       </p:sp>
       <p:pic>
         <p:nvPicPr>
-          <p:cNvPr id="19" name="celular-47" descr="Control en el celular">    </p:cNvPr>
+          <p:cNvPr id="19" name="celular-48" descr="Control en el celular">    </p:cNvPr>
           <p:cNvPicPr>
             <a:picLocks noChangeAspect="1"/>
           </p:cNvPicPr>
@@ -8423,7 +8827,7 @@
       </p:pic>
       <p:sp>
         <p:nvSpPr>
-          <p:cNvPr id="20" name="numero-48"/>
+          <p:cNvPr id="20" name="numero-49"/>
           <p:cNvSpPr/>
           <p:nvPr/>
         </p:nvSpPr>
@@ -8443,7 +8847,7 @@
       </p:sp>
       <p:sp>
         <p:nvSpPr>
-          <p:cNvPr id="21" name="numero-texto-49"/>
+          <p:cNvPr id="21" name="numero-texto-50"/>
           <p:cNvSpPr txBox="1"/>
           <p:nvPr/>
         </p:nvSpPr>
@@ -8479,7 +8883,7 @@
       </p:sp>
       <p:sp>
         <p:nvSpPr>
-          <p:cNvPr id="22" name="texto-50"/>
+          <p:cNvPr id="22" name="texto-51"/>
           <p:cNvSpPr txBox="1"/>
           <p:nvPr/>
         </p:nvSpPr>
@@ -8623,7 +9027,7 @@
           <a:bodyPr wrap="square" lIns="0" tIns="0" rIns="0" bIns="0" rtlCol="0" anchor="ctr"/>
           <a:lstStyle/>
           <a:p>
-            <a:pPr indent="0" marL="0">
+            <a:pPr algn="l" indent="0" marL="0">
               <a:buNone/>
             </a:pPr>
             <a:r>
@@ -8661,7 +9065,7 @@
           <a:bodyPr wrap="square" lIns="0" tIns="0" rIns="0" bIns="0" rtlCol="0" anchor="t"/>
           <a:lstStyle/>
           <a:p>
-            <a:pPr indent="0" marL="0">
+            <a:pPr algn="l" indent="0" marL="0">
               <a:buNone/>
             </a:pPr>
             <a:r>
@@ -8678,7 +9082,7 @@
       </p:sp>
       <p:pic>
         <p:nvPicPr>
-          <p:cNvPr id="4" name="celular-51" descr="Pantalla de diapositivas del control">    </p:cNvPr>
+          <p:cNvPr id="4" name="celular-52" descr="Pantalla de diapositivas del control">    </p:cNvPr>
           <p:cNvPicPr>
             <a:picLocks noChangeAspect="1"/>
           </p:cNvPicPr>
@@ -8702,7 +9106,7 @@
       </p:pic>
       <p:sp>
         <p:nvSpPr>
-          <p:cNvPr id="5" name="icono-fondo-52"/>
+          <p:cNvPr id="5" name="icono-fondo-53"/>
           <p:cNvSpPr/>
           <p:nvPr/>
         </p:nvSpPr>
@@ -8724,7 +9128,7 @@
       </p:sp>
       <p:pic>
         <p:nvPicPr>
-          <p:cNvPr id="6" name="icono-LuChevronRight-53" descr="preencoded.png">    </p:cNvPr>
+          <p:cNvPr id="6" name="icono-LuChevronRight-54" descr="preencoded.png">    </p:cNvPr>
           <p:cNvPicPr>
             <a:picLocks noChangeAspect="1"/>
           </p:cNvPicPr>
@@ -8748,7 +9152,7 @@
       </p:pic>
       <p:sp>
         <p:nvSpPr>
-          <p:cNvPr id="7" name="texto-54"/>
+          <p:cNvPr id="7" name="texto-55"/>
           <p:cNvSpPr txBox="1"/>
           <p:nvPr/>
         </p:nvSpPr>
@@ -8801,7 +9205,7 @@
       </p:sp>
       <p:sp>
         <p:nvSpPr>
-          <p:cNvPr id="8" name="icono-fondo-55"/>
+          <p:cNvPr id="8" name="icono-fondo-56"/>
           <p:cNvSpPr/>
           <p:nvPr/>
         </p:nvSpPr>
@@ -8823,7 +9227,7 @@
       </p:sp>
       <p:pic>
         <p:nvPicPr>
-          <p:cNvPr id="9" name="icono-LuPlay-56" descr="preencoded.png">    </p:cNvPr>
+          <p:cNvPr id="9" name="icono-LuPlay-57" descr="preencoded.png">    </p:cNvPr>
           <p:cNvPicPr>
             <a:picLocks noChangeAspect="1"/>
           </p:cNvPicPr>
@@ -8847,7 +9251,7 @@
       </p:pic>
       <p:sp>
         <p:nvSpPr>
-          <p:cNvPr id="10" name="texto-57"/>
+          <p:cNvPr id="10" name="texto-58"/>
           <p:cNvSpPr txBox="1"/>
           <p:nvPr/>
         </p:nvSpPr>
@@ -8900,7 +9304,7 @@
       </p:sp>
       <p:sp>
         <p:nvSpPr>
-          <p:cNvPr id="11" name="icono-fondo-58"/>
+          <p:cNvPr id="11" name="icono-fondo-59"/>
           <p:cNvSpPr/>
           <p:nvPr/>
         </p:nvSpPr>
@@ -8922,7 +9326,7 @@
       </p:sp>
       <p:pic>
         <p:nvPicPr>
-          <p:cNvPr id="12" name="icono-LuSquare-59" descr="preencoded.png">    </p:cNvPr>
+          <p:cNvPr id="12" name="icono-LuSquare-60" descr="preencoded.png">    </p:cNvPr>
           <p:cNvPicPr>
             <a:picLocks noChangeAspect="1"/>
           </p:cNvPicPr>
@@ -8946,7 +9350,7 @@
       </p:pic>
       <p:sp>
         <p:nvSpPr>
-          <p:cNvPr id="13" name="texto-60"/>
+          <p:cNvPr id="13" name="texto-61"/>
           <p:cNvSpPr txBox="1"/>
           <p:nvPr/>
         </p:nvSpPr>
@@ -8999,7 +9403,7 @@
       </p:sp>
       <p:sp>
         <p:nvSpPr>
-          <p:cNvPr id="14" name="icono-fondo-61"/>
+          <p:cNvPr id="14" name="icono-fondo-62"/>
           <p:cNvSpPr/>
           <p:nvPr/>
         </p:nvSpPr>
@@ -9021,7 +9425,7 @@
       </p:sp>
       <p:pic>
         <p:nvPicPr>
-          <p:cNvPr id="15" name="icono-LuTimer-62" descr="preencoded.png">    </p:cNvPr>
+          <p:cNvPr id="15" name="icono-LuTimer-63" descr="preencoded.png">    </p:cNvPr>
           <p:cNvPicPr>
             <a:picLocks noChangeAspect="1"/>
           </p:cNvPicPr>
@@ -9045,7 +9449,7 @@
       </p:pic>
       <p:sp>
         <p:nvSpPr>
-          <p:cNvPr id="16" name="texto-63"/>
+          <p:cNvPr id="16" name="texto-64"/>
           <p:cNvSpPr txBox="1"/>
           <p:nvPr/>
         </p:nvSpPr>
@@ -9098,7 +9502,7 @@
       </p:sp>
       <p:sp>
         <p:nvSpPr>
-          <p:cNvPr id="17" name="icono-fondo-64"/>
+          <p:cNvPr id="17" name="icono-fondo-65"/>
           <p:cNvSpPr/>
           <p:nvPr/>
         </p:nvSpPr>
@@ -9120,7 +9524,7 @@
       </p:sp>
       <p:pic>
         <p:nvPicPr>
-          <p:cNvPr id="18" name="icono-LuVibrate-65" descr="preencoded.png">    </p:cNvPr>
+          <p:cNvPr id="18" name="icono-LuVibrate-66" descr="preencoded.png">    </p:cNvPr>
           <p:cNvPicPr>
             <a:picLocks noChangeAspect="1"/>
           </p:cNvPicPr>
@@ -9144,7 +9548,7 @@
       </p:pic>
       <p:sp>
         <p:nvSpPr>
-          <p:cNvPr id="19" name="texto-66"/>
+          <p:cNvPr id="19" name="texto-67"/>
           <p:cNvSpPr txBox="1"/>
           <p:nvPr/>
         </p:nvSpPr>
@@ -9288,7 +9692,7 @@
           <a:bodyPr wrap="square" lIns="0" tIns="0" rIns="0" bIns="0" rtlCol="0" anchor="ctr"/>
           <a:lstStyle/>
           <a:p>
-            <a:pPr indent="0" marL="0">
+            <a:pPr algn="l" indent="0" marL="0">
               <a:buNone/>
             </a:pPr>
             <a:r>
@@ -9326,7 +9730,7 @@
           <a:bodyPr wrap="square" lIns="0" tIns="0" rIns="0" bIns="0" rtlCol="0" anchor="t"/>
           <a:lstStyle/>
           <a:p>
-            <a:pPr indent="0" marL="0">
+            <a:pPr algn="l" indent="0" marL="0">
               <a:buNone/>
             </a:pPr>
             <a:r>
@@ -9343,7 +9747,7 @@
       </p:sp>
       <p:sp>
         <p:nvSpPr>
-          <p:cNvPr id="4" name="marco-67"/>
+          <p:cNvPr id="4" name="marco-68"/>
           <p:cNvSpPr/>
           <p:nvPr/>
         </p:nvSpPr>
@@ -9368,7 +9772,7 @@
       </p:sp>
       <p:pic>
         <p:nvPicPr>
-          <p:cNvPr id="5" name="captura-68" descr="Láser con estela">    </p:cNvPr>
+          <p:cNvPr id="5" name="captura-69" descr="Láser con estela">    </p:cNvPr>
           <p:cNvPicPr>
             <a:picLocks noChangeAspect="1"/>
           </p:cNvPicPr>
@@ -9392,7 +9796,7 @@
       </p:pic>
       <p:sp>
         <p:nvSpPr>
-          <p:cNvPr id="6" name="texto-69"/>
+          <p:cNvPr id="6" name="texto-70"/>
           <p:cNvSpPr txBox="1"/>
           <p:nvPr/>
         </p:nvSpPr>
@@ -9445,7 +9849,7 @@
       </p:sp>
       <p:sp>
         <p:nvSpPr>
-          <p:cNvPr id="7" name="marco-70"/>
+          <p:cNvPr id="7" name="marco-71"/>
           <p:cNvSpPr/>
           <p:nvPr/>
         </p:nvSpPr>
@@ -9470,7 +9874,7 @@
       </p:sp>
       <p:pic>
         <p:nvPicPr>
-          <p:cNvPr id="8" name="captura-71" descr="Foco de luz">    </p:cNvPr>
+          <p:cNvPr id="8" name="captura-72" descr="Foco de luz">    </p:cNvPr>
           <p:cNvPicPr>
             <a:picLocks noChangeAspect="1"/>
           </p:cNvPicPr>
@@ -9494,7 +9898,7 @@
       </p:pic>
       <p:sp>
         <p:nvSpPr>
-          <p:cNvPr id="9" name="texto-72"/>
+          <p:cNvPr id="9" name="texto-73"/>
           <p:cNvSpPr txBox="1"/>
           <p:nvPr/>
         </p:nvSpPr>
@@ -9547,7 +9951,7 @@
       </p:sp>
       <p:sp>
         <p:nvSpPr>
-          <p:cNvPr id="10" name="marco-73"/>
+          <p:cNvPr id="10" name="marco-74"/>
           <p:cNvSpPr/>
           <p:nvPr/>
         </p:nvSpPr>
@@ -9572,7 +9976,7 @@
       </p:sp>
       <p:pic>
         <p:nvPicPr>
-          <p:cNvPr id="11" name="captura-74" descr="Lápiz de colores">    </p:cNvPr>
+          <p:cNvPr id="11" name="captura-75" descr="Lápiz de colores">    </p:cNvPr>
           <p:cNvPicPr>
             <a:picLocks noChangeAspect="1"/>
           </p:cNvPicPr>
@@ -9596,7 +10000,7 @@
       </p:pic>
       <p:sp>
         <p:nvSpPr>
-          <p:cNvPr id="12" name="texto-75"/>
+          <p:cNvPr id="12" name="texto-76"/>
           <p:cNvSpPr txBox="1"/>
           <p:nvPr/>
         </p:nvSpPr>
@@ -9649,7 +10053,7 @@
       </p:sp>
       <p:sp>
         <p:nvSpPr>
-          <p:cNvPr id="13" name="icono-fondo-76"/>
+          <p:cNvPr id="13" name="icono-fondo-77"/>
           <p:cNvSpPr/>
           <p:nvPr/>
         </p:nvSpPr>
@@ -9671,7 +10075,7 @@
       </p:sp>
       <p:pic>
         <p:nvPicPr>
-          <p:cNvPr id="14" name="icono-LuSmartphone-77" descr="preencoded.png">    </p:cNvPr>
+          <p:cNvPr id="14" name="icono-LuSmartphone-78" descr="preencoded.png">    </p:cNvPr>
           <p:cNvPicPr>
             <a:picLocks noChangeAspect="1"/>
           </p:cNvPicPr>
@@ -9833,7 +10237,7 @@
           <a:bodyPr wrap="square" lIns="0" tIns="0" rIns="0" bIns="0" rtlCol="0" anchor="ctr"/>
           <a:lstStyle/>
           <a:p>
-            <a:pPr indent="0" marL="0">
+            <a:pPr algn="l" indent="0" marL="0">
               <a:buNone/>
             </a:pPr>
             <a:r>
@@ -9871,7 +10275,7 @@
           <a:bodyPr wrap="square" lIns="0" tIns="0" rIns="0" bIns="0" rtlCol="0" anchor="t"/>
           <a:lstStyle/>
           <a:p>
-            <a:pPr indent="0" marL="0">
+            <a:pPr algn="l" indent="0" marL="0">
               <a:buNone/>
             </a:pPr>
             <a:r>
@@ -9888,7 +10292,7 @@
       </p:sp>
       <p:pic>
         <p:nvPicPr>
-          <p:cNvPr id="4" name="celular-78" descr="Panel táctil del control">    </p:cNvPr>
+          <p:cNvPr id="4" name="celular-79" descr="Panel táctil del control">    </p:cNvPr>
           <p:cNvPicPr>
             <a:picLocks noChangeAspect="1"/>
           </p:cNvPicPr>
@@ -9912,7 +10316,7 @@
       </p:pic>
       <p:pic>
         <p:nvPicPr>
-          <p:cNvPr id="5" name="celular-79" descr="Teclado del control">    </p:cNvPr>
+          <p:cNvPr id="5" name="celular-80" descr="Teclado del control">    </p:cNvPr>
           <p:cNvPicPr>
             <a:picLocks noChangeAspect="1"/>
           </p:cNvPicPr>
@@ -9936,7 +10340,7 @@
       </p:pic>
       <p:sp>
         <p:nvSpPr>
-          <p:cNvPr id="6" name="marco-80"/>
+          <p:cNvPr id="6" name="marco-81"/>
           <p:cNvSpPr/>
           <p:nvPr/>
         </p:nvSpPr>
@@ -9968,7 +10372,7 @@
       </p:sp>
       <p:pic>
         <p:nvPicPr>
-          <p:cNvPr id="7" name="captura-81" descr="Cursor remoto sobre la presentación">    </p:cNvPr>
+          <p:cNvPr id="7" name="captura-82" descr="Cursor remoto sobre la presentación">    </p:cNvPr>
           <p:cNvPicPr>
             <a:picLocks noChangeAspect="1"/>
           </p:cNvPicPr>
@@ -9992,7 +10396,7 @@
       </p:pic>
       <p:sp>
         <p:nvSpPr>
-          <p:cNvPr id="8" name="texto-82"/>
+          <p:cNvPr id="8" name="texto-83"/>
           <p:cNvSpPr txBox="1"/>
           <p:nvPr/>
         </p:nvSpPr>
@@ -10045,7 +10449,7 @@
       </p:sp>
       <p:sp>
         <p:nvSpPr>
-          <p:cNvPr id="9" name="texto-83"/>
+          <p:cNvPr id="9" name="texto-84"/>
           <p:cNvSpPr txBox="1"/>
           <p:nvPr/>
         </p:nvSpPr>
@@ -10189,7 +10593,7 @@
           <a:bodyPr wrap="square" lIns="0" tIns="0" rIns="0" bIns="0" rtlCol="0" anchor="ctr"/>
           <a:lstStyle/>
           <a:p>
-            <a:pPr indent="0" marL="0">
+            <a:pPr algn="l" indent="0" marL="0">
               <a:buNone/>
             </a:pPr>
             <a:r>
@@ -10227,7 +10631,7 @@
           <a:bodyPr wrap="square" lIns="0" tIns="0" rIns="0" bIns="0" rtlCol="0" anchor="t"/>
           <a:lstStyle/>
           <a:p>
-            <a:pPr indent="0" marL="0">
+            <a:pPr algn="l" indent="0" marL="0">
               <a:buNone/>
             </a:pPr>
             <a:r>
@@ -10244,7 +10648,7 @@
       </p:sp>
       <p:sp>
         <p:nvSpPr>
-          <p:cNvPr id="4" name="tarjeta-84"/>
+          <p:cNvPr id="4" name="tarjeta-85"/>
           <p:cNvSpPr/>
           <p:nvPr/>
         </p:nvSpPr>
@@ -10266,7 +10670,7 @@
       </p:sp>
       <p:sp>
         <p:nvSpPr>
-          <p:cNvPr id="5" name="icono-fondo-85"/>
+          <p:cNvPr id="5" name="icono-fondo-86"/>
           <p:cNvSpPr/>
           <p:nvPr/>
         </p:nvSpPr>
@@ -10288,7 +10692,7 @@
       </p:sp>
       <p:pic>
         <p:nvPicPr>
-          <p:cNvPr id="6" name="icono-LuQrCode-86" descr="preencoded.png">    </p:cNvPr>
+          <p:cNvPr id="6" name="icono-LuQrCode-87" descr="preencoded.png">    </p:cNvPr>
           <p:cNvPicPr>
             <a:picLocks noChangeAspect="1"/>
           </p:cNvPicPr>
@@ -10312,7 +10716,7 @@
       </p:pic>
       <p:sp>
         <p:nvSpPr>
-          <p:cNvPr id="7" name="texto-87"/>
+          <p:cNvPr id="7" name="texto-88"/>
           <p:cNvSpPr txBox="1"/>
           <p:nvPr/>
         </p:nvSpPr>
@@ -10365,7 +10769,7 @@
       </p:sp>
       <p:sp>
         <p:nvSpPr>
-          <p:cNvPr id="8" name="tarjeta-88"/>
+          <p:cNvPr id="8" name="tarjeta-89"/>
           <p:cNvSpPr/>
           <p:nvPr/>
         </p:nvSpPr>
@@ -10387,7 +10791,7 @@
       </p:sp>
       <p:sp>
         <p:nvSpPr>
-          <p:cNvPr id="9" name="icono-fondo-89"/>
+          <p:cNvPr id="9" name="icono-fondo-90"/>
           <p:cNvSpPr/>
           <p:nvPr/>
         </p:nvSpPr>
@@ -10409,7 +10813,7 @@
       </p:sp>
       <p:pic>
         <p:nvPicPr>
-          <p:cNvPr id="10" name="icono-LuWallet-90" descr="preencoded.png">    </p:cNvPr>
+          <p:cNvPr id="10" name="icono-LuWallet-91" descr="preencoded.png">    </p:cNvPr>
           <p:cNvPicPr>
             <a:picLocks noChangeAspect="1"/>
           </p:cNvPicPr>
@@ -10433,7 +10837,7 @@
       </p:pic>
       <p:sp>
         <p:nvSpPr>
-          <p:cNvPr id="11" name="texto-91"/>
+          <p:cNvPr id="11" name="texto-92"/>
           <p:cNvSpPr txBox="1"/>
           <p:nvPr/>
         </p:nvSpPr>
@@ -10486,7 +10890,7 @@
       </p:sp>
       <p:sp>
         <p:nvSpPr>
-          <p:cNvPr id="12" name="tarjeta-92"/>
+          <p:cNvPr id="12" name="tarjeta-93"/>
           <p:cNvSpPr/>
           <p:nvPr/>
         </p:nvSpPr>
@@ -10508,7 +10912,7 @@
       </p:sp>
       <p:sp>
         <p:nvSpPr>
-          <p:cNvPr id="13" name="icono-fondo-93"/>
+          <p:cNvPr id="13" name="icono-fondo-94"/>
           <p:cNvSpPr/>
           <p:nvPr/>
         </p:nvSpPr>
@@ -10530,7 +10934,7 @@
       </p:sp>
       <p:pic>
         <p:nvPicPr>
-          <p:cNvPr id="14" name="icono-LuMove-94" descr="preencoded.png">    </p:cNvPr>
+          <p:cNvPr id="14" name="icono-LuMove-95" descr="preencoded.png">    </p:cNvPr>
           <p:cNvPicPr>
             <a:picLocks noChangeAspect="1"/>
           </p:cNvPicPr>
@@ -10554,7 +10958,7 @@
       </p:pic>
       <p:sp>
         <p:nvSpPr>
-          <p:cNvPr id="15" name="texto-95"/>
+          <p:cNvPr id="15" name="texto-96"/>
           <p:cNvSpPr txBox="1"/>
           <p:nvPr/>
         </p:nvSpPr>
@@ -10607,7 +11011,7 @@
       </p:sp>
       <p:sp>
         <p:nvSpPr>
-          <p:cNvPr id="16" name="tarjeta-96"/>
+          <p:cNvPr id="16" name="tarjeta-97"/>
           <p:cNvSpPr/>
           <p:nvPr/>
         </p:nvSpPr>
@@ -10629,7 +11033,7 @@
       </p:sp>
       <p:sp>
         <p:nvSpPr>
-          <p:cNvPr id="17" name="icono-fondo-97"/>
+          <p:cNvPr id="17" name="icono-fondo-98"/>
           <p:cNvSpPr/>
           <p:nvPr/>
         </p:nvSpPr>
@@ -10651,7 +11055,7 @@
       </p:sp>
       <p:pic>
         <p:nvPicPr>
-          <p:cNvPr id="18" name="icono-LuMonitorSmartphone-98" descr="preencoded.png">    </p:cNvPr>
+          <p:cNvPr id="18" name="icono-LuMonitorSmartphone-99" descr="preencoded.png">    </p:cNvPr>
           <p:cNvPicPr>
             <a:picLocks noChangeAspect="1"/>
           </p:cNvPicPr>
@@ -10675,7 +11079,7 @@
       </p:pic>
       <p:sp>
         <p:nvSpPr>
-          <p:cNvPr id="19" name="texto-99"/>
+          <p:cNvPr id="19" name="texto-100"/>
           <p:cNvSpPr txBox="1"/>
           <p:nvPr/>
         </p:nvSpPr>
@@ -10728,7 +11132,7 @@
       </p:sp>
       <p:sp>
         <p:nvSpPr>
-          <p:cNvPr id="20" name="tarjeta-100"/>
+          <p:cNvPr id="20" name="tarjeta-101"/>
           <p:cNvSpPr/>
           <p:nvPr/>
         </p:nvSpPr>
@@ -10750,7 +11154,7 @@
       </p:sp>
       <p:sp>
         <p:nvSpPr>
-          <p:cNvPr id="21" name="icono-fondo-101"/>
+          <p:cNvPr id="21" name="icono-fondo-102"/>
           <p:cNvSpPr/>
           <p:nvPr/>
         </p:nvSpPr>
@@ -10772,7 +11176,7 @@
       </p:sp>
       <p:pic>
         <p:nvPicPr>
-          <p:cNvPr id="22" name="icono-LuLayers-102" descr="preencoded.png">    </p:cNvPr>
+          <p:cNvPr id="22" name="icono-LuLayers-103" descr="preencoded.png">    </p:cNvPr>
           <p:cNvPicPr>
             <a:picLocks noChangeAspect="1"/>
           </p:cNvPicPr>
@@ -10796,7 +11200,7 @@
       </p:pic>
       <p:sp>
         <p:nvSpPr>
-          <p:cNvPr id="23" name="texto-103"/>
+          <p:cNvPr id="23" name="texto-104"/>
           <p:cNvSpPr txBox="1"/>
           <p:nvPr/>
         </p:nvSpPr>
@@ -10849,7 +11253,7 @@
       </p:sp>
       <p:sp>
         <p:nvSpPr>
-          <p:cNvPr id="24" name="tarjeta-104"/>
+          <p:cNvPr id="24" name="tarjeta-105"/>
           <p:cNvSpPr/>
           <p:nvPr/>
         </p:nvSpPr>
@@ -10871,7 +11275,7 @@
       </p:sp>
       <p:sp>
         <p:nvSpPr>
-          <p:cNvPr id="25" name="icono-fondo-105"/>
+          <p:cNvPr id="25" name="icono-fondo-106"/>
           <p:cNvSpPr/>
           <p:nvPr/>
         </p:nvSpPr>
@@ -10893,7 +11297,7 @@
       </p:sp>
       <p:pic>
         <p:nvPicPr>
-          <p:cNvPr id="26" name="icono-LuShieldCheck-106" descr="preencoded.png">    </p:cNvPr>
+          <p:cNvPr id="26" name="icono-LuShieldCheck-107" descr="preencoded.png">    </p:cNvPr>
           <p:cNvPicPr>
             <a:picLocks noChangeAspect="1"/>
           </p:cNvPicPr>
@@ -10917,7 +11321,7 @@
       </p:pic>
       <p:sp>
         <p:nvSpPr>
-          <p:cNvPr id="27" name="texto-107"/>
+          <p:cNvPr id="27" name="texto-108"/>
           <p:cNvSpPr txBox="1"/>
           <p:nvPr/>
         </p:nvSpPr>
@@ -11061,7 +11465,7 @@
           <a:bodyPr wrap="square" lIns="0" tIns="0" rIns="0" bIns="0" rtlCol="0" anchor="ctr"/>
           <a:lstStyle/>
           <a:p>
-            <a:pPr indent="0" marL="0">
+            <a:pPr algn="l" indent="0" marL="0">
               <a:buNone/>
             </a:pPr>
             <a:r>
@@ -11099,7 +11503,7 @@
           <a:bodyPr wrap="square" lIns="0" tIns="0" rIns="0" bIns="0" rtlCol="0" anchor="t"/>
           <a:lstStyle/>
           <a:p>
-            <a:pPr indent="0" marL="0">
+            <a:pPr algn="l" indent="0" marL="0">
               <a:buNone/>
             </a:pPr>
             <a:r>
@@ -11116,7 +11520,7 @@
       </p:sp>
       <p:sp>
         <p:nvSpPr>
-          <p:cNvPr id="4" name="icono-fondo-108"/>
+          <p:cNvPr id="4" name="icono-fondo-109"/>
           <p:cNvSpPr/>
           <p:nvPr/>
         </p:nvSpPr>
@@ -11138,7 +11542,7 @@
       </p:sp>
       <p:pic>
         <p:nvPicPr>
-          <p:cNvPr id="5" name="icono-LuPresentation-109" descr="preencoded.png">    </p:cNvPr>
+          <p:cNvPr id="5" name="icono-LuPresentation-110" descr="preencoded.png">    </p:cNvPr>
           <p:cNvPicPr>
             <a:picLocks noChangeAspect="1"/>
           </p:cNvPicPr>
@@ -11198,7 +11602,7 @@
       </p:sp>
       <p:sp>
         <p:nvSpPr>
-          <p:cNvPr id="7" name="chip-110"/>
+          <p:cNvPr id="7" name="chip-111"/>
           <p:cNvSpPr/>
           <p:nvPr/>
         </p:nvSpPr>
@@ -11220,7 +11624,7 @@
       </p:sp>
       <p:pic>
         <p:nvPicPr>
-          <p:cNvPr id="8" name="verificado-111" descr="Verificado">    </p:cNvPr>
+          <p:cNvPr id="8" name="verificado-112" descr="Verificado">    </p:cNvPr>
           <p:cNvPicPr>
             <a:picLocks noChangeAspect="1"/>
           </p:cNvPicPr>
@@ -11244,7 +11648,7 @@
       </p:pic>
       <p:sp>
         <p:nvSpPr>
-          <p:cNvPr id="9" name="chip-texto-112"/>
+          <p:cNvPr id="9" name="chip-texto-113"/>
           <p:cNvSpPr txBox="1"/>
           <p:nvPr/>
         </p:nvSpPr>
@@ -11280,7 +11684,7 @@
       </p:sp>
       <p:sp>
         <p:nvSpPr>
-          <p:cNvPr id="10" name="chip-113"/>
+          <p:cNvPr id="10" name="chip-114"/>
           <p:cNvSpPr/>
           <p:nvPr/>
         </p:nvSpPr>
@@ -11302,7 +11706,7 @@
       </p:sp>
       <p:pic>
         <p:nvPicPr>
-          <p:cNvPr id="11" name="verificado-114" descr="Verificado">    </p:cNvPr>
+          <p:cNvPr id="11" name="verificado-115" descr="Verificado">    </p:cNvPr>
           <p:cNvPicPr>
             <a:picLocks noChangeAspect="1"/>
           </p:cNvPicPr>
@@ -11326,7 +11730,7 @@
       </p:pic>
       <p:sp>
         <p:nvSpPr>
-          <p:cNvPr id="12" name="chip-texto-115"/>
+          <p:cNvPr id="12" name="chip-texto-116"/>
           <p:cNvSpPr txBox="1"/>
           <p:nvPr/>
         </p:nvSpPr>
@@ -11362,7 +11766,7 @@
       </p:sp>
       <p:sp>
         <p:nvSpPr>
-          <p:cNvPr id="13" name="chip-116"/>
+          <p:cNvPr id="13" name="chip-117"/>
           <p:cNvSpPr/>
           <p:nvPr/>
         </p:nvSpPr>
@@ -11384,7 +11788,7 @@
       </p:sp>
       <p:sp>
         <p:nvSpPr>
-          <p:cNvPr id="14" name="chip-texto-117"/>
+          <p:cNvPr id="14" name="chip-texto-118"/>
           <p:cNvSpPr txBox="1"/>
           <p:nvPr/>
         </p:nvSpPr>
@@ -11420,7 +11824,7 @@
       </p:sp>
       <p:sp>
         <p:nvSpPr>
-          <p:cNvPr id="15" name="chip-118"/>
+          <p:cNvPr id="15" name="chip-119"/>
           <p:cNvSpPr/>
           <p:nvPr/>
         </p:nvSpPr>
@@ -11442,7 +11846,7 @@
       </p:sp>
       <p:sp>
         <p:nvSpPr>
-          <p:cNvPr id="16" name="chip-texto-119"/>
+          <p:cNvPr id="16" name="chip-texto-120"/>
           <p:cNvSpPr txBox="1"/>
           <p:nvPr/>
         </p:nvSpPr>
@@ -11478,7 +11882,7 @@
       </p:sp>
       <p:sp>
         <p:nvSpPr>
-          <p:cNvPr id="17" name="chip-120"/>
+          <p:cNvPr id="17" name="chip-121"/>
           <p:cNvSpPr/>
           <p:nvPr/>
         </p:nvSpPr>
@@ -11500,7 +11904,7 @@
       </p:sp>
       <p:sp>
         <p:nvSpPr>
-          <p:cNvPr id="18" name="chip-texto-121"/>
+          <p:cNvPr id="18" name="chip-texto-122"/>
           <p:cNvSpPr txBox="1"/>
           <p:nvPr/>
         </p:nvSpPr>
@@ -11536,7 +11940,7 @@
       </p:sp>
       <p:sp>
         <p:nvSpPr>
-          <p:cNvPr id="19" name="chip-122"/>
+          <p:cNvPr id="19" name="chip-123"/>
           <p:cNvSpPr/>
           <p:nvPr/>
         </p:nvSpPr>
@@ -11558,7 +11962,7 @@
       </p:sp>
       <p:sp>
         <p:nvSpPr>
-          <p:cNvPr id="20" name="chip-texto-123"/>
+          <p:cNvPr id="20" name="chip-texto-124"/>
           <p:cNvSpPr txBox="1"/>
           <p:nvPr/>
         </p:nvSpPr>
@@ -11594,7 +11998,7 @@
       </p:sp>
       <p:sp>
         <p:nvSpPr>
-          <p:cNvPr id="21" name="chip-124"/>
+          <p:cNvPr id="21" name="chip-125"/>
           <p:cNvSpPr/>
           <p:nvPr/>
         </p:nvSpPr>
@@ -11616,7 +12020,7 @@
       </p:sp>
       <p:sp>
         <p:nvSpPr>
-          <p:cNvPr id="22" name="chip-texto-125"/>
+          <p:cNvPr id="22" name="chip-texto-126"/>
           <p:cNvSpPr txBox="1"/>
           <p:nvPr/>
         </p:nvSpPr>
@@ -11652,7 +12056,7 @@
       </p:sp>
       <p:sp>
         <p:nvSpPr>
-          <p:cNvPr id="23" name="chip-126"/>
+          <p:cNvPr id="23" name="chip-127"/>
           <p:cNvSpPr/>
           <p:nvPr/>
         </p:nvSpPr>
@@ -11674,7 +12078,7 @@
       </p:sp>
       <p:sp>
         <p:nvSpPr>
-          <p:cNvPr id="24" name="chip-texto-127"/>
+          <p:cNvPr id="24" name="chip-texto-128"/>
           <p:cNvSpPr txBox="1"/>
           <p:nvPr/>
         </p:nvSpPr>
@@ -11710,7 +12114,7 @@
       </p:sp>
       <p:sp>
         <p:nvSpPr>
-          <p:cNvPr id="25" name="chip-128"/>
+          <p:cNvPr id="25" name="chip-129"/>
           <p:cNvSpPr/>
           <p:nvPr/>
         </p:nvSpPr>
@@ -11732,7 +12136,7 @@
       </p:sp>
       <p:sp>
         <p:nvSpPr>
-          <p:cNvPr id="26" name="chip-texto-129"/>
+          <p:cNvPr id="26" name="chip-texto-130"/>
           <p:cNvSpPr txBox="1"/>
           <p:nvPr/>
         </p:nvSpPr>
@@ -11768,7 +12172,7 @@
       </p:sp>
       <p:sp>
         <p:nvSpPr>
-          <p:cNvPr id="27" name="chip-130"/>
+          <p:cNvPr id="27" name="chip-131"/>
           <p:cNvSpPr/>
           <p:nvPr/>
         </p:nvSpPr>
@@ -11790,7 +12194,7 @@
       </p:sp>
       <p:sp>
         <p:nvSpPr>
-          <p:cNvPr id="28" name="chip-texto-131"/>
+          <p:cNvPr id="28" name="chip-texto-132"/>
           <p:cNvSpPr txBox="1"/>
           <p:nvPr/>
         </p:nvSpPr>
@@ -11886,7 +12290,7 @@
       </p:sp>
       <p:sp>
         <p:nvSpPr>
-          <p:cNvPr id="31" name="tarjeta-132"/>
+          <p:cNvPr id="31" name="tarjeta-133"/>
           <p:cNvSpPr/>
           <p:nvPr/>
         </p:nvSpPr>
@@ -11944,7 +12348,7 @@
       </p:sp>
       <p:sp>
         <p:nvSpPr>
-          <p:cNvPr id="33" name="icono-fondo-133"/>
+          <p:cNvPr id="33" name="icono-fondo-134"/>
           <p:cNvSpPr/>
           <p:nvPr/>
         </p:nvSpPr>
@@ -11966,7 +12370,7 @@
       </p:sp>
       <p:pic>
         <p:nvPicPr>
-          <p:cNvPr id="34" name="icono-LuSmartphone-134" descr="preencoded.png">    </p:cNvPr>
+          <p:cNvPr id="34" name="icono-LuSmartphone-135" descr="preencoded.png">    </p:cNvPr>
           <p:cNvPicPr>
             <a:picLocks noChangeAspect="1"/>
           </p:cNvPicPr>
@@ -11990,7 +12394,7 @@
       </p:pic>
       <p:sp>
         <p:nvSpPr>
-          <p:cNvPr id="35" name="texto-135"/>
+          <p:cNvPr id="35" name="texto-136"/>
           <p:cNvSpPr txBox="1"/>
           <p:nvPr/>
         </p:nvSpPr>
@@ -12043,7 +12447,7 @@
       </p:sp>
       <p:sp>
         <p:nvSpPr>
-          <p:cNvPr id="36" name="icono-fondo-136"/>
+          <p:cNvPr id="36" name="icono-fondo-137"/>
           <p:cNvSpPr/>
           <p:nvPr/>
         </p:nvSpPr>
@@ -12065,7 +12469,7 @@
       </p:sp>
       <p:pic>
         <p:nvPicPr>
-          <p:cNvPr id="37" name="icono-LuMonitorSmartphone-137" descr="preencoded.png">    </p:cNvPr>
+          <p:cNvPr id="37" name="icono-LuMonitorSmartphone-138" descr="preencoded.png">    </p:cNvPr>
           <p:cNvPicPr>
             <a:picLocks noChangeAspect="1"/>
           </p:cNvPicPr>
@@ -12089,7 +12493,7 @@
       </p:pic>
       <p:sp>
         <p:nvSpPr>
-          <p:cNvPr id="38" name="texto-138"/>
+          <p:cNvPr id="38" name="texto-139"/>
           <p:cNvSpPr txBox="1"/>
           <p:nvPr/>
         </p:nvSpPr>
@@ -12142,7 +12546,7 @@
       </p:sp>
       <p:sp>
         <p:nvSpPr>
-          <p:cNvPr id="39" name="icono-fondo-139"/>
+          <p:cNvPr id="39" name="icono-fondo-140"/>
           <p:cNvSpPr/>
           <p:nvPr/>
         </p:nvSpPr>
@@ -12164,7 +12568,7 @@
       </p:sp>
       <p:pic>
         <p:nvPicPr>
-          <p:cNvPr id="40" name="icono-LuLaptop-140" descr="preencoded.png">    </p:cNvPr>
+          <p:cNvPr id="40" name="icono-LuLaptop-141" descr="preencoded.png">    </p:cNvPr>
           <p:cNvPicPr>
             <a:picLocks noChangeAspect="1"/>
           </p:cNvPicPr>
@@ -12188,7 +12592,7 @@
       </p:pic>
       <p:sp>
         <p:nvSpPr>
-          <p:cNvPr id="41" name="texto-141"/>
+          <p:cNvPr id="41" name="texto-142"/>
           <p:cNvSpPr txBox="1"/>
           <p:nvPr/>
         </p:nvSpPr>

--- a/presentacion/mando.pptx
+++ b/presentacion/mando.pptx
@@ -121,7 +121,7 @@
   <p:extLst>
     <p:ext uri="{521415D9-36F7-43E2-AB2F-B90AF26B5E84}">
       <p14:sectionLst xmlns:p14="http://schemas.microsoft.com/office/powerpoint/2010/main">
-        <p14:section name="Introducción" id="{06db4df0-0b89-3d8a-8a21-2f684eb23efb}">
+        <p14:section name="Introducción" id="{95793fad-9825-39e2-ec6e-f81686b1b5fd}">
           <p14:sldIdLst>
             <p14:sldId id="256"/>
             <p14:sldId id="257"/>
@@ -129,27 +129,27 @@
             <p14:sldId id="259"/>
           </p14:sldIdLst>
         </p14:section>
-        <p14:section name="Funciones" id="{c196b939-49c5-fca3-f3e2-cad589d2b8c8}">
+        <p14:section name="Funciones" id="{4de36e3f-f06f-2548-7027-682465533058}">
           <p14:sldIdLst>
             <p14:sldId id="260"/>
             <p14:sldId id="261"/>
             <p14:sldId id="262"/>
           </p14:sldIdLst>
         </p14:section>
-        <p14:section name="Valor" id="{552fc145-2c25-bfea-19c9-1c515cfce813}">
+        <p14:section name="Valor" id="{f17600f2-e6ee-45ea-2607-614e9a65286c}">
           <p14:sldIdLst>
             <p14:sldId id="263"/>
             <p14:sldId id="264"/>
           </p14:sldIdLst>
         </p14:section>
-        <p14:section name="Tecnología" id="{dcec37d4-004a-6025-fbc3-056e0e3a43af}">
+        <p14:section name="Tecnología" id="{79f2e2a7-ea93-2022-43e2-16701c791e30}">
           <p14:sldIdLst>
             <p14:sldId id="265"/>
             <p14:sldId id="266"/>
             <p14:sldId id="267"/>
           </p14:sldIdLst>
         </p14:section>
-        <p14:section name="Cierre" id="{c957a61e-37c1-aac5-90f1-28f1f74aab92}">
+        <p14:section name="Cierre" id="{2a9e87be-c8fc-523e-ffd4-48945e44dbb5}">
           <p14:sldIdLst>
             <p14:sldId id="268"/>
             <p14:sldId id="269"/>
@@ -560,7 +560,7 @@
           <a:p>
             <a:r>
               <a:rPr lang="en-US" dirty="0"/>
-              <a:t>Mando es una extensión de Chrome que convierte el celular en el control remoto de cualquier presentación: avanzar diapositivas, puntero láser, lápiz, mouse y teclado. Se conecta escaneando un código QR, sin instalar apps.</a:t>
+              <a:t>Presentazo es una extensión de Chrome que convierte el celular en el control remoto de cualquier presentación: avanzar diapositivas, puntero láser, lápiz, mouse y teclado. Se conecta escaneando un código QR, sin instalar apps.</a:t>
             </a:r>
             <a:endParaRPr lang="en-US" dirty="0"/>
           </a:p>
@@ -824,7 +824,7 @@
           <a:p>
             <a:r>
               <a:rPr lang="en-US" dirty="0"/>
-              <a:t>Mando se probó de punta a punta con pruebas automáticas que conectan la extensión y el celular de verdad: 42 de 42 comprobaciones superadas. La interfaz se revisó en 28 combinaciones de pantalla y vista. Si se corta el servidor, se reconecta solo en unos 3 segundos sin desconectar al celular.</a:t>
+              <a:t>Presentazo se probó de punta a punta con pruebas automáticas que conectan la extensión y el celular de verdad: 42 de 42 comprobaciones superadas. La interfaz se revisó en 28 combinaciones de pantalla y vista. Si se corta el servidor, se reconecta solo en unos 3 segundos sin desconectar al celular.</a:t>
             </a:r>
             <a:endParaRPr lang="en-US" dirty="0"/>
           </a:p>
@@ -912,7 +912,7 @@
           <a:p>
             <a:r>
               <a:rPr lang="en-US" dirty="0"/>
-              <a:t>Hoy hay tres límites conocidos: se necesita internet para enlazar los dispositivos, Chrome no permite extensiones en sus páginas internas, y Mando no controla programas fuera del navegador. Ya están listos la retransmisión con Cloudflare para redes restrictivas y el QR nuevo en cada sesión. La versión 1.0 está en revisión en la Chrome Web Store y la 1.1 está preparada; queda por evaluar una app para Apple Watch.</a:t>
+              <a:t>Varias metas ya están cumplidas: la retransmisión con Cloudflare para redes de empresa, la protección de costos que pausa el servicio antes de pasar la cuota gratuita, el código QR nuevo en cada sesión y el control web publicado. Lo que sigue es la aprobación en la Chrome Web Store, donde la versión 1.1 llegará con el nuevo nombre Presentazo, y evaluar una app para Apple Watch. Los límites que se mantienen son técnicos: se necesita internet, y Chrome no permite extensiones en sus páginas internas.</a:t>
             </a:r>
             <a:endParaRPr lang="en-US" dirty="0"/>
           </a:p>
@@ -1000,7 +1000,7 @@
           <a:p>
             <a:r>
               <a:rPr lang="en-US" dirty="0"/>
-              <a:t>Mando permite presentar con libertad: escanear, conectar y presentar desde el celular. El código QR de la diapositiva lleva al repositorio en GitHub, donde está todo el proyecto.</a:t>
+              <a:t>Presentazo permite presentar con libertad: escanear, conectar y presentar desde el celular. El código QR de la diapositiva lleva al repositorio en GitHub, donde está todo el proyecto.</a:t>
             </a:r>
             <a:endParaRPr lang="en-US" dirty="0"/>
           </a:p>
@@ -1352,7 +1352,7 @@
           <a:p>
             <a:r>
               <a:rPr lang="en-US" dirty="0"/>
-              <a:t>Paso 1: abrir la presentación en Chrome. Paso 2: hacer clic en el ícono de Mando o pulsar Alt+Shift+M y escanear el QR con la cámara. Paso 3: presentar desde el celular. Por seguridad, cada sesión genera un código QR nuevo.</a:t>
+              <a:t>Paso 1: abrir la presentación en Chrome. Paso 2: hacer clic en el ícono de Presentazo o pulsar Alt+Shift+M y escanear el QR con la cámara. Paso 3: presentar desde el celular. Por seguridad, cada sesión genera un código QR nuevo.</a:t>
             </a:r>
             <a:endParaRPr lang="en-US" dirty="0"/>
           </a:p>
@@ -1792,7 +1792,7 @@
           <a:p>
             <a:r>
               <a:rPr lang="en-US" dirty="0"/>
-              <a:t>Mando funciona con cualquier presentación que avance con el teclado. Google Slides y reveal.js se verificaron con presentaciones reales. El control funciona en celulares desde 320 píxeles y en tablets; en la computadora se necesita Google Chrome.</a:t>
+              <a:t>Presentazo funciona con cualquier presentación que avance con el teclado. Google Slides y reveal.js se verificaron con presentaciones reales. El control funciona en celulares desde 320 píxeles y en tablets; en la computadora se necesita Google Chrome.</a:t>
             </a:r>
             <a:endParaRPr lang="en-US" dirty="0"/>
           </a:p>
@@ -1899,7 +1899,7 @@
         <p:spPr>
           <a:xfrm>
             <a:off x="822960" y="2788920"/>
-            <a:ext cx="4937760" cy="1051560"/>
+            <a:ext cx="5257800" cy="1051560"/>
           </a:xfrm>
           <a:prstGeom prst="rect">
             <a:avLst/>
@@ -1912,7 +1912,7 @@
           <a:lstStyle>
             <a:lvl1pPr algn="l" indent="0" marL="0">
               <a:buNone/>
-              <a:defRPr lang="en-US" sz="6600" b="1" dirty="0">
+              <a:defRPr lang="en-US" sz="6000" b="1" dirty="0">
                 <a:solidFill>
                   <a:schemeClr val="bg1"/>
                 </a:solidFill>
@@ -1923,7 +1923,7 @@
             <a:pPr algn="l" indent="0" marL="0">
               <a:buNone/>
             </a:pPr>
-            <a:endParaRPr lang="en-US" sz="6600" dirty="0"/>
+            <a:endParaRPr lang="en-US" sz="6000" dirty="0"/>
           </a:p>
         </p:txBody>
       </p:sp>
@@ -2145,7 +2145,7 @@
                   <a:schemeClr val="accent6"/>
                 </a:solidFill>
               </a:rPr>
-              <a:t>Mando · Control remoto de presentaciones</a:t>
+              <a:t>Presentazo · Control remoto de presentaciones</a:t>
             </a:r>
             <a:endParaRPr lang="en-US" sz="1000" dirty="0"/>
           </a:p>
@@ -2336,7 +2336,7 @@
                   <a:schemeClr val="accent5"/>
                 </a:solidFill>
               </a:rPr>
-              <a:t>Mando · Control remoto de presentaciones</a:t>
+              <a:t>Presentazo · Control remoto de presentaciones</a:t>
             </a:r>
             <a:endParaRPr lang="en-US" sz="1000" dirty="0"/>
           </a:p>
@@ -2850,7 +2850,7 @@
       </p:grpSpPr>
       <p:pic>
         <p:nvPicPr>
-          <p:cNvPr id="2" name="logo" descr="Logo de Mando">    </p:cNvPr>
+          <p:cNvPr id="2" name="logo" descr="Logo de Presentazo">    </p:cNvPr>
           <p:cNvPicPr>
             <a:picLocks noChangeAspect="1"/>
           </p:cNvPicPr>
@@ -2883,7 +2883,7 @@
         <p:spPr>
           <a:xfrm>
             <a:off x="822960" y="2788920"/>
-            <a:ext cx="4937760" cy="1051560"/>
+            <a:ext cx="5257800" cy="1051560"/>
           </a:xfrm>
           <a:prstGeom prst="rect">
             <a:avLst/>
@@ -2899,14 +2899,14 @@
               <a:buNone/>
             </a:pPr>
             <a:r>
-              <a:rPr lang="en-US" sz="6600" b="1" dirty="0">
+              <a:rPr lang="en-US" sz="6000" b="1" dirty="0">
                 <a:solidFill>
                   <a:schemeClr val="bg1"/>
                 </a:solidFill>
               </a:rPr>
-              <a:t>Mando</a:t>
-            </a:r>
-            <a:endParaRPr lang="en-US" sz="6600" dirty="0"/>
+              <a:t>Presentazo</a:t>
+            </a:r>
+            <a:endParaRPr lang="en-US" sz="6000" dirty="0"/>
           </a:p>
         </p:txBody>
       </p:sp>
@@ -3013,7 +3013,7 @@
       </p:sp>
       <p:pic>
         <p:nvPicPr>
-          <p:cNvPr id="7" name="captura-2" descr="Diapositiva con el puntero láser de Mando">    </p:cNvPr>
+          <p:cNvPr id="7" name="captura-2" descr="Diapositiva con el puntero láser de Presentazo">    </p:cNvPr>
           <p:cNvPicPr>
             <a:picLocks noChangeAspect="1"/>
           </p:cNvPicPr>
@@ -3037,7 +3037,7 @@
       </p:pic>
       <p:pic>
         <p:nvPicPr>
-          <p:cNvPr id="8" name="celular-3" descr="Control de Mando en el celular">    </p:cNvPr>
+          <p:cNvPr id="8" name="celular-3" descr="Control de Presentazo en el celular">    </p:cNvPr>
           <p:cNvPicPr>
             <a:picLocks noChangeAspect="1"/>
           </p:cNvPicPr>
@@ -3609,7 +3609,7 @@
                   <a:schemeClr val="accent6"/>
                 </a:solidFill>
               </a:rPr>
-              <a:t>Google Chrome con la extensión Mando.</a:t>
+              <a:t>Google Chrome con la extensión Presentazo.</a:t>
             </a:r>
             <a:endParaRPr lang="en-US" sz="1700" dirty="0"/>
           </a:p>
@@ -4304,7 +4304,7 @@
                   <a:schemeClr val="accent5"/>
                 </a:solidFill>
               </a:rPr>
-              <a:t>Los scripts de Mando se retiran de Chrome al detener la sesión.</a:t>
+              <a:t>Los scripts de Presentazo se retiran de Chrome al detener la sesión.</a:t>
             </a:r>
             <a:endParaRPr lang="en-US" sz="1700" dirty="0"/>
           </a:p>
@@ -5228,12 +5228,12 @@
         </p:nvSpPr>
         <p:spPr>
           <a:xfrm>
-            <a:off x="640080" y="4480560"/>
-            <a:ext cx="10911535" cy="1097280"/>
+            <a:off x="640080" y="4343400"/>
+            <a:ext cx="10911535" cy="1325880"/>
           </a:xfrm>
           <a:prstGeom prst="roundRect">
             <a:avLst>
-              <a:gd name="adj" fmla="val 13333"/>
+              <a:gd name="adj" fmla="val 11034"/>
             </a:avLst>
           </a:prstGeom>
           <a:solidFill>
@@ -5258,8 +5258,8 @@
         </p:blipFill>
         <p:spPr>
           <a:xfrm>
-            <a:off x="960120" y="4754880"/>
-            <a:ext cx="347472" cy="347472"/>
+            <a:off x="960120" y="4617720"/>
+            <a:ext cx="329184" cy="329184"/>
           </a:xfrm>
           <a:prstGeom prst="rect">
             <a:avLst/>
@@ -5274,8 +5274,8 @@
         </p:nvSpPr>
         <p:spPr>
           <a:xfrm>
-            <a:off x="1508760" y="4690872"/>
-            <a:ext cx="4495648" cy="777240"/>
+            <a:off x="1463040" y="4553712"/>
+            <a:ext cx="2692298" cy="1051560"/>
           </a:xfrm>
           <a:prstGeom prst="rect">
             <a:avLst/>
@@ -5294,28 +5294,28 @@
               <a:buNone/>
             </a:pPr>
             <a:r>
-              <a:rPr lang="en-US" sz="1600" b="1" dirty="0">
+              <a:rPr lang="en-US" sz="1500" b="1" dirty="0">
                 <a:solidFill>
                   <a:schemeClr val="tx1"/>
                 </a:solidFill>
               </a:rPr>
-              <a:t>Verificado con Google Slides y reveal.js reales</a:t>
-            </a:r>
-            <a:endParaRPr lang="en-US" sz="1600" dirty="0"/>
-          </a:p>
-          <a:p>
-            <a:pPr indent="0" marL="0">
-              <a:buNone/>
-            </a:pPr>
-            <a:r>
-              <a:rPr lang="en-US" sz="1400" dirty="0">
+              <a:t>Google Slides y reveal.js reales</a:t>
+            </a:r>
+            <a:endParaRPr lang="en-US" sz="1500" dirty="0"/>
+          </a:p>
+          <a:p>
+            <a:pPr indent="0" marL="0">
+              <a:buNone/>
+            </a:pPr>
+            <a:r>
+              <a:rPr lang="en-US" sz="1300" dirty="0">
                 <a:solidFill>
                   <a:schemeClr val="accent6"/>
                 </a:solidFill>
               </a:rPr>
-              <a:t>Iniciar la presentación, avanzar, retroceder y salir.</a:t>
-            </a:r>
-            <a:endParaRPr lang="en-US" sz="1600" dirty="0"/>
+              <a:t>Iniciar, avanzar, retroceder y salir.</a:t>
+            </a:r>
+            <a:endParaRPr lang="en-US" sz="1500" dirty="0"/>
           </a:p>
         </p:txBody>
       </p:sp>
@@ -5335,8 +5335,8 @@
         </p:blipFill>
         <p:spPr>
           <a:xfrm>
-            <a:off x="6415888" y="4754880"/>
-            <a:ext cx="347472" cy="347472"/>
+            <a:off x="4475378" y="4617720"/>
+            <a:ext cx="329184" cy="329184"/>
           </a:xfrm>
           <a:prstGeom prst="rect">
             <a:avLst/>
@@ -5351,8 +5351,8 @@
         </p:nvSpPr>
         <p:spPr>
           <a:xfrm>
-            <a:off x="6964528" y="4690872"/>
-            <a:ext cx="4495648" cy="777240"/>
+            <a:off x="4978298" y="4553712"/>
+            <a:ext cx="2692298" cy="1051560"/>
           </a:xfrm>
           <a:prstGeom prst="rect">
             <a:avLst/>
@@ -5371,28 +5371,105 @@
               <a:buNone/>
             </a:pPr>
             <a:r>
-              <a:rPr lang="en-US" sz="1600" b="1" dirty="0">
+              <a:rPr lang="en-US" sz="1500" b="1" dirty="0">
                 <a:solidFill>
                   <a:schemeClr val="tx1"/>
                 </a:solidFill>
               </a:rPr>
+              <a:t>Redes de empresa</a:t>
+            </a:r>
+            <a:endParaRPr lang="en-US" sz="1500" dirty="0"/>
+          </a:p>
+          <a:p>
+            <a:pPr indent="0" marL="0">
+              <a:buNone/>
+            </a:pPr>
+            <a:r>
+              <a:rPr lang="en-US" sz="1300" dirty="0">
+                <a:solidFill>
+                  <a:schemeClr val="accent6"/>
+                </a:solidFill>
+              </a:rPr>
+              <a:t>Conecta por Cloudflare incluso solo con el puerto 443.</a:t>
+            </a:r>
+            <a:endParaRPr lang="en-US" sz="1500" dirty="0"/>
+          </a:p>
+        </p:txBody>
+      </p:sp>
+      <p:pic>
+        <p:nvPicPr>
+          <p:cNvPr id="17" name="check-195" descr="preencoded.png">    </p:cNvPr>
+          <p:cNvPicPr>
+            <a:picLocks noChangeAspect="1"/>
+          </p:cNvPicPr>
+          <p:nvPr/>
+        </p:nvPicPr>
+        <p:blipFill>
+          <a:blip r:embed="rId3"/>
+          <a:stretch>
+            <a:fillRect/>
+          </a:stretch>
+        </p:blipFill>
+        <p:spPr>
+          <a:xfrm>
+            <a:off x="7990637" y="4617720"/>
+            <a:ext cx="329184" cy="329184"/>
+          </a:xfrm>
+          <a:prstGeom prst="rect">
+            <a:avLst/>
+          </a:prstGeom>
+        </p:spPr>
+      </p:pic>
+      <p:sp>
+        <p:nvSpPr>
+          <p:cNvPr id="18" name="texto-196"/>
+          <p:cNvSpPr txBox="1"/>
+          <p:nvPr/>
+        </p:nvSpPr>
+        <p:spPr>
+          <a:xfrm>
+            <a:off x="8493557" y="4553712"/>
+            <a:ext cx="2692298" cy="1051560"/>
+          </a:xfrm>
+          <a:prstGeom prst="rect">
+            <a:avLst/>
+          </a:prstGeom>
+          <a:noFill/>
+          <a:ln/>
+        </p:spPr>
+        <p:txBody>
+          <a:bodyPr wrap="square" lIns="0" tIns="0" rIns="0" bIns="0" rtlCol="0" anchor="t"/>
+          <a:lstStyle/>
+          <a:p>
+            <a:pPr indent="0" marL="0">
+              <a:spcAft>
+                <a:spcPts val="300"/>
+              </a:spcAft>
+              <a:buNone/>
+            </a:pPr>
+            <a:r>
+              <a:rPr lang="en-US" sz="1500" b="1" dirty="0">
+                <a:solidFill>
+                  <a:schemeClr val="tx1"/>
+                </a:solidFill>
+              </a:rPr>
               <a:t>Código QR fácil de escanear</a:t>
             </a:r>
-            <a:endParaRPr lang="en-US" sz="1600" dirty="0"/>
-          </a:p>
-          <a:p>
-            <a:pPr indent="0" marL="0">
-              <a:buNone/>
-            </a:pPr>
-            <a:r>
-              <a:rPr lang="en-US" sz="1400" dirty="0">
+            <a:endParaRPr lang="en-US" sz="1500" dirty="0"/>
+          </a:p>
+          <a:p>
+            <a:pPr indent="0" marL="0">
+              <a:buNone/>
+            </a:pPr>
+            <a:r>
+              <a:rPr lang="en-US" sz="1300" dirty="0">
                 <a:solidFill>
                   <a:schemeClr val="accent6"/>
                 </a:solidFill>
               </a:rPr>
-              <a:t>Se lee correctamente incluso reducido al 30 % de su tamaño.</a:t>
-            </a:r>
-            <a:endParaRPr lang="en-US" sz="1600" dirty="0"/>
+              <a:t>Se lee incluso reducido al 30 % de su tamaño.</a:t>
+            </a:r>
+            <a:endParaRPr lang="en-US" sz="1500" dirty="0"/>
           </a:p>
         </p:txBody>
       </p:sp>
@@ -5498,7 +5575,7 @@
                   <a:schemeClr val="accent1"/>
                 </a:solidFill>
               </a:rPr>
-              <a:t>HOJA DE RUTA</a:t>
+              <a:t>ESTADO DEL PROYECTO</a:t>
             </a:r>
             <a:endParaRPr lang="en-US" sz="1200" dirty="0"/>
           </a:p>
@@ -5536,7 +5613,7 @@
                   <a:schemeClr val="tx1"/>
                 </a:solidFill>
               </a:rPr>
-              <a:t>Límites actuales y próximos pasos</a:t>
+              <a:t>Lo que ya está listo y lo que sigue</a:t>
             </a:r>
             <a:endParaRPr lang="en-US" sz="3600" dirty="0"/>
           </a:p>
@@ -5544,18 +5621,18 @@
       </p:sp>
       <p:sp>
         <p:nvSpPr>
-          <p:cNvPr id="4" name="tarjeta-195"/>
+          <p:cNvPr id="4" name="tarjeta-197"/>
           <p:cNvSpPr/>
           <p:nvPr/>
         </p:nvSpPr>
         <p:spPr>
           <a:xfrm>
             <a:off x="640080" y="1783080"/>
-            <a:ext cx="5300320" cy="4297680"/>
+            <a:ext cx="5300320" cy="3794760"/>
           </a:xfrm>
           <a:prstGeom prst="roundRect">
             <a:avLst>
-              <a:gd name="adj" fmla="val 3404"/>
+              <a:gd name="adj" fmla="val 3855"/>
             </a:avLst>
           </a:prstGeom>
           <a:solidFill>
@@ -5566,29 +5643,63 @@
       </p:sp>
       <p:sp>
         <p:nvSpPr>
-          <p:cNvPr id="5" name="icono-fondo-196"/>
-          <p:cNvSpPr/>
-          <p:nvPr/>
-        </p:nvSpPr>
-        <p:spPr>
-          <a:xfrm>
-            <a:off x="960120" y="2011680"/>
-            <a:ext cx="502920" cy="502920"/>
-          </a:xfrm>
-          <a:prstGeom prst="roundRect">
-            <a:avLst>
-              <a:gd name="adj" fmla="val 26000"/>
-            </a:avLst>
+          <p:cNvPr id="5" name="listo"/>
+          <p:cNvSpPr txBox="1"/>
+          <p:nvPr/>
+        </p:nvSpPr>
+        <p:spPr>
+          <a:xfrm>
+            <a:off x="960120" y="1965960"/>
+            <a:ext cx="4660240" cy="457200"/>
+          </a:xfrm>
+          <a:prstGeom prst="rect">
+            <a:avLst/>
+          </a:prstGeom>
+          <a:noFill/>
+          <a:ln/>
+        </p:spPr>
+        <p:txBody>
+          <a:bodyPr wrap="square" lIns="0" tIns="0" rIns="0" bIns="0" rtlCol="0" anchor="ctr"/>
+          <a:lstStyle/>
+          <a:p>
+            <a:pPr indent="0" marL="0">
+              <a:buNone/>
+            </a:pPr>
+            <a:r>
+              <a:rPr lang="en-US" sz="1800" b="1" dirty="0">
+                <a:solidFill>
+                  <a:schemeClr val="tx1"/>
+                </a:solidFill>
+              </a:rPr>
+              <a:t>Ya disponible</a:t>
+            </a:r>
+            <a:endParaRPr lang="en-US" sz="1800" dirty="0"/>
+          </a:p>
+        </p:txBody>
+      </p:sp>
+      <p:sp>
+        <p:nvSpPr>
+          <p:cNvPr id="6" name="hecho-198"/>
+          <p:cNvSpPr/>
+          <p:nvPr/>
+        </p:nvSpPr>
+        <p:spPr>
+          <a:xfrm>
+            <a:off x="960120" y="2578608"/>
+            <a:ext cx="402336" cy="402336"/>
+          </a:xfrm>
+          <a:prstGeom prst="ellipse">
+            <a:avLst/>
           </a:prstGeom>
           <a:solidFill>
-            <a:schemeClr val="accent6"/>
+            <a:schemeClr val="accent2"/>
           </a:solidFill>
           <a:ln/>
         </p:spPr>
       </p:sp>
       <p:pic>
         <p:nvPicPr>
-          <p:cNvPr id="6" name="icono-LuTriangleAlert-197" descr="preencoded.png">    </p:cNvPr>
+          <p:cNvPr id="7" name="hecho-icono-199" descr="preencoded.png">    </p:cNvPr>
           <p:cNvPicPr>
             <a:picLocks noChangeAspect="1"/>
           </p:cNvPicPr>
@@ -5602,8 +5713,8 @@
         </p:blipFill>
         <p:spPr>
           <a:xfrm>
-            <a:off x="1080821" y="2132381"/>
-            <a:ext cx="261518" cy="261518"/>
+            <a:off x="1042416" y="2660904"/>
+            <a:ext cx="237744" cy="237744"/>
           </a:xfrm>
           <a:prstGeom prst="rect">
             <a:avLst/>
@@ -5612,70 +5723,14 @@
       </p:pic>
       <p:sp>
         <p:nvSpPr>
-          <p:cNvPr id="7" name="limites"/>
+          <p:cNvPr id="8" name="texto-200"/>
           <p:cNvSpPr txBox="1"/>
           <p:nvPr/>
         </p:nvSpPr>
         <p:spPr>
           <a:xfrm>
-            <a:off x="1645920" y="2011680"/>
-            <a:ext cx="4020160" cy="502920"/>
-          </a:xfrm>
-          <a:prstGeom prst="rect">
-            <a:avLst/>
-          </a:prstGeom>
-          <a:noFill/>
-          <a:ln/>
-        </p:spPr>
-        <p:txBody>
-          <a:bodyPr wrap="square" lIns="0" tIns="0" rIns="0" bIns="0" rtlCol="0" anchor="ctr"/>
-          <a:lstStyle/>
-          <a:p>
-            <a:pPr indent="0" marL="0">
-              <a:buNone/>
-            </a:pPr>
-            <a:r>
-              <a:rPr lang="en-US" sz="1800" b="1" dirty="0">
-                <a:solidFill>
-                  <a:schemeClr val="tx1"/>
-                </a:solidFill>
-              </a:rPr>
-              <a:t>Límites actuales</a:t>
-            </a:r>
-            <a:endParaRPr lang="en-US" sz="1800" dirty="0"/>
-          </a:p>
-        </p:txBody>
-      </p:sp>
-      <p:sp>
-        <p:nvSpPr>
-          <p:cNvPr id="8" name="punto-198"/>
-          <p:cNvSpPr/>
-          <p:nvPr/>
-        </p:nvSpPr>
-        <p:spPr>
-          <a:xfrm>
-            <a:off x="1024128" y="2880360"/>
-            <a:ext cx="128016" cy="128016"/>
-          </a:xfrm>
-          <a:prstGeom prst="ellipse">
-            <a:avLst/>
-          </a:prstGeom>
-          <a:solidFill>
-            <a:schemeClr val="accent6"/>
-          </a:solidFill>
-          <a:ln/>
-        </p:spPr>
-      </p:sp>
-      <p:sp>
-        <p:nvSpPr>
-          <p:cNvPr id="9" name="texto-199"/>
-          <p:cNvSpPr txBox="1"/>
-          <p:nvPr/>
-        </p:nvSpPr>
-        <p:spPr>
-          <a:xfrm>
-            <a:off x="1371600" y="2788920"/>
-            <a:ext cx="4248760" cy="960120"/>
+            <a:off x="1536192" y="2542032"/>
+            <a:ext cx="4111600" cy="713232"/>
           </a:xfrm>
           <a:prstGeom prst="rect">
             <a:avLst/>
@@ -5694,228 +5749,44 @@
               <a:buNone/>
             </a:pPr>
             <a:r>
-              <a:rPr lang="en-US" sz="1600" b="1" dirty="0">
+              <a:rPr lang="en-US" sz="1500" b="1" dirty="0">
                 <a:solidFill>
                   <a:schemeClr val="tx1"/>
                 </a:solidFill>
               </a:rPr>
-              <a:t>Necesita internet</a:t>
-            </a:r>
-            <a:endParaRPr lang="en-US" sz="1600" dirty="0"/>
-          </a:p>
-          <a:p>
-            <a:pPr indent="0" marL="0">
-              <a:buNone/>
-            </a:pPr>
-            <a:r>
-              <a:rPr lang="en-US" sz="1400" dirty="0">
+              <a:t>Retransmisión con Cloudflare</a:t>
+            </a:r>
+            <a:endParaRPr lang="en-US" sz="1500" dirty="0"/>
+          </a:p>
+          <a:p>
+            <a:pPr indent="0" marL="0">
+              <a:buNone/>
+            </a:pPr>
+            <a:r>
+              <a:rPr lang="en-US" sz="1300" dirty="0">
                 <a:solidFill>
                   <a:schemeClr val="accent6"/>
                 </a:solidFill>
               </a:rPr>
-              <a:t>El celular y la computadora se enlazan a través de internet.</a:t>
-            </a:r>
-            <a:endParaRPr lang="en-US" sz="1600" dirty="0"/>
-          </a:p>
-        </p:txBody>
-      </p:sp>
-      <p:sp>
-        <p:nvSpPr>
-          <p:cNvPr id="10" name="punto-200"/>
-          <p:cNvSpPr/>
-          <p:nvPr/>
-        </p:nvSpPr>
-        <p:spPr>
-          <a:xfrm>
-            <a:off x="1024128" y="3959352"/>
-            <a:ext cx="128016" cy="128016"/>
+              <a:t>Conecta incluso en redes de empresa (puerto 443).</a:t>
+            </a:r>
+            <a:endParaRPr lang="en-US" sz="1500" dirty="0"/>
+          </a:p>
+        </p:txBody>
+      </p:sp>
+      <p:sp>
+        <p:nvSpPr>
+          <p:cNvPr id="9" name="hecho-201"/>
+          <p:cNvSpPr/>
+          <p:nvPr/>
+        </p:nvSpPr>
+        <p:spPr>
+          <a:xfrm>
+            <a:off x="960120" y="3310128"/>
+            <a:ext cx="402336" cy="402336"/>
           </a:xfrm>
           <a:prstGeom prst="ellipse">
             <a:avLst/>
-          </a:prstGeom>
-          <a:solidFill>
-            <a:schemeClr val="accent6"/>
-          </a:solidFill>
-          <a:ln/>
-        </p:spPr>
-      </p:sp>
-      <p:sp>
-        <p:nvSpPr>
-          <p:cNvPr id="11" name="texto-201"/>
-          <p:cNvSpPr txBox="1"/>
-          <p:nvPr/>
-        </p:nvSpPr>
-        <p:spPr>
-          <a:xfrm>
-            <a:off x="1371600" y="3867912"/>
-            <a:ext cx="4248760" cy="960120"/>
-          </a:xfrm>
-          <a:prstGeom prst="rect">
-            <a:avLst/>
-          </a:prstGeom>
-          <a:noFill/>
-          <a:ln/>
-        </p:spPr>
-        <p:txBody>
-          <a:bodyPr wrap="square" lIns="0" tIns="0" rIns="0" bIns="0" rtlCol="0" anchor="t"/>
-          <a:lstStyle/>
-          <a:p>
-            <a:pPr indent="0" marL="0">
-              <a:spcAft>
-                <a:spcPts val="300"/>
-              </a:spcAft>
-              <a:buNone/>
-            </a:pPr>
-            <a:r>
-              <a:rPr lang="en-US" sz="1600" b="1" dirty="0">
-                <a:solidFill>
-                  <a:schemeClr val="tx1"/>
-                </a:solidFill>
-              </a:rPr>
-              <a:t>Páginas protegidas de Chrome</a:t>
-            </a:r>
-            <a:endParaRPr lang="en-US" sz="1600" dirty="0"/>
-          </a:p>
-          <a:p>
-            <a:pPr indent="0" marL="0">
-              <a:buNone/>
-            </a:pPr>
-            <a:r>
-              <a:rPr lang="en-US" sz="1400" dirty="0">
-                <a:solidFill>
-                  <a:schemeClr val="accent6"/>
-                </a:solidFill>
-              </a:rPr>
-              <a:t>No funciona en chrome://, la Chrome Web Store ni el visor de PDF integrado.</a:t>
-            </a:r>
-            <a:endParaRPr lang="en-US" sz="1600" dirty="0"/>
-          </a:p>
-        </p:txBody>
-      </p:sp>
-      <p:sp>
-        <p:nvSpPr>
-          <p:cNvPr id="12" name="punto-202"/>
-          <p:cNvSpPr/>
-          <p:nvPr/>
-        </p:nvSpPr>
-        <p:spPr>
-          <a:xfrm>
-            <a:off x="1024128" y="5038344"/>
-            <a:ext cx="128016" cy="128016"/>
-          </a:xfrm>
-          <a:prstGeom prst="ellipse">
-            <a:avLst/>
-          </a:prstGeom>
-          <a:solidFill>
-            <a:schemeClr val="accent6"/>
-          </a:solidFill>
-          <a:ln/>
-        </p:spPr>
-      </p:sp>
-      <p:sp>
-        <p:nvSpPr>
-          <p:cNvPr id="13" name="texto-203"/>
-          <p:cNvSpPr txBox="1"/>
-          <p:nvPr/>
-        </p:nvSpPr>
-        <p:spPr>
-          <a:xfrm>
-            <a:off x="1371600" y="4946904"/>
-            <a:ext cx="4248760" cy="960120"/>
-          </a:xfrm>
-          <a:prstGeom prst="rect">
-            <a:avLst/>
-          </a:prstGeom>
-          <a:noFill/>
-          <a:ln/>
-        </p:spPr>
-        <p:txBody>
-          <a:bodyPr wrap="square" lIns="0" tIns="0" rIns="0" bIns="0" rtlCol="0" anchor="t"/>
-          <a:lstStyle/>
-          <a:p>
-            <a:pPr indent="0" marL="0">
-              <a:spcAft>
-                <a:spcPts val="300"/>
-              </a:spcAft>
-              <a:buNone/>
-            </a:pPr>
-            <a:r>
-              <a:rPr lang="en-US" sz="1600" b="1" dirty="0">
-                <a:solidFill>
-                  <a:schemeClr val="tx1"/>
-                </a:solidFill>
-              </a:rPr>
-              <a:t>Fuera del navegador</a:t>
-            </a:r>
-            <a:endParaRPr lang="en-US" sz="1600" dirty="0"/>
-          </a:p>
-          <a:p>
-            <a:pPr indent="0" marL="0">
-              <a:buNone/>
-            </a:pPr>
-            <a:r>
-              <a:rPr lang="en-US" sz="1400" dirty="0">
-                <a:solidFill>
-                  <a:schemeClr val="accent6"/>
-                </a:solidFill>
-              </a:rPr>
-              <a:t>No controla PowerPoint o Keynote de escritorio ni relojes inteligentes.</a:t>
-            </a:r>
-            <a:endParaRPr lang="en-US" sz="1600" dirty="0"/>
-          </a:p>
-        </p:txBody>
-      </p:sp>
-      <p:sp>
-        <p:nvSpPr>
-          <p:cNvPr id="14" name="proximos"/>
-          <p:cNvSpPr txBox="1"/>
-          <p:nvPr/>
-        </p:nvSpPr>
-        <p:spPr>
-          <a:xfrm>
-            <a:off x="6251296" y="2011680"/>
-            <a:ext cx="5300320" cy="502920"/>
-          </a:xfrm>
-          <a:prstGeom prst="rect">
-            <a:avLst/>
-          </a:prstGeom>
-          <a:noFill/>
-          <a:ln/>
-        </p:spPr>
-        <p:txBody>
-          <a:bodyPr wrap="square" lIns="0" tIns="0" rIns="0" bIns="0" rtlCol="0" anchor="ctr"/>
-          <a:lstStyle/>
-          <a:p>
-            <a:pPr indent="0" marL="0">
-              <a:buNone/>
-            </a:pPr>
-            <a:r>
-              <a:rPr lang="en-US" sz="1800" b="1" dirty="0">
-                <a:solidFill>
-                  <a:schemeClr val="tx1"/>
-                </a:solidFill>
-              </a:rPr>
-              <a:t>Avances y próximos pasos</a:t>
-            </a:r>
-            <a:endParaRPr lang="en-US" sz="1800" dirty="0"/>
-          </a:p>
-        </p:txBody>
-      </p:sp>
-      <p:sp>
-        <p:nvSpPr>
-          <p:cNvPr id="15" name="icono-fondo-204"/>
-          <p:cNvSpPr/>
-          <p:nvPr/>
-        </p:nvSpPr>
-        <p:spPr>
-          <a:xfrm>
-            <a:off x="6251296" y="2743200"/>
-            <a:ext cx="502920" cy="502920"/>
-          </a:xfrm>
-          <a:prstGeom prst="roundRect">
-            <a:avLst>
-              <a:gd name="adj" fmla="val 26000"/>
-            </a:avLst>
           </a:prstGeom>
           <a:solidFill>
             <a:schemeClr val="accent2"/>
@@ -5925,7 +5796,7 @@
       </p:sp>
       <p:pic>
         <p:nvPicPr>
-          <p:cNvPr id="16" name="icono-LuCircleCheck-205" descr="preencoded.png">    </p:cNvPr>
+          <p:cNvPr id="10" name="hecho-icono-202" descr="preencoded.png">    </p:cNvPr>
           <p:cNvPicPr>
             <a:picLocks noChangeAspect="1"/>
           </p:cNvPicPr>
@@ -5939,8 +5810,8 @@
         </p:blipFill>
         <p:spPr>
           <a:xfrm>
-            <a:off x="6371996" y="2863901"/>
-            <a:ext cx="261518" cy="261518"/>
+            <a:off x="1042416" y="3392424"/>
+            <a:ext cx="237744" cy="237744"/>
           </a:xfrm>
           <a:prstGeom prst="rect">
             <a:avLst/>
@@ -5949,14 +5820,14 @@
       </p:pic>
       <p:sp>
         <p:nvSpPr>
-          <p:cNvPr id="17" name="texto-206"/>
+          <p:cNvPr id="11" name="texto-203"/>
           <p:cNvSpPr txBox="1"/>
           <p:nvPr/>
         </p:nvSpPr>
         <p:spPr>
           <a:xfrm>
-            <a:off x="6982816" y="2706624"/>
-            <a:ext cx="4568800" cy="777240"/>
+            <a:off x="1536192" y="3273552"/>
+            <a:ext cx="4111600" cy="713232"/>
           </a:xfrm>
           <a:prstGeom prst="rect">
             <a:avLst/>
@@ -5975,46 +5846,44 @@
               <a:buNone/>
             </a:pPr>
             <a:r>
-              <a:rPr lang="en-US" sz="1600" b="1" dirty="0">
+              <a:rPr lang="en-US" sz="1500" b="1" dirty="0">
                 <a:solidFill>
                   <a:schemeClr val="tx1"/>
                 </a:solidFill>
               </a:rPr>
-              <a:t>Retransmisión con Cloudflare · lista</a:t>
-            </a:r>
-            <a:endParaRPr lang="en-US" sz="1600" dirty="0"/>
-          </a:p>
-          <a:p>
-            <a:pPr indent="0" marL="0">
-              <a:buNone/>
-            </a:pPr>
-            <a:r>
-              <a:rPr lang="en-US" sz="1400" dirty="0">
+              <a:t>Protección de costos</a:t>
+            </a:r>
+            <a:endParaRPr lang="en-US" sz="1500" dirty="0"/>
+          </a:p>
+          <a:p>
+            <a:pPr indent="0" marL="0">
+              <a:buNone/>
+            </a:pPr>
+            <a:r>
+              <a:rPr lang="en-US" sz="1300" dirty="0">
                 <a:solidFill>
                   <a:schemeClr val="accent6"/>
                 </a:solidFill>
               </a:rPr>
-              <a:t>Funciona en redes restrictivas; gratis hasta 1.000 GB al mes.</a:t>
-            </a:r>
-            <a:endParaRPr lang="en-US" sz="1600" dirty="0"/>
-          </a:p>
-        </p:txBody>
-      </p:sp>
-      <p:sp>
-        <p:nvSpPr>
-          <p:cNvPr id="18" name="icono-fondo-207"/>
-          <p:cNvSpPr/>
-          <p:nvPr/>
-        </p:nvSpPr>
-        <p:spPr>
-          <a:xfrm>
-            <a:off x="6251296" y="3584448"/>
-            <a:ext cx="502920" cy="502920"/>
-          </a:xfrm>
-          <a:prstGeom prst="roundRect">
-            <a:avLst>
-              <a:gd name="adj" fmla="val 26000"/>
-            </a:avLst>
+              <a:t>Se pausa sola a los 900 GB del mes y se reactiva cada mes.</a:t>
+            </a:r>
+            <a:endParaRPr lang="en-US" sz="1500" dirty="0"/>
+          </a:p>
+        </p:txBody>
+      </p:sp>
+      <p:sp>
+        <p:nvSpPr>
+          <p:cNvPr id="12" name="hecho-204"/>
+          <p:cNvSpPr/>
+          <p:nvPr/>
+        </p:nvSpPr>
+        <p:spPr>
+          <a:xfrm>
+            <a:off x="960120" y="4041648"/>
+            <a:ext cx="402336" cy="402336"/>
+          </a:xfrm>
+          <a:prstGeom prst="ellipse">
+            <a:avLst/>
           </a:prstGeom>
           <a:solidFill>
             <a:schemeClr val="accent2"/>
@@ -6024,7 +5893,7 @@
       </p:sp>
       <p:pic>
         <p:nvPicPr>
-          <p:cNvPr id="19" name="icono-LuCircleCheck-208" descr="preencoded.png">    </p:cNvPr>
+          <p:cNvPr id="13" name="hecho-icono-205" descr="preencoded.png">    </p:cNvPr>
           <p:cNvPicPr>
             <a:picLocks noChangeAspect="1"/>
           </p:cNvPicPr>
@@ -6038,8 +5907,8 @@
         </p:blipFill>
         <p:spPr>
           <a:xfrm>
-            <a:off x="6371996" y="3705149"/>
-            <a:ext cx="261518" cy="261518"/>
+            <a:off x="1042416" y="4123944"/>
+            <a:ext cx="237744" cy="237744"/>
           </a:xfrm>
           <a:prstGeom prst="rect">
             <a:avLst/>
@@ -6048,14 +5917,14 @@
       </p:pic>
       <p:sp>
         <p:nvSpPr>
-          <p:cNvPr id="20" name="texto-209"/>
+          <p:cNvPr id="14" name="texto-206"/>
           <p:cNvSpPr txBox="1"/>
           <p:nvPr/>
         </p:nvSpPr>
         <p:spPr>
           <a:xfrm>
-            <a:off x="6982816" y="3547872"/>
-            <a:ext cx="4568800" cy="777240"/>
+            <a:off x="1536192" y="4005072"/>
+            <a:ext cx="4111600" cy="713232"/>
           </a:xfrm>
           <a:prstGeom prst="rect">
             <a:avLst/>
@@ -6074,56 +5943,54 @@
               <a:buNone/>
             </a:pPr>
             <a:r>
-              <a:rPr lang="en-US" sz="1600" b="1" dirty="0">
+              <a:rPr lang="en-US" sz="1500" b="1" dirty="0">
                 <a:solidFill>
                   <a:schemeClr val="tx1"/>
                 </a:solidFill>
               </a:rPr>
-              <a:t>QR nuevo en cada sesión · listo</a:t>
-            </a:r>
-            <a:endParaRPr lang="en-US" sz="1600" dirty="0"/>
-          </a:p>
-          <a:p>
-            <a:pPr indent="0" marL="0">
-              <a:buNone/>
-            </a:pPr>
-            <a:r>
-              <a:rPr lang="en-US" sz="1400" dirty="0">
+              <a:t>Código QR nuevo en cada sesión</a:t>
+            </a:r>
+            <a:endParaRPr lang="en-US" sz="1500" dirty="0"/>
+          </a:p>
+          <a:p>
+            <a:pPr indent="0" marL="0">
+              <a:buNone/>
+            </a:pPr>
+            <a:r>
+              <a:rPr lang="en-US" sz="1300" dirty="0">
                 <a:solidFill>
                   <a:schemeClr val="accent6"/>
                 </a:solidFill>
               </a:rPr>
-              <a:t>Activado por defecto; se puede desactivar en Ajustes.</a:t>
-            </a:r>
-            <a:endParaRPr lang="en-US" sz="1600" dirty="0"/>
-          </a:p>
-        </p:txBody>
-      </p:sp>
-      <p:sp>
-        <p:nvSpPr>
-          <p:cNvPr id="21" name="icono-fondo-210"/>
-          <p:cNvSpPr/>
-          <p:nvPr/>
-        </p:nvSpPr>
-        <p:spPr>
-          <a:xfrm>
-            <a:off x="6251296" y="4425696"/>
-            <a:ext cx="502920" cy="502920"/>
-          </a:xfrm>
-          <a:prstGeom prst="roundRect">
-            <a:avLst>
-              <a:gd name="adj" fmla="val 26000"/>
-            </a:avLst>
+              <a:t>Activado por defecto; se puede cambiar en Ajustes.</a:t>
+            </a:r>
+            <a:endParaRPr lang="en-US" sz="1500" dirty="0"/>
+          </a:p>
+        </p:txBody>
+      </p:sp>
+      <p:sp>
+        <p:nvSpPr>
+          <p:cNvPr id="15" name="hecho-207"/>
+          <p:cNvSpPr/>
+          <p:nvPr/>
+        </p:nvSpPr>
+        <p:spPr>
+          <a:xfrm>
+            <a:off x="960120" y="4773168"/>
+            <a:ext cx="402336" cy="402336"/>
+          </a:xfrm>
+          <a:prstGeom prst="ellipse">
+            <a:avLst/>
           </a:prstGeom>
           <a:solidFill>
-            <a:schemeClr val="accent1"/>
+            <a:schemeClr val="accent2"/>
           </a:solidFill>
           <a:ln/>
         </p:spPr>
       </p:sp>
       <p:pic>
         <p:nvPicPr>
-          <p:cNvPr id="22" name="icono-LuHourglass-211" descr="preencoded.png">    </p:cNvPr>
+          <p:cNvPr id="16" name="hecho-icono-208" descr="preencoded.png">    </p:cNvPr>
           <p:cNvPicPr>
             <a:picLocks noChangeAspect="1"/>
           </p:cNvPicPr>
@@ -6137,8 +6004,8 @@
         </p:blipFill>
         <p:spPr>
           <a:xfrm>
-            <a:off x="6371996" y="4546397"/>
-            <a:ext cx="261518" cy="261518"/>
+            <a:off x="1042416" y="4855464"/>
+            <a:ext cx="237744" cy="237744"/>
           </a:xfrm>
           <a:prstGeom prst="rect">
             <a:avLst/>
@@ -6147,14 +6014,14 @@
       </p:pic>
       <p:sp>
         <p:nvSpPr>
-          <p:cNvPr id="23" name="texto-212"/>
+          <p:cNvPr id="17" name="texto-209"/>
           <p:cNvSpPr txBox="1"/>
           <p:nvPr/>
         </p:nvSpPr>
         <p:spPr>
           <a:xfrm>
-            <a:off x="6982816" y="4389120"/>
-            <a:ext cx="4568800" cy="777240"/>
+            <a:off x="1536192" y="4736592"/>
+            <a:ext cx="4111600" cy="713232"/>
           </a:xfrm>
           <a:prstGeom prst="rect">
             <a:avLst/>
@@ -6173,40 +6040,76 @@
               <a:buNone/>
             </a:pPr>
             <a:r>
-              <a:rPr lang="en-US" sz="1600" b="1" dirty="0">
+              <a:rPr lang="en-US" sz="1500" b="1" dirty="0">
                 <a:solidFill>
                   <a:schemeClr val="tx1"/>
                 </a:solidFill>
               </a:rPr>
-              <a:t>Chrome Web Store</a:t>
-            </a:r>
-            <a:endParaRPr lang="en-US" sz="1600" dirty="0"/>
-          </a:p>
-          <a:p>
-            <a:pPr indent="0" marL="0">
-              <a:buNone/>
-            </a:pPr>
-            <a:r>
-              <a:rPr lang="en-US" sz="1400" dirty="0">
+              <a:t>Control web publicado</a:t>
+            </a:r>
+            <a:endParaRPr lang="en-US" sz="1500" dirty="0"/>
+          </a:p>
+          <a:p>
+            <a:pPr indent="0" marL="0">
+              <a:buNone/>
+            </a:pPr>
+            <a:r>
+              <a:rPr lang="en-US" sz="1300" dirty="0">
                 <a:solidFill>
                   <a:schemeClr val="accent6"/>
                 </a:solidFill>
               </a:rPr>
-              <a:t>La versión 1.0 está en revisión; la 1.1 ya está preparada.</a:t>
-            </a:r>
-            <a:endParaRPr lang="en-US" sz="1600" dirty="0"/>
-          </a:p>
-        </p:txBody>
-      </p:sp>
-      <p:sp>
-        <p:nvSpPr>
-          <p:cNvPr id="24" name="icono-fondo-213"/>
-          <p:cNvSpPr/>
-          <p:nvPr/>
-        </p:nvSpPr>
-        <p:spPr>
-          <a:xfrm>
-            <a:off x="6251296" y="5266944"/>
+              <a:t>En GitHub Pages, con reconexión automática.</a:t>
+            </a:r>
+            <a:endParaRPr lang="en-US" sz="1500" dirty="0"/>
+          </a:p>
+        </p:txBody>
+      </p:sp>
+      <p:sp>
+        <p:nvSpPr>
+          <p:cNvPr id="18" name="sigue"/>
+          <p:cNvSpPr txBox="1"/>
+          <p:nvPr/>
+        </p:nvSpPr>
+        <p:spPr>
+          <a:xfrm>
+            <a:off x="6251296" y="1965960"/>
+            <a:ext cx="5300320" cy="457200"/>
+          </a:xfrm>
+          <a:prstGeom prst="rect">
+            <a:avLst/>
+          </a:prstGeom>
+          <a:noFill/>
+          <a:ln/>
+        </p:spPr>
+        <p:txBody>
+          <a:bodyPr wrap="square" lIns="0" tIns="0" rIns="0" bIns="0" rtlCol="0" anchor="ctr"/>
+          <a:lstStyle/>
+          <a:p>
+            <a:pPr indent="0" marL="0">
+              <a:buNone/>
+            </a:pPr>
+            <a:r>
+              <a:rPr lang="en-US" sz="1800" b="1" dirty="0">
+                <a:solidFill>
+                  <a:schemeClr val="tx1"/>
+                </a:solidFill>
+              </a:rPr>
+              <a:t>Lo que sigue</a:t>
+            </a:r>
+            <a:endParaRPr lang="en-US" sz="1800" dirty="0"/>
+          </a:p>
+        </p:txBody>
+      </p:sp>
+      <p:sp>
+        <p:nvSpPr>
+          <p:cNvPr id="19" name="icono-fondo-210"/>
+          <p:cNvSpPr/>
+          <p:nvPr/>
+        </p:nvSpPr>
+        <p:spPr>
+          <a:xfrm>
+            <a:off x="6251296" y="2606040"/>
             <a:ext cx="502920" cy="502920"/>
           </a:xfrm>
           <a:prstGeom prst="roundRect">
@@ -6222,7 +6125,7 @@
       </p:sp>
       <p:pic>
         <p:nvPicPr>
-          <p:cNvPr id="25" name="icono-LuWatch-214" descr="preencoded.png">    </p:cNvPr>
+          <p:cNvPr id="20" name="icono-LuHourglass-211" descr="preencoded.png">    </p:cNvPr>
           <p:cNvPicPr>
             <a:picLocks noChangeAspect="1"/>
           </p:cNvPicPr>
@@ -6236,7 +6139,7 @@
         </p:blipFill>
         <p:spPr>
           <a:xfrm>
-            <a:off x="6371996" y="5387645"/>
+            <a:off x="6371996" y="2726741"/>
             <a:ext cx="261518" cy="261518"/>
           </a:xfrm>
           <a:prstGeom prst="rect">
@@ -6246,14 +6149,14 @@
       </p:pic>
       <p:sp>
         <p:nvSpPr>
-          <p:cNvPr id="26" name="texto-215"/>
+          <p:cNvPr id="21" name="texto-212"/>
           <p:cNvSpPr txBox="1"/>
           <p:nvPr/>
         </p:nvSpPr>
         <p:spPr>
           <a:xfrm>
-            <a:off x="6982816" y="5230368"/>
-            <a:ext cx="4568800" cy="777240"/>
+            <a:off x="6982816" y="2569464"/>
+            <a:ext cx="4568800" cy="1051560"/>
           </a:xfrm>
           <a:prstGeom prst="rect">
             <a:avLst/>
@@ -6277,6 +6180,105 @@
                   <a:schemeClr val="tx1"/>
                 </a:solidFill>
               </a:rPr>
+              <a:t>Chrome Web Store</a:t>
+            </a:r>
+            <a:endParaRPr lang="en-US" sz="1600" dirty="0"/>
+          </a:p>
+          <a:p>
+            <a:pPr indent="0" marL="0">
+              <a:buNone/>
+            </a:pPr>
+            <a:r>
+              <a:rPr lang="en-US" sz="1400" dirty="0">
+                <a:solidFill>
+                  <a:schemeClr val="accent6"/>
+                </a:solidFill>
+              </a:rPr>
+              <a:t>La versión 1.0 («Mando») está en revisión. Al aprobarse, se sube la 1.1 con el nombre Presentazo.</a:t>
+            </a:r>
+            <a:endParaRPr lang="en-US" sz="1600" dirty="0"/>
+          </a:p>
+        </p:txBody>
+      </p:sp>
+      <p:sp>
+        <p:nvSpPr>
+          <p:cNvPr id="22" name="icono-fondo-213"/>
+          <p:cNvSpPr/>
+          <p:nvPr/>
+        </p:nvSpPr>
+        <p:spPr>
+          <a:xfrm>
+            <a:off x="6251296" y="3794760"/>
+            <a:ext cx="502920" cy="502920"/>
+          </a:xfrm>
+          <a:prstGeom prst="roundRect">
+            <a:avLst>
+              <a:gd name="adj" fmla="val 26000"/>
+            </a:avLst>
+          </a:prstGeom>
+          <a:solidFill>
+            <a:schemeClr val="accent1"/>
+          </a:solidFill>
+          <a:ln/>
+        </p:spPr>
+      </p:sp>
+      <p:pic>
+        <p:nvPicPr>
+          <p:cNvPr id="23" name="icono-LuWatch-214" descr="preencoded.png">    </p:cNvPr>
+          <p:cNvPicPr>
+            <a:picLocks noChangeAspect="1"/>
+          </p:cNvPicPr>
+          <p:nvPr/>
+        </p:nvPicPr>
+        <p:blipFill>
+          <a:blip r:embed="rId6"/>
+          <a:stretch>
+            <a:fillRect/>
+          </a:stretch>
+        </p:blipFill>
+        <p:spPr>
+          <a:xfrm>
+            <a:off x="6371996" y="3915461"/>
+            <a:ext cx="261518" cy="261518"/>
+          </a:xfrm>
+          <a:prstGeom prst="rect">
+            <a:avLst/>
+          </a:prstGeom>
+        </p:spPr>
+      </p:pic>
+      <p:sp>
+        <p:nvSpPr>
+          <p:cNvPr id="24" name="texto-215"/>
+          <p:cNvSpPr txBox="1"/>
+          <p:nvPr/>
+        </p:nvSpPr>
+        <p:spPr>
+          <a:xfrm>
+            <a:off x="6982816" y="3758184"/>
+            <a:ext cx="4568800" cy="1051560"/>
+          </a:xfrm>
+          <a:prstGeom prst="rect">
+            <a:avLst/>
+          </a:prstGeom>
+          <a:noFill/>
+          <a:ln/>
+        </p:spPr>
+        <p:txBody>
+          <a:bodyPr wrap="square" lIns="0" tIns="0" rIns="0" bIns="0" rtlCol="0" anchor="t"/>
+          <a:lstStyle/>
+          <a:p>
+            <a:pPr indent="0" marL="0">
+              <a:spcAft>
+                <a:spcPts val="300"/>
+              </a:spcAft>
+              <a:buNone/>
+            </a:pPr>
+            <a:r>
+              <a:rPr lang="en-US" sz="1600" b="1" dirty="0">
+                <a:solidFill>
+                  <a:schemeClr val="tx1"/>
+                </a:solidFill>
+              </a:rPr>
               <a:t>App para Apple Watch</a:t>
             </a:r>
             <a:endParaRPr lang="en-US" sz="1600" dirty="0"/>
@@ -6294,6 +6296,77 @@
               <a:t>Evaluar una app nativa que use el iPhone como puente.</a:t>
             </a:r>
             <a:endParaRPr lang="en-US" sz="1600" dirty="0"/>
+          </a:p>
+        </p:txBody>
+      </p:sp>
+      <p:pic>
+        <p:nvPicPr>
+          <p:cNvPr id="25" name="limites-icono" descr="preencoded.png">    </p:cNvPr>
+          <p:cNvPicPr>
+            <a:picLocks noChangeAspect="1"/>
+          </p:cNvPicPr>
+          <p:nvPr/>
+        </p:nvPicPr>
+        <p:blipFill>
+          <a:blip r:embed="rId7"/>
+          <a:stretch>
+            <a:fillRect/>
+          </a:stretch>
+        </p:blipFill>
+        <p:spPr>
+          <a:xfrm>
+            <a:off x="640080" y="5788152"/>
+            <a:ext cx="256032" cy="256032"/>
+          </a:xfrm>
+          <a:prstGeom prst="rect">
+            <a:avLst/>
+          </a:prstGeom>
+        </p:spPr>
+      </p:pic>
+      <p:sp>
+        <p:nvSpPr>
+          <p:cNvPr id="26" name="limites"/>
+          <p:cNvSpPr txBox="1"/>
+          <p:nvPr/>
+        </p:nvSpPr>
+        <p:spPr>
+          <a:xfrm>
+            <a:off x="1024128" y="5715000"/>
+            <a:ext cx="10527487" cy="411480"/>
+          </a:xfrm>
+          <a:prstGeom prst="rect">
+            <a:avLst/>
+          </a:prstGeom>
+          <a:noFill/>
+          <a:ln/>
+        </p:spPr>
+        <p:txBody>
+          <a:bodyPr wrap="square" lIns="0" tIns="0" rIns="0" bIns="0" rtlCol="0" anchor="ctr"/>
+          <a:lstStyle/>
+          <a:p>
+            <a:pPr indent="0" marL="0">
+              <a:buNone/>
+            </a:pPr>
+            <a:r>
+              <a:rPr lang="en-US" sz="1300" b="1" dirty="0">
+                <a:solidFill>
+                  <a:schemeClr val="tx1"/>
+                </a:solidFill>
+              </a:rPr>
+              <a:t>Límites que se mantienen: </a:t>
+            </a:r>
+            <a:pPr indent="0" marL="0">
+              <a:buNone/>
+            </a:pPr>
+            <a:r>
+              <a:rPr lang="en-US" sz="1300" dirty="0">
+                <a:solidFill>
+                  <a:schemeClr val="accent6"/>
+                </a:solidFill>
+              </a:rPr>
+              <a:t>necesita internet para enlazar los dispositivos y no funciona en páginas internas de Chrome ni fuera del navegador.</a:t>
+            </a:r>
+            <a:endParaRPr lang="en-US" sz="1300" dirty="0"/>
           </a:p>
         </p:txBody>
       </p:sp>
@@ -6369,7 +6442,7 @@
       </p:grpSpPr>
       <p:pic>
         <p:nvPicPr>
-          <p:cNvPr id="2" name="logo-cierre" descr="Logo de Mando">    </p:cNvPr>
+          <p:cNvPr id="2" name="logo-cierre" descr="Logo de Presentazo">    </p:cNvPr>
           <p:cNvPicPr>
             <a:picLocks noChangeAspect="1"/>
           </p:cNvPicPr>
@@ -6671,7 +6744,7 @@
       </p:sp>
       <p:pic>
         <p:nvPicPr>
-          <p:cNvPr id="12" name="qr" descr="Código QR al repositorio de Mando en GitHub">    </p:cNvPr>
+          <p:cNvPr id="12" name="qr" descr="Código QR al repositorio de Presentazo en GitHub">    </p:cNvPr>
           <p:cNvPicPr>
             <a:picLocks noChangeAspect="1"/>
           </p:cNvPicPr>
@@ -6756,7 +6829,7 @@
       </p:grpSpPr>
       <p:pic>
         <p:nvPicPr>
-          <p:cNvPr id="2" name="logo-final" descr="Logo de Mando">    </p:cNvPr>
+          <p:cNvPr id="2" name="logo-final" descr="Logo de Presentazo">    </p:cNvPr>
           <p:cNvPicPr>
             <a:picLocks noChangeAspect="1"/>
           </p:cNvPicPr>
@@ -6789,7 +6862,7 @@
         <p:spPr>
           <a:xfrm>
             <a:off x="822960" y="2788920"/>
-            <a:ext cx="4937760" cy="1051560"/>
+            <a:ext cx="5257800" cy="1051560"/>
           </a:xfrm>
           <a:prstGeom prst="rect">
             <a:avLst/>
@@ -6805,14 +6878,14 @@
               <a:buNone/>
             </a:pPr>
             <a:r>
-              <a:rPr lang="en-US" sz="6600" b="1" dirty="0">
+              <a:rPr lang="en-US" sz="6000" b="1" dirty="0">
                 <a:solidFill>
                   <a:schemeClr val="bg1"/>
                 </a:solidFill>
               </a:rPr>
               <a:t>Gracias</a:t>
             </a:r>
-            <a:endParaRPr lang="en-US" sz="6600" dirty="0"/>
+            <a:endParaRPr lang="en-US" sz="6000" dirty="0"/>
           </a:p>
         </p:txBody>
       </p:sp>
@@ -6919,7 +6992,7 @@
       </p:sp>
       <p:pic>
         <p:nvPicPr>
-          <p:cNvPr id="7" name="captura-223" descr="Diapositiva con anotaciones del lápiz de Mando">    </p:cNvPr>
+          <p:cNvPr id="7" name="captura-223" descr="Diapositiva con anotaciones del lápiz de Presentazo">    </p:cNvPr>
           <p:cNvPicPr>
             <a:picLocks noChangeAspect="1"/>
           </p:cNvPicPr>
@@ -7622,7 +7695,7 @@
                   <a:schemeClr val="bg1"/>
                 </a:solidFill>
               </a:rPr>
-              <a:t>Con Mando, todo eso se resuelve desde el celular que ya llevas en el bolsillo.</a:t>
+              <a:t>Con Presentazo, todo eso se resuelve desde el celular que ya llevas en el bolsillo.</a:t>
             </a:r>
             <a:endParaRPr lang="en-US" sz="1700" dirty="0"/>
           </a:p>
@@ -7768,7 +7841,7 @@
                   <a:schemeClr val="tx1"/>
                 </a:solidFill>
               </a:rPr>
-              <a:t>Mando convierte tu celular en el control remoto</a:t>
+              <a:t>Tu celular, convertido en control remoto</a:t>
             </a:r>
             <a:endParaRPr lang="en-US" sz="3600" dirty="0"/>
           </a:p>
@@ -8624,7 +8697,7 @@
       </p:sp>
       <p:pic>
         <p:nvPicPr>
-          <p:cNvPr id="13" name="captura-42" descr="Código QR de Mando">    </p:cNvPr>
+          <p:cNvPr id="13" name="captura-42" descr="Código QR de Presentazo">    </p:cNvPr>
           <p:cNvPicPr>
             <a:picLocks noChangeAspect="1"/>
           </p:cNvPicPr>
@@ -8749,7 +8822,7 @@
                   <a:schemeClr val="accent6"/>
                 </a:solidFill>
               </a:rPr>
-              <a:t>Haz clic en el ícono de Mando (Alt+Shift+M) y apunta la cámara al QR.</a:t>
+              <a:t>Haz clic en el ícono de Presentazo (Alt+Shift+M) y apunta la cámara al QR.</a:t>
             </a:r>
             <a:endParaRPr lang="en-US" sz="1800" dirty="0"/>
           </a:p>
@@ -10640,7 +10713,7 @@
                   <a:schemeClr val="tx1"/>
                 </a:solidFill>
               </a:rPr>
-              <a:t>Por qué usar Mando</a:t>
+              <a:t>Por qué usar Presentazo</a:t>
             </a:r>
             <a:endParaRPr lang="en-US" sz="3600" dirty="0"/>
           </a:p>
@@ -12697,9 +12770,9 @@
 </file>
 
 <file path=ppt/theme/theme1.xml><?xml version="1.0" encoding="utf-8"?>
-<a:theme xmlns:a="http://schemas.openxmlformats.org/drawingml/2006/main" name="Mando">
+<a:theme xmlns:a="http://schemas.openxmlformats.org/drawingml/2006/main" name="Presentazo">
   <a:themeElements>
-    <a:clrScheme name="Mando">
+    <a:clrScheme name="Presentazo">
       <a:dk1>
         <a:srgbClr val="0B0B0C"/>
       </a:dk1>
@@ -12737,7 +12810,7 @@
         <a:srgbClr val="8E8E93"/>
       </a:folHlink>
     </a:clrScheme>
-    <a:fontScheme name="Mando">
+    <a:fontScheme name="Presentazo">
       <a:majorFont>
         <a:latin typeface="Arial"/>
         <a:ea typeface=""/>

--- a/presentacion/mando.pptx
+++ b/presentacion/mando.pptx
@@ -121,7 +121,7 @@
   <p:extLst>
     <p:ext uri="{521415D9-36F7-43E2-AB2F-B90AF26B5E84}">
       <p14:sectionLst xmlns:p14="http://schemas.microsoft.com/office/powerpoint/2010/main">
-        <p14:section name="Introducción" id="{95793fad-9825-39e2-ec6e-f81686b1b5fd}">
+        <p14:section name="Introducción" id="{30cef092-71b7-9727-4a13-42ebe84e97a1}">
           <p14:sldIdLst>
             <p14:sldId id="256"/>
             <p14:sldId id="257"/>
@@ -129,27 +129,27 @@
             <p14:sldId id="259"/>
           </p14:sldIdLst>
         </p14:section>
-        <p14:section name="Funciones" id="{4de36e3f-f06f-2548-7027-682465533058}">
+        <p14:section name="Funciones" id="{990aedf9-e937-103b-d5a9-45890a4f7e4e}">
           <p14:sldIdLst>
             <p14:sldId id="260"/>
             <p14:sldId id="261"/>
             <p14:sldId id="262"/>
           </p14:sldIdLst>
         </p14:section>
-        <p14:section name="Valor" id="{f17600f2-e6ee-45ea-2607-614e9a65286c}">
+        <p14:section name="Valor" id="{4972cc06-44b0-7d43-5822-b2b1f7470bc1}">
           <p14:sldIdLst>
             <p14:sldId id="263"/>
             <p14:sldId id="264"/>
           </p14:sldIdLst>
         </p14:section>
-        <p14:section name="Tecnología" id="{79f2e2a7-ea93-2022-43e2-16701c791e30}">
+        <p14:section name="Tecnología" id="{804d7d24-5919-ce37-96fd-3497354004b4}">
           <p14:sldIdLst>
             <p14:sldId id="265"/>
             <p14:sldId id="266"/>
             <p14:sldId id="267"/>
           </p14:sldIdLst>
         </p14:section>
-        <p14:section name="Cierre" id="{2a9e87be-c8fc-523e-ffd4-48945e44dbb5}">
+        <p14:section name="Cierre" id="{790004ac-1d7d-f751-b4b9-5b89356271c2}">
           <p14:sldIdLst>
             <p14:sldId id="268"/>
             <p14:sldId id="269"/>
@@ -736,7 +736,7 @@
           <a:p>
             <a:r>
               <a:rPr lang="en-US" dirty="0"/>
-              <a:t>La seguridad está en el diseño: conexión cifrada de extremo a extremo, la clave secreta solo existe en el QR, los scripts solo están activos mientras hay una sesión, no hay cuentas ni recopilación de datos y un botón permite renovar el código en cualquier momento.</a:t>
+              <a:t>La seguridad está en el diseño: conexión cifrada de extremo a extremo, la clave secreta solo existe en el QR, Presentazo solo actúa en la pestaña donde se pulsa su ícono y no pide acceso a todos los sitios, no hay cuentas ni recopilación de datos y un botón permite renovar el código en cualquier momento.</a:t>
             </a:r>
             <a:endParaRPr lang="en-US" dirty="0"/>
           </a:p>
@@ -4235,7 +4235,7 @@
       </p:sp>
       <p:pic>
         <p:nvPicPr>
-          <p:cNvPr id="8" name="icono-LuPower-168" descr="preencoded.png">    </p:cNvPr>
+          <p:cNvPr id="8" name="icono-LuMousePointerClick-168" descr="preencoded.png">    </p:cNvPr>
           <p:cNvPicPr>
             <a:picLocks noChangeAspect="1"/>
           </p:cNvPicPr>
@@ -4290,7 +4290,7 @@
                   <a:schemeClr val="bg1"/>
                 </a:solidFill>
               </a:rPr>
-              <a:t>Activo solo durante la sesión</a:t>
+              <a:t>Solo la pestaña que eliges</a:t>
             </a:r>
             <a:endParaRPr lang="en-US" sz="1700" dirty="0"/>
           </a:p>
@@ -4304,7 +4304,7 @@
                   <a:schemeClr val="accent5"/>
                 </a:solidFill>
               </a:rPr>
-              <a:t>Los scripts de Presentazo se retiran de Chrome al detener la sesión.</a:t>
+              <a:t>Actúa únicamente donde pulsas su ícono; no pide acceso a todos tus sitios.</a:t>
             </a:r>
             <a:endParaRPr lang="en-US" sz="1700" dirty="0"/>
           </a:p>

--- a/presentacion/mando.pptx
+++ b/presentacion/mando.pptx
@@ -20,9 +20,10 @@
     <p:sldId id="268" r:id="rId14"/>
     <p:sldId id="269" r:id="rId15"/>
     <p:sldId id="270" r:id="rId16"/>
+    <p:sldId id="271" r:id="rId17"/>
   </p:sldIdLst>
   <p:notesMasterIdLst>
-    <p:notesMasterId r:id="rId17"/>
+    <p:notesMasterId r:id="rId18"/>
   </p:notesMasterIdLst>
   <p:sldSz cx="12192000" cy="6858000"/>
   <p:notesSz cx="6858000" cy="12192000"/>
@@ -121,7 +122,7 @@
   <p:extLst>
     <p:ext uri="{521415D9-36F7-43E2-AB2F-B90AF26B5E84}">
       <p14:sectionLst xmlns:p14="http://schemas.microsoft.com/office/powerpoint/2010/main">
-        <p14:section name="Introducción" id="{30cef092-71b7-9727-4a13-42ebe84e97a1}">
+        <p14:section name="Introducción" id="{9e82da7c-9516-63de-02d0-85b3806c8383}">
           <p14:sldIdLst>
             <p14:sldId id="256"/>
             <p14:sldId id="257"/>
@@ -129,31 +130,32 @@
             <p14:sldId id="259"/>
           </p14:sldIdLst>
         </p14:section>
-        <p14:section name="Funciones" id="{990aedf9-e937-103b-d5a9-45890a4f7e4e}">
+        <p14:section name="Funciones" id="{04962323-cdae-e16e-605c-c1b7d31e0e7b}">
           <p14:sldIdLst>
             <p14:sldId id="260"/>
             <p14:sldId id="261"/>
             <p14:sldId id="262"/>
           </p14:sldIdLst>
         </p14:section>
-        <p14:section name="Valor" id="{4972cc06-44b0-7d43-5822-b2b1f7470bc1}">
+        <p14:section name="Valor" id="{d823885a-1bb4-aca7-aa0b-82979708357c}">
           <p14:sldIdLst>
             <p14:sldId id="263"/>
             <p14:sldId id="264"/>
+            <p14:sldId id="265"/>
           </p14:sldIdLst>
         </p14:section>
-        <p14:section name="Tecnología" id="{804d7d24-5919-ce37-96fd-3497354004b4}">
+        <p14:section name="Tecnología" id="{9037c723-56ba-e06a-3272-129b81337fac}">
           <p14:sldIdLst>
-            <p14:sldId id="265"/>
             <p14:sldId id="266"/>
             <p14:sldId id="267"/>
+            <p14:sldId id="268"/>
           </p14:sldIdLst>
         </p14:section>
-        <p14:section name="Cierre" id="{790004ac-1d7d-f751-b4b9-5b89356271c2}">
+        <p14:section name="Cierre" id="{4f8c8251-fbcf-4905-6c50-573c96043c23}">
           <p14:sldIdLst>
-            <p14:sldId id="268"/>
             <p14:sldId id="269"/>
             <p14:sldId id="270"/>
+            <p14:sldId id="271"/>
           </p14:sldIdLst>
         </p14:section>
       </p14:sectionLst>
@@ -560,7 +562,7 @@
           <a:p>
             <a:r>
               <a:rPr lang="en-US" dirty="0"/>
-              <a:t>Presentazo es una extensión de Chrome que convierte el celular en el control remoto de cualquier presentación: avanzar diapositivas, puntero láser, lápiz, mouse y teclado. Se conecta escaneando un código QR, sin instalar apps.</a:t>
+              <a:t>Presentazo convierte el celular en el control remoto de cualquier presentación: avanzar diapositivas, puntero láser, lápiz, mouse y teclado. Funciona como extensión de Chrome y como app para Windows y Mac. Se conecta escaneando un código QR, sin instalar nada en el celular.</a:t>
             </a:r>
             <a:endParaRPr lang="en-US" dirty="0"/>
           </a:p>
@@ -648,7 +650,7 @@
           <a:p>
             <a:r>
               <a:rPr lang="en-US" dirty="0"/>
-              <a:t>El celular y la computadora se comunican de forma directa mediante WebRTC, cifrado de punto a punto. Un servidor de señalización gratuito solo se usa para que los dos dispositivos se encuentren; después ya no participa. Si la red bloquea la conexión directa, el tráfico, todavía cifrado, pasa por el servidor de retransmisión de Cloudflare. La clave secreta viaja dentro del QR y nunca se envía al servidor.</a:t>
+              <a:t>Presentazo ya tiene app para la computadora. Hay instaladores para Windows, para Mac con procesador Intel y para Mac con chip M, cada uno con una versión que se instala y otra portable. La app controla cualquier programa: PowerPoint, Keynote, un PDF o el navegador. Además permite elegir qué controlar: una pantalla, un programa o una pestaña del navegador. En el celular se usa el mismo control remoto que con la extensión.</a:t>
             </a:r>
             <a:endParaRPr lang="en-US" dirty="0"/>
           </a:p>
@@ -736,7 +738,7 @@
           <a:p>
             <a:r>
               <a:rPr lang="en-US" dirty="0"/>
-              <a:t>La seguridad está en el diseño: conexión cifrada de extremo a extremo, la clave secreta solo existe en el QR, Presentazo solo actúa en la pestaña donde se pulsa su ícono y no pide acceso a todos los sitios, no hay cuentas ni recopilación de datos y un botón permite renovar el código en cualquier momento.</a:t>
+              <a:t>El celular y la computadora se comunican de forma directa mediante WebRTC, cifrado de punto a punto. Un servidor de señalización gratuito solo se usa para que los dos dispositivos se encuentren; después ya no participa. Si la red bloquea la conexión directa, el tráfico, todavía cifrado, pasa por el servidor de retransmisión de Cloudflare. La clave secreta viaja dentro del QR y nunca se envía al servidor.</a:t>
             </a:r>
             <a:endParaRPr lang="en-US" dirty="0"/>
           </a:p>
@@ -824,7 +826,7 @@
           <a:p>
             <a:r>
               <a:rPr lang="en-US" dirty="0"/>
-              <a:t>Presentazo se probó de punta a punta con pruebas automáticas que conectan la extensión y el celular de verdad: 42 de 42 comprobaciones superadas. La interfaz se revisó en 28 combinaciones de pantalla y vista. Si se corta el servidor, se reconecta solo en unos 3 segundos sin desconectar al celular.</a:t>
+              <a:t>La seguridad está en el diseño: conexión cifrada de extremo a extremo, la clave secreta solo existe en el QR, Presentazo solo actúa en la pestaña donde se pulsa su ícono y no pide acceso a todos los sitios, no hay cuentas ni recopilación de datos y un botón permite renovar el código en cualquier momento.</a:t>
             </a:r>
             <a:endParaRPr lang="en-US" dirty="0"/>
           </a:p>
@@ -912,7 +914,7 @@
           <a:p>
             <a:r>
               <a:rPr lang="en-US" dirty="0"/>
-              <a:t>Varias metas ya están cumplidas: la retransmisión con Cloudflare para redes de empresa, la protección de costos que pausa el servicio antes de pasar la cuota gratuita, el código QR nuevo en cada sesión y el control web publicado. Lo que sigue es la aprobación en la Chrome Web Store, donde la versión 1.1 llegará con el nuevo nombre Presentazo, y evaluar una app para Apple Watch. Los límites que se mantienen son técnicos: se necesita internet, y Chrome no permite extensiones en sus páginas internas.</a:t>
+              <a:t>Presentazo se probó de punta a punta con pruebas automáticas que conectan la extensión y el celular de verdad: 42 de 42 comprobaciones superadas. La interfaz se revisó en 28 combinaciones de pantalla y vista. Si se corta el servidor, se reconecta solo en unos 3 segundos sin desconectar al celular.</a:t>
             </a:r>
             <a:endParaRPr lang="en-US" dirty="0"/>
           </a:p>
@@ -1000,7 +1002,7 @@
           <a:p>
             <a:r>
               <a:rPr lang="en-US" dirty="0"/>
-              <a:t>Presentazo permite presentar con libertad: escanear, conectar y presentar desde el celular. El código QR de la diapositiva lleva al repositorio en GitHub, donde está todo el proyecto.</a:t>
+              <a:t>Varias metas ya están cumplidas. Hay instaladores de la app para Windows, Mac con procesador Intel y Mac con chip M. También funcionan la retransmisión con Cloudflare para redes de empresa, la protección de costos que pausa el servicio antes de pasar la cuota gratuita, el código QR nuevo en cada sesión y el control web publicado. Lo que sigue es la aprobación en la Chrome Web Store, donde la versión 1.1 llegará con el nuevo nombre Presentazo; firmar los instaladores con Apple y Microsoft para quitar el aviso de seguridad; y evaluar una app para Apple Watch. Los límites que se mantienen son técnicos: se necesita internet, y Chrome no permite extensiones en sus páginas internas.</a:t>
             </a:r>
             <a:endParaRPr lang="en-US" dirty="0"/>
           </a:p>
@@ -1088,7 +1090,7 @@
           <a:p>
             <a:r>
               <a:rPr lang="en-US" dirty="0"/>
-              <a:t>Cierre: agradecer al público y abrir el espacio de preguntas. Si alguien quiere probarlo, puede escanear el código de la diapositiva anterior para ver el proyecto en GitHub.</a:t>
+              <a:t>Presentazo permite presentar con libertad: escanear, conectar y presentar desde el celular. El código QR de la diapositiva lleva al repositorio en GitHub, donde está todo el proyecto.</a:t>
             </a:r>
             <a:endParaRPr lang="en-US" dirty="0"/>
           </a:p>
@@ -1112,6 +1114,94 @@
             <a:fld id="{F7021451-1387-4CA6-816F-3879F97B5CBC}" type="slidenum">
               <a:rPr lang="en-US"/>
               <a:t>15</a:t>
+            </a:fld>
+            <a:endParaRPr lang="en-US"/>
+          </a:p>
+        </p:txBody>
+      </p:sp>
+    </p:spTree>
+    <p:extLst>
+      <p:ext uri="{BB962C8B-B14F-4D97-AF65-F5344CB8AC3E}">
+        <p14:creationId xmlns:p14="http://schemas.microsoft.com/office/powerpoint/2010/main" val="1024086991"/>
+      </p:ext>
+    </p:extLst>
+  </p:cSld>
+  <p:clrMapOvr>
+    <a:masterClrMapping/>
+  </p:clrMapOvr>
+</p:notes>
+</file>
+
+<file path=ppt/notesSlides/notesSlide16.xml><?xml version="1.0" encoding="utf-8"?>
+<p:notes xmlns:a="http://schemas.openxmlformats.org/drawingml/2006/main" xmlns:r="http://schemas.openxmlformats.org/officeDocument/2006/relationships" xmlns:p="http://schemas.openxmlformats.org/presentationml/2006/main">
+  <p:cSld>
+    <p:spTree>
+      <p:nvGrpSpPr>
+        <p:cNvPr id="1" name=""/>
+        <p:cNvGrpSpPr/>
+        <p:nvPr/>
+      </p:nvGrpSpPr>
+      <p:grpSpPr>
+        <a:xfrm>
+          <a:off x="0" y="0"/>
+          <a:ext cx="0" cy="0"/>
+          <a:chOff x="0" y="0"/>
+          <a:chExt cx="0" cy="0"/>
+        </a:xfrm>
+      </p:grpSpPr>
+      <p:sp>
+        <p:nvSpPr>
+          <p:cNvPr id="2" name="Slide Image Placeholder 1"/>
+          <p:cNvSpPr>
+            <a:spLocks noGrp="1" noRot="1" noChangeAspect="1"/>
+          </p:cNvSpPr>
+          <p:nvPr>
+            <p:ph type="sldImg"/>
+          </p:nvPr>
+        </p:nvSpPr>
+        <p:spPr/>
+      </p:sp>
+      <p:sp>
+        <p:nvSpPr>
+          <p:cNvPr id="3" name="Notes Placeholder 2"/>
+          <p:cNvSpPr>
+            <a:spLocks noGrp="1"/>
+          </p:cNvSpPr>
+          <p:nvPr>
+            <p:ph type="body" idx="1"/>
+          </p:nvPr>
+        </p:nvSpPr>
+        <p:spPr/>
+        <p:txBody>
+          <a:bodyPr/>
+          <a:lstStyle/>
+          <a:p>
+            <a:r>
+              <a:rPr lang="en-US" dirty="0"/>
+              <a:t>Cierre: agradecer al público y abrir el espacio de preguntas. Si alguien quiere probarlo, puede escanear el código de la diapositiva anterior para ver el proyecto en GitHub.</a:t>
+            </a:r>
+            <a:endParaRPr lang="en-US" dirty="0"/>
+          </a:p>
+        </p:txBody>
+      </p:sp>
+      <p:sp>
+        <p:nvSpPr>
+          <p:cNvPr id="4" name="Slide Number Placeholder 3"/>
+          <p:cNvSpPr>
+            <a:spLocks noGrp="1"/>
+          </p:cNvSpPr>
+          <p:nvPr>
+            <p:ph type="sldNum" sz="quarter" idx="10"/>
+          </p:nvPr>
+        </p:nvSpPr>
+        <p:spPr/>
+        <p:txBody>
+          <a:bodyPr/>
+          <a:lstStyle/>
+          <a:p>
+            <a:fld id="{F7021451-1387-4CA6-816F-3879F97B5CBC}" type="slidenum">
+              <a:rPr lang="en-US"/>
+              <a:t>16</a:t>
             </a:fld>
             <a:endParaRPr lang="en-US"/>
           </a:p>
@@ -1792,7 +1882,7 @@
           <a:p>
             <a:r>
               <a:rPr lang="en-US" dirty="0"/>
-              <a:t>Presentazo funciona con cualquier presentación que avance con el teclado. Google Slides y reveal.js se verificaron con presentaciones reales. El control funciona en celulares desde 320 píxeles y en tablets; en la computadora se necesita Google Chrome.</a:t>
+              <a:t>Presentazo funciona con cualquier presentación que avance con el teclado. Google Slides y reveal.js se verificaron con presentaciones reales. El control funciona en celulares desde 320 píxeles y en tablets. En la computadora se usa la extensión de Chrome o la app para Windows y Mac.</a:t>
             </a:r>
             <a:endParaRPr lang="en-US" dirty="0"/>
           </a:p>
@@ -3116,7 +3206,7 @@
                   <a:schemeClr val="accent1"/>
                 </a:solidFill>
               </a:rPr>
-              <a:t>CÓMO FUNCIONA</a:t>
+              <a:t>NUEVO · APP DE ESCRITORIO</a:t>
             </a:r>
             <a:endParaRPr lang="en-US" sz="1200" dirty="0"/>
           </a:p>
@@ -3154,7 +3244,7 @@
                   <a:schemeClr val="tx1"/>
                 </a:solidFill>
               </a:rPr>
-              <a:t>Una conexión directa y cifrada</a:t>
+              <a:t>Ahora también para Windows y Mac</a:t>
             </a:r>
             <a:endParaRPr lang="en-US" sz="3600" dirty="0"/>
           </a:p>
@@ -3162,51 +3252,39 @@
       </p:sp>
       <p:sp>
         <p:nvSpPr>
-          <p:cNvPr id="4" name="tarjeta-143"/>
-          <p:cNvSpPr/>
-          <p:nvPr/>
-        </p:nvSpPr>
-        <p:spPr>
-          <a:xfrm>
-            <a:off x="4541368" y="1783080"/>
-            <a:ext cx="3108960" cy="960120"/>
-          </a:xfrm>
-          <a:prstGeom prst="roundRect">
-            <a:avLst>
-              <a:gd name="adj" fmla="val 15238"/>
-            </a:avLst>
+          <p:cNvPr id="4" name="marco-143"/>
+          <p:cNvSpPr/>
+          <p:nvPr/>
+        </p:nvSpPr>
+        <p:spPr>
+          <a:xfrm>
+            <a:off x="640080" y="1783080"/>
+            <a:ext cx="2377440" cy="4160520"/>
+          </a:xfrm>
+          <a:prstGeom prst="rect">
+            <a:avLst/>
           </a:prstGeom>
           <a:solidFill>
-            <a:schemeClr val="bg2"/>
+            <a:schemeClr val="bg1"/>
           </a:solidFill>
-          <a:ln/>
-        </p:spPr>
-      </p:sp>
-      <p:sp>
-        <p:nvSpPr>
-          <p:cNvPr id="5" name="icono-fondo-144"/>
-          <p:cNvSpPr/>
-          <p:nvPr/>
-        </p:nvSpPr>
-        <p:spPr>
-          <a:xfrm>
-            <a:off x="4769968" y="2002536"/>
-            <a:ext cx="502920" cy="502920"/>
-          </a:xfrm>
-          <a:prstGeom prst="roundRect">
-            <a:avLst>
-              <a:gd name="adj" fmla="val 26000"/>
-            </a:avLst>
-          </a:prstGeom>
-          <a:solidFill>
-            <a:schemeClr val="accent6"/>
-          </a:solidFill>
-          <a:ln/>
+          <a:ln w="9525">
+            <a:solidFill>
+              <a:srgbClr val="E5E5EA"/>
+            </a:solidFill>
+            <a:prstDash val="solid"/>
+          </a:ln>
+          <a:effectLst>
+            <a:outerShdw sx="100000" sy="100000" kx="0" ky="0" algn="bl" rotWithShape="0" blurRad="177800" dist="50800" dir="5400000">
+              <a:srgbClr val="000000">
+                <a:alpha val="18000"/>
+              </a:srgbClr>
+            </a:outerShdw>
+          </a:effectLst>
         </p:spPr>
       </p:sp>
       <p:pic>
         <p:nvPicPr>
-          <p:cNvPr id="6" name="icono-LuServer-145" descr="preencoded.png">    </p:cNvPr>
+          <p:cNvPr id="5" name="captura-144" descr="Panel de Presentazo en la computadora con el código QR">    </p:cNvPr>
           <p:cNvPicPr>
             <a:picLocks noChangeAspect="1"/>
           </p:cNvPicPr>
@@ -3220,8 +3298,8 @@
         </p:blipFill>
         <p:spPr>
           <a:xfrm>
-            <a:off x="4890668" y="2123237"/>
-            <a:ext cx="261518" cy="261518"/>
+            <a:off x="640080" y="1783080"/>
+            <a:ext cx="2377440" cy="4160520"/>
           </a:xfrm>
           <a:prstGeom prst="rect">
             <a:avLst/>
@@ -3230,196 +3308,39 @@
       </p:pic>
       <p:sp>
         <p:nvSpPr>
-          <p:cNvPr id="7" name="texto-146"/>
-          <p:cNvSpPr txBox="1"/>
-          <p:nvPr/>
-        </p:nvSpPr>
-        <p:spPr>
-          <a:xfrm>
-            <a:off x="5410048" y="1938528"/>
-            <a:ext cx="2103120" cy="731520"/>
-          </a:xfrm>
-          <a:prstGeom prst="rect">
-            <a:avLst/>
-          </a:prstGeom>
-          <a:noFill/>
-          <a:ln/>
-        </p:spPr>
-        <p:txBody>
-          <a:bodyPr wrap="square" lIns="0" tIns="0" rIns="0" bIns="0" rtlCol="0" anchor="t"/>
-          <a:lstStyle/>
-          <a:p>
-            <a:pPr indent="0" marL="0">
-              <a:spcAft>
-                <a:spcPts val="300"/>
-              </a:spcAft>
-              <a:buNone/>
-            </a:pPr>
-            <a:r>
-              <a:rPr lang="en-US" sz="1500" b="1" dirty="0">
-                <a:solidFill>
-                  <a:schemeClr val="tx1"/>
-                </a:solidFill>
-              </a:rPr>
-              <a:t>Servidor de señalización</a:t>
-            </a:r>
-            <a:endParaRPr lang="en-US" sz="1500" dirty="0"/>
-          </a:p>
-          <a:p>
-            <a:pPr indent="0" marL="0">
-              <a:buNone/>
-            </a:pPr>
-            <a:r>
-              <a:rPr lang="en-US" sz="1300" dirty="0">
-                <a:solidFill>
-                  <a:schemeClr val="accent6"/>
-                </a:solidFill>
-              </a:rPr>
-              <a:t>Solo para el enlace inicial</a:t>
-            </a:r>
-            <a:endParaRPr lang="en-US" sz="1500" dirty="0"/>
-          </a:p>
-        </p:txBody>
-      </p:sp>
-      <p:sp>
-        <p:nvSpPr>
-          <p:cNvPr id="8" name="senal-izq"/>
-          <p:cNvSpPr/>
-          <p:nvPr/>
-        </p:nvSpPr>
-        <p:spPr>
-          <a:xfrm>
-            <a:off x="3474720" y="2263140"/>
-            <a:ext cx="1066648" cy="0"/>
-          </a:xfrm>
-          <a:prstGeom prst="line">
-            <a:avLst/>
-          </a:prstGeom>
-          <a:noFill/>
-          <a:ln w="19050">
+          <p:cNvPr id="6" name="marco-145"/>
+          <p:cNvSpPr/>
+          <p:nvPr/>
+        </p:nvSpPr>
+        <p:spPr>
+          <a:xfrm>
+            <a:off x="3291840" y="1783080"/>
+            <a:ext cx="2377440" cy="4160520"/>
+          </a:xfrm>
+          <a:prstGeom prst="rect">
+            <a:avLst/>
+          </a:prstGeom>
+          <a:solidFill>
+            <a:schemeClr val="bg1"/>
+          </a:solidFill>
+          <a:ln w="9525">
             <a:solidFill>
-              <a:srgbClr val="8E8E93"/>
+              <a:srgbClr val="E5E5EA"/>
             </a:solidFill>
-            <a:prstDash val="dash"/>
+            <a:prstDash val="solid"/>
           </a:ln>
-        </p:spPr>
-      </p:sp>
-      <p:sp>
-        <p:nvSpPr>
-          <p:cNvPr id="9" name="senal-izq-v"/>
-          <p:cNvSpPr/>
-          <p:nvPr/>
-        </p:nvSpPr>
-        <p:spPr>
-          <a:xfrm>
-            <a:off x="3474720" y="2263140"/>
-            <a:ext cx="0" cy="708660"/>
-          </a:xfrm>
-          <a:prstGeom prst="line">
-            <a:avLst/>
-          </a:prstGeom>
-          <a:noFill/>
-          <a:ln w="19050">
-            <a:solidFill>
-              <a:srgbClr val="8E8E93"/>
-            </a:solidFill>
-            <a:prstDash val="dash"/>
-          </a:ln>
-        </p:spPr>
-      </p:sp>
-      <p:sp>
-        <p:nvSpPr>
-          <p:cNvPr id="10" name="senal-der"/>
-          <p:cNvSpPr/>
-          <p:nvPr/>
-        </p:nvSpPr>
-        <p:spPr>
-          <a:xfrm>
-            <a:off x="7650328" y="2263140"/>
-            <a:ext cx="1066648" cy="0"/>
-          </a:xfrm>
-          <a:prstGeom prst="line">
-            <a:avLst/>
-          </a:prstGeom>
-          <a:noFill/>
-          <a:ln w="19050">
-            <a:solidFill>
-              <a:srgbClr val="8E8E93"/>
-            </a:solidFill>
-            <a:prstDash val="dash"/>
-          </a:ln>
-        </p:spPr>
-      </p:sp>
-      <p:sp>
-        <p:nvSpPr>
-          <p:cNvPr id="11" name="senal-der-v"/>
-          <p:cNvSpPr/>
-          <p:nvPr/>
-        </p:nvSpPr>
-        <p:spPr>
-          <a:xfrm>
-            <a:off x="8716975" y="2263140"/>
-            <a:ext cx="0" cy="708660"/>
-          </a:xfrm>
-          <a:prstGeom prst="line">
-            <a:avLst/>
-          </a:prstGeom>
-          <a:noFill/>
-          <a:ln w="19050">
-            <a:solidFill>
-              <a:srgbClr val="8E8E93"/>
-            </a:solidFill>
-            <a:prstDash val="dash"/>
-          </a:ln>
-        </p:spPr>
-      </p:sp>
-      <p:sp>
-        <p:nvSpPr>
-          <p:cNvPr id="12" name="tarjeta-147"/>
-          <p:cNvSpPr/>
-          <p:nvPr/>
-        </p:nvSpPr>
-        <p:spPr>
-          <a:xfrm>
-            <a:off x="822960" y="2971800"/>
-            <a:ext cx="3017520" cy="1600200"/>
-          </a:xfrm>
-          <a:prstGeom prst="roundRect">
-            <a:avLst>
-              <a:gd name="adj" fmla="val 9143"/>
-            </a:avLst>
-          </a:prstGeom>
-          <a:solidFill>
-            <a:schemeClr val="bg2"/>
-          </a:solidFill>
-          <a:ln/>
-        </p:spPr>
-      </p:sp>
-      <p:sp>
-        <p:nvSpPr>
-          <p:cNvPr id="13" name="icono-fondo-148"/>
-          <p:cNvSpPr/>
-          <p:nvPr/>
-        </p:nvSpPr>
-        <p:spPr>
-          <a:xfrm>
-            <a:off x="1097280" y="3246120"/>
-            <a:ext cx="566928" cy="566928"/>
-          </a:xfrm>
-          <a:prstGeom prst="roundRect">
-            <a:avLst>
-              <a:gd name="adj" fmla="val 26000"/>
-            </a:avLst>
-          </a:prstGeom>
-          <a:solidFill>
-            <a:schemeClr val="tx1"/>
-          </a:solidFill>
-          <a:ln/>
+          <a:effectLst>
+            <a:outerShdw sx="100000" sy="100000" kx="0" ky="0" algn="bl" rotWithShape="0" blurRad="177800" dist="50800" dir="5400000">
+              <a:srgbClr val="000000">
+                <a:alpha val="18000"/>
+              </a:srgbClr>
+            </a:outerShdw>
+          </a:effectLst>
         </p:spPr>
       </p:sp>
       <p:pic>
         <p:nvPicPr>
-          <p:cNvPr id="14" name="icono-LuSmartphone-149" descr="preencoded.png">    </p:cNvPr>
+          <p:cNvPr id="7" name="captura-146" descr="Selector para elegir qué programa controlar">    </p:cNvPr>
           <p:cNvPicPr>
             <a:picLocks noChangeAspect="1"/>
           </p:cNvPicPr>
@@ -3433,8 +3354,8 @@
         </p:blipFill>
         <p:spPr>
           <a:xfrm>
-            <a:off x="1233343" y="3382183"/>
-            <a:ext cx="294803" cy="294803"/>
+            <a:off x="3291840" y="1783080"/>
+            <a:ext cx="2377440" cy="4160520"/>
           </a:xfrm>
           <a:prstGeom prst="rect">
             <a:avLst/>
@@ -3443,14 +3364,14 @@
       </p:pic>
       <p:sp>
         <p:nvSpPr>
-          <p:cNvPr id="15" name="texto-150"/>
+          <p:cNvPr id="8" name="escritorio-resumen"/>
           <p:cNvSpPr txBox="1"/>
           <p:nvPr/>
         </p:nvSpPr>
         <p:spPr>
           <a:xfrm>
-            <a:off x="1828800" y="3227832"/>
-            <a:ext cx="1783080" cy="1234440"/>
+            <a:off x="6172200" y="1783080"/>
+            <a:ext cx="5379415" cy="777240"/>
           </a:xfrm>
           <a:prstGeom prst="rect">
             <a:avLst/>
@@ -3463,51 +3384,34 @@
           <a:lstStyle/>
           <a:p>
             <a:pPr indent="0" marL="0">
-              <a:spcAft>
-                <a:spcPts val="300"/>
-              </a:spcAft>
-              <a:buNone/>
-            </a:pPr>
-            <a:r>
-              <a:rPr lang="en-US" sz="1700" b="1" dirty="0">
+              <a:buNone/>
+            </a:pPr>
+            <a:r>
+              <a:rPr lang="en-US" sz="1600" dirty="0">
                 <a:solidFill>
                   <a:schemeClr val="tx1"/>
                 </a:solidFill>
               </a:rPr>
-              <a:t>Celular</a:t>
-            </a:r>
-            <a:endParaRPr lang="en-US" sz="1700" dirty="0"/>
-          </a:p>
-          <a:p>
-            <a:pPr indent="0" marL="0">
-              <a:buNone/>
-            </a:pPr>
-            <a:r>
-              <a:rPr lang="en-US" sz="1400" dirty="0">
-                <a:solidFill>
-                  <a:schemeClr val="accent6"/>
-                </a:solidFill>
-              </a:rPr>
-              <a:t>Control web en el navegador, sin instalar apps.</a:t>
-            </a:r>
-            <a:endParaRPr lang="en-US" sz="1700" dirty="0"/>
-          </a:p>
-        </p:txBody>
-      </p:sp>
-      <p:sp>
-        <p:nvSpPr>
-          <p:cNvPr id="16" name="tarjeta-151"/>
-          <p:cNvSpPr/>
-          <p:nvPr/>
-        </p:nvSpPr>
-        <p:spPr>
-          <a:xfrm>
-            <a:off x="8351215" y="2971800"/>
-            <a:ext cx="3017520" cy="1600200"/>
+              <a:t>Ya hay instaladores listos. La app controla PowerPoint, Keynote, un PDF o cualquier programa, no solo Chrome.</a:t>
+            </a:r>
+            <a:endParaRPr lang="en-US" sz="1600" dirty="0"/>
+          </a:p>
+        </p:txBody>
+      </p:sp>
+      <p:sp>
+        <p:nvSpPr>
+          <p:cNvPr id="9" name="tarjeta-147"/>
+          <p:cNvSpPr/>
+          <p:nvPr/>
+        </p:nvSpPr>
+        <p:spPr>
+          <a:xfrm>
+            <a:off x="6172200" y="2697480"/>
+            <a:ext cx="5379415" cy="777240"/>
           </a:xfrm>
           <a:prstGeom prst="roundRect">
             <a:avLst>
-              <a:gd name="adj" fmla="val 9143"/>
+              <a:gd name="adj" fmla="val 18824"/>
             </a:avLst>
           </a:prstGeom>
           <a:solidFill>
@@ -3518,14 +3422,14 @@
       </p:sp>
       <p:sp>
         <p:nvSpPr>
-          <p:cNvPr id="17" name="icono-fondo-152"/>
-          <p:cNvSpPr/>
-          <p:nvPr/>
-        </p:nvSpPr>
-        <p:spPr>
-          <a:xfrm>
-            <a:off x="8625535" y="3246120"/>
-            <a:ext cx="566928" cy="566928"/>
+          <p:cNvPr id="10" name="icono-fondo-148"/>
+          <p:cNvSpPr/>
+          <p:nvPr/>
+        </p:nvSpPr>
+        <p:spPr>
+          <a:xfrm>
+            <a:off x="6355080" y="2834640"/>
+            <a:ext cx="502920" cy="502920"/>
           </a:xfrm>
           <a:prstGeom prst="roundRect">
             <a:avLst>
@@ -3533,14 +3437,14 @@
             </a:avLst>
           </a:prstGeom>
           <a:solidFill>
-            <a:schemeClr val="tx1"/>
+            <a:schemeClr val="accent1"/>
           </a:solidFill>
           <a:ln/>
         </p:spPr>
       </p:sp>
       <p:pic>
         <p:nvPicPr>
-          <p:cNvPr id="18" name="icono-LuLaptop-153" descr="preencoded.png">    </p:cNvPr>
+          <p:cNvPr id="11" name="icono-LuMonitor-149" descr="preencoded.png">    </p:cNvPr>
           <p:cNvPicPr>
             <a:picLocks noChangeAspect="1"/>
           </p:cNvPicPr>
@@ -3554,8 +3458,8 @@
         </p:blipFill>
         <p:spPr>
           <a:xfrm>
-            <a:off x="8761598" y="3382183"/>
-            <a:ext cx="294803" cy="294803"/>
+            <a:off x="6475781" y="2955341"/>
+            <a:ext cx="261518" cy="261518"/>
           </a:xfrm>
           <a:prstGeom prst="rect">
             <a:avLst/>
@@ -3564,14 +3468,14 @@
       </p:pic>
       <p:sp>
         <p:nvSpPr>
-          <p:cNvPr id="19" name="texto-154"/>
+          <p:cNvPr id="12" name="texto-150"/>
           <p:cNvSpPr txBox="1"/>
           <p:nvPr/>
         </p:nvSpPr>
         <p:spPr>
           <a:xfrm>
-            <a:off x="9357055" y="3227832"/>
-            <a:ext cx="1783080" cy="1234440"/>
+            <a:off x="7040880" y="2807208"/>
+            <a:ext cx="4373575" cy="640080"/>
           </a:xfrm>
           <a:prstGeom prst="rect">
             <a:avLst/>
@@ -3590,119 +3494,68 @@
               <a:buNone/>
             </a:pPr>
             <a:r>
-              <a:rPr lang="en-US" sz="1700" b="1" dirty="0">
+              <a:rPr lang="en-US" sz="1500" b="1" dirty="0">
                 <a:solidFill>
                   <a:schemeClr val="tx1"/>
                 </a:solidFill>
               </a:rPr>
-              <a:t>Computadora</a:t>
-            </a:r>
-            <a:endParaRPr lang="en-US" sz="1700" dirty="0"/>
-          </a:p>
-          <a:p>
-            <a:pPr indent="0" marL="0">
-              <a:buNone/>
-            </a:pPr>
-            <a:r>
-              <a:rPr lang="en-US" sz="1400" dirty="0">
+              <a:t>Windows 10 y 11</a:t>
+            </a:r>
+            <a:endParaRPr lang="en-US" sz="1500" dirty="0"/>
+          </a:p>
+          <a:p>
+            <a:pPr indent="0" marL="0">
+              <a:buNone/>
+            </a:pPr>
+            <a:r>
+              <a:rPr lang="en-US" sz="1300" dirty="0">
                 <a:solidFill>
                   <a:schemeClr val="accent6"/>
                 </a:solidFill>
               </a:rPr>
-              <a:t>Google Chrome con la extensión Presentazo.</a:t>
-            </a:r>
-            <a:endParaRPr lang="en-US" sz="1700" dirty="0"/>
-          </a:p>
-        </p:txBody>
-      </p:sp>
-      <p:sp>
-        <p:nvSpPr>
-          <p:cNvPr id="20" name="enlace-directo"/>
-          <p:cNvSpPr/>
-          <p:nvPr/>
-        </p:nvSpPr>
-        <p:spPr>
-          <a:xfrm>
-            <a:off x="3977640" y="3771900"/>
-            <a:ext cx="4236415" cy="0"/>
-          </a:xfrm>
-          <a:prstGeom prst="line">
-            <a:avLst/>
-          </a:prstGeom>
-          <a:noFill/>
-          <a:ln w="38100">
-            <a:solidFill>
-              <a:srgbClr val="FF3B30"/>
-            </a:solidFill>
-            <a:prstDash val="solid"/>
-            <a:headEnd type="triangle"/>
-            <a:tailEnd type="triangle"/>
-          </a:ln>
-        </p:spPr>
-      </p:sp>
-      <p:sp>
-        <p:nvSpPr>
-          <p:cNvPr id="21" name="enlace-texto"/>
-          <p:cNvSpPr txBox="1"/>
-          <p:nvPr/>
-        </p:nvSpPr>
-        <p:spPr>
-          <a:xfrm>
-            <a:off x="4114800" y="3881628"/>
-            <a:ext cx="3962095" cy="640080"/>
-          </a:xfrm>
-          <a:prstGeom prst="rect">
-            <a:avLst/>
-          </a:prstGeom>
-          <a:noFill/>
-          <a:ln/>
-        </p:spPr>
-        <p:txBody>
-          <a:bodyPr wrap="square" lIns="0" tIns="0" rIns="0" bIns="0" rtlCol="0" anchor="t"/>
-          <a:lstStyle/>
-          <a:p>
-            <a:pPr algn="ctr" indent="0" marL="0">
-              <a:buNone/>
-            </a:pPr>
-            <a:r>
-              <a:rPr lang="en-US" sz="1500" b="1" dirty="0">
-                <a:solidFill>
-                  <a:schemeClr val="tx1"/>
-                </a:solidFill>
-              </a:rPr>
-              <a:t>WebRTC cifrado de punto a punto</a:t>
+              <a:t>Instalador .exe y versión portable</a:t>
             </a:r>
             <a:endParaRPr lang="en-US" sz="1500" dirty="0"/>
           </a:p>
-          <a:p>
-            <a:pPr algn="ctr" indent="0" marL="0">
-              <a:buNone/>
-            </a:pPr>
-            <a:r>
-              <a:rPr lang="en-US" sz="1300" dirty="0">
-                <a:solidFill>
-                  <a:schemeClr val="accent6"/>
-                </a:solidFill>
-              </a:rPr>
-              <a:t>Si la red lo bloquea, pasa cifrado por Cloudflare</a:t>
-            </a:r>
-            <a:endParaRPr lang="en-US" sz="1500" dirty="0"/>
-          </a:p>
-        </p:txBody>
-      </p:sp>
-      <p:sp>
-        <p:nvSpPr>
-          <p:cNvPr id="22" name="paso-155"/>
-          <p:cNvSpPr/>
-          <p:nvPr/>
-        </p:nvSpPr>
-        <p:spPr>
-          <a:xfrm>
-            <a:off x="640080" y="5257800"/>
-            <a:ext cx="411480" cy="411480"/>
-          </a:xfrm>
-          <a:prstGeom prst="ellipse">
-            <a:avLst/>
+        </p:txBody>
+      </p:sp>
+      <p:sp>
+        <p:nvSpPr>
+          <p:cNvPr id="13" name="tarjeta-151"/>
+          <p:cNvSpPr/>
+          <p:nvPr/>
+        </p:nvSpPr>
+        <p:spPr>
+          <a:xfrm>
+            <a:off x="6172200" y="3611880"/>
+            <a:ext cx="5379415" cy="777240"/>
+          </a:xfrm>
+          <a:prstGeom prst="roundRect">
+            <a:avLst>
+              <a:gd name="adj" fmla="val 18824"/>
+            </a:avLst>
+          </a:prstGeom>
+          <a:solidFill>
+            <a:schemeClr val="bg2"/>
+          </a:solidFill>
+          <a:ln/>
+        </p:spPr>
+      </p:sp>
+      <p:sp>
+        <p:nvSpPr>
+          <p:cNvPr id="14" name="icono-fondo-152"/>
+          <p:cNvSpPr/>
+          <p:nvPr/>
+        </p:nvSpPr>
+        <p:spPr>
+          <a:xfrm>
+            <a:off x="6355080" y="3749040"/>
+            <a:ext cx="502920" cy="502920"/>
+          </a:xfrm>
+          <a:prstGeom prst="roundRect">
+            <a:avLst>
+              <a:gd name="adj" fmla="val 26000"/>
+            </a:avLst>
           </a:prstGeom>
           <a:solidFill>
             <a:schemeClr val="accent1"/>
@@ -3710,91 +3563,120 @@
           <a:ln/>
         </p:spPr>
       </p:sp>
-      <p:sp>
-        <p:nvSpPr>
-          <p:cNvPr id="23" name="paso-n-156"/>
+      <p:pic>
+        <p:nvPicPr>
+          <p:cNvPr id="15" name="icono-LuLaptop-153" descr="preencoded.png">    </p:cNvPr>
+          <p:cNvPicPr>
+            <a:picLocks noChangeAspect="1"/>
+          </p:cNvPicPr>
+          <p:nvPr/>
+        </p:nvPicPr>
+        <p:blipFill>
+          <a:blip r:embed="rId4"/>
+          <a:stretch>
+            <a:fillRect/>
+          </a:stretch>
+        </p:blipFill>
+        <p:spPr>
+          <a:xfrm>
+            <a:off x="6475781" y="3869741"/>
+            <a:ext cx="261518" cy="261518"/>
+          </a:xfrm>
+          <a:prstGeom prst="rect">
+            <a:avLst/>
+          </a:prstGeom>
+        </p:spPr>
+      </p:pic>
+      <p:sp>
+        <p:nvSpPr>
+          <p:cNvPr id="16" name="texto-154"/>
           <p:cNvSpPr txBox="1"/>
           <p:nvPr/>
         </p:nvSpPr>
         <p:spPr>
           <a:xfrm>
-            <a:off x="640080" y="5257800"/>
-            <a:ext cx="411480" cy="411480"/>
-          </a:xfrm>
-          <a:prstGeom prst="rect">
-            <a:avLst/>
-          </a:prstGeom>
-          <a:noFill/>
-          <a:ln/>
-        </p:spPr>
-        <p:txBody>
-          <a:bodyPr wrap="square" lIns="0" tIns="0" rIns="0" bIns="0" rtlCol="0" anchor="ctr"/>
-          <a:lstStyle/>
-          <a:p>
-            <a:pPr algn="ctr" indent="0" marL="0">
+            <a:off x="7040880" y="3721608"/>
+            <a:ext cx="4373575" cy="640080"/>
+          </a:xfrm>
+          <a:prstGeom prst="rect">
+            <a:avLst/>
+          </a:prstGeom>
+          <a:noFill/>
+          <a:ln/>
+        </p:spPr>
+        <p:txBody>
+          <a:bodyPr wrap="square" lIns="0" tIns="0" rIns="0" bIns="0" rtlCol="0" anchor="t"/>
+          <a:lstStyle/>
+          <a:p>
+            <a:pPr indent="0" marL="0">
+              <a:spcAft>
+                <a:spcPts val="300"/>
+              </a:spcAft>
               <a:buNone/>
             </a:pPr>
             <a:r>
               <a:rPr lang="en-US" sz="1500" b="1" dirty="0">
                 <a:solidFill>
-                  <a:schemeClr val="bg1"/>
-                </a:solidFill>
-              </a:rPr>
-              <a:t>1</a:t>
+                  <a:schemeClr val="tx1"/>
+                </a:solidFill>
+              </a:rPr>
+              <a:t>Mac con procesador Intel</a:t>
             </a:r>
             <a:endParaRPr lang="en-US" sz="1500" dirty="0"/>
           </a:p>
-        </p:txBody>
-      </p:sp>
-      <p:sp>
-        <p:nvSpPr>
-          <p:cNvPr id="24" name="paso-texto-157"/>
-          <p:cNvSpPr txBox="1"/>
-          <p:nvPr/>
-        </p:nvSpPr>
-        <p:spPr>
-          <a:xfrm>
-            <a:off x="1188720" y="5230368"/>
-            <a:ext cx="2881274" cy="777240"/>
-          </a:xfrm>
-          <a:prstGeom prst="rect">
-            <a:avLst/>
-          </a:prstGeom>
-          <a:noFill/>
-          <a:ln/>
-        </p:spPr>
-        <p:txBody>
-          <a:bodyPr wrap="square" lIns="0" tIns="0" rIns="0" bIns="0" rtlCol="0" anchor="t"/>
-          <a:lstStyle/>
-          <a:p>
-            <a:pPr indent="0" marL="0">
-              <a:buNone/>
-            </a:pPr>
-            <a:r>
-              <a:rPr lang="en-US" sz="1400" dirty="0">
-                <a:solidFill>
-                  <a:schemeClr val="tx1"/>
-                </a:solidFill>
-              </a:rPr>
-              <a:t>El QR lleva un identificador y una clave secreta.</a:t>
-            </a:r>
-            <a:endParaRPr lang="en-US" sz="1400" dirty="0"/>
-          </a:p>
-        </p:txBody>
-      </p:sp>
-      <p:sp>
-        <p:nvSpPr>
-          <p:cNvPr id="25" name="paso-158"/>
-          <p:cNvSpPr/>
-          <p:nvPr/>
-        </p:nvSpPr>
-        <p:spPr>
-          <a:xfrm>
-            <a:off x="4380890" y="5257800"/>
-            <a:ext cx="411480" cy="411480"/>
-          </a:xfrm>
-          <a:prstGeom prst="ellipse">
-            <a:avLst/>
+          <a:p>
+            <a:pPr indent="0" marL="0">
+              <a:buNone/>
+            </a:pPr>
+            <a:r>
+              <a:rPr lang="en-US" sz="1300" dirty="0">
+                <a:solidFill>
+                  <a:schemeClr val="accent6"/>
+                </a:solidFill>
+              </a:rPr>
+              <a:t>Instalador .dmg y versión .zip</a:t>
+            </a:r>
+            <a:endParaRPr lang="en-US" sz="1500" dirty="0"/>
+          </a:p>
+        </p:txBody>
+      </p:sp>
+      <p:sp>
+        <p:nvSpPr>
+          <p:cNvPr id="17" name="tarjeta-155"/>
+          <p:cNvSpPr/>
+          <p:nvPr/>
+        </p:nvSpPr>
+        <p:spPr>
+          <a:xfrm>
+            <a:off x="6172200" y="4526280"/>
+            <a:ext cx="5379415" cy="777240"/>
+          </a:xfrm>
+          <a:prstGeom prst="roundRect">
+            <a:avLst>
+              <a:gd name="adj" fmla="val 18824"/>
+            </a:avLst>
+          </a:prstGeom>
+          <a:solidFill>
+            <a:schemeClr val="bg2"/>
+          </a:solidFill>
+          <a:ln/>
+        </p:spPr>
+      </p:sp>
+      <p:sp>
+        <p:nvSpPr>
+          <p:cNvPr id="18" name="icono-fondo-156"/>
+          <p:cNvSpPr/>
+          <p:nvPr/>
+        </p:nvSpPr>
+        <p:spPr>
+          <a:xfrm>
+            <a:off x="6355080" y="4663440"/>
+            <a:ext cx="502920" cy="502920"/>
+          </a:xfrm>
+          <a:prstGeom prst="roundRect">
+            <a:avLst>
+              <a:gd name="adj" fmla="val 26000"/>
+            </a:avLst>
           </a:prstGeom>
           <a:solidFill>
             <a:schemeClr val="accent1"/>
@@ -3802,16 +3684,117 @@
           <a:ln/>
         </p:spPr>
       </p:sp>
-      <p:sp>
-        <p:nvSpPr>
-          <p:cNvPr id="26" name="paso-n-159"/>
+      <p:pic>
+        <p:nvPicPr>
+          <p:cNvPr id="19" name="icono-LuCpu-157" descr="preencoded.png">    </p:cNvPr>
+          <p:cNvPicPr>
+            <a:picLocks noChangeAspect="1"/>
+          </p:cNvPicPr>
+          <p:nvPr/>
+        </p:nvPicPr>
+        <p:blipFill>
+          <a:blip r:embed="rId5"/>
+          <a:stretch>
+            <a:fillRect/>
+          </a:stretch>
+        </p:blipFill>
+        <p:spPr>
+          <a:xfrm>
+            <a:off x="6475781" y="4784141"/>
+            <a:ext cx="261518" cy="261518"/>
+          </a:xfrm>
+          <a:prstGeom prst="rect">
+            <a:avLst/>
+          </a:prstGeom>
+        </p:spPr>
+      </p:pic>
+      <p:sp>
+        <p:nvSpPr>
+          <p:cNvPr id="20" name="texto-158"/>
           <p:cNvSpPr txBox="1"/>
           <p:nvPr/>
         </p:nvSpPr>
         <p:spPr>
           <a:xfrm>
-            <a:off x="4380890" y="5257800"/>
-            <a:ext cx="411480" cy="411480"/>
+            <a:off x="7040880" y="4636008"/>
+            <a:ext cx="4373575" cy="640080"/>
+          </a:xfrm>
+          <a:prstGeom prst="rect">
+            <a:avLst/>
+          </a:prstGeom>
+          <a:noFill/>
+          <a:ln/>
+        </p:spPr>
+        <p:txBody>
+          <a:bodyPr wrap="square" lIns="0" tIns="0" rIns="0" bIns="0" rtlCol="0" anchor="t"/>
+          <a:lstStyle/>
+          <a:p>
+            <a:pPr indent="0" marL="0">
+              <a:spcAft>
+                <a:spcPts val="300"/>
+              </a:spcAft>
+              <a:buNone/>
+            </a:pPr>
+            <a:r>
+              <a:rPr lang="en-US" sz="1500" b="1" dirty="0">
+                <a:solidFill>
+                  <a:schemeClr val="tx1"/>
+                </a:solidFill>
+              </a:rPr>
+              <a:t>Mac con chip M (M1, M2, M3, M4…)</a:t>
+            </a:r>
+            <a:endParaRPr lang="en-US" sz="1500" dirty="0"/>
+          </a:p>
+          <a:p>
+            <a:pPr indent="0" marL="0">
+              <a:buNone/>
+            </a:pPr>
+            <a:r>
+              <a:rPr lang="en-US" sz="1300" dirty="0">
+                <a:solidFill>
+                  <a:schemeClr val="accent6"/>
+                </a:solidFill>
+              </a:rPr>
+              <a:t>Instalador .dmg y versión .zip, nativa para el chip M</a:t>
+            </a:r>
+            <a:endParaRPr lang="en-US" sz="1500" dirty="0"/>
+          </a:p>
+        </p:txBody>
+      </p:sp>
+      <p:pic>
+        <p:nvPicPr>
+          <p:cNvPr id="21" name="escritorio-check" descr="preencoded.png">    </p:cNvPr>
+          <p:cNvPicPr>
+            <a:picLocks noChangeAspect="1"/>
+          </p:cNvPicPr>
+          <p:nvPr/>
+        </p:nvPicPr>
+        <p:blipFill>
+          <a:blip r:embed="rId6"/>
+          <a:stretch>
+            <a:fillRect/>
+          </a:stretch>
+        </p:blipFill>
+        <p:spPr>
+          <a:xfrm>
+            <a:off x="6172200" y="5550408"/>
+            <a:ext cx="274320" cy="274320"/>
+          </a:xfrm>
+          <a:prstGeom prst="rect">
+            <a:avLst/>
+          </a:prstGeom>
+        </p:spPr>
+      </p:pic>
+      <p:sp>
+        <p:nvSpPr>
+          <p:cNvPr id="22" name="escritorio-elegir"/>
+          <p:cNvSpPr txBox="1"/>
+          <p:nvPr/>
+        </p:nvSpPr>
+        <p:spPr>
+          <a:xfrm>
+            <a:off x="6556248" y="5458968"/>
+            <a:ext cx="4995367" cy="457200"/>
           </a:xfrm>
           <a:prstGeom prst="rect">
             <a:avLst/>
@@ -3823,144 +3806,16 @@
           <a:bodyPr wrap="square" lIns="0" tIns="0" rIns="0" bIns="0" rtlCol="0" anchor="ctr"/>
           <a:lstStyle/>
           <a:p>
-            <a:pPr algn="ctr" indent="0" marL="0">
-              <a:buNone/>
-            </a:pPr>
-            <a:r>
-              <a:rPr lang="en-US" sz="1500" b="1" dirty="0">
-                <a:solidFill>
-                  <a:schemeClr val="bg1"/>
-                </a:solidFill>
-              </a:rPr>
-              <a:t>2</a:t>
-            </a:r>
-            <a:endParaRPr lang="en-US" sz="1500" dirty="0"/>
-          </a:p>
-        </p:txBody>
-      </p:sp>
-      <p:sp>
-        <p:nvSpPr>
-          <p:cNvPr id="27" name="paso-texto-160"/>
-          <p:cNvSpPr txBox="1"/>
-          <p:nvPr/>
-        </p:nvSpPr>
-        <p:spPr>
-          <a:xfrm>
-            <a:off x="4929530" y="5230368"/>
-            <a:ext cx="2881274" cy="777240"/>
-          </a:xfrm>
-          <a:prstGeom prst="rect">
-            <a:avLst/>
-          </a:prstGeom>
-          <a:noFill/>
-          <a:ln/>
-        </p:spPr>
-        <p:txBody>
-          <a:bodyPr wrap="square" lIns="0" tIns="0" rIns="0" bIns="0" rtlCol="0" anchor="t"/>
-          <a:lstStyle/>
-          <a:p>
             <a:pPr indent="0" marL="0">
               <a:buNone/>
             </a:pPr>
             <a:r>
               <a:rPr lang="en-US" sz="1400" dirty="0">
                 <a:solidFill>
-                  <a:schemeClr val="tx1"/>
-                </a:solidFill>
-              </a:rPr>
-              <a:t>El servidor presenta a los dos dispositivos.</a:t>
-            </a:r>
-            <a:endParaRPr lang="en-US" sz="1400" dirty="0"/>
-          </a:p>
-        </p:txBody>
-      </p:sp>
-      <p:sp>
-        <p:nvSpPr>
-          <p:cNvPr id="28" name="paso-161"/>
-          <p:cNvSpPr/>
-          <p:nvPr/>
-        </p:nvSpPr>
-        <p:spPr>
-          <a:xfrm>
-            <a:off x="8121701" y="5257800"/>
-            <a:ext cx="411480" cy="411480"/>
-          </a:xfrm>
-          <a:prstGeom prst="ellipse">
-            <a:avLst/>
-          </a:prstGeom>
-          <a:solidFill>
-            <a:schemeClr val="accent1"/>
-          </a:solidFill>
-          <a:ln/>
-        </p:spPr>
-      </p:sp>
-      <p:sp>
-        <p:nvSpPr>
-          <p:cNvPr id="29" name="paso-n-162"/>
-          <p:cNvSpPr txBox="1"/>
-          <p:nvPr/>
-        </p:nvSpPr>
-        <p:spPr>
-          <a:xfrm>
-            <a:off x="8121701" y="5257800"/>
-            <a:ext cx="411480" cy="411480"/>
-          </a:xfrm>
-          <a:prstGeom prst="rect">
-            <a:avLst/>
-          </a:prstGeom>
-          <a:noFill/>
-          <a:ln/>
-        </p:spPr>
-        <p:txBody>
-          <a:bodyPr wrap="square" lIns="0" tIns="0" rIns="0" bIns="0" rtlCol="0" anchor="ctr"/>
-          <a:lstStyle/>
-          <a:p>
-            <a:pPr algn="ctr" indent="0" marL="0">
-              <a:buNone/>
-            </a:pPr>
-            <a:r>
-              <a:rPr lang="en-US" sz="1500" b="1" dirty="0">
-                <a:solidFill>
-                  <a:schemeClr val="bg1"/>
-                </a:solidFill>
-              </a:rPr>
-              <a:t>3</a:t>
-            </a:r>
-            <a:endParaRPr lang="en-US" sz="1500" dirty="0"/>
-          </a:p>
-        </p:txBody>
-      </p:sp>
-      <p:sp>
-        <p:nvSpPr>
-          <p:cNvPr id="30" name="paso-texto-163"/>
-          <p:cNvSpPr txBox="1"/>
-          <p:nvPr/>
-        </p:nvSpPr>
-        <p:spPr>
-          <a:xfrm>
-            <a:off x="8670341" y="5230368"/>
-            <a:ext cx="2881274" cy="777240"/>
-          </a:xfrm>
-          <a:prstGeom prst="rect">
-            <a:avLst/>
-          </a:prstGeom>
-          <a:noFill/>
-          <a:ln/>
-        </p:spPr>
-        <p:txBody>
-          <a:bodyPr wrap="square" lIns="0" tIns="0" rIns="0" bIns="0" rtlCol="0" anchor="t"/>
-          <a:lstStyle/>
-          <a:p>
-            <a:pPr indent="0" marL="0">
-              <a:buNone/>
-            </a:pPr>
-            <a:r>
-              <a:rPr lang="en-US" sz="1400" dirty="0">
-                <a:solidFill>
-                  <a:schemeClr val="tx1"/>
-                </a:solidFill>
-              </a:rPr>
-              <a:t>Los comandos viajan directo y cifrados.</a:t>
+                  <a:schemeClr val="accent6"/>
+                </a:solidFill>
+              </a:rPr>
+              <a:t>Elige qué controlar: una pantalla, un programa o una pestaña del navegador.</a:t>
             </a:r>
             <a:endParaRPr lang="en-US" sz="1400" dirty="0"/>
           </a:p>
@@ -4068,7 +3923,7 @@
                   <a:schemeClr val="accent1"/>
                 </a:solidFill>
               </a:rPr>
-              <a:t>SEGURIDAD Y PRIVACIDAD</a:t>
+              <a:t>CÓMO FUNCIONA</a:t>
             </a:r>
             <a:endParaRPr lang="en-US" sz="1200" dirty="0"/>
           </a:p>
@@ -4103,10 +3958,10 @@
             <a:r>
               <a:rPr lang="en-US" sz="3600" b="1" dirty="0">
                 <a:solidFill>
-                  <a:schemeClr val="bg1"/>
-                </a:solidFill>
-              </a:rPr>
-              <a:t>Tus presentaciones siguen siendo tuyas</a:t>
+                  <a:schemeClr val="tx1"/>
+                </a:solidFill>
+              </a:rPr>
+              <a:t>Una conexión directa y cifrada</a:t>
             </a:r>
             <a:endParaRPr lang="en-US" sz="3600" dirty="0"/>
           </a:p>
@@ -4114,14 +3969,36 @@
       </p:sp>
       <p:sp>
         <p:nvSpPr>
-          <p:cNvPr id="4" name="icono-fondo-164"/>
-          <p:cNvSpPr/>
-          <p:nvPr/>
-        </p:nvSpPr>
-        <p:spPr>
-          <a:xfrm>
-            <a:off x="640080" y="1828800"/>
-            <a:ext cx="566928" cy="566928"/>
+          <p:cNvPr id="4" name="tarjeta-159"/>
+          <p:cNvSpPr/>
+          <p:nvPr/>
+        </p:nvSpPr>
+        <p:spPr>
+          <a:xfrm>
+            <a:off x="4541368" y="1783080"/>
+            <a:ext cx="3108960" cy="960120"/>
+          </a:xfrm>
+          <a:prstGeom prst="roundRect">
+            <a:avLst>
+              <a:gd name="adj" fmla="val 15238"/>
+            </a:avLst>
+          </a:prstGeom>
+          <a:solidFill>
+            <a:schemeClr val="bg2"/>
+          </a:solidFill>
+          <a:ln/>
+        </p:spPr>
+      </p:sp>
+      <p:sp>
+        <p:nvSpPr>
+          <p:cNvPr id="5" name="icono-fondo-160"/>
+          <p:cNvSpPr/>
+          <p:nvPr/>
+        </p:nvSpPr>
+        <p:spPr>
+          <a:xfrm>
+            <a:off x="4769968" y="2002536"/>
+            <a:ext cx="502920" cy="502920"/>
           </a:xfrm>
           <a:prstGeom prst="roundRect">
             <a:avLst>
@@ -4129,14 +4006,14 @@
             </a:avLst>
           </a:prstGeom>
           <a:solidFill>
-            <a:schemeClr val="tx2"/>
+            <a:schemeClr val="accent6"/>
           </a:solidFill>
           <a:ln/>
         </p:spPr>
       </p:sp>
       <p:pic>
         <p:nvPicPr>
-          <p:cNvPr id="5" name="icono-LuLock-165" descr="preencoded.png">    </p:cNvPr>
+          <p:cNvPr id="6" name="icono-LuServer-161" descr="preencoded.png">    </p:cNvPr>
           <p:cNvPicPr>
             <a:picLocks noChangeAspect="1"/>
           </p:cNvPicPr>
@@ -4150,8 +4027,8 @@
         </p:blipFill>
         <p:spPr>
           <a:xfrm>
-            <a:off x="776143" y="1964863"/>
-            <a:ext cx="294803" cy="294803"/>
+            <a:off x="4890668" y="2123237"/>
+            <a:ext cx="261518" cy="261518"/>
           </a:xfrm>
           <a:prstGeom prst="rect">
             <a:avLst/>
@@ -4160,14 +4037,14 @@
       </p:pic>
       <p:sp>
         <p:nvSpPr>
-          <p:cNvPr id="6" name="texto-166"/>
+          <p:cNvPr id="7" name="texto-162"/>
           <p:cNvSpPr txBox="1"/>
           <p:nvPr/>
         </p:nvSpPr>
         <p:spPr>
           <a:xfrm>
-            <a:off x="1463040" y="1801368"/>
-            <a:ext cx="4358488" cy="1097280"/>
+            <a:off x="5410048" y="1938528"/>
+            <a:ext cx="2103120" cy="731520"/>
           </a:xfrm>
           <a:prstGeom prst="rect">
             <a:avLst/>
@@ -4186,40 +4063,154 @@
               <a:buNone/>
             </a:pPr>
             <a:r>
-              <a:rPr lang="en-US" sz="1700" b="1" dirty="0">
-                <a:solidFill>
-                  <a:schemeClr val="bg1"/>
-                </a:solidFill>
-              </a:rPr>
-              <a:t>Cifrado de extremo a extremo</a:t>
-            </a:r>
-            <a:endParaRPr lang="en-US" sz="1700" dirty="0"/>
-          </a:p>
-          <a:p>
-            <a:pPr indent="0" marL="0">
-              <a:buNone/>
-            </a:pPr>
-            <a:r>
-              <a:rPr lang="en-US" sz="1400" dirty="0">
-                <a:solidFill>
-                  <a:schemeClr val="accent5"/>
-                </a:solidFill>
-              </a:rPr>
-              <a:t>Los comandos viajan cifrados directamente entre tus dispositivos.</a:t>
-            </a:r>
-            <a:endParaRPr lang="en-US" sz="1700" dirty="0"/>
-          </a:p>
-        </p:txBody>
-      </p:sp>
-      <p:sp>
-        <p:nvSpPr>
-          <p:cNvPr id="7" name="icono-fondo-167"/>
-          <p:cNvSpPr/>
-          <p:nvPr/>
-        </p:nvSpPr>
-        <p:spPr>
-          <a:xfrm>
-            <a:off x="6370168" y="1828800"/>
+              <a:rPr lang="en-US" sz="1500" b="1" dirty="0">
+                <a:solidFill>
+                  <a:schemeClr val="tx1"/>
+                </a:solidFill>
+              </a:rPr>
+              <a:t>Servidor de señalización</a:t>
+            </a:r>
+            <a:endParaRPr lang="en-US" sz="1500" dirty="0"/>
+          </a:p>
+          <a:p>
+            <a:pPr indent="0" marL="0">
+              <a:buNone/>
+            </a:pPr>
+            <a:r>
+              <a:rPr lang="en-US" sz="1300" dirty="0">
+                <a:solidFill>
+                  <a:schemeClr val="accent6"/>
+                </a:solidFill>
+              </a:rPr>
+              <a:t>Solo para el enlace inicial</a:t>
+            </a:r>
+            <a:endParaRPr lang="en-US" sz="1500" dirty="0"/>
+          </a:p>
+        </p:txBody>
+      </p:sp>
+      <p:sp>
+        <p:nvSpPr>
+          <p:cNvPr id="8" name="senal-izq"/>
+          <p:cNvSpPr/>
+          <p:nvPr/>
+        </p:nvSpPr>
+        <p:spPr>
+          <a:xfrm>
+            <a:off x="3474720" y="2263140"/>
+            <a:ext cx="1066648" cy="0"/>
+          </a:xfrm>
+          <a:prstGeom prst="line">
+            <a:avLst/>
+          </a:prstGeom>
+          <a:noFill/>
+          <a:ln w="19050">
+            <a:solidFill>
+              <a:srgbClr val="8E8E93"/>
+            </a:solidFill>
+            <a:prstDash val="dash"/>
+          </a:ln>
+        </p:spPr>
+      </p:sp>
+      <p:sp>
+        <p:nvSpPr>
+          <p:cNvPr id="9" name="senal-izq-v"/>
+          <p:cNvSpPr/>
+          <p:nvPr/>
+        </p:nvSpPr>
+        <p:spPr>
+          <a:xfrm>
+            <a:off x="3474720" y="2263140"/>
+            <a:ext cx="0" cy="708660"/>
+          </a:xfrm>
+          <a:prstGeom prst="line">
+            <a:avLst/>
+          </a:prstGeom>
+          <a:noFill/>
+          <a:ln w="19050">
+            <a:solidFill>
+              <a:srgbClr val="8E8E93"/>
+            </a:solidFill>
+            <a:prstDash val="dash"/>
+          </a:ln>
+        </p:spPr>
+      </p:sp>
+      <p:sp>
+        <p:nvSpPr>
+          <p:cNvPr id="10" name="senal-der"/>
+          <p:cNvSpPr/>
+          <p:nvPr/>
+        </p:nvSpPr>
+        <p:spPr>
+          <a:xfrm>
+            <a:off x="7650328" y="2263140"/>
+            <a:ext cx="1066648" cy="0"/>
+          </a:xfrm>
+          <a:prstGeom prst="line">
+            <a:avLst/>
+          </a:prstGeom>
+          <a:noFill/>
+          <a:ln w="19050">
+            <a:solidFill>
+              <a:srgbClr val="8E8E93"/>
+            </a:solidFill>
+            <a:prstDash val="dash"/>
+          </a:ln>
+        </p:spPr>
+      </p:sp>
+      <p:sp>
+        <p:nvSpPr>
+          <p:cNvPr id="11" name="senal-der-v"/>
+          <p:cNvSpPr/>
+          <p:nvPr/>
+        </p:nvSpPr>
+        <p:spPr>
+          <a:xfrm>
+            <a:off x="8716975" y="2263140"/>
+            <a:ext cx="0" cy="708660"/>
+          </a:xfrm>
+          <a:prstGeom prst="line">
+            <a:avLst/>
+          </a:prstGeom>
+          <a:noFill/>
+          <a:ln w="19050">
+            <a:solidFill>
+              <a:srgbClr val="8E8E93"/>
+            </a:solidFill>
+            <a:prstDash val="dash"/>
+          </a:ln>
+        </p:spPr>
+      </p:sp>
+      <p:sp>
+        <p:nvSpPr>
+          <p:cNvPr id="12" name="tarjeta-163"/>
+          <p:cNvSpPr/>
+          <p:nvPr/>
+        </p:nvSpPr>
+        <p:spPr>
+          <a:xfrm>
+            <a:off x="822960" y="2971800"/>
+            <a:ext cx="3017520" cy="1600200"/>
+          </a:xfrm>
+          <a:prstGeom prst="roundRect">
+            <a:avLst>
+              <a:gd name="adj" fmla="val 9143"/>
+            </a:avLst>
+          </a:prstGeom>
+          <a:solidFill>
+            <a:schemeClr val="bg2"/>
+          </a:solidFill>
+          <a:ln/>
+        </p:spPr>
+      </p:sp>
+      <p:sp>
+        <p:nvSpPr>
+          <p:cNvPr id="13" name="icono-fondo-164"/>
+          <p:cNvSpPr/>
+          <p:nvPr/>
+        </p:nvSpPr>
+        <p:spPr>
+          <a:xfrm>
+            <a:off x="1097280" y="3246120"/>
             <a:ext cx="566928" cy="566928"/>
           </a:xfrm>
           <a:prstGeom prst="roundRect">
@@ -4228,14 +4219,14 @@
             </a:avLst>
           </a:prstGeom>
           <a:solidFill>
-            <a:schemeClr val="tx2"/>
+            <a:schemeClr val="tx1"/>
           </a:solidFill>
           <a:ln/>
         </p:spPr>
       </p:sp>
       <p:pic>
         <p:nvPicPr>
-          <p:cNvPr id="8" name="icono-LuMousePointerClick-168" descr="preencoded.png">    </p:cNvPr>
+          <p:cNvPr id="14" name="icono-LuSmartphone-165" descr="preencoded.png">    </p:cNvPr>
           <p:cNvPicPr>
             <a:picLocks noChangeAspect="1"/>
           </p:cNvPicPr>
@@ -4249,7 +4240,7 @@
         </p:blipFill>
         <p:spPr>
           <a:xfrm>
-            <a:off x="6506230" y="1964863"/>
+            <a:off x="1233343" y="3382183"/>
             <a:ext cx="294803" cy="294803"/>
           </a:xfrm>
           <a:prstGeom prst="rect">
@@ -4259,14 +4250,14 @@
       </p:pic>
       <p:sp>
         <p:nvSpPr>
-          <p:cNvPr id="9" name="texto-169"/>
+          <p:cNvPr id="15" name="texto-166"/>
           <p:cNvSpPr txBox="1"/>
           <p:nvPr/>
         </p:nvSpPr>
         <p:spPr>
           <a:xfrm>
-            <a:off x="7193128" y="1801368"/>
-            <a:ext cx="4358488" cy="1097280"/>
+            <a:off x="1828800" y="3227832"/>
+            <a:ext cx="1783080" cy="1234440"/>
           </a:xfrm>
           <a:prstGeom prst="rect">
             <a:avLst/>
@@ -4287,10 +4278,10 @@
             <a:r>
               <a:rPr lang="en-US" sz="1700" b="1" dirty="0">
                 <a:solidFill>
-                  <a:schemeClr val="bg1"/>
-                </a:solidFill>
-              </a:rPr>
-              <a:t>Solo la pestaña que eliges</a:t>
+                  <a:schemeClr val="tx1"/>
+                </a:solidFill>
+              </a:rPr>
+              <a:t>Celular</a:t>
             </a:r>
             <a:endParaRPr lang="en-US" sz="1700" dirty="0"/>
           </a:p>
@@ -4301,10 +4292,10 @@
             <a:r>
               <a:rPr lang="en-US" sz="1400" dirty="0">
                 <a:solidFill>
-                  <a:schemeClr val="accent5"/>
-                </a:solidFill>
-              </a:rPr>
-              <a:t>Actúa únicamente donde pulsas su ícono; no pide acceso a todos tus sitios.</a:t>
+                  <a:schemeClr val="accent6"/>
+                </a:solidFill>
+              </a:rPr>
+              <a:t>Control web en el navegador, sin instalar apps.</a:t>
             </a:r>
             <a:endParaRPr lang="en-US" sz="1700" dirty="0"/>
           </a:p>
@@ -4312,13 +4303,35 @@
       </p:sp>
       <p:sp>
         <p:nvSpPr>
-          <p:cNvPr id="10" name="icono-fondo-170"/>
-          <p:cNvSpPr/>
-          <p:nvPr/>
-        </p:nvSpPr>
-        <p:spPr>
-          <a:xfrm>
-            <a:off x="640080" y="3200400"/>
+          <p:cNvPr id="16" name="tarjeta-167"/>
+          <p:cNvSpPr/>
+          <p:nvPr/>
+        </p:nvSpPr>
+        <p:spPr>
+          <a:xfrm>
+            <a:off x="8351215" y="2971800"/>
+            <a:ext cx="3017520" cy="1600200"/>
+          </a:xfrm>
+          <a:prstGeom prst="roundRect">
+            <a:avLst>
+              <a:gd name="adj" fmla="val 9143"/>
+            </a:avLst>
+          </a:prstGeom>
+          <a:solidFill>
+            <a:schemeClr val="bg2"/>
+          </a:solidFill>
+          <a:ln/>
+        </p:spPr>
+      </p:sp>
+      <p:sp>
+        <p:nvSpPr>
+          <p:cNvPr id="17" name="icono-fondo-168"/>
+          <p:cNvSpPr/>
+          <p:nvPr/>
+        </p:nvSpPr>
+        <p:spPr>
+          <a:xfrm>
+            <a:off x="8625535" y="3246120"/>
             <a:ext cx="566928" cy="566928"/>
           </a:xfrm>
           <a:prstGeom prst="roundRect">
@@ -4327,14 +4340,14 @@
             </a:avLst>
           </a:prstGeom>
           <a:solidFill>
-            <a:schemeClr val="tx2"/>
+            <a:schemeClr val="tx1"/>
           </a:solidFill>
           <a:ln/>
         </p:spPr>
       </p:sp>
       <p:pic>
         <p:nvPicPr>
-          <p:cNvPr id="11" name="icono-LuKeyRound-171" descr="preencoded.png">    </p:cNvPr>
+          <p:cNvPr id="18" name="icono-LuLaptop-169" descr="preencoded.png">    </p:cNvPr>
           <p:cNvPicPr>
             <a:picLocks noChangeAspect="1"/>
           </p:cNvPicPr>
@@ -4348,7 +4361,7 @@
         </p:blipFill>
         <p:spPr>
           <a:xfrm>
-            <a:off x="776143" y="3336463"/>
+            <a:off x="8761598" y="3382183"/>
             <a:ext cx="294803" cy="294803"/>
           </a:xfrm>
           <a:prstGeom prst="rect">
@@ -4358,14 +4371,14 @@
       </p:pic>
       <p:sp>
         <p:nvSpPr>
-          <p:cNvPr id="12" name="texto-172"/>
+          <p:cNvPr id="19" name="texto-170"/>
           <p:cNvSpPr txBox="1"/>
           <p:nvPr/>
         </p:nvSpPr>
         <p:spPr>
           <a:xfrm>
-            <a:off x="1463040" y="3172968"/>
-            <a:ext cx="4358488" cy="1097280"/>
+            <a:off x="9357055" y="3227832"/>
+            <a:ext cx="1783080" cy="1234440"/>
           </a:xfrm>
           <a:prstGeom prst="rect">
             <a:avLst/>
@@ -4386,13 +4399,180 @@
             <a:r>
               <a:rPr lang="en-US" sz="1700" b="1" dirty="0">
                 <a:solidFill>
+                  <a:schemeClr val="tx1"/>
+                </a:solidFill>
+              </a:rPr>
+              <a:t>Computadora</a:t>
+            </a:r>
+            <a:endParaRPr lang="en-US" sz="1700" dirty="0"/>
+          </a:p>
+          <a:p>
+            <a:pPr indent="0" marL="0">
+              <a:buNone/>
+            </a:pPr>
+            <a:r>
+              <a:rPr lang="en-US" sz="1400" dirty="0">
+                <a:solidFill>
+                  <a:schemeClr val="accent6"/>
+                </a:solidFill>
+              </a:rPr>
+              <a:t>Google Chrome con la extensión Presentazo.</a:t>
+            </a:r>
+            <a:endParaRPr lang="en-US" sz="1700" dirty="0"/>
+          </a:p>
+        </p:txBody>
+      </p:sp>
+      <p:sp>
+        <p:nvSpPr>
+          <p:cNvPr id="20" name="enlace-directo"/>
+          <p:cNvSpPr/>
+          <p:nvPr/>
+        </p:nvSpPr>
+        <p:spPr>
+          <a:xfrm>
+            <a:off x="3977640" y="3771900"/>
+            <a:ext cx="4236415" cy="0"/>
+          </a:xfrm>
+          <a:prstGeom prst="line">
+            <a:avLst/>
+          </a:prstGeom>
+          <a:noFill/>
+          <a:ln w="38100">
+            <a:solidFill>
+              <a:srgbClr val="FF3B30"/>
+            </a:solidFill>
+            <a:prstDash val="solid"/>
+            <a:headEnd type="triangle"/>
+            <a:tailEnd type="triangle"/>
+          </a:ln>
+        </p:spPr>
+      </p:sp>
+      <p:sp>
+        <p:nvSpPr>
+          <p:cNvPr id="21" name="enlace-texto"/>
+          <p:cNvSpPr txBox="1"/>
+          <p:nvPr/>
+        </p:nvSpPr>
+        <p:spPr>
+          <a:xfrm>
+            <a:off x="4114800" y="3881628"/>
+            <a:ext cx="3962095" cy="640080"/>
+          </a:xfrm>
+          <a:prstGeom prst="rect">
+            <a:avLst/>
+          </a:prstGeom>
+          <a:noFill/>
+          <a:ln/>
+        </p:spPr>
+        <p:txBody>
+          <a:bodyPr wrap="square" lIns="0" tIns="0" rIns="0" bIns="0" rtlCol="0" anchor="t"/>
+          <a:lstStyle/>
+          <a:p>
+            <a:pPr algn="ctr" indent="0" marL="0">
+              <a:buNone/>
+            </a:pPr>
+            <a:r>
+              <a:rPr lang="en-US" sz="1500" b="1" dirty="0">
+                <a:solidFill>
+                  <a:schemeClr val="tx1"/>
+                </a:solidFill>
+              </a:rPr>
+              <a:t>WebRTC cifrado de punto a punto</a:t>
+            </a:r>
+            <a:endParaRPr lang="en-US" sz="1500" dirty="0"/>
+          </a:p>
+          <a:p>
+            <a:pPr algn="ctr" indent="0" marL="0">
+              <a:buNone/>
+            </a:pPr>
+            <a:r>
+              <a:rPr lang="en-US" sz="1300" dirty="0">
+                <a:solidFill>
+                  <a:schemeClr val="accent6"/>
+                </a:solidFill>
+              </a:rPr>
+              <a:t>Si la red lo bloquea, pasa cifrado por Cloudflare</a:t>
+            </a:r>
+            <a:endParaRPr lang="en-US" sz="1500" dirty="0"/>
+          </a:p>
+        </p:txBody>
+      </p:sp>
+      <p:sp>
+        <p:nvSpPr>
+          <p:cNvPr id="22" name="paso-171"/>
+          <p:cNvSpPr/>
+          <p:nvPr/>
+        </p:nvSpPr>
+        <p:spPr>
+          <a:xfrm>
+            <a:off x="640080" y="5257800"/>
+            <a:ext cx="411480" cy="411480"/>
+          </a:xfrm>
+          <a:prstGeom prst="ellipse">
+            <a:avLst/>
+          </a:prstGeom>
+          <a:solidFill>
+            <a:schemeClr val="accent1"/>
+          </a:solidFill>
+          <a:ln/>
+        </p:spPr>
+      </p:sp>
+      <p:sp>
+        <p:nvSpPr>
+          <p:cNvPr id="23" name="paso-n-172"/>
+          <p:cNvSpPr txBox="1"/>
+          <p:nvPr/>
+        </p:nvSpPr>
+        <p:spPr>
+          <a:xfrm>
+            <a:off x="640080" y="5257800"/>
+            <a:ext cx="411480" cy="411480"/>
+          </a:xfrm>
+          <a:prstGeom prst="rect">
+            <a:avLst/>
+          </a:prstGeom>
+          <a:noFill/>
+          <a:ln/>
+        </p:spPr>
+        <p:txBody>
+          <a:bodyPr wrap="square" lIns="0" tIns="0" rIns="0" bIns="0" rtlCol="0" anchor="ctr"/>
+          <a:lstStyle/>
+          <a:p>
+            <a:pPr algn="ctr" indent="0" marL="0">
+              <a:buNone/>
+            </a:pPr>
+            <a:r>
+              <a:rPr lang="en-US" sz="1500" b="1" dirty="0">
+                <a:solidFill>
                   <a:schemeClr val="bg1"/>
                 </a:solidFill>
               </a:rPr>
-              <a:t>La clave nunca sale del QR</a:t>
-            </a:r>
-            <a:endParaRPr lang="en-US" sz="1700" dirty="0"/>
-          </a:p>
+              <a:t>1</a:t>
+            </a:r>
+            <a:endParaRPr lang="en-US" sz="1500" dirty="0"/>
+          </a:p>
+        </p:txBody>
+      </p:sp>
+      <p:sp>
+        <p:nvSpPr>
+          <p:cNvPr id="24" name="paso-texto-173"/>
+          <p:cNvSpPr txBox="1"/>
+          <p:nvPr/>
+        </p:nvSpPr>
+        <p:spPr>
+          <a:xfrm>
+            <a:off x="1188720" y="5230368"/>
+            <a:ext cx="2881274" cy="777240"/>
+          </a:xfrm>
+          <a:prstGeom prst="rect">
+            <a:avLst/>
+          </a:prstGeom>
+          <a:noFill/>
+          <a:ln/>
+        </p:spPr>
+        <p:txBody>
+          <a:bodyPr wrap="square" lIns="0" tIns="0" rIns="0" bIns="0" rtlCol="0" anchor="t"/>
+          <a:lstStyle/>
           <a:p>
             <a:pPr indent="0" marL="0">
               <a:buNone/>
@@ -4400,71 +4580,81 @@
             <a:r>
               <a:rPr lang="en-US" sz="1400" dirty="0">
                 <a:solidFill>
-                  <a:schemeClr val="accent5"/>
-                </a:solidFill>
-              </a:rPr>
-              <a:t>Va en una parte de la dirección que el navegador no envía.</a:t>
-            </a:r>
-            <a:endParaRPr lang="en-US" sz="1700" dirty="0"/>
-          </a:p>
-        </p:txBody>
-      </p:sp>
-      <p:sp>
-        <p:nvSpPr>
-          <p:cNvPr id="13" name="icono-fondo-173"/>
-          <p:cNvSpPr/>
-          <p:nvPr/>
-        </p:nvSpPr>
-        <p:spPr>
-          <a:xfrm>
-            <a:off x="6370168" y="3200400"/>
-            <a:ext cx="566928" cy="566928"/>
-          </a:xfrm>
-          <a:prstGeom prst="roundRect">
-            <a:avLst>
-              <a:gd name="adj" fmla="val 26000"/>
-            </a:avLst>
+                  <a:schemeClr val="tx1"/>
+                </a:solidFill>
+              </a:rPr>
+              <a:t>El QR lleva un identificador y una clave secreta.</a:t>
+            </a:r>
+            <a:endParaRPr lang="en-US" sz="1400" dirty="0"/>
+          </a:p>
+        </p:txBody>
+      </p:sp>
+      <p:sp>
+        <p:nvSpPr>
+          <p:cNvPr id="25" name="paso-174"/>
+          <p:cNvSpPr/>
+          <p:nvPr/>
+        </p:nvSpPr>
+        <p:spPr>
+          <a:xfrm>
+            <a:off x="4380890" y="5257800"/>
+            <a:ext cx="411480" cy="411480"/>
+          </a:xfrm>
+          <a:prstGeom prst="ellipse">
+            <a:avLst/>
           </a:prstGeom>
           <a:solidFill>
-            <a:schemeClr val="tx2"/>
+            <a:schemeClr val="accent1"/>
           </a:solidFill>
           <a:ln/>
         </p:spPr>
       </p:sp>
-      <p:pic>
-        <p:nvPicPr>
-          <p:cNvPr id="14" name="icono-LuEyeOff-174" descr="preencoded.png">    </p:cNvPr>
-          <p:cNvPicPr>
-            <a:picLocks noChangeAspect="1"/>
-          </p:cNvPicPr>
-          <p:nvPr/>
-        </p:nvPicPr>
-        <p:blipFill>
-          <a:blip r:embed="rId4"/>
-          <a:stretch>
-            <a:fillRect/>
-          </a:stretch>
-        </p:blipFill>
-        <p:spPr>
-          <a:xfrm>
-            <a:off x="6506230" y="3336463"/>
-            <a:ext cx="294803" cy="294803"/>
-          </a:xfrm>
-          <a:prstGeom prst="rect">
-            <a:avLst/>
-          </a:prstGeom>
-        </p:spPr>
-      </p:pic>
-      <p:sp>
-        <p:nvSpPr>
-          <p:cNvPr id="15" name="texto-175"/>
+      <p:sp>
+        <p:nvSpPr>
+          <p:cNvPr id="26" name="paso-n-175"/>
           <p:cNvSpPr txBox="1"/>
           <p:nvPr/>
         </p:nvSpPr>
         <p:spPr>
           <a:xfrm>
-            <a:off x="7193128" y="3172968"/>
-            <a:ext cx="4358488" cy="1097280"/>
+            <a:off x="4380890" y="5257800"/>
+            <a:ext cx="411480" cy="411480"/>
+          </a:xfrm>
+          <a:prstGeom prst="rect">
+            <a:avLst/>
+          </a:prstGeom>
+          <a:noFill/>
+          <a:ln/>
+        </p:spPr>
+        <p:txBody>
+          <a:bodyPr wrap="square" lIns="0" tIns="0" rIns="0" bIns="0" rtlCol="0" anchor="ctr"/>
+          <a:lstStyle/>
+          <a:p>
+            <a:pPr algn="ctr" indent="0" marL="0">
+              <a:buNone/>
+            </a:pPr>
+            <a:r>
+              <a:rPr lang="en-US" sz="1500" b="1" dirty="0">
+                <a:solidFill>
+                  <a:schemeClr val="bg1"/>
+                </a:solidFill>
+              </a:rPr>
+              <a:t>2</a:t>
+            </a:r>
+            <a:endParaRPr lang="en-US" sz="1500" dirty="0"/>
+          </a:p>
+        </p:txBody>
+      </p:sp>
+      <p:sp>
+        <p:nvSpPr>
+          <p:cNvPr id="27" name="paso-texto-176"/>
+          <p:cNvSpPr txBox="1"/>
+          <p:nvPr/>
+        </p:nvSpPr>
+        <p:spPr>
+          <a:xfrm>
+            <a:off x="4929530" y="5230368"/>
+            <a:ext cx="2881274" cy="777240"/>
           </a:xfrm>
           <a:prstGeom prst="rect">
             <a:avLst/>
@@ -4477,21 +4667,96 @@
           <a:lstStyle/>
           <a:p>
             <a:pPr indent="0" marL="0">
-              <a:spcAft>
-                <a:spcPts val="300"/>
-              </a:spcAft>
-              <a:buNone/>
-            </a:pPr>
-            <a:r>
-              <a:rPr lang="en-US" sz="1700" b="1" dirty="0">
+              <a:buNone/>
+            </a:pPr>
+            <a:r>
+              <a:rPr lang="en-US" sz="1400" dirty="0">
+                <a:solidFill>
+                  <a:schemeClr val="tx1"/>
+                </a:solidFill>
+              </a:rPr>
+              <a:t>El servidor presenta a los dos dispositivos.</a:t>
+            </a:r>
+            <a:endParaRPr lang="en-US" sz="1400" dirty="0"/>
+          </a:p>
+        </p:txBody>
+      </p:sp>
+      <p:sp>
+        <p:nvSpPr>
+          <p:cNvPr id="28" name="paso-177"/>
+          <p:cNvSpPr/>
+          <p:nvPr/>
+        </p:nvSpPr>
+        <p:spPr>
+          <a:xfrm>
+            <a:off x="8121701" y="5257800"/>
+            <a:ext cx="411480" cy="411480"/>
+          </a:xfrm>
+          <a:prstGeom prst="ellipse">
+            <a:avLst/>
+          </a:prstGeom>
+          <a:solidFill>
+            <a:schemeClr val="accent1"/>
+          </a:solidFill>
+          <a:ln/>
+        </p:spPr>
+      </p:sp>
+      <p:sp>
+        <p:nvSpPr>
+          <p:cNvPr id="29" name="paso-n-178"/>
+          <p:cNvSpPr txBox="1"/>
+          <p:nvPr/>
+        </p:nvSpPr>
+        <p:spPr>
+          <a:xfrm>
+            <a:off x="8121701" y="5257800"/>
+            <a:ext cx="411480" cy="411480"/>
+          </a:xfrm>
+          <a:prstGeom prst="rect">
+            <a:avLst/>
+          </a:prstGeom>
+          <a:noFill/>
+          <a:ln/>
+        </p:spPr>
+        <p:txBody>
+          <a:bodyPr wrap="square" lIns="0" tIns="0" rIns="0" bIns="0" rtlCol="0" anchor="ctr"/>
+          <a:lstStyle/>
+          <a:p>
+            <a:pPr algn="ctr" indent="0" marL="0">
+              <a:buNone/>
+            </a:pPr>
+            <a:r>
+              <a:rPr lang="en-US" sz="1500" b="1" dirty="0">
                 <a:solidFill>
                   <a:schemeClr val="bg1"/>
                 </a:solidFill>
               </a:rPr>
-              <a:t>Sin cuentas ni datos</a:t>
-            </a:r>
-            <a:endParaRPr lang="en-US" sz="1700" dirty="0"/>
-          </a:p>
+              <a:t>3</a:t>
+            </a:r>
+            <a:endParaRPr lang="en-US" sz="1500" dirty="0"/>
+          </a:p>
+        </p:txBody>
+      </p:sp>
+      <p:sp>
+        <p:nvSpPr>
+          <p:cNvPr id="30" name="paso-texto-179"/>
+          <p:cNvSpPr txBox="1"/>
+          <p:nvPr/>
+        </p:nvSpPr>
+        <p:spPr>
+          <a:xfrm>
+            <a:off x="8670341" y="5230368"/>
+            <a:ext cx="2881274" cy="777240"/>
+          </a:xfrm>
+          <a:prstGeom prst="rect">
+            <a:avLst/>
+          </a:prstGeom>
+          <a:noFill/>
+          <a:ln/>
+        </p:spPr>
+        <p:txBody>
+          <a:bodyPr wrap="square" lIns="0" tIns="0" rIns="0" bIns="0" rtlCol="0" anchor="t"/>
+          <a:lstStyle/>
           <a:p>
             <a:pPr indent="0" marL="0">
               <a:buNone/>
@@ -4499,210 +4764,12 @@
             <a:r>
               <a:rPr lang="en-US" sz="1400" dirty="0">
                 <a:solidFill>
-                  <a:schemeClr val="accent5"/>
-                </a:solidFill>
-              </a:rPr>
-              <a:t>No hay registro, anuncios, analítica ni base de datos.</a:t>
-            </a:r>
-            <a:endParaRPr lang="en-US" sz="1700" dirty="0"/>
-          </a:p>
-        </p:txBody>
-      </p:sp>
-      <p:sp>
-        <p:nvSpPr>
-          <p:cNvPr id="16" name="icono-fondo-176"/>
-          <p:cNvSpPr/>
-          <p:nvPr/>
-        </p:nvSpPr>
-        <p:spPr>
-          <a:xfrm>
-            <a:off x="640080" y="4572000"/>
-            <a:ext cx="566928" cy="566928"/>
-          </a:xfrm>
-          <a:prstGeom prst="roundRect">
-            <a:avLst>
-              <a:gd name="adj" fmla="val 26000"/>
-            </a:avLst>
-          </a:prstGeom>
-          <a:solidFill>
-            <a:schemeClr val="tx2"/>
-          </a:solidFill>
-          <a:ln/>
-        </p:spPr>
-      </p:sp>
-      <p:pic>
-        <p:nvPicPr>
-          <p:cNvPr id="17" name="icono-LuRefreshCw-177" descr="preencoded.png">    </p:cNvPr>
-          <p:cNvPicPr>
-            <a:picLocks noChangeAspect="1"/>
-          </p:cNvPicPr>
-          <p:nvPr/>
-        </p:nvPicPr>
-        <p:blipFill>
-          <a:blip r:embed="rId5"/>
-          <a:stretch>
-            <a:fillRect/>
-          </a:stretch>
-        </p:blipFill>
-        <p:spPr>
-          <a:xfrm>
-            <a:off x="776143" y="4708063"/>
-            <a:ext cx="294803" cy="294803"/>
-          </a:xfrm>
-          <a:prstGeom prst="rect">
-            <a:avLst/>
-          </a:prstGeom>
-        </p:spPr>
-      </p:pic>
-      <p:sp>
-        <p:nvSpPr>
-          <p:cNvPr id="18" name="texto-178"/>
-          <p:cNvSpPr txBox="1"/>
-          <p:nvPr/>
-        </p:nvSpPr>
-        <p:spPr>
-          <a:xfrm>
-            <a:off x="1463040" y="4544568"/>
-            <a:ext cx="4358488" cy="1097280"/>
-          </a:xfrm>
-          <a:prstGeom prst="rect">
-            <a:avLst/>
-          </a:prstGeom>
-          <a:noFill/>
-          <a:ln/>
-        </p:spPr>
-        <p:txBody>
-          <a:bodyPr wrap="square" lIns="0" tIns="0" rIns="0" bIns="0" rtlCol="0" anchor="t"/>
-          <a:lstStyle/>
-          <a:p>
-            <a:pPr indent="0" marL="0">
-              <a:spcAft>
-                <a:spcPts val="300"/>
-              </a:spcAft>
-              <a:buNone/>
-            </a:pPr>
-            <a:r>
-              <a:rPr lang="en-US" sz="1700" b="1" dirty="0">
-                <a:solidFill>
-                  <a:schemeClr val="bg1"/>
-                </a:solidFill>
-              </a:rPr>
-              <a:t>Código nuevo en cada sesión</a:t>
-            </a:r>
-            <a:endParaRPr lang="en-US" sz="1700" dirty="0"/>
-          </a:p>
-          <a:p>
-            <a:pPr indent="0" marL="0">
-              <a:buNone/>
-            </a:pPr>
-            <a:r>
-              <a:rPr lang="en-US" sz="1400" dirty="0">
-                <a:solidFill>
-                  <a:schemeClr val="accent5"/>
-                </a:solidFill>
-              </a:rPr>
-              <a:t>El QR cambia en cada sesión y puedes renovarlo cuando quieras.</a:t>
-            </a:r>
-            <a:endParaRPr lang="en-US" sz="1700" dirty="0"/>
-          </a:p>
-        </p:txBody>
-      </p:sp>
-      <p:sp>
-        <p:nvSpPr>
-          <p:cNvPr id="19" name="icono-fondo-179"/>
-          <p:cNvSpPr/>
-          <p:nvPr/>
-        </p:nvSpPr>
-        <p:spPr>
-          <a:xfrm>
-            <a:off x="6370168" y="4572000"/>
-            <a:ext cx="566928" cy="566928"/>
-          </a:xfrm>
-          <a:prstGeom prst="roundRect">
-            <a:avLst>
-              <a:gd name="adj" fmla="val 26000"/>
-            </a:avLst>
-          </a:prstGeom>
-          <a:solidFill>
-            <a:schemeClr val="tx2"/>
-          </a:solidFill>
-          <a:ln/>
-        </p:spPr>
-      </p:sp>
-      <p:pic>
-        <p:nvPicPr>
-          <p:cNvPr id="20" name="icono-LuGithub-180" descr="preencoded.png">    </p:cNvPr>
-          <p:cNvPicPr>
-            <a:picLocks noChangeAspect="1"/>
-          </p:cNvPicPr>
-          <p:nvPr/>
-        </p:nvPicPr>
-        <p:blipFill>
-          <a:blip r:embed="rId6"/>
-          <a:stretch>
-            <a:fillRect/>
-          </a:stretch>
-        </p:blipFill>
-        <p:spPr>
-          <a:xfrm>
-            <a:off x="6506230" y="4708063"/>
-            <a:ext cx="294803" cy="294803"/>
-          </a:xfrm>
-          <a:prstGeom prst="rect">
-            <a:avLst/>
-          </a:prstGeom>
-        </p:spPr>
-      </p:pic>
-      <p:sp>
-        <p:nvSpPr>
-          <p:cNvPr id="21" name="texto-181"/>
-          <p:cNvSpPr txBox="1"/>
-          <p:nvPr/>
-        </p:nvSpPr>
-        <p:spPr>
-          <a:xfrm>
-            <a:off x="7193128" y="4544568"/>
-            <a:ext cx="4358488" cy="1097280"/>
-          </a:xfrm>
-          <a:prstGeom prst="rect">
-            <a:avLst/>
-          </a:prstGeom>
-          <a:noFill/>
-          <a:ln/>
-        </p:spPr>
-        <p:txBody>
-          <a:bodyPr wrap="square" lIns="0" tIns="0" rIns="0" bIns="0" rtlCol="0" anchor="t"/>
-          <a:lstStyle/>
-          <a:p>
-            <a:pPr indent="0" marL="0">
-              <a:spcAft>
-                <a:spcPts val="300"/>
-              </a:spcAft>
-              <a:buNone/>
-            </a:pPr>
-            <a:r>
-              <a:rPr lang="en-US" sz="1700" b="1" dirty="0">
-                <a:solidFill>
-                  <a:schemeClr val="bg1"/>
-                </a:solidFill>
-              </a:rPr>
-              <a:t>Código público</a:t>
-            </a:r>
-            <a:endParaRPr lang="en-US" sz="1700" dirty="0"/>
-          </a:p>
-          <a:p>
-            <a:pPr indent="0" marL="0">
-              <a:buNone/>
-            </a:pPr>
-            <a:r>
-              <a:rPr lang="en-US" sz="1400" dirty="0">
-                <a:solidFill>
-                  <a:schemeClr val="accent5"/>
-                </a:solidFill>
-              </a:rPr>
-              <a:t>Todo el código está publicado en GitHub para revisarlo.</a:t>
-            </a:r>
-            <a:endParaRPr lang="en-US" sz="1700" dirty="0"/>
+                  <a:schemeClr val="tx1"/>
+                </a:solidFill>
+              </a:rPr>
+              <a:t>Los comandos viajan directo y cifrados.</a:t>
+            </a:r>
+            <a:endParaRPr lang="en-US" sz="1400" dirty="0"/>
           </a:p>
         </p:txBody>
       </p:sp>
@@ -4736,7 +4803,7 @@
             <a:lvl1pPr>
               <a:defRPr sz="1000">
                 <a:solidFill>
-                  <a:schemeClr val="accent5"/>
+                  <a:schemeClr val="accent6"/>
                 </a:solidFill>
               </a:defRPr>
             </a:lvl1pPr>
@@ -4808,7 +4875,7 @@
                   <a:schemeClr val="accent1"/>
                 </a:solidFill>
               </a:rPr>
-              <a:t>CALIDAD</a:t>
+              <a:t>SEGURIDAD Y PRIVACIDAD</a:t>
             </a:r>
             <a:endParaRPr lang="en-US" sz="1200" dirty="0"/>
           </a:p>
@@ -4843,10 +4910,10 @@
             <a:r>
               <a:rPr lang="en-US" sz="3600" b="1" dirty="0">
                 <a:solidFill>
-                  <a:schemeClr val="tx1"/>
-                </a:solidFill>
-              </a:rPr>
-              <a:t>Probado de principio a fin</a:t>
+                  <a:schemeClr val="bg1"/>
+                </a:solidFill>
+              </a:rPr>
+              <a:t>Tus presentaciones siguen siendo tuyas</a:t>
             </a:r>
             <a:endParaRPr lang="en-US" sz="3600" dirty="0"/>
           </a:p>
@@ -4854,397 +4921,29 @@
       </p:sp>
       <p:sp>
         <p:nvSpPr>
-          <p:cNvPr id="4" name="cifra-182"/>
-          <p:cNvSpPr txBox="1"/>
+          <p:cNvPr id="4" name="icono-fondo-180"/>
+          <p:cNvSpPr/>
           <p:nvPr/>
         </p:nvSpPr>
         <p:spPr>
           <a:xfrm>
             <a:off x="640080" y="1828800"/>
-            <a:ext cx="2522144" cy="914400"/>
-          </a:xfrm>
-          <a:prstGeom prst="rect">
-            <a:avLst/>
-          </a:prstGeom>
-          <a:noFill/>
-          <a:ln/>
-        </p:spPr>
-        <p:txBody>
-          <a:bodyPr wrap="square" lIns="0" tIns="0" rIns="0" bIns="0" rtlCol="0" anchor="b"/>
-          <a:lstStyle/>
-          <a:p>
-            <a:pPr indent="0" marL="0">
-              <a:buNone/>
-            </a:pPr>
-            <a:r>
-              <a:rPr lang="en-US" sz="5400" b="1" dirty="0">
-                <a:solidFill>
-                  <a:schemeClr val="accent1"/>
-                </a:solidFill>
-                <a:latin typeface="Arial" pitchFamily="34" charset="0"/>
-                <a:ea typeface="Arial" pitchFamily="34" charset="-122"/>
-                <a:cs typeface="Arial" pitchFamily="34" charset="-120"/>
-              </a:rPr>
-              <a:t>42/42</a:t>
-            </a:r>
-            <a:endParaRPr lang="en-US" sz="5400" dirty="0"/>
-          </a:p>
-        </p:txBody>
-      </p:sp>
-      <p:sp>
-        <p:nvSpPr>
-          <p:cNvPr id="5" name="texto-183"/>
-          <p:cNvSpPr txBox="1"/>
-          <p:nvPr/>
-        </p:nvSpPr>
-        <p:spPr>
-          <a:xfrm>
-            <a:off x="640080" y="2880360"/>
-            <a:ext cx="2339264" cy="1188720"/>
-          </a:xfrm>
-          <a:prstGeom prst="rect">
-            <a:avLst/>
-          </a:prstGeom>
-          <a:noFill/>
-          <a:ln/>
-        </p:spPr>
-        <p:txBody>
-          <a:bodyPr wrap="square" lIns="0" tIns="0" rIns="0" bIns="0" rtlCol="0" anchor="t"/>
-          <a:lstStyle/>
-          <a:p>
-            <a:pPr indent="0" marL="0">
-              <a:spcAft>
-                <a:spcPts val="300"/>
-              </a:spcAft>
-              <a:buNone/>
-            </a:pPr>
-            <a:r>
-              <a:rPr lang="en-US" sz="1700" b="1" dirty="0">
-                <a:solidFill>
-                  <a:schemeClr val="tx1"/>
-                </a:solidFill>
-              </a:rPr>
-              <a:t>Pruebas automáticas</a:t>
-            </a:r>
-            <a:endParaRPr lang="en-US" sz="1700" dirty="0"/>
-          </a:p>
-          <a:p>
-            <a:pPr indent="0" marL="0">
-              <a:buNone/>
-            </a:pPr>
-            <a:r>
-              <a:rPr lang="en-US" sz="1400" dirty="0">
-                <a:solidFill>
-                  <a:schemeClr val="accent6"/>
-                </a:solidFill>
-              </a:rPr>
-              <a:t>Extensión y celular conectados de verdad.</a:t>
-            </a:r>
-            <a:endParaRPr lang="en-US" sz="1700" dirty="0"/>
-          </a:p>
-        </p:txBody>
-      </p:sp>
-      <p:sp>
-        <p:nvSpPr>
-          <p:cNvPr id="6" name="cifra-184"/>
-          <p:cNvSpPr txBox="1"/>
-          <p:nvPr/>
-        </p:nvSpPr>
-        <p:spPr>
-          <a:xfrm>
-            <a:off x="3436544" y="1828800"/>
-            <a:ext cx="2522144" cy="914400"/>
-          </a:xfrm>
-          <a:prstGeom prst="rect">
-            <a:avLst/>
-          </a:prstGeom>
-          <a:noFill/>
-          <a:ln/>
-        </p:spPr>
-        <p:txBody>
-          <a:bodyPr wrap="square" lIns="0" tIns="0" rIns="0" bIns="0" rtlCol="0" anchor="b"/>
-          <a:lstStyle/>
-          <a:p>
-            <a:pPr indent="0" marL="0">
-              <a:buNone/>
-            </a:pPr>
-            <a:r>
-              <a:rPr lang="en-US" sz="5400" b="1" dirty="0">
-                <a:solidFill>
-                  <a:schemeClr val="accent1"/>
-                </a:solidFill>
-                <a:latin typeface="Arial" pitchFamily="34" charset="0"/>
-                <a:ea typeface="Arial" pitchFamily="34" charset="-122"/>
-                <a:cs typeface="Arial" pitchFamily="34" charset="-120"/>
-              </a:rPr>
-              <a:t>28/28</a:t>
-            </a:r>
-            <a:endParaRPr lang="en-US" sz="5400" dirty="0"/>
-          </a:p>
-        </p:txBody>
-      </p:sp>
-      <p:sp>
-        <p:nvSpPr>
-          <p:cNvPr id="7" name="texto-185"/>
-          <p:cNvSpPr txBox="1"/>
-          <p:nvPr/>
-        </p:nvSpPr>
-        <p:spPr>
-          <a:xfrm>
-            <a:off x="3436544" y="2880360"/>
-            <a:ext cx="2339264" cy="1188720"/>
-          </a:xfrm>
-          <a:prstGeom prst="rect">
-            <a:avLst/>
-          </a:prstGeom>
-          <a:noFill/>
-          <a:ln/>
-        </p:spPr>
-        <p:txBody>
-          <a:bodyPr wrap="square" lIns="0" tIns="0" rIns="0" bIns="0" rtlCol="0" anchor="t"/>
-          <a:lstStyle/>
-          <a:p>
-            <a:pPr indent="0" marL="0">
-              <a:spcAft>
-                <a:spcPts val="300"/>
-              </a:spcAft>
-              <a:buNone/>
-            </a:pPr>
-            <a:r>
-              <a:rPr lang="en-US" sz="1700" b="1" dirty="0">
-                <a:solidFill>
-                  <a:schemeClr val="tx1"/>
-                </a:solidFill>
-              </a:rPr>
-              <a:t>Pantallas y vistas</a:t>
-            </a:r>
-            <a:endParaRPr lang="en-US" sz="1700" dirty="0"/>
-          </a:p>
-          <a:p>
-            <a:pPr indent="0" marL="0">
-              <a:buNone/>
-            </a:pPr>
-            <a:r>
-              <a:rPr lang="en-US" sz="1400" dirty="0">
-                <a:solidFill>
-                  <a:schemeClr val="accent6"/>
-                </a:solidFill>
-              </a:rPr>
-              <a:t>Del celular más pequeño a la tablet, sin errores.</a:t>
-            </a:r>
-            <a:endParaRPr lang="en-US" sz="1700" dirty="0"/>
-          </a:p>
-        </p:txBody>
-      </p:sp>
-      <p:sp>
-        <p:nvSpPr>
-          <p:cNvPr id="8" name="cifra-186"/>
-          <p:cNvSpPr txBox="1"/>
-          <p:nvPr/>
-        </p:nvSpPr>
-        <p:spPr>
-          <a:xfrm>
-            <a:off x="6233008" y="1828800"/>
-            <a:ext cx="2522144" cy="914400"/>
-          </a:xfrm>
-          <a:prstGeom prst="rect">
-            <a:avLst/>
-          </a:prstGeom>
-          <a:noFill/>
-          <a:ln/>
-        </p:spPr>
-        <p:txBody>
-          <a:bodyPr wrap="square" lIns="0" tIns="0" rIns="0" bIns="0" rtlCol="0" anchor="b"/>
-          <a:lstStyle/>
-          <a:p>
-            <a:pPr indent="0" marL="0">
-              <a:buNone/>
-            </a:pPr>
-            <a:r>
-              <a:rPr lang="en-US" sz="5400" b="1" dirty="0">
-                <a:solidFill>
-                  <a:schemeClr val="accent1"/>
-                </a:solidFill>
-                <a:latin typeface="Arial" pitchFamily="34" charset="0"/>
-                <a:ea typeface="Arial" pitchFamily="34" charset="-122"/>
-                <a:cs typeface="Arial" pitchFamily="34" charset="-120"/>
-              </a:rPr>
-              <a:t>2,7 s</a:t>
-            </a:r>
-            <a:endParaRPr lang="en-US" sz="5400" dirty="0"/>
-          </a:p>
-        </p:txBody>
-      </p:sp>
-      <p:sp>
-        <p:nvSpPr>
-          <p:cNvPr id="9" name="texto-187"/>
-          <p:cNvSpPr txBox="1"/>
-          <p:nvPr/>
-        </p:nvSpPr>
-        <p:spPr>
-          <a:xfrm>
-            <a:off x="6233008" y="2880360"/>
-            <a:ext cx="2339264" cy="1188720"/>
-          </a:xfrm>
-          <a:prstGeom prst="rect">
-            <a:avLst/>
-          </a:prstGeom>
-          <a:noFill/>
-          <a:ln/>
-        </p:spPr>
-        <p:txBody>
-          <a:bodyPr wrap="square" lIns="0" tIns="0" rIns="0" bIns="0" rtlCol="0" anchor="t"/>
-          <a:lstStyle/>
-          <a:p>
-            <a:pPr indent="0" marL="0">
-              <a:spcAft>
-                <a:spcPts val="300"/>
-              </a:spcAft>
-              <a:buNone/>
-            </a:pPr>
-            <a:r>
-              <a:rPr lang="en-US" sz="1700" b="1" dirty="0">
-                <a:solidFill>
-                  <a:schemeClr val="tx1"/>
-                </a:solidFill>
-              </a:rPr>
-              <a:t>Reconexión automática</a:t>
-            </a:r>
-            <a:endParaRPr lang="en-US" sz="1700" dirty="0"/>
-          </a:p>
-          <a:p>
-            <a:pPr indent="0" marL="0">
-              <a:buNone/>
-            </a:pPr>
-            <a:r>
-              <a:rPr lang="en-US" sz="1400" dirty="0">
-                <a:solidFill>
-                  <a:schemeClr val="accent6"/>
-                </a:solidFill>
-              </a:rPr>
-              <a:t>Si se corta el servidor, sin soltar al celular.</a:t>
-            </a:r>
-            <a:endParaRPr lang="en-US" sz="1700" dirty="0"/>
-          </a:p>
-        </p:txBody>
-      </p:sp>
-      <p:sp>
-        <p:nvSpPr>
-          <p:cNvPr id="10" name="cifra-188"/>
-          <p:cNvSpPr txBox="1"/>
-          <p:nvPr/>
-        </p:nvSpPr>
-        <p:spPr>
-          <a:xfrm>
-            <a:off x="9029471" y="1828800"/>
-            <a:ext cx="2522144" cy="914400"/>
-          </a:xfrm>
-          <a:prstGeom prst="rect">
-            <a:avLst/>
-          </a:prstGeom>
-          <a:noFill/>
-          <a:ln/>
-        </p:spPr>
-        <p:txBody>
-          <a:bodyPr wrap="square" lIns="0" tIns="0" rIns="0" bIns="0" rtlCol="0" anchor="b"/>
-          <a:lstStyle/>
-          <a:p>
-            <a:pPr indent="0" marL="0">
-              <a:buNone/>
-            </a:pPr>
-            <a:r>
-              <a:rPr lang="en-US" sz="5400" b="1" dirty="0">
-                <a:solidFill>
-                  <a:schemeClr val="accent1"/>
-                </a:solidFill>
-                <a:latin typeface="Arial" pitchFamily="34" charset="0"/>
-                <a:ea typeface="Arial" pitchFamily="34" charset="-122"/>
-                <a:cs typeface="Arial" pitchFamily="34" charset="-120"/>
-              </a:rPr>
-              <a:t>80 KB</a:t>
-            </a:r>
-            <a:endParaRPr lang="en-US" sz="5400" dirty="0"/>
-          </a:p>
-        </p:txBody>
-      </p:sp>
-      <p:sp>
-        <p:nvSpPr>
-          <p:cNvPr id="11" name="texto-189"/>
-          <p:cNvSpPr txBox="1"/>
-          <p:nvPr/>
-        </p:nvSpPr>
-        <p:spPr>
-          <a:xfrm>
-            <a:off x="9029471" y="2880360"/>
-            <a:ext cx="2339264" cy="1188720"/>
-          </a:xfrm>
-          <a:prstGeom prst="rect">
-            <a:avLst/>
-          </a:prstGeom>
-          <a:noFill/>
-          <a:ln/>
-        </p:spPr>
-        <p:txBody>
-          <a:bodyPr wrap="square" lIns="0" tIns="0" rIns="0" bIns="0" rtlCol="0" anchor="t"/>
-          <a:lstStyle/>
-          <a:p>
-            <a:pPr indent="0" marL="0">
-              <a:spcAft>
-                <a:spcPts val="300"/>
-              </a:spcAft>
-              <a:buNone/>
-            </a:pPr>
-            <a:r>
-              <a:rPr lang="en-US" sz="1700" b="1" dirty="0">
-                <a:solidFill>
-                  <a:schemeClr val="tx1"/>
-                </a:solidFill>
-              </a:rPr>
-              <a:t>Extensión liviana</a:t>
-            </a:r>
-            <a:endParaRPr lang="en-US" sz="1700" dirty="0"/>
-          </a:p>
-          <a:p>
-            <a:pPr indent="0" marL="0">
-              <a:buNone/>
-            </a:pPr>
-            <a:r>
-              <a:rPr lang="en-US" sz="1400" dirty="0">
-                <a:solidFill>
-                  <a:schemeClr val="accent6"/>
-                </a:solidFill>
-              </a:rPr>
-              <a:t>Todo el código incluido, sin descargas externas.</a:t>
-            </a:r>
-            <a:endParaRPr lang="en-US" sz="1700" dirty="0"/>
-          </a:p>
-        </p:txBody>
-      </p:sp>
-      <p:sp>
-        <p:nvSpPr>
-          <p:cNvPr id="12" name="tarjeta-190"/>
-          <p:cNvSpPr/>
-          <p:nvPr/>
-        </p:nvSpPr>
-        <p:spPr>
-          <a:xfrm>
-            <a:off x="640080" y="4343400"/>
-            <a:ext cx="10911535" cy="1325880"/>
+            <a:ext cx="566928" cy="566928"/>
           </a:xfrm>
           <a:prstGeom prst="roundRect">
             <a:avLst>
-              <a:gd name="adj" fmla="val 11034"/>
+              <a:gd name="adj" fmla="val 26000"/>
             </a:avLst>
           </a:prstGeom>
           <a:solidFill>
-            <a:schemeClr val="bg2"/>
+            <a:schemeClr val="tx2"/>
           </a:solidFill>
           <a:ln/>
         </p:spPr>
       </p:sp>
       <p:pic>
         <p:nvPicPr>
-          <p:cNvPr id="13" name="check-191" descr="preencoded.png">    </p:cNvPr>
+          <p:cNvPr id="5" name="icono-LuLock-181" descr="preencoded.png">    </p:cNvPr>
           <p:cNvPicPr>
             <a:picLocks noChangeAspect="1"/>
           </p:cNvPicPr>
@@ -5258,8 +4957,8 @@
         </p:blipFill>
         <p:spPr>
           <a:xfrm>
-            <a:off x="960120" y="4617720"/>
-            <a:ext cx="329184" cy="329184"/>
+            <a:off x="776143" y="1964863"/>
+            <a:ext cx="294803" cy="294803"/>
           </a:xfrm>
           <a:prstGeom prst="rect">
             <a:avLst/>
@@ -5268,14 +4967,14 @@
       </p:pic>
       <p:sp>
         <p:nvSpPr>
-          <p:cNvPr id="14" name="texto-192"/>
+          <p:cNvPr id="6" name="texto-182"/>
           <p:cNvSpPr txBox="1"/>
           <p:nvPr/>
         </p:nvSpPr>
         <p:spPr>
           <a:xfrm>
-            <a:off x="1463040" y="4553712"/>
-            <a:ext cx="2692298" cy="1051560"/>
+            <a:off x="1463040" y="1801368"/>
+            <a:ext cx="4358488" cy="1097280"/>
           </a:xfrm>
           <a:prstGeom prst="rect">
             <a:avLst/>
@@ -5294,34 +4993,56 @@
               <a:buNone/>
             </a:pPr>
             <a:r>
-              <a:rPr lang="en-US" sz="1500" b="1" dirty="0">
-                <a:solidFill>
-                  <a:schemeClr val="tx1"/>
-                </a:solidFill>
-              </a:rPr>
-              <a:t>Google Slides y reveal.js reales</a:t>
-            </a:r>
-            <a:endParaRPr lang="en-US" sz="1500" dirty="0"/>
-          </a:p>
-          <a:p>
-            <a:pPr indent="0" marL="0">
-              <a:buNone/>
-            </a:pPr>
-            <a:r>
-              <a:rPr lang="en-US" sz="1300" dirty="0">
-                <a:solidFill>
-                  <a:schemeClr val="accent6"/>
-                </a:solidFill>
-              </a:rPr>
-              <a:t>Iniciar, avanzar, retroceder y salir.</a:t>
-            </a:r>
-            <a:endParaRPr lang="en-US" sz="1500" dirty="0"/>
-          </a:p>
-        </p:txBody>
+              <a:rPr lang="en-US" sz="1700" b="1" dirty="0">
+                <a:solidFill>
+                  <a:schemeClr val="bg1"/>
+                </a:solidFill>
+              </a:rPr>
+              <a:t>Cifrado de extremo a extremo</a:t>
+            </a:r>
+            <a:endParaRPr lang="en-US" sz="1700" dirty="0"/>
+          </a:p>
+          <a:p>
+            <a:pPr indent="0" marL="0">
+              <a:buNone/>
+            </a:pPr>
+            <a:r>
+              <a:rPr lang="en-US" sz="1400" dirty="0">
+                <a:solidFill>
+                  <a:schemeClr val="accent5"/>
+                </a:solidFill>
+              </a:rPr>
+              <a:t>Los comandos viajan cifrados directamente entre tus dispositivos.</a:t>
+            </a:r>
+            <a:endParaRPr lang="en-US" sz="1700" dirty="0"/>
+          </a:p>
+        </p:txBody>
+      </p:sp>
+      <p:sp>
+        <p:nvSpPr>
+          <p:cNvPr id="7" name="icono-fondo-183"/>
+          <p:cNvSpPr/>
+          <p:nvPr/>
+        </p:nvSpPr>
+        <p:spPr>
+          <a:xfrm>
+            <a:off x="6370168" y="1828800"/>
+            <a:ext cx="566928" cy="566928"/>
+          </a:xfrm>
+          <a:prstGeom prst="roundRect">
+            <a:avLst>
+              <a:gd name="adj" fmla="val 26000"/>
+            </a:avLst>
+          </a:prstGeom>
+          <a:solidFill>
+            <a:schemeClr val="tx2"/>
+          </a:solidFill>
+          <a:ln/>
+        </p:spPr>
       </p:sp>
       <p:pic>
         <p:nvPicPr>
-          <p:cNvPr id="15" name="check-193" descr="preencoded.png">    </p:cNvPr>
+          <p:cNvPr id="8" name="icono-LuMousePointerClick-184" descr="preencoded.png">    </p:cNvPr>
           <p:cNvPicPr>
             <a:picLocks noChangeAspect="1"/>
           </p:cNvPicPr>
@@ -5335,8 +5056,8 @@
         </p:blipFill>
         <p:spPr>
           <a:xfrm>
-            <a:off x="4475378" y="4617720"/>
-            <a:ext cx="329184" cy="329184"/>
+            <a:off x="6506230" y="1964863"/>
+            <a:ext cx="294803" cy="294803"/>
           </a:xfrm>
           <a:prstGeom prst="rect">
             <a:avLst/>
@@ -5345,14 +5066,14 @@
       </p:pic>
       <p:sp>
         <p:nvSpPr>
-          <p:cNvPr id="16" name="texto-194"/>
+          <p:cNvPr id="9" name="texto-185"/>
           <p:cNvSpPr txBox="1"/>
           <p:nvPr/>
         </p:nvSpPr>
         <p:spPr>
           <a:xfrm>
-            <a:off x="4978298" y="4553712"/>
-            <a:ext cx="2692298" cy="1051560"/>
+            <a:off x="7193128" y="1801368"/>
+            <a:ext cx="4358488" cy="1097280"/>
           </a:xfrm>
           <a:prstGeom prst="rect">
             <a:avLst/>
@@ -5371,34 +5092,56 @@
               <a:buNone/>
             </a:pPr>
             <a:r>
-              <a:rPr lang="en-US" sz="1500" b="1" dirty="0">
-                <a:solidFill>
-                  <a:schemeClr val="tx1"/>
-                </a:solidFill>
-              </a:rPr>
-              <a:t>Redes de empresa</a:t>
-            </a:r>
-            <a:endParaRPr lang="en-US" sz="1500" dirty="0"/>
-          </a:p>
-          <a:p>
-            <a:pPr indent="0" marL="0">
-              <a:buNone/>
-            </a:pPr>
-            <a:r>
-              <a:rPr lang="en-US" sz="1300" dirty="0">
-                <a:solidFill>
-                  <a:schemeClr val="accent6"/>
-                </a:solidFill>
-              </a:rPr>
-              <a:t>Conecta por Cloudflare incluso solo con el puerto 443.</a:t>
-            </a:r>
-            <a:endParaRPr lang="en-US" sz="1500" dirty="0"/>
-          </a:p>
-        </p:txBody>
+              <a:rPr lang="en-US" sz="1700" b="1" dirty="0">
+                <a:solidFill>
+                  <a:schemeClr val="bg1"/>
+                </a:solidFill>
+              </a:rPr>
+              <a:t>Solo la pestaña que eliges</a:t>
+            </a:r>
+            <a:endParaRPr lang="en-US" sz="1700" dirty="0"/>
+          </a:p>
+          <a:p>
+            <a:pPr indent="0" marL="0">
+              <a:buNone/>
+            </a:pPr>
+            <a:r>
+              <a:rPr lang="en-US" sz="1400" dirty="0">
+                <a:solidFill>
+                  <a:schemeClr val="accent5"/>
+                </a:solidFill>
+              </a:rPr>
+              <a:t>Actúa únicamente donde pulsas su ícono; no pide acceso a todos tus sitios.</a:t>
+            </a:r>
+            <a:endParaRPr lang="en-US" sz="1700" dirty="0"/>
+          </a:p>
+        </p:txBody>
+      </p:sp>
+      <p:sp>
+        <p:nvSpPr>
+          <p:cNvPr id="10" name="icono-fondo-186"/>
+          <p:cNvSpPr/>
+          <p:nvPr/>
+        </p:nvSpPr>
+        <p:spPr>
+          <a:xfrm>
+            <a:off x="640080" y="3200400"/>
+            <a:ext cx="566928" cy="566928"/>
+          </a:xfrm>
+          <a:prstGeom prst="roundRect">
+            <a:avLst>
+              <a:gd name="adj" fmla="val 26000"/>
+            </a:avLst>
+          </a:prstGeom>
+          <a:solidFill>
+            <a:schemeClr val="tx2"/>
+          </a:solidFill>
+          <a:ln/>
+        </p:spPr>
       </p:sp>
       <p:pic>
         <p:nvPicPr>
-          <p:cNvPr id="17" name="check-195" descr="preencoded.png">    </p:cNvPr>
+          <p:cNvPr id="11" name="icono-LuKeyRound-187" descr="preencoded.png">    </p:cNvPr>
           <p:cNvPicPr>
             <a:picLocks noChangeAspect="1"/>
           </p:cNvPicPr>
@@ -5412,8 +5155,8 @@
         </p:blipFill>
         <p:spPr>
           <a:xfrm>
-            <a:off x="7990637" y="4617720"/>
-            <a:ext cx="329184" cy="329184"/>
+            <a:off x="776143" y="3336463"/>
+            <a:ext cx="294803" cy="294803"/>
           </a:xfrm>
           <a:prstGeom prst="rect">
             <a:avLst/>
@@ -5422,14 +5165,14 @@
       </p:pic>
       <p:sp>
         <p:nvSpPr>
-          <p:cNvPr id="18" name="texto-196"/>
+          <p:cNvPr id="12" name="texto-188"/>
           <p:cNvSpPr txBox="1"/>
           <p:nvPr/>
         </p:nvSpPr>
         <p:spPr>
           <a:xfrm>
-            <a:off x="8493557" y="4553712"/>
-            <a:ext cx="2692298" cy="1051560"/>
+            <a:off x="1463040" y="3172968"/>
+            <a:ext cx="4358488" cy="1097280"/>
           </a:xfrm>
           <a:prstGeom prst="rect">
             <a:avLst/>
@@ -5448,28 +5191,325 @@
               <a:buNone/>
             </a:pPr>
             <a:r>
-              <a:rPr lang="en-US" sz="1500" b="1" dirty="0">
-                <a:solidFill>
-                  <a:schemeClr val="tx1"/>
-                </a:solidFill>
-              </a:rPr>
-              <a:t>Código QR fácil de escanear</a:t>
-            </a:r>
-            <a:endParaRPr lang="en-US" sz="1500" dirty="0"/>
-          </a:p>
-          <a:p>
-            <a:pPr indent="0" marL="0">
-              <a:buNone/>
-            </a:pPr>
-            <a:r>
-              <a:rPr lang="en-US" sz="1300" dirty="0">
-                <a:solidFill>
-                  <a:schemeClr val="accent6"/>
-                </a:solidFill>
-              </a:rPr>
-              <a:t>Se lee incluso reducido al 30 % de su tamaño.</a:t>
-            </a:r>
-            <a:endParaRPr lang="en-US" sz="1500" dirty="0"/>
+              <a:rPr lang="en-US" sz="1700" b="1" dirty="0">
+                <a:solidFill>
+                  <a:schemeClr val="bg1"/>
+                </a:solidFill>
+              </a:rPr>
+              <a:t>La clave nunca sale del QR</a:t>
+            </a:r>
+            <a:endParaRPr lang="en-US" sz="1700" dirty="0"/>
+          </a:p>
+          <a:p>
+            <a:pPr indent="0" marL="0">
+              <a:buNone/>
+            </a:pPr>
+            <a:r>
+              <a:rPr lang="en-US" sz="1400" dirty="0">
+                <a:solidFill>
+                  <a:schemeClr val="accent5"/>
+                </a:solidFill>
+              </a:rPr>
+              <a:t>Va en una parte de la dirección que el navegador no envía.</a:t>
+            </a:r>
+            <a:endParaRPr lang="en-US" sz="1700" dirty="0"/>
+          </a:p>
+        </p:txBody>
+      </p:sp>
+      <p:sp>
+        <p:nvSpPr>
+          <p:cNvPr id="13" name="icono-fondo-189"/>
+          <p:cNvSpPr/>
+          <p:nvPr/>
+        </p:nvSpPr>
+        <p:spPr>
+          <a:xfrm>
+            <a:off x="6370168" y="3200400"/>
+            <a:ext cx="566928" cy="566928"/>
+          </a:xfrm>
+          <a:prstGeom prst="roundRect">
+            <a:avLst>
+              <a:gd name="adj" fmla="val 26000"/>
+            </a:avLst>
+          </a:prstGeom>
+          <a:solidFill>
+            <a:schemeClr val="tx2"/>
+          </a:solidFill>
+          <a:ln/>
+        </p:spPr>
+      </p:sp>
+      <p:pic>
+        <p:nvPicPr>
+          <p:cNvPr id="14" name="icono-LuEyeOff-190" descr="preencoded.png">    </p:cNvPr>
+          <p:cNvPicPr>
+            <a:picLocks noChangeAspect="1"/>
+          </p:cNvPicPr>
+          <p:nvPr/>
+        </p:nvPicPr>
+        <p:blipFill>
+          <a:blip r:embed="rId4"/>
+          <a:stretch>
+            <a:fillRect/>
+          </a:stretch>
+        </p:blipFill>
+        <p:spPr>
+          <a:xfrm>
+            <a:off x="6506230" y="3336463"/>
+            <a:ext cx="294803" cy="294803"/>
+          </a:xfrm>
+          <a:prstGeom prst="rect">
+            <a:avLst/>
+          </a:prstGeom>
+        </p:spPr>
+      </p:pic>
+      <p:sp>
+        <p:nvSpPr>
+          <p:cNvPr id="15" name="texto-191"/>
+          <p:cNvSpPr txBox="1"/>
+          <p:nvPr/>
+        </p:nvSpPr>
+        <p:spPr>
+          <a:xfrm>
+            <a:off x="7193128" y="3172968"/>
+            <a:ext cx="4358488" cy="1097280"/>
+          </a:xfrm>
+          <a:prstGeom prst="rect">
+            <a:avLst/>
+          </a:prstGeom>
+          <a:noFill/>
+          <a:ln/>
+        </p:spPr>
+        <p:txBody>
+          <a:bodyPr wrap="square" lIns="0" tIns="0" rIns="0" bIns="0" rtlCol="0" anchor="t"/>
+          <a:lstStyle/>
+          <a:p>
+            <a:pPr indent="0" marL="0">
+              <a:spcAft>
+                <a:spcPts val="300"/>
+              </a:spcAft>
+              <a:buNone/>
+            </a:pPr>
+            <a:r>
+              <a:rPr lang="en-US" sz="1700" b="1" dirty="0">
+                <a:solidFill>
+                  <a:schemeClr val="bg1"/>
+                </a:solidFill>
+              </a:rPr>
+              <a:t>Sin cuentas ni datos</a:t>
+            </a:r>
+            <a:endParaRPr lang="en-US" sz="1700" dirty="0"/>
+          </a:p>
+          <a:p>
+            <a:pPr indent="0" marL="0">
+              <a:buNone/>
+            </a:pPr>
+            <a:r>
+              <a:rPr lang="en-US" sz="1400" dirty="0">
+                <a:solidFill>
+                  <a:schemeClr val="accent5"/>
+                </a:solidFill>
+              </a:rPr>
+              <a:t>No hay registro, anuncios, analítica ni base de datos.</a:t>
+            </a:r>
+            <a:endParaRPr lang="en-US" sz="1700" dirty="0"/>
+          </a:p>
+        </p:txBody>
+      </p:sp>
+      <p:sp>
+        <p:nvSpPr>
+          <p:cNvPr id="16" name="icono-fondo-192"/>
+          <p:cNvSpPr/>
+          <p:nvPr/>
+        </p:nvSpPr>
+        <p:spPr>
+          <a:xfrm>
+            <a:off x="640080" y="4572000"/>
+            <a:ext cx="566928" cy="566928"/>
+          </a:xfrm>
+          <a:prstGeom prst="roundRect">
+            <a:avLst>
+              <a:gd name="adj" fmla="val 26000"/>
+            </a:avLst>
+          </a:prstGeom>
+          <a:solidFill>
+            <a:schemeClr val="tx2"/>
+          </a:solidFill>
+          <a:ln/>
+        </p:spPr>
+      </p:sp>
+      <p:pic>
+        <p:nvPicPr>
+          <p:cNvPr id="17" name="icono-LuRefreshCw-193" descr="preencoded.png">    </p:cNvPr>
+          <p:cNvPicPr>
+            <a:picLocks noChangeAspect="1"/>
+          </p:cNvPicPr>
+          <p:nvPr/>
+        </p:nvPicPr>
+        <p:blipFill>
+          <a:blip r:embed="rId5"/>
+          <a:stretch>
+            <a:fillRect/>
+          </a:stretch>
+        </p:blipFill>
+        <p:spPr>
+          <a:xfrm>
+            <a:off x="776143" y="4708063"/>
+            <a:ext cx="294803" cy="294803"/>
+          </a:xfrm>
+          <a:prstGeom prst="rect">
+            <a:avLst/>
+          </a:prstGeom>
+        </p:spPr>
+      </p:pic>
+      <p:sp>
+        <p:nvSpPr>
+          <p:cNvPr id="18" name="texto-194"/>
+          <p:cNvSpPr txBox="1"/>
+          <p:nvPr/>
+        </p:nvSpPr>
+        <p:spPr>
+          <a:xfrm>
+            <a:off x="1463040" y="4544568"/>
+            <a:ext cx="4358488" cy="1097280"/>
+          </a:xfrm>
+          <a:prstGeom prst="rect">
+            <a:avLst/>
+          </a:prstGeom>
+          <a:noFill/>
+          <a:ln/>
+        </p:spPr>
+        <p:txBody>
+          <a:bodyPr wrap="square" lIns="0" tIns="0" rIns="0" bIns="0" rtlCol="0" anchor="t"/>
+          <a:lstStyle/>
+          <a:p>
+            <a:pPr indent="0" marL="0">
+              <a:spcAft>
+                <a:spcPts val="300"/>
+              </a:spcAft>
+              <a:buNone/>
+            </a:pPr>
+            <a:r>
+              <a:rPr lang="en-US" sz="1700" b="1" dirty="0">
+                <a:solidFill>
+                  <a:schemeClr val="bg1"/>
+                </a:solidFill>
+              </a:rPr>
+              <a:t>Código nuevo en cada sesión</a:t>
+            </a:r>
+            <a:endParaRPr lang="en-US" sz="1700" dirty="0"/>
+          </a:p>
+          <a:p>
+            <a:pPr indent="0" marL="0">
+              <a:buNone/>
+            </a:pPr>
+            <a:r>
+              <a:rPr lang="en-US" sz="1400" dirty="0">
+                <a:solidFill>
+                  <a:schemeClr val="accent5"/>
+                </a:solidFill>
+              </a:rPr>
+              <a:t>El QR cambia en cada sesión y puedes renovarlo cuando quieras.</a:t>
+            </a:r>
+            <a:endParaRPr lang="en-US" sz="1700" dirty="0"/>
+          </a:p>
+        </p:txBody>
+      </p:sp>
+      <p:sp>
+        <p:nvSpPr>
+          <p:cNvPr id="19" name="icono-fondo-195"/>
+          <p:cNvSpPr/>
+          <p:nvPr/>
+        </p:nvSpPr>
+        <p:spPr>
+          <a:xfrm>
+            <a:off x="6370168" y="4572000"/>
+            <a:ext cx="566928" cy="566928"/>
+          </a:xfrm>
+          <a:prstGeom prst="roundRect">
+            <a:avLst>
+              <a:gd name="adj" fmla="val 26000"/>
+            </a:avLst>
+          </a:prstGeom>
+          <a:solidFill>
+            <a:schemeClr val="tx2"/>
+          </a:solidFill>
+          <a:ln/>
+        </p:spPr>
+      </p:sp>
+      <p:pic>
+        <p:nvPicPr>
+          <p:cNvPr id="20" name="icono-LuGithub-196" descr="preencoded.png">    </p:cNvPr>
+          <p:cNvPicPr>
+            <a:picLocks noChangeAspect="1"/>
+          </p:cNvPicPr>
+          <p:nvPr/>
+        </p:nvPicPr>
+        <p:blipFill>
+          <a:blip r:embed="rId6"/>
+          <a:stretch>
+            <a:fillRect/>
+          </a:stretch>
+        </p:blipFill>
+        <p:spPr>
+          <a:xfrm>
+            <a:off x="6506230" y="4708063"/>
+            <a:ext cx="294803" cy="294803"/>
+          </a:xfrm>
+          <a:prstGeom prst="rect">
+            <a:avLst/>
+          </a:prstGeom>
+        </p:spPr>
+      </p:pic>
+      <p:sp>
+        <p:nvSpPr>
+          <p:cNvPr id="21" name="texto-197"/>
+          <p:cNvSpPr txBox="1"/>
+          <p:nvPr/>
+        </p:nvSpPr>
+        <p:spPr>
+          <a:xfrm>
+            <a:off x="7193128" y="4544568"/>
+            <a:ext cx="4358488" cy="1097280"/>
+          </a:xfrm>
+          <a:prstGeom prst="rect">
+            <a:avLst/>
+          </a:prstGeom>
+          <a:noFill/>
+          <a:ln/>
+        </p:spPr>
+        <p:txBody>
+          <a:bodyPr wrap="square" lIns="0" tIns="0" rIns="0" bIns="0" rtlCol="0" anchor="t"/>
+          <a:lstStyle/>
+          <a:p>
+            <a:pPr indent="0" marL="0">
+              <a:spcAft>
+                <a:spcPts val="300"/>
+              </a:spcAft>
+              <a:buNone/>
+            </a:pPr>
+            <a:r>
+              <a:rPr lang="en-US" sz="1700" b="1" dirty="0">
+                <a:solidFill>
+                  <a:schemeClr val="bg1"/>
+                </a:solidFill>
+              </a:rPr>
+              <a:t>Código público</a:t>
+            </a:r>
+            <a:endParaRPr lang="en-US" sz="1700" dirty="0"/>
+          </a:p>
+          <a:p>
+            <a:pPr indent="0" marL="0">
+              <a:buNone/>
+            </a:pPr>
+            <a:r>
+              <a:rPr lang="en-US" sz="1400" dirty="0">
+                <a:solidFill>
+                  <a:schemeClr val="accent5"/>
+                </a:solidFill>
+              </a:rPr>
+              <a:t>Todo el código está publicado en GitHub para revisarlo.</a:t>
+            </a:r>
+            <a:endParaRPr lang="en-US" sz="1700" dirty="0"/>
           </a:p>
         </p:txBody>
       </p:sp>
@@ -5503,7 +5543,7 @@
             <a:lvl1pPr>
               <a:defRPr sz="1000">
                 <a:solidFill>
-                  <a:schemeClr val="accent6"/>
+                  <a:schemeClr val="accent5"/>
                 </a:solidFill>
               </a:defRPr>
             </a:lvl1pPr>
@@ -5575,7 +5615,7 @@
                   <a:schemeClr val="accent1"/>
                 </a:solidFill>
               </a:rPr>
-              <a:t>ESTADO DEL PROYECTO</a:t>
+              <a:t>CALIDAD</a:t>
             </a:r>
             <a:endParaRPr lang="en-US" sz="1200" dirty="0"/>
           </a:p>
@@ -5613,7 +5653,7 @@
                   <a:schemeClr val="tx1"/>
                 </a:solidFill>
               </a:rPr>
-              <a:t>Lo que ya está listo y lo que sigue</a:t>
+              <a:t>Probado de principio a fin</a:t>
             </a:r>
             <a:endParaRPr lang="en-US" sz="3600" dirty="0"/>
           </a:p>
@@ -5621,18 +5661,386 @@
       </p:sp>
       <p:sp>
         <p:nvSpPr>
-          <p:cNvPr id="4" name="tarjeta-197"/>
-          <p:cNvSpPr/>
-          <p:nvPr/>
-        </p:nvSpPr>
-        <p:spPr>
-          <a:xfrm>
-            <a:off x="640080" y="1783080"/>
-            <a:ext cx="5300320" cy="3794760"/>
+          <p:cNvPr id="4" name="cifra-198"/>
+          <p:cNvSpPr txBox="1"/>
+          <p:nvPr/>
+        </p:nvSpPr>
+        <p:spPr>
+          <a:xfrm>
+            <a:off x="640080" y="1828800"/>
+            <a:ext cx="2522144" cy="914400"/>
+          </a:xfrm>
+          <a:prstGeom prst="rect">
+            <a:avLst/>
+          </a:prstGeom>
+          <a:noFill/>
+          <a:ln/>
+        </p:spPr>
+        <p:txBody>
+          <a:bodyPr wrap="square" lIns="0" tIns="0" rIns="0" bIns="0" rtlCol="0" anchor="b"/>
+          <a:lstStyle/>
+          <a:p>
+            <a:pPr indent="0" marL="0">
+              <a:buNone/>
+            </a:pPr>
+            <a:r>
+              <a:rPr lang="en-US" sz="5400" b="1" dirty="0">
+                <a:solidFill>
+                  <a:schemeClr val="accent1"/>
+                </a:solidFill>
+                <a:latin typeface="Arial" pitchFamily="34" charset="0"/>
+                <a:ea typeface="Arial" pitchFamily="34" charset="-122"/>
+                <a:cs typeface="Arial" pitchFamily="34" charset="-120"/>
+              </a:rPr>
+              <a:t>42/42</a:t>
+            </a:r>
+            <a:endParaRPr lang="en-US" sz="5400" dirty="0"/>
+          </a:p>
+        </p:txBody>
+      </p:sp>
+      <p:sp>
+        <p:nvSpPr>
+          <p:cNvPr id="5" name="texto-199"/>
+          <p:cNvSpPr txBox="1"/>
+          <p:nvPr/>
+        </p:nvSpPr>
+        <p:spPr>
+          <a:xfrm>
+            <a:off x="640080" y="2880360"/>
+            <a:ext cx="2339264" cy="1188720"/>
+          </a:xfrm>
+          <a:prstGeom prst="rect">
+            <a:avLst/>
+          </a:prstGeom>
+          <a:noFill/>
+          <a:ln/>
+        </p:spPr>
+        <p:txBody>
+          <a:bodyPr wrap="square" lIns="0" tIns="0" rIns="0" bIns="0" rtlCol="0" anchor="t"/>
+          <a:lstStyle/>
+          <a:p>
+            <a:pPr indent="0" marL="0">
+              <a:spcAft>
+                <a:spcPts val="300"/>
+              </a:spcAft>
+              <a:buNone/>
+            </a:pPr>
+            <a:r>
+              <a:rPr lang="en-US" sz="1700" b="1" dirty="0">
+                <a:solidFill>
+                  <a:schemeClr val="tx1"/>
+                </a:solidFill>
+              </a:rPr>
+              <a:t>Pruebas automáticas</a:t>
+            </a:r>
+            <a:endParaRPr lang="en-US" sz="1700" dirty="0"/>
+          </a:p>
+          <a:p>
+            <a:pPr indent="0" marL="0">
+              <a:buNone/>
+            </a:pPr>
+            <a:r>
+              <a:rPr lang="en-US" sz="1400" dirty="0">
+                <a:solidFill>
+                  <a:schemeClr val="accent6"/>
+                </a:solidFill>
+              </a:rPr>
+              <a:t>Extensión y celular conectados de verdad.</a:t>
+            </a:r>
+            <a:endParaRPr lang="en-US" sz="1700" dirty="0"/>
+          </a:p>
+        </p:txBody>
+      </p:sp>
+      <p:sp>
+        <p:nvSpPr>
+          <p:cNvPr id="6" name="cifra-200"/>
+          <p:cNvSpPr txBox="1"/>
+          <p:nvPr/>
+        </p:nvSpPr>
+        <p:spPr>
+          <a:xfrm>
+            <a:off x="3436544" y="1828800"/>
+            <a:ext cx="2522144" cy="914400"/>
+          </a:xfrm>
+          <a:prstGeom prst="rect">
+            <a:avLst/>
+          </a:prstGeom>
+          <a:noFill/>
+          <a:ln/>
+        </p:spPr>
+        <p:txBody>
+          <a:bodyPr wrap="square" lIns="0" tIns="0" rIns="0" bIns="0" rtlCol="0" anchor="b"/>
+          <a:lstStyle/>
+          <a:p>
+            <a:pPr indent="0" marL="0">
+              <a:buNone/>
+            </a:pPr>
+            <a:r>
+              <a:rPr lang="en-US" sz="5400" b="1" dirty="0">
+                <a:solidFill>
+                  <a:schemeClr val="accent1"/>
+                </a:solidFill>
+                <a:latin typeface="Arial" pitchFamily="34" charset="0"/>
+                <a:ea typeface="Arial" pitchFamily="34" charset="-122"/>
+                <a:cs typeface="Arial" pitchFamily="34" charset="-120"/>
+              </a:rPr>
+              <a:t>28/28</a:t>
+            </a:r>
+            <a:endParaRPr lang="en-US" sz="5400" dirty="0"/>
+          </a:p>
+        </p:txBody>
+      </p:sp>
+      <p:sp>
+        <p:nvSpPr>
+          <p:cNvPr id="7" name="texto-201"/>
+          <p:cNvSpPr txBox="1"/>
+          <p:nvPr/>
+        </p:nvSpPr>
+        <p:spPr>
+          <a:xfrm>
+            <a:off x="3436544" y="2880360"/>
+            <a:ext cx="2339264" cy="1188720"/>
+          </a:xfrm>
+          <a:prstGeom prst="rect">
+            <a:avLst/>
+          </a:prstGeom>
+          <a:noFill/>
+          <a:ln/>
+        </p:spPr>
+        <p:txBody>
+          <a:bodyPr wrap="square" lIns="0" tIns="0" rIns="0" bIns="0" rtlCol="0" anchor="t"/>
+          <a:lstStyle/>
+          <a:p>
+            <a:pPr indent="0" marL="0">
+              <a:spcAft>
+                <a:spcPts val="300"/>
+              </a:spcAft>
+              <a:buNone/>
+            </a:pPr>
+            <a:r>
+              <a:rPr lang="en-US" sz="1700" b="1" dirty="0">
+                <a:solidFill>
+                  <a:schemeClr val="tx1"/>
+                </a:solidFill>
+              </a:rPr>
+              <a:t>Pantallas y vistas</a:t>
+            </a:r>
+            <a:endParaRPr lang="en-US" sz="1700" dirty="0"/>
+          </a:p>
+          <a:p>
+            <a:pPr indent="0" marL="0">
+              <a:buNone/>
+            </a:pPr>
+            <a:r>
+              <a:rPr lang="en-US" sz="1400" dirty="0">
+                <a:solidFill>
+                  <a:schemeClr val="accent6"/>
+                </a:solidFill>
+              </a:rPr>
+              <a:t>Del celular más pequeño a la tablet, sin errores.</a:t>
+            </a:r>
+            <a:endParaRPr lang="en-US" sz="1700" dirty="0"/>
+          </a:p>
+        </p:txBody>
+      </p:sp>
+      <p:sp>
+        <p:nvSpPr>
+          <p:cNvPr id="8" name="cifra-202"/>
+          <p:cNvSpPr txBox="1"/>
+          <p:nvPr/>
+        </p:nvSpPr>
+        <p:spPr>
+          <a:xfrm>
+            <a:off x="6233008" y="1828800"/>
+            <a:ext cx="2522144" cy="914400"/>
+          </a:xfrm>
+          <a:prstGeom prst="rect">
+            <a:avLst/>
+          </a:prstGeom>
+          <a:noFill/>
+          <a:ln/>
+        </p:spPr>
+        <p:txBody>
+          <a:bodyPr wrap="square" lIns="0" tIns="0" rIns="0" bIns="0" rtlCol="0" anchor="b"/>
+          <a:lstStyle/>
+          <a:p>
+            <a:pPr indent="0" marL="0">
+              <a:buNone/>
+            </a:pPr>
+            <a:r>
+              <a:rPr lang="en-US" sz="5400" b="1" dirty="0">
+                <a:solidFill>
+                  <a:schemeClr val="accent1"/>
+                </a:solidFill>
+                <a:latin typeface="Arial" pitchFamily="34" charset="0"/>
+                <a:ea typeface="Arial" pitchFamily="34" charset="-122"/>
+                <a:cs typeface="Arial" pitchFamily="34" charset="-120"/>
+              </a:rPr>
+              <a:t>2,7 s</a:t>
+            </a:r>
+            <a:endParaRPr lang="en-US" sz="5400" dirty="0"/>
+          </a:p>
+        </p:txBody>
+      </p:sp>
+      <p:sp>
+        <p:nvSpPr>
+          <p:cNvPr id="9" name="texto-203"/>
+          <p:cNvSpPr txBox="1"/>
+          <p:nvPr/>
+        </p:nvSpPr>
+        <p:spPr>
+          <a:xfrm>
+            <a:off x="6233008" y="2880360"/>
+            <a:ext cx="2339264" cy="1188720"/>
+          </a:xfrm>
+          <a:prstGeom prst="rect">
+            <a:avLst/>
+          </a:prstGeom>
+          <a:noFill/>
+          <a:ln/>
+        </p:spPr>
+        <p:txBody>
+          <a:bodyPr wrap="square" lIns="0" tIns="0" rIns="0" bIns="0" rtlCol="0" anchor="t"/>
+          <a:lstStyle/>
+          <a:p>
+            <a:pPr indent="0" marL="0">
+              <a:spcAft>
+                <a:spcPts val="300"/>
+              </a:spcAft>
+              <a:buNone/>
+            </a:pPr>
+            <a:r>
+              <a:rPr lang="en-US" sz="1700" b="1" dirty="0">
+                <a:solidFill>
+                  <a:schemeClr val="tx1"/>
+                </a:solidFill>
+              </a:rPr>
+              <a:t>Reconexión automática</a:t>
+            </a:r>
+            <a:endParaRPr lang="en-US" sz="1700" dirty="0"/>
+          </a:p>
+          <a:p>
+            <a:pPr indent="0" marL="0">
+              <a:buNone/>
+            </a:pPr>
+            <a:r>
+              <a:rPr lang="en-US" sz="1400" dirty="0">
+                <a:solidFill>
+                  <a:schemeClr val="accent6"/>
+                </a:solidFill>
+              </a:rPr>
+              <a:t>Si se corta el servidor, sin soltar al celular.</a:t>
+            </a:r>
+            <a:endParaRPr lang="en-US" sz="1700" dirty="0"/>
+          </a:p>
+        </p:txBody>
+      </p:sp>
+      <p:sp>
+        <p:nvSpPr>
+          <p:cNvPr id="10" name="cifra-204"/>
+          <p:cNvSpPr txBox="1"/>
+          <p:nvPr/>
+        </p:nvSpPr>
+        <p:spPr>
+          <a:xfrm>
+            <a:off x="9029471" y="1828800"/>
+            <a:ext cx="2522144" cy="914400"/>
+          </a:xfrm>
+          <a:prstGeom prst="rect">
+            <a:avLst/>
+          </a:prstGeom>
+          <a:noFill/>
+          <a:ln/>
+        </p:spPr>
+        <p:txBody>
+          <a:bodyPr wrap="square" lIns="0" tIns="0" rIns="0" bIns="0" rtlCol="0" anchor="b"/>
+          <a:lstStyle/>
+          <a:p>
+            <a:pPr indent="0" marL="0">
+              <a:buNone/>
+            </a:pPr>
+            <a:r>
+              <a:rPr lang="en-US" sz="5400" b="1" dirty="0">
+                <a:solidFill>
+                  <a:schemeClr val="accent1"/>
+                </a:solidFill>
+                <a:latin typeface="Arial" pitchFamily="34" charset="0"/>
+                <a:ea typeface="Arial" pitchFamily="34" charset="-122"/>
+                <a:cs typeface="Arial" pitchFamily="34" charset="-120"/>
+              </a:rPr>
+              <a:t>80 KB</a:t>
+            </a:r>
+            <a:endParaRPr lang="en-US" sz="5400" dirty="0"/>
+          </a:p>
+        </p:txBody>
+      </p:sp>
+      <p:sp>
+        <p:nvSpPr>
+          <p:cNvPr id="11" name="texto-205"/>
+          <p:cNvSpPr txBox="1"/>
+          <p:nvPr/>
+        </p:nvSpPr>
+        <p:spPr>
+          <a:xfrm>
+            <a:off x="9029471" y="2880360"/>
+            <a:ext cx="2339264" cy="1188720"/>
+          </a:xfrm>
+          <a:prstGeom prst="rect">
+            <a:avLst/>
+          </a:prstGeom>
+          <a:noFill/>
+          <a:ln/>
+        </p:spPr>
+        <p:txBody>
+          <a:bodyPr wrap="square" lIns="0" tIns="0" rIns="0" bIns="0" rtlCol="0" anchor="t"/>
+          <a:lstStyle/>
+          <a:p>
+            <a:pPr indent="0" marL="0">
+              <a:spcAft>
+                <a:spcPts val="300"/>
+              </a:spcAft>
+              <a:buNone/>
+            </a:pPr>
+            <a:r>
+              <a:rPr lang="en-US" sz="1700" b="1" dirty="0">
+                <a:solidFill>
+                  <a:schemeClr val="tx1"/>
+                </a:solidFill>
+              </a:rPr>
+              <a:t>Extensión liviana</a:t>
+            </a:r>
+            <a:endParaRPr lang="en-US" sz="1700" dirty="0"/>
+          </a:p>
+          <a:p>
+            <a:pPr indent="0" marL="0">
+              <a:buNone/>
+            </a:pPr>
+            <a:r>
+              <a:rPr lang="en-US" sz="1400" dirty="0">
+                <a:solidFill>
+                  <a:schemeClr val="accent6"/>
+                </a:solidFill>
+              </a:rPr>
+              <a:t>Todo el código incluido, sin descargas externas.</a:t>
+            </a:r>
+            <a:endParaRPr lang="en-US" sz="1700" dirty="0"/>
+          </a:p>
+        </p:txBody>
+      </p:sp>
+      <p:sp>
+        <p:nvSpPr>
+          <p:cNvPr id="12" name="tarjeta-206"/>
+          <p:cNvSpPr/>
+          <p:nvPr/>
+        </p:nvSpPr>
+        <p:spPr>
+          <a:xfrm>
+            <a:off x="640080" y="4343400"/>
+            <a:ext cx="10911535" cy="1325880"/>
           </a:xfrm>
           <a:prstGeom prst="roundRect">
             <a:avLst>
-              <a:gd name="adj" fmla="val 3855"/>
+              <a:gd name="adj" fmla="val 11034"/>
             </a:avLst>
           </a:prstGeom>
           <a:solidFill>
@@ -5641,65 +6049,9 @@
           <a:ln/>
         </p:spPr>
       </p:sp>
-      <p:sp>
-        <p:nvSpPr>
-          <p:cNvPr id="5" name="listo"/>
-          <p:cNvSpPr txBox="1"/>
-          <p:nvPr/>
-        </p:nvSpPr>
-        <p:spPr>
-          <a:xfrm>
-            <a:off x="960120" y="1965960"/>
-            <a:ext cx="4660240" cy="457200"/>
-          </a:xfrm>
-          <a:prstGeom prst="rect">
-            <a:avLst/>
-          </a:prstGeom>
-          <a:noFill/>
-          <a:ln/>
-        </p:spPr>
-        <p:txBody>
-          <a:bodyPr wrap="square" lIns="0" tIns="0" rIns="0" bIns="0" rtlCol="0" anchor="ctr"/>
-          <a:lstStyle/>
-          <a:p>
-            <a:pPr indent="0" marL="0">
-              <a:buNone/>
-            </a:pPr>
-            <a:r>
-              <a:rPr lang="en-US" sz="1800" b="1" dirty="0">
-                <a:solidFill>
-                  <a:schemeClr val="tx1"/>
-                </a:solidFill>
-              </a:rPr>
-              <a:t>Ya disponible</a:t>
-            </a:r>
-            <a:endParaRPr lang="en-US" sz="1800" dirty="0"/>
-          </a:p>
-        </p:txBody>
-      </p:sp>
-      <p:sp>
-        <p:nvSpPr>
-          <p:cNvPr id="6" name="hecho-198"/>
-          <p:cNvSpPr/>
-          <p:nvPr/>
-        </p:nvSpPr>
-        <p:spPr>
-          <a:xfrm>
-            <a:off x="960120" y="2578608"/>
-            <a:ext cx="402336" cy="402336"/>
-          </a:xfrm>
-          <a:prstGeom prst="ellipse">
-            <a:avLst/>
-          </a:prstGeom>
-          <a:solidFill>
-            <a:schemeClr val="accent2"/>
-          </a:solidFill>
-          <a:ln/>
-        </p:spPr>
-      </p:sp>
       <p:pic>
         <p:nvPicPr>
-          <p:cNvPr id="7" name="hecho-icono-199" descr="preencoded.png">    </p:cNvPr>
+          <p:cNvPr id="13" name="check-207" descr="preencoded.png">    </p:cNvPr>
           <p:cNvPicPr>
             <a:picLocks noChangeAspect="1"/>
           </p:cNvPicPr>
@@ -5713,8 +6065,8 @@
         </p:blipFill>
         <p:spPr>
           <a:xfrm>
-            <a:off x="1042416" y="2660904"/>
-            <a:ext cx="237744" cy="237744"/>
+            <a:off x="960120" y="4617720"/>
+            <a:ext cx="329184" cy="329184"/>
           </a:xfrm>
           <a:prstGeom prst="rect">
             <a:avLst/>
@@ -5723,14 +6075,14 @@
       </p:pic>
       <p:sp>
         <p:nvSpPr>
-          <p:cNvPr id="8" name="texto-200"/>
+          <p:cNvPr id="14" name="texto-208"/>
           <p:cNvSpPr txBox="1"/>
           <p:nvPr/>
         </p:nvSpPr>
         <p:spPr>
           <a:xfrm>
-            <a:off x="1536192" y="2542032"/>
-            <a:ext cx="4111600" cy="713232"/>
+            <a:off x="1463040" y="4553712"/>
+            <a:ext cx="2692298" cy="1051560"/>
           </a:xfrm>
           <a:prstGeom prst="rect">
             <a:avLst/>
@@ -5754,7 +6106,7 @@
                   <a:schemeClr val="tx1"/>
                 </a:solidFill>
               </a:rPr>
-              <a:t>Retransmisión con Cloudflare</a:t>
+              <a:t>Google Slides y reveal.js reales</a:t>
             </a:r>
             <a:endParaRPr lang="en-US" sz="1500" dirty="0"/>
           </a:p>
@@ -5768,35 +6120,15 @@
                   <a:schemeClr val="accent6"/>
                 </a:solidFill>
               </a:rPr>
-              <a:t>Conecta incluso en redes de empresa (puerto 443).</a:t>
+              <a:t>Iniciar, avanzar, retroceder y salir.</a:t>
             </a:r>
             <a:endParaRPr lang="en-US" sz="1500" dirty="0"/>
           </a:p>
         </p:txBody>
-      </p:sp>
-      <p:sp>
-        <p:nvSpPr>
-          <p:cNvPr id="9" name="hecho-201"/>
-          <p:cNvSpPr/>
-          <p:nvPr/>
-        </p:nvSpPr>
-        <p:spPr>
-          <a:xfrm>
-            <a:off x="960120" y="3310128"/>
-            <a:ext cx="402336" cy="402336"/>
-          </a:xfrm>
-          <a:prstGeom prst="ellipse">
-            <a:avLst/>
-          </a:prstGeom>
-          <a:solidFill>
-            <a:schemeClr val="accent2"/>
-          </a:solidFill>
-          <a:ln/>
-        </p:spPr>
       </p:sp>
       <p:pic>
         <p:nvPicPr>
-          <p:cNvPr id="10" name="hecho-icono-202" descr="preencoded.png">    </p:cNvPr>
+          <p:cNvPr id="15" name="check-209" descr="preencoded.png">    </p:cNvPr>
           <p:cNvPicPr>
             <a:picLocks noChangeAspect="1"/>
           </p:cNvPicPr>
@@ -5810,8 +6142,8 @@
         </p:blipFill>
         <p:spPr>
           <a:xfrm>
-            <a:off x="1042416" y="3392424"/>
-            <a:ext cx="237744" cy="237744"/>
+            <a:off x="4475378" y="4617720"/>
+            <a:ext cx="329184" cy="329184"/>
           </a:xfrm>
           <a:prstGeom prst="rect">
             <a:avLst/>
@@ -5820,14 +6152,14 @@
       </p:pic>
       <p:sp>
         <p:nvSpPr>
-          <p:cNvPr id="11" name="texto-203"/>
+          <p:cNvPr id="16" name="texto-210"/>
           <p:cNvSpPr txBox="1"/>
           <p:nvPr/>
         </p:nvSpPr>
         <p:spPr>
           <a:xfrm>
-            <a:off x="1536192" y="3273552"/>
-            <a:ext cx="4111600" cy="713232"/>
+            <a:off x="4978298" y="4553712"/>
+            <a:ext cx="2692298" cy="1051560"/>
           </a:xfrm>
           <a:prstGeom prst="rect">
             <a:avLst/>
@@ -5851,7 +6183,7 @@
                   <a:schemeClr val="tx1"/>
                 </a:solidFill>
               </a:rPr>
-              <a:t>Protección de costos</a:t>
+              <a:t>Redes de empresa</a:t>
             </a:r>
             <a:endParaRPr lang="en-US" sz="1500" dirty="0"/>
           </a:p>
@@ -5865,35 +6197,15 @@
                   <a:schemeClr val="accent6"/>
                 </a:solidFill>
               </a:rPr>
-              <a:t>Se pausa sola a los 900 GB del mes y se reactiva cada mes.</a:t>
+              <a:t>Conecta por Cloudflare incluso solo con el puerto 443.</a:t>
             </a:r>
             <a:endParaRPr lang="en-US" sz="1500" dirty="0"/>
           </a:p>
         </p:txBody>
-      </p:sp>
-      <p:sp>
-        <p:nvSpPr>
-          <p:cNvPr id="12" name="hecho-204"/>
-          <p:cNvSpPr/>
-          <p:nvPr/>
-        </p:nvSpPr>
-        <p:spPr>
-          <a:xfrm>
-            <a:off x="960120" y="4041648"/>
-            <a:ext cx="402336" cy="402336"/>
-          </a:xfrm>
-          <a:prstGeom prst="ellipse">
-            <a:avLst/>
-          </a:prstGeom>
-          <a:solidFill>
-            <a:schemeClr val="accent2"/>
-          </a:solidFill>
-          <a:ln/>
-        </p:spPr>
       </p:sp>
       <p:pic>
         <p:nvPicPr>
-          <p:cNvPr id="13" name="hecho-icono-205" descr="preencoded.png">    </p:cNvPr>
+          <p:cNvPr id="17" name="check-211" descr="preencoded.png">    </p:cNvPr>
           <p:cNvPicPr>
             <a:picLocks noChangeAspect="1"/>
           </p:cNvPicPr>
@@ -5907,8 +6219,8 @@
         </p:blipFill>
         <p:spPr>
           <a:xfrm>
-            <a:off x="1042416" y="4123944"/>
-            <a:ext cx="237744" cy="237744"/>
+            <a:off x="7990637" y="4617720"/>
+            <a:ext cx="329184" cy="329184"/>
           </a:xfrm>
           <a:prstGeom prst="rect">
             <a:avLst/>
@@ -5917,14 +6229,14 @@
       </p:pic>
       <p:sp>
         <p:nvSpPr>
-          <p:cNvPr id="14" name="texto-206"/>
+          <p:cNvPr id="18" name="texto-212"/>
           <p:cNvSpPr txBox="1"/>
           <p:nvPr/>
         </p:nvSpPr>
         <p:spPr>
           <a:xfrm>
-            <a:off x="1536192" y="4005072"/>
-            <a:ext cx="4111600" cy="713232"/>
+            <a:off x="8493557" y="4553712"/>
+            <a:ext cx="2692298" cy="1051560"/>
           </a:xfrm>
           <a:prstGeom prst="rect">
             <a:avLst/>
@@ -5948,7 +6260,7 @@
                   <a:schemeClr val="tx1"/>
                 </a:solidFill>
               </a:rPr>
-              <a:t>Código QR nuevo en cada sesión</a:t>
+              <a:t>Código QR fácil de escanear</a:t>
             </a:r>
             <a:endParaRPr lang="en-US" sz="1500" dirty="0"/>
           </a:p>
@@ -5962,411 +6274,9 @@
                   <a:schemeClr val="accent6"/>
                 </a:solidFill>
               </a:rPr>
-              <a:t>Activado por defecto; se puede cambiar en Ajustes.</a:t>
+              <a:t>Se lee incluso reducido al 30 % de su tamaño.</a:t>
             </a:r>
             <a:endParaRPr lang="en-US" sz="1500" dirty="0"/>
-          </a:p>
-        </p:txBody>
-      </p:sp>
-      <p:sp>
-        <p:nvSpPr>
-          <p:cNvPr id="15" name="hecho-207"/>
-          <p:cNvSpPr/>
-          <p:nvPr/>
-        </p:nvSpPr>
-        <p:spPr>
-          <a:xfrm>
-            <a:off x="960120" y="4773168"/>
-            <a:ext cx="402336" cy="402336"/>
-          </a:xfrm>
-          <a:prstGeom prst="ellipse">
-            <a:avLst/>
-          </a:prstGeom>
-          <a:solidFill>
-            <a:schemeClr val="accent2"/>
-          </a:solidFill>
-          <a:ln/>
-        </p:spPr>
-      </p:sp>
-      <p:pic>
-        <p:nvPicPr>
-          <p:cNvPr id="16" name="hecho-icono-208" descr="preencoded.png">    </p:cNvPr>
-          <p:cNvPicPr>
-            <a:picLocks noChangeAspect="1"/>
-          </p:cNvPicPr>
-          <p:nvPr/>
-        </p:nvPicPr>
-        <p:blipFill>
-          <a:blip r:embed="rId4"/>
-          <a:stretch>
-            <a:fillRect/>
-          </a:stretch>
-        </p:blipFill>
-        <p:spPr>
-          <a:xfrm>
-            <a:off x="1042416" y="4855464"/>
-            <a:ext cx="237744" cy="237744"/>
-          </a:xfrm>
-          <a:prstGeom prst="rect">
-            <a:avLst/>
-          </a:prstGeom>
-        </p:spPr>
-      </p:pic>
-      <p:sp>
-        <p:nvSpPr>
-          <p:cNvPr id="17" name="texto-209"/>
-          <p:cNvSpPr txBox="1"/>
-          <p:nvPr/>
-        </p:nvSpPr>
-        <p:spPr>
-          <a:xfrm>
-            <a:off x="1536192" y="4736592"/>
-            <a:ext cx="4111600" cy="713232"/>
-          </a:xfrm>
-          <a:prstGeom prst="rect">
-            <a:avLst/>
-          </a:prstGeom>
-          <a:noFill/>
-          <a:ln/>
-        </p:spPr>
-        <p:txBody>
-          <a:bodyPr wrap="square" lIns="0" tIns="0" rIns="0" bIns="0" rtlCol="0" anchor="t"/>
-          <a:lstStyle/>
-          <a:p>
-            <a:pPr indent="0" marL="0">
-              <a:spcAft>
-                <a:spcPts val="300"/>
-              </a:spcAft>
-              <a:buNone/>
-            </a:pPr>
-            <a:r>
-              <a:rPr lang="en-US" sz="1500" b="1" dirty="0">
-                <a:solidFill>
-                  <a:schemeClr val="tx1"/>
-                </a:solidFill>
-              </a:rPr>
-              <a:t>Control web publicado</a:t>
-            </a:r>
-            <a:endParaRPr lang="en-US" sz="1500" dirty="0"/>
-          </a:p>
-          <a:p>
-            <a:pPr indent="0" marL="0">
-              <a:buNone/>
-            </a:pPr>
-            <a:r>
-              <a:rPr lang="en-US" sz="1300" dirty="0">
-                <a:solidFill>
-                  <a:schemeClr val="accent6"/>
-                </a:solidFill>
-              </a:rPr>
-              <a:t>En GitHub Pages, con reconexión automática.</a:t>
-            </a:r>
-            <a:endParaRPr lang="en-US" sz="1500" dirty="0"/>
-          </a:p>
-        </p:txBody>
-      </p:sp>
-      <p:sp>
-        <p:nvSpPr>
-          <p:cNvPr id="18" name="sigue"/>
-          <p:cNvSpPr txBox="1"/>
-          <p:nvPr/>
-        </p:nvSpPr>
-        <p:spPr>
-          <a:xfrm>
-            <a:off x="6251296" y="1965960"/>
-            <a:ext cx="5300320" cy="457200"/>
-          </a:xfrm>
-          <a:prstGeom prst="rect">
-            <a:avLst/>
-          </a:prstGeom>
-          <a:noFill/>
-          <a:ln/>
-        </p:spPr>
-        <p:txBody>
-          <a:bodyPr wrap="square" lIns="0" tIns="0" rIns="0" bIns="0" rtlCol="0" anchor="ctr"/>
-          <a:lstStyle/>
-          <a:p>
-            <a:pPr indent="0" marL="0">
-              <a:buNone/>
-            </a:pPr>
-            <a:r>
-              <a:rPr lang="en-US" sz="1800" b="1" dirty="0">
-                <a:solidFill>
-                  <a:schemeClr val="tx1"/>
-                </a:solidFill>
-              </a:rPr>
-              <a:t>Lo que sigue</a:t>
-            </a:r>
-            <a:endParaRPr lang="en-US" sz="1800" dirty="0"/>
-          </a:p>
-        </p:txBody>
-      </p:sp>
-      <p:sp>
-        <p:nvSpPr>
-          <p:cNvPr id="19" name="icono-fondo-210"/>
-          <p:cNvSpPr/>
-          <p:nvPr/>
-        </p:nvSpPr>
-        <p:spPr>
-          <a:xfrm>
-            <a:off x="6251296" y="2606040"/>
-            <a:ext cx="502920" cy="502920"/>
-          </a:xfrm>
-          <a:prstGeom prst="roundRect">
-            <a:avLst>
-              <a:gd name="adj" fmla="val 26000"/>
-            </a:avLst>
-          </a:prstGeom>
-          <a:solidFill>
-            <a:schemeClr val="accent1"/>
-          </a:solidFill>
-          <a:ln/>
-        </p:spPr>
-      </p:sp>
-      <p:pic>
-        <p:nvPicPr>
-          <p:cNvPr id="20" name="icono-LuHourglass-211" descr="preencoded.png">    </p:cNvPr>
-          <p:cNvPicPr>
-            <a:picLocks noChangeAspect="1"/>
-          </p:cNvPicPr>
-          <p:nvPr/>
-        </p:nvPicPr>
-        <p:blipFill>
-          <a:blip r:embed="rId5"/>
-          <a:stretch>
-            <a:fillRect/>
-          </a:stretch>
-        </p:blipFill>
-        <p:spPr>
-          <a:xfrm>
-            <a:off x="6371996" y="2726741"/>
-            <a:ext cx="261518" cy="261518"/>
-          </a:xfrm>
-          <a:prstGeom prst="rect">
-            <a:avLst/>
-          </a:prstGeom>
-        </p:spPr>
-      </p:pic>
-      <p:sp>
-        <p:nvSpPr>
-          <p:cNvPr id="21" name="texto-212"/>
-          <p:cNvSpPr txBox="1"/>
-          <p:nvPr/>
-        </p:nvSpPr>
-        <p:spPr>
-          <a:xfrm>
-            <a:off x="6982816" y="2569464"/>
-            <a:ext cx="4568800" cy="1051560"/>
-          </a:xfrm>
-          <a:prstGeom prst="rect">
-            <a:avLst/>
-          </a:prstGeom>
-          <a:noFill/>
-          <a:ln/>
-        </p:spPr>
-        <p:txBody>
-          <a:bodyPr wrap="square" lIns="0" tIns="0" rIns="0" bIns="0" rtlCol="0" anchor="t"/>
-          <a:lstStyle/>
-          <a:p>
-            <a:pPr indent="0" marL="0">
-              <a:spcAft>
-                <a:spcPts val="300"/>
-              </a:spcAft>
-              <a:buNone/>
-            </a:pPr>
-            <a:r>
-              <a:rPr lang="en-US" sz="1600" b="1" dirty="0">
-                <a:solidFill>
-                  <a:schemeClr val="tx1"/>
-                </a:solidFill>
-              </a:rPr>
-              <a:t>Chrome Web Store</a:t>
-            </a:r>
-            <a:endParaRPr lang="en-US" sz="1600" dirty="0"/>
-          </a:p>
-          <a:p>
-            <a:pPr indent="0" marL="0">
-              <a:buNone/>
-            </a:pPr>
-            <a:r>
-              <a:rPr lang="en-US" sz="1400" dirty="0">
-                <a:solidFill>
-                  <a:schemeClr val="accent6"/>
-                </a:solidFill>
-              </a:rPr>
-              <a:t>La versión 1.0 («Mando») está en revisión. Al aprobarse, se sube la 1.1 con el nombre Presentazo.</a:t>
-            </a:r>
-            <a:endParaRPr lang="en-US" sz="1600" dirty="0"/>
-          </a:p>
-        </p:txBody>
-      </p:sp>
-      <p:sp>
-        <p:nvSpPr>
-          <p:cNvPr id="22" name="icono-fondo-213"/>
-          <p:cNvSpPr/>
-          <p:nvPr/>
-        </p:nvSpPr>
-        <p:spPr>
-          <a:xfrm>
-            <a:off x="6251296" y="3794760"/>
-            <a:ext cx="502920" cy="502920"/>
-          </a:xfrm>
-          <a:prstGeom prst="roundRect">
-            <a:avLst>
-              <a:gd name="adj" fmla="val 26000"/>
-            </a:avLst>
-          </a:prstGeom>
-          <a:solidFill>
-            <a:schemeClr val="accent1"/>
-          </a:solidFill>
-          <a:ln/>
-        </p:spPr>
-      </p:sp>
-      <p:pic>
-        <p:nvPicPr>
-          <p:cNvPr id="23" name="icono-LuWatch-214" descr="preencoded.png">    </p:cNvPr>
-          <p:cNvPicPr>
-            <a:picLocks noChangeAspect="1"/>
-          </p:cNvPicPr>
-          <p:nvPr/>
-        </p:nvPicPr>
-        <p:blipFill>
-          <a:blip r:embed="rId6"/>
-          <a:stretch>
-            <a:fillRect/>
-          </a:stretch>
-        </p:blipFill>
-        <p:spPr>
-          <a:xfrm>
-            <a:off x="6371996" y="3915461"/>
-            <a:ext cx="261518" cy="261518"/>
-          </a:xfrm>
-          <a:prstGeom prst="rect">
-            <a:avLst/>
-          </a:prstGeom>
-        </p:spPr>
-      </p:pic>
-      <p:sp>
-        <p:nvSpPr>
-          <p:cNvPr id="24" name="texto-215"/>
-          <p:cNvSpPr txBox="1"/>
-          <p:nvPr/>
-        </p:nvSpPr>
-        <p:spPr>
-          <a:xfrm>
-            <a:off x="6982816" y="3758184"/>
-            <a:ext cx="4568800" cy="1051560"/>
-          </a:xfrm>
-          <a:prstGeom prst="rect">
-            <a:avLst/>
-          </a:prstGeom>
-          <a:noFill/>
-          <a:ln/>
-        </p:spPr>
-        <p:txBody>
-          <a:bodyPr wrap="square" lIns="0" tIns="0" rIns="0" bIns="0" rtlCol="0" anchor="t"/>
-          <a:lstStyle/>
-          <a:p>
-            <a:pPr indent="0" marL="0">
-              <a:spcAft>
-                <a:spcPts val="300"/>
-              </a:spcAft>
-              <a:buNone/>
-            </a:pPr>
-            <a:r>
-              <a:rPr lang="en-US" sz="1600" b="1" dirty="0">
-                <a:solidFill>
-                  <a:schemeClr val="tx1"/>
-                </a:solidFill>
-              </a:rPr>
-              <a:t>App para Apple Watch</a:t>
-            </a:r>
-            <a:endParaRPr lang="en-US" sz="1600" dirty="0"/>
-          </a:p>
-          <a:p>
-            <a:pPr indent="0" marL="0">
-              <a:buNone/>
-            </a:pPr>
-            <a:r>
-              <a:rPr lang="en-US" sz="1400" dirty="0">
-                <a:solidFill>
-                  <a:schemeClr val="accent6"/>
-                </a:solidFill>
-              </a:rPr>
-              <a:t>Evaluar una app nativa que use el iPhone como puente.</a:t>
-            </a:r>
-            <a:endParaRPr lang="en-US" sz="1600" dirty="0"/>
-          </a:p>
-        </p:txBody>
-      </p:sp>
-      <p:pic>
-        <p:nvPicPr>
-          <p:cNvPr id="25" name="limites-icono" descr="preencoded.png">    </p:cNvPr>
-          <p:cNvPicPr>
-            <a:picLocks noChangeAspect="1"/>
-          </p:cNvPicPr>
-          <p:nvPr/>
-        </p:nvPicPr>
-        <p:blipFill>
-          <a:blip r:embed="rId7"/>
-          <a:stretch>
-            <a:fillRect/>
-          </a:stretch>
-        </p:blipFill>
-        <p:spPr>
-          <a:xfrm>
-            <a:off x="640080" y="5788152"/>
-            <a:ext cx="256032" cy="256032"/>
-          </a:xfrm>
-          <a:prstGeom prst="rect">
-            <a:avLst/>
-          </a:prstGeom>
-        </p:spPr>
-      </p:pic>
-      <p:sp>
-        <p:nvSpPr>
-          <p:cNvPr id="26" name="limites"/>
-          <p:cNvSpPr txBox="1"/>
-          <p:nvPr/>
-        </p:nvSpPr>
-        <p:spPr>
-          <a:xfrm>
-            <a:off x="1024128" y="5715000"/>
-            <a:ext cx="10527487" cy="411480"/>
-          </a:xfrm>
-          <a:prstGeom prst="rect">
-            <a:avLst/>
-          </a:prstGeom>
-          <a:noFill/>
-          <a:ln/>
-        </p:spPr>
-        <p:txBody>
-          <a:bodyPr wrap="square" lIns="0" tIns="0" rIns="0" bIns="0" rtlCol="0" anchor="ctr"/>
-          <a:lstStyle/>
-          <a:p>
-            <a:pPr indent="0" marL="0">
-              <a:buNone/>
-            </a:pPr>
-            <a:r>
-              <a:rPr lang="en-US" sz="1300" b="1" dirty="0">
-                <a:solidFill>
-                  <a:schemeClr val="tx1"/>
-                </a:solidFill>
-              </a:rPr>
-              <a:t>Límites que se mantienen: </a:t>
-            </a:r>
-            <a:pPr indent="0" marL="0">
-              <a:buNone/>
-            </a:pPr>
-            <a:r>
-              <a:rPr lang="en-US" sz="1300" dirty="0">
-                <a:solidFill>
-                  <a:schemeClr val="accent6"/>
-                </a:solidFill>
-              </a:rPr>
-              <a:t>necesita internet para enlazar los dispositivos y no funciona en páginas internas de Chrome ni fuera del navegador.</a:t>
-            </a:r>
-            <a:endParaRPr lang="en-US" sz="1300" dirty="0"/>
           </a:p>
         </p:txBody>
       </p:sp>
@@ -6440,9 +6350,163 @@
           <a:chExt cx="0" cy="0"/>
         </a:xfrm>
       </p:grpSpPr>
+      <p:sp>
+        <p:nvSpPr>
+          <p:cNvPr id="2" name="Text 0"/>
+          <p:cNvSpPr/>
+          <p:nvPr>
+            <p:ph idx="100" type="body" hasCustomPrompt="1"/>
+          </p:nvPr>
+        </p:nvSpPr>
+        <p:spPr>
+          <a:xfrm>
+            <a:off x="640080" y="438912"/>
+            <a:ext cx="8229600" cy="292608"/>
+          </a:xfrm>
+          <a:prstGeom prst="rect">
+            <a:avLst/>
+          </a:prstGeom>
+          <a:noFill/>
+          <a:ln/>
+        </p:spPr>
+        <p:txBody>
+          <a:bodyPr wrap="square" lIns="0" tIns="0" rIns="0" bIns="0" rtlCol="0" anchor="ctr"/>
+          <a:lstStyle/>
+          <a:p>
+            <a:pPr algn="l" indent="0" marL="0">
+              <a:buNone/>
+            </a:pPr>
+            <a:r>
+              <a:rPr lang="en-US" sz="1200" b="1" spc="200" kern="0" dirty="0">
+                <a:solidFill>
+                  <a:schemeClr val="accent1"/>
+                </a:solidFill>
+              </a:rPr>
+              <a:t>ESTADO DEL PROYECTO</a:t>
+            </a:r>
+            <a:endParaRPr lang="en-US" sz="1200" dirty="0"/>
+          </a:p>
+        </p:txBody>
+      </p:sp>
+      <p:sp>
+        <p:nvSpPr>
+          <p:cNvPr id="3" name="Text 0"/>
+          <p:cNvSpPr/>
+          <p:nvPr>
+            <p:ph idx="101" type="title" hasCustomPrompt="1"/>
+          </p:nvPr>
+        </p:nvSpPr>
+        <p:spPr>
+          <a:xfrm>
+            <a:off x="640080" y="768096"/>
+            <a:ext cx="10911535" cy="731520"/>
+          </a:xfrm>
+          <a:prstGeom prst="rect">
+            <a:avLst/>
+          </a:prstGeom>
+          <a:noFill/>
+          <a:ln/>
+        </p:spPr>
+        <p:txBody>
+          <a:bodyPr wrap="square" lIns="0" tIns="0" rIns="0" bIns="0" rtlCol="0" anchor="t"/>
+          <a:lstStyle/>
+          <a:p>
+            <a:pPr algn="l" indent="0" marL="0">
+              <a:buNone/>
+            </a:pPr>
+            <a:r>
+              <a:rPr lang="en-US" sz="3600" b="1" dirty="0">
+                <a:solidFill>
+                  <a:schemeClr val="tx1"/>
+                </a:solidFill>
+              </a:rPr>
+              <a:t>Lo que ya está listo y lo que sigue</a:t>
+            </a:r>
+            <a:endParaRPr lang="en-US" sz="3600" dirty="0"/>
+          </a:p>
+        </p:txBody>
+      </p:sp>
+      <p:sp>
+        <p:nvSpPr>
+          <p:cNvPr id="4" name="tarjeta-213"/>
+          <p:cNvSpPr/>
+          <p:nvPr/>
+        </p:nvSpPr>
+        <p:spPr>
+          <a:xfrm>
+            <a:off x="640080" y="1783080"/>
+            <a:ext cx="5300320" cy="3794760"/>
+          </a:xfrm>
+          <a:prstGeom prst="roundRect">
+            <a:avLst>
+              <a:gd name="adj" fmla="val 3855"/>
+            </a:avLst>
+          </a:prstGeom>
+          <a:solidFill>
+            <a:schemeClr val="bg2"/>
+          </a:solidFill>
+          <a:ln/>
+        </p:spPr>
+      </p:sp>
+      <p:sp>
+        <p:nvSpPr>
+          <p:cNvPr id="5" name="listo"/>
+          <p:cNvSpPr txBox="1"/>
+          <p:nvPr/>
+        </p:nvSpPr>
+        <p:spPr>
+          <a:xfrm>
+            <a:off x="960120" y="1965960"/>
+            <a:ext cx="4660240" cy="457200"/>
+          </a:xfrm>
+          <a:prstGeom prst="rect">
+            <a:avLst/>
+          </a:prstGeom>
+          <a:noFill/>
+          <a:ln/>
+        </p:spPr>
+        <p:txBody>
+          <a:bodyPr wrap="square" lIns="0" tIns="0" rIns="0" bIns="0" rtlCol="0" anchor="ctr"/>
+          <a:lstStyle/>
+          <a:p>
+            <a:pPr indent="0" marL="0">
+              <a:buNone/>
+            </a:pPr>
+            <a:r>
+              <a:rPr lang="en-US" sz="1800" b="1" dirty="0">
+                <a:solidFill>
+                  <a:schemeClr val="tx1"/>
+                </a:solidFill>
+              </a:rPr>
+              <a:t>Ya disponible</a:t>
+            </a:r>
+            <a:endParaRPr lang="en-US" sz="1800" dirty="0"/>
+          </a:p>
+        </p:txBody>
+      </p:sp>
+      <p:sp>
+        <p:nvSpPr>
+          <p:cNvPr id="6" name="hecho-214"/>
+          <p:cNvSpPr/>
+          <p:nvPr/>
+        </p:nvSpPr>
+        <p:spPr>
+          <a:xfrm>
+            <a:off x="960120" y="2532888"/>
+            <a:ext cx="402336" cy="402336"/>
+          </a:xfrm>
+          <a:prstGeom prst="ellipse">
+            <a:avLst/>
+          </a:prstGeom>
+          <a:solidFill>
+            <a:schemeClr val="accent2"/>
+          </a:solidFill>
+          <a:ln/>
+        </p:spPr>
+      </p:sp>
       <p:pic>
         <p:nvPicPr>
-          <p:cNvPr id="2" name="logo-cierre" descr="Logo de Presentazo">    </p:cNvPr>
+          <p:cNvPr id="7" name="hecho-icono-215" descr="preencoded.png">    </p:cNvPr>
           <p:cNvPicPr>
             <a:picLocks noChangeAspect="1"/>
           </p:cNvPicPr>
@@ -6456,8 +6520,8 @@
         </p:blipFill>
         <p:spPr>
           <a:xfrm>
-            <a:off x="497434" y="685800"/>
-            <a:ext cx="914400" cy="914400"/>
+            <a:off x="1042416" y="2615184"/>
+            <a:ext cx="237744" cy="237744"/>
           </a:xfrm>
           <a:prstGeom prst="rect">
             <a:avLst/>
@@ -6466,54 +6530,14 @@
       </p:pic>
       <p:sp>
         <p:nvSpPr>
-          <p:cNvPr id="3" name="Text 0"/>
-          <p:cNvSpPr/>
-          <p:nvPr>
-            <p:ph idx="100" type="title" hasCustomPrompt="1"/>
-          </p:nvPr>
-        </p:nvSpPr>
-        <p:spPr>
-          <a:xfrm>
-            <a:off x="640080" y="1874520"/>
-            <a:ext cx="6949440" cy="914400"/>
-          </a:xfrm>
-          <a:prstGeom prst="rect">
-            <a:avLst/>
-          </a:prstGeom>
-          <a:noFill/>
-          <a:ln/>
-        </p:spPr>
-        <p:txBody>
-          <a:bodyPr wrap="square" lIns="0" tIns="0" rIns="0" bIns="0" rtlCol="0" anchor="b"/>
-          <a:lstStyle/>
-          <a:p>
-            <a:pPr algn="l" indent="0" marL="0">
-              <a:buNone/>
-            </a:pPr>
-            <a:r>
-              <a:rPr lang="en-US" sz="5200" b="1" dirty="0">
-                <a:solidFill>
-                  <a:schemeClr val="bg1"/>
-                </a:solidFill>
-              </a:rPr>
-              <a:t>Presenta con libertad</a:t>
-            </a:r>
-            <a:endParaRPr lang="en-US" sz="5200" dirty="0"/>
-          </a:p>
-        </p:txBody>
-      </p:sp>
-      <p:sp>
-        <p:nvSpPr>
-          <p:cNvPr id="4" name="Text 0"/>
-          <p:cNvSpPr/>
-          <p:nvPr>
-            <p:ph idx="101" type="body" hasCustomPrompt="1"/>
-          </p:nvPr>
-        </p:nvSpPr>
-        <p:spPr>
-          <a:xfrm>
-            <a:off x="640080" y="2926080"/>
-            <a:ext cx="6949440" cy="548640"/>
+          <p:cNvPr id="8" name="texto-216"/>
+          <p:cNvSpPr txBox="1"/>
+          <p:nvPr/>
+        </p:nvSpPr>
+        <p:spPr>
+          <a:xfrm>
+            <a:off x="1536192" y="2496312"/>
+            <a:ext cx="4111600" cy="713232"/>
           </a:xfrm>
           <a:prstGeom prst="rect">
             <a:avLst/>
@@ -6525,24 +6549,61 @@
           <a:bodyPr wrap="square" lIns="0" tIns="0" rIns="0" bIns="0" rtlCol="0" anchor="t"/>
           <a:lstStyle/>
           <a:p>
-            <a:pPr algn="l" indent="0" marL="0">
-              <a:buNone/>
-            </a:pPr>
-            <a:r>
-              <a:rPr lang="en-US" sz="2000" dirty="0">
-                <a:solidFill>
-                  <a:schemeClr val="accent5"/>
-                </a:solidFill>
-              </a:rPr>
-              <a:t>Escanea, conecta y presenta desde tu celular.</a:t>
-            </a:r>
-            <a:endParaRPr lang="en-US" sz="2000" dirty="0"/>
-          </a:p>
-        </p:txBody>
+            <a:pPr indent="0" marL="0">
+              <a:spcAft>
+                <a:spcPts val="300"/>
+              </a:spcAft>
+              <a:buNone/>
+            </a:pPr>
+            <a:r>
+              <a:rPr lang="en-US" sz="1500" b="1" dirty="0">
+                <a:solidFill>
+                  <a:schemeClr val="tx1"/>
+                </a:solidFill>
+              </a:rPr>
+              <a:t>Instaladores para Windows y Mac</a:t>
+            </a:r>
+            <a:endParaRPr lang="en-US" sz="1500" dirty="0"/>
+          </a:p>
+          <a:p>
+            <a:pPr indent="0" marL="0">
+              <a:buNone/>
+            </a:pPr>
+            <a:r>
+              <a:rPr lang="en-US" sz="1300" dirty="0">
+                <a:solidFill>
+                  <a:schemeClr val="accent6"/>
+                </a:solidFill>
+              </a:rPr>
+              <a:t>Windows, Mac Intel y Mac con chip M.</a:t>
+            </a:r>
+            <a:endParaRPr lang="en-US" sz="1500" dirty="0"/>
+          </a:p>
+        </p:txBody>
+      </p:sp>
+      <p:sp>
+        <p:nvSpPr>
+          <p:cNvPr id="9" name="hecho-217"/>
+          <p:cNvSpPr/>
+          <p:nvPr/>
+        </p:nvSpPr>
+        <p:spPr>
+          <a:xfrm>
+            <a:off x="960120" y="3136392"/>
+            <a:ext cx="402336" cy="402336"/>
+          </a:xfrm>
+          <a:prstGeom prst="ellipse">
+            <a:avLst/>
+          </a:prstGeom>
+          <a:solidFill>
+            <a:schemeClr val="accent2"/>
+          </a:solidFill>
+          <a:ln/>
+        </p:spPr>
       </p:sp>
       <p:pic>
         <p:nvPicPr>
-          <p:cNvPr id="5" name="enlace-icono-216" descr="preencoded.png">    </p:cNvPr>
+          <p:cNvPr id="10" name="hecho-icono-218" descr="preencoded.png">    </p:cNvPr>
           <p:cNvPicPr>
             <a:picLocks noChangeAspect="1"/>
           </p:cNvPicPr>
@@ -6556,8 +6617,8 @@
         </p:blipFill>
         <p:spPr>
           <a:xfrm>
-            <a:off x="640080" y="3995928"/>
-            <a:ext cx="292608" cy="292608"/>
+            <a:off x="1042416" y="3218688"/>
+            <a:ext cx="237744" cy="237744"/>
           </a:xfrm>
           <a:prstGeom prst="rect">
             <a:avLst/>
@@ -6566,43 +6627,80 @@
       </p:pic>
       <p:sp>
         <p:nvSpPr>
-          <p:cNvPr id="6" name="enlace-217"/>
+          <p:cNvPr id="11" name="texto-219"/>
           <p:cNvSpPr txBox="1"/>
           <p:nvPr/>
         </p:nvSpPr>
         <p:spPr>
           <a:xfrm>
-            <a:off x="1097280" y="3931920"/>
-            <a:ext cx="5486400" cy="420624"/>
-          </a:xfrm>
-          <a:prstGeom prst="rect">
-            <a:avLst/>
-          </a:prstGeom>
-          <a:noFill/>
-          <a:ln/>
-        </p:spPr>
-        <p:txBody>
-          <a:bodyPr wrap="square" lIns="0" tIns="0" rIns="0" bIns="0" rtlCol="0" anchor="ctr"/>
-          <a:lstStyle/>
-          <a:p>
-            <a:pPr indent="0" marL="0">
-              <a:buNone/>
-            </a:pPr>
-            <a:r>
-              <a:rPr lang="en-US" sz="1600" dirty="0">
-                <a:solidFill>
-                  <a:schemeClr val="bg1"/>
-                </a:solidFill>
-              </a:rPr>
-              <a:t>mjmc4498.github.io/mando</a:t>
-            </a:r>
-            <a:endParaRPr lang="en-US" sz="1600" dirty="0"/>
-          </a:p>
-        </p:txBody>
+            <a:off x="1536192" y="3099816"/>
+            <a:ext cx="4111600" cy="713232"/>
+          </a:xfrm>
+          <a:prstGeom prst="rect">
+            <a:avLst/>
+          </a:prstGeom>
+          <a:noFill/>
+          <a:ln/>
+        </p:spPr>
+        <p:txBody>
+          <a:bodyPr wrap="square" lIns="0" tIns="0" rIns="0" bIns="0" rtlCol="0" anchor="t"/>
+          <a:lstStyle/>
+          <a:p>
+            <a:pPr indent="0" marL="0">
+              <a:spcAft>
+                <a:spcPts val="300"/>
+              </a:spcAft>
+              <a:buNone/>
+            </a:pPr>
+            <a:r>
+              <a:rPr lang="en-US" sz="1500" b="1" dirty="0">
+                <a:solidFill>
+                  <a:schemeClr val="tx1"/>
+                </a:solidFill>
+              </a:rPr>
+              <a:t>Retransmisión con Cloudflare</a:t>
+            </a:r>
+            <a:endParaRPr lang="en-US" sz="1500" dirty="0"/>
+          </a:p>
+          <a:p>
+            <a:pPr indent="0" marL="0">
+              <a:buNone/>
+            </a:pPr>
+            <a:r>
+              <a:rPr lang="en-US" sz="1300" dirty="0">
+                <a:solidFill>
+                  <a:schemeClr val="accent6"/>
+                </a:solidFill>
+              </a:rPr>
+              <a:t>Conecta incluso en redes de empresa (puerto 443).</a:t>
+            </a:r>
+            <a:endParaRPr lang="en-US" sz="1500" dirty="0"/>
+          </a:p>
+        </p:txBody>
+      </p:sp>
+      <p:sp>
+        <p:nvSpPr>
+          <p:cNvPr id="12" name="hecho-220"/>
+          <p:cNvSpPr/>
+          <p:nvPr/>
+        </p:nvSpPr>
+        <p:spPr>
+          <a:xfrm>
+            <a:off x="960120" y="3739896"/>
+            <a:ext cx="402336" cy="402336"/>
+          </a:xfrm>
+          <a:prstGeom prst="ellipse">
+            <a:avLst/>
+          </a:prstGeom>
+          <a:solidFill>
+            <a:schemeClr val="accent2"/>
+          </a:solidFill>
+          <a:ln/>
+        </p:spPr>
       </p:sp>
       <p:pic>
         <p:nvPicPr>
-          <p:cNvPr id="7" name="enlace-icono-218" descr="preencoded.png">    </p:cNvPr>
+          <p:cNvPr id="13" name="hecho-icono-221" descr="preencoded.png">    </p:cNvPr>
           <p:cNvPicPr>
             <a:picLocks noChangeAspect="1"/>
           </p:cNvPicPr>
@@ -6616,8 +6714,8 @@
         </p:blipFill>
         <p:spPr>
           <a:xfrm>
-            <a:off x="640080" y="4562856"/>
-            <a:ext cx="292608" cy="292608"/>
+            <a:off x="1042416" y="3822192"/>
+            <a:ext cx="237744" cy="237744"/>
           </a:xfrm>
           <a:prstGeom prst="rect">
             <a:avLst/>
@@ -6626,43 +6724,80 @@
       </p:pic>
       <p:sp>
         <p:nvSpPr>
-          <p:cNvPr id="8" name="enlace-219"/>
+          <p:cNvPr id="14" name="texto-222"/>
           <p:cNvSpPr txBox="1"/>
           <p:nvPr/>
         </p:nvSpPr>
         <p:spPr>
           <a:xfrm>
-            <a:off x="1097280" y="4498848"/>
-            <a:ext cx="5486400" cy="420624"/>
-          </a:xfrm>
-          <a:prstGeom prst="rect">
-            <a:avLst/>
-          </a:prstGeom>
-          <a:noFill/>
-          <a:ln/>
-        </p:spPr>
-        <p:txBody>
-          <a:bodyPr wrap="square" lIns="0" tIns="0" rIns="0" bIns="0" rtlCol="0" anchor="ctr"/>
-          <a:lstStyle/>
-          <a:p>
-            <a:pPr indent="0" marL="0">
-              <a:buNone/>
-            </a:pPr>
-            <a:r>
-              <a:rPr lang="en-US" sz="1600" dirty="0">
-                <a:solidFill>
-                  <a:schemeClr val="bg1"/>
-                </a:solidFill>
-              </a:rPr>
-              <a:t>github.com/mjmc4498/mando</a:t>
-            </a:r>
-            <a:endParaRPr lang="en-US" sz="1600" dirty="0"/>
-          </a:p>
-        </p:txBody>
+            <a:off x="1536192" y="3703320"/>
+            <a:ext cx="4111600" cy="713232"/>
+          </a:xfrm>
+          <a:prstGeom prst="rect">
+            <a:avLst/>
+          </a:prstGeom>
+          <a:noFill/>
+          <a:ln/>
+        </p:spPr>
+        <p:txBody>
+          <a:bodyPr wrap="square" lIns="0" tIns="0" rIns="0" bIns="0" rtlCol="0" anchor="t"/>
+          <a:lstStyle/>
+          <a:p>
+            <a:pPr indent="0" marL="0">
+              <a:spcAft>
+                <a:spcPts val="300"/>
+              </a:spcAft>
+              <a:buNone/>
+            </a:pPr>
+            <a:r>
+              <a:rPr lang="en-US" sz="1500" b="1" dirty="0">
+                <a:solidFill>
+                  <a:schemeClr val="tx1"/>
+                </a:solidFill>
+              </a:rPr>
+              <a:t>Protección de costos</a:t>
+            </a:r>
+            <a:endParaRPr lang="en-US" sz="1500" dirty="0"/>
+          </a:p>
+          <a:p>
+            <a:pPr indent="0" marL="0">
+              <a:buNone/>
+            </a:pPr>
+            <a:r>
+              <a:rPr lang="en-US" sz="1300" dirty="0">
+                <a:solidFill>
+                  <a:schemeClr val="accent6"/>
+                </a:solidFill>
+              </a:rPr>
+              <a:t>Se pausa sola a los 900 GB del mes y se reactiva cada mes.</a:t>
+            </a:r>
+            <a:endParaRPr lang="en-US" sz="1500" dirty="0"/>
+          </a:p>
+        </p:txBody>
+      </p:sp>
+      <p:sp>
+        <p:nvSpPr>
+          <p:cNvPr id="15" name="hecho-223"/>
+          <p:cNvSpPr/>
+          <p:nvPr/>
+        </p:nvSpPr>
+        <p:spPr>
+          <a:xfrm>
+            <a:off x="960120" y="4343400"/>
+            <a:ext cx="402336" cy="402336"/>
+          </a:xfrm>
+          <a:prstGeom prst="ellipse">
+            <a:avLst/>
+          </a:prstGeom>
+          <a:solidFill>
+            <a:schemeClr val="accent2"/>
+          </a:solidFill>
+          <a:ln/>
+        </p:spPr>
       </p:sp>
       <p:pic>
         <p:nvPicPr>
-          <p:cNvPr id="9" name="enlace-icono-220" descr="preencoded.png">    </p:cNvPr>
+          <p:cNvPr id="16" name="hecho-icono-224" descr="preencoded.png">    </p:cNvPr>
           <p:cNvPicPr>
             <a:picLocks noChangeAspect="1"/>
           </p:cNvPicPr>
@@ -6676,8 +6811,8 @@
         </p:blipFill>
         <p:spPr>
           <a:xfrm>
-            <a:off x="640080" y="5129784"/>
-            <a:ext cx="292608" cy="292608"/>
+            <a:off x="1042416" y="4425696"/>
+            <a:ext cx="237744" cy="237744"/>
           </a:xfrm>
           <a:prstGeom prst="rect">
             <a:avLst/>
@@ -6686,65 +6821,80 @@
       </p:pic>
       <p:sp>
         <p:nvSpPr>
-          <p:cNvPr id="10" name="enlace-221"/>
+          <p:cNvPr id="17" name="texto-225"/>
           <p:cNvSpPr txBox="1"/>
           <p:nvPr/>
         </p:nvSpPr>
         <p:spPr>
           <a:xfrm>
-            <a:off x="1097280" y="5065776"/>
-            <a:ext cx="5486400" cy="420624"/>
-          </a:xfrm>
-          <a:prstGeom prst="rect">
-            <a:avLst/>
-          </a:prstGeom>
-          <a:noFill/>
-          <a:ln/>
-        </p:spPr>
-        <p:txBody>
-          <a:bodyPr wrap="square" lIns="0" tIns="0" rIns="0" bIns="0" rtlCol="0" anchor="ctr"/>
-          <a:lstStyle/>
-          <a:p>
-            <a:pPr indent="0" marL="0">
-              <a:buNone/>
-            </a:pPr>
-            <a:r>
-              <a:rPr lang="en-US" sz="1600" dirty="0">
-                <a:solidFill>
-                  <a:schemeClr val="bg1"/>
-                </a:solidFill>
-              </a:rPr>
-              <a:t>Miguel Mogrovejo</a:t>
-            </a:r>
-            <a:endParaRPr lang="en-US" sz="1600" dirty="0"/>
-          </a:p>
-        </p:txBody>
-      </p:sp>
-      <p:sp>
-        <p:nvSpPr>
-          <p:cNvPr id="11" name="qr-tarjeta"/>
-          <p:cNvSpPr/>
-          <p:nvPr/>
-        </p:nvSpPr>
-        <p:spPr>
-          <a:xfrm>
-            <a:off x="8458200" y="1783080"/>
-            <a:ext cx="3090672" cy="3703320"/>
-          </a:xfrm>
-          <a:prstGeom prst="roundRect">
-            <a:avLst>
-              <a:gd name="adj" fmla="val 6509"/>
-            </a:avLst>
+            <a:off x="1536192" y="4306824"/>
+            <a:ext cx="4111600" cy="713232"/>
+          </a:xfrm>
+          <a:prstGeom prst="rect">
+            <a:avLst/>
+          </a:prstGeom>
+          <a:noFill/>
+          <a:ln/>
+        </p:spPr>
+        <p:txBody>
+          <a:bodyPr wrap="square" lIns="0" tIns="0" rIns="0" bIns="0" rtlCol="0" anchor="t"/>
+          <a:lstStyle/>
+          <a:p>
+            <a:pPr indent="0" marL="0">
+              <a:spcAft>
+                <a:spcPts val="300"/>
+              </a:spcAft>
+              <a:buNone/>
+            </a:pPr>
+            <a:r>
+              <a:rPr lang="en-US" sz="1500" b="1" dirty="0">
+                <a:solidFill>
+                  <a:schemeClr val="tx1"/>
+                </a:solidFill>
+              </a:rPr>
+              <a:t>Código QR nuevo en cada sesión</a:t>
+            </a:r>
+            <a:endParaRPr lang="en-US" sz="1500" dirty="0"/>
+          </a:p>
+          <a:p>
+            <a:pPr indent="0" marL="0">
+              <a:buNone/>
+            </a:pPr>
+            <a:r>
+              <a:rPr lang="en-US" sz="1300" dirty="0">
+                <a:solidFill>
+                  <a:schemeClr val="accent6"/>
+                </a:solidFill>
+              </a:rPr>
+              <a:t>Activado por defecto; se puede cambiar en Ajustes.</a:t>
+            </a:r>
+            <a:endParaRPr lang="en-US" sz="1500" dirty="0"/>
+          </a:p>
+        </p:txBody>
+      </p:sp>
+      <p:sp>
+        <p:nvSpPr>
+          <p:cNvPr id="18" name="hecho-226"/>
+          <p:cNvSpPr/>
+          <p:nvPr/>
+        </p:nvSpPr>
+        <p:spPr>
+          <a:xfrm>
+            <a:off x="960120" y="4946904"/>
+            <a:ext cx="402336" cy="402336"/>
+          </a:xfrm>
+          <a:prstGeom prst="ellipse">
+            <a:avLst/>
           </a:prstGeom>
           <a:solidFill>
-            <a:schemeClr val="bg1"/>
+            <a:schemeClr val="accent2"/>
           </a:solidFill>
           <a:ln/>
         </p:spPr>
       </p:sp>
       <p:pic>
         <p:nvPicPr>
-          <p:cNvPr id="12" name="qr" descr="Código QR al repositorio de Presentazo en GitHub">    </p:cNvPr>
+          <p:cNvPr id="19" name="hecho-icono-227" descr="preencoded.png">    </p:cNvPr>
           <p:cNvPicPr>
             <a:picLocks noChangeAspect="1"/>
           </p:cNvPicPr>
@@ -6758,8 +6908,8 @@
         </p:blipFill>
         <p:spPr>
           <a:xfrm>
-            <a:off x="8814816" y="2103120"/>
-            <a:ext cx="2377440" cy="2377440"/>
+            <a:off x="1042416" y="5029200"/>
+            <a:ext cx="237744" cy="237744"/>
           </a:xfrm>
           <a:prstGeom prst="rect">
             <a:avLst/>
@@ -6768,14 +6918,67 @@
       </p:pic>
       <p:sp>
         <p:nvSpPr>
-          <p:cNvPr id="13" name="qr-texto"/>
+          <p:cNvPr id="20" name="texto-228"/>
           <p:cNvSpPr txBox="1"/>
           <p:nvPr/>
         </p:nvSpPr>
         <p:spPr>
           <a:xfrm>
-            <a:off x="8641080" y="4709160"/>
-            <a:ext cx="2724912" cy="457200"/>
+            <a:off x="1536192" y="4910328"/>
+            <a:ext cx="4111600" cy="713232"/>
+          </a:xfrm>
+          <a:prstGeom prst="rect">
+            <a:avLst/>
+          </a:prstGeom>
+          <a:noFill/>
+          <a:ln/>
+        </p:spPr>
+        <p:txBody>
+          <a:bodyPr wrap="square" lIns="0" tIns="0" rIns="0" bIns="0" rtlCol="0" anchor="t"/>
+          <a:lstStyle/>
+          <a:p>
+            <a:pPr indent="0" marL="0">
+              <a:spcAft>
+                <a:spcPts val="300"/>
+              </a:spcAft>
+              <a:buNone/>
+            </a:pPr>
+            <a:r>
+              <a:rPr lang="en-US" sz="1500" b="1" dirty="0">
+                <a:solidFill>
+                  <a:schemeClr val="tx1"/>
+                </a:solidFill>
+              </a:rPr>
+              <a:t>Control web publicado</a:t>
+            </a:r>
+            <a:endParaRPr lang="en-US" sz="1500" dirty="0"/>
+          </a:p>
+          <a:p>
+            <a:pPr indent="0" marL="0">
+              <a:buNone/>
+            </a:pPr>
+            <a:r>
+              <a:rPr lang="en-US" sz="1300" dirty="0">
+                <a:solidFill>
+                  <a:schemeClr val="accent6"/>
+                </a:solidFill>
+              </a:rPr>
+              <a:t>En GitHub Pages, con reconexión automática.</a:t>
+            </a:r>
+            <a:endParaRPr lang="en-US" sz="1500" dirty="0"/>
+          </a:p>
+        </p:txBody>
+      </p:sp>
+      <p:sp>
+        <p:nvSpPr>
+          <p:cNvPr id="21" name="sigue"/>
+          <p:cNvSpPr txBox="1"/>
+          <p:nvPr/>
+        </p:nvSpPr>
+        <p:spPr>
+          <a:xfrm>
+            <a:off x="6251296" y="1965960"/>
+            <a:ext cx="5300320" cy="457200"/>
           </a:xfrm>
           <a:prstGeom prst="rect">
             <a:avLst/>
@@ -6787,18 +6990,431 @@
           <a:bodyPr wrap="square" lIns="0" tIns="0" rIns="0" bIns="0" rtlCol="0" anchor="ctr"/>
           <a:lstStyle/>
           <a:p>
-            <a:pPr algn="ctr" indent="0" marL="0">
-              <a:buNone/>
-            </a:pPr>
-            <a:r>
-              <a:rPr lang="en-US" sz="1400" b="1" dirty="0">
+            <a:pPr indent="0" marL="0">
+              <a:buNone/>
+            </a:pPr>
+            <a:r>
+              <a:rPr lang="en-US" sz="1800" b="1" dirty="0">
                 <a:solidFill>
                   <a:schemeClr val="tx1"/>
                 </a:solidFill>
               </a:rPr>
-              <a:t>Escanea para ver el proyecto</a:t>
-            </a:r>
-            <a:endParaRPr lang="en-US" sz="1400" dirty="0"/>
+              <a:t>Lo que sigue</a:t>
+            </a:r>
+            <a:endParaRPr lang="en-US" sz="1800" dirty="0"/>
+          </a:p>
+        </p:txBody>
+      </p:sp>
+      <p:sp>
+        <p:nvSpPr>
+          <p:cNvPr id="22" name="icono-fondo-229"/>
+          <p:cNvSpPr/>
+          <p:nvPr/>
+        </p:nvSpPr>
+        <p:spPr>
+          <a:xfrm>
+            <a:off x="6251296" y="2560320"/>
+            <a:ext cx="502920" cy="502920"/>
+          </a:xfrm>
+          <a:prstGeom prst="roundRect">
+            <a:avLst>
+              <a:gd name="adj" fmla="val 26000"/>
+            </a:avLst>
+          </a:prstGeom>
+          <a:solidFill>
+            <a:schemeClr val="accent1"/>
+          </a:solidFill>
+          <a:ln/>
+        </p:spPr>
+      </p:sp>
+      <p:pic>
+        <p:nvPicPr>
+          <p:cNvPr id="23" name="icono-LuHourglass-230" descr="preencoded.png">    </p:cNvPr>
+          <p:cNvPicPr>
+            <a:picLocks noChangeAspect="1"/>
+          </p:cNvPicPr>
+          <p:nvPr/>
+        </p:nvPicPr>
+        <p:blipFill>
+          <a:blip r:embed="rId6"/>
+          <a:stretch>
+            <a:fillRect/>
+          </a:stretch>
+        </p:blipFill>
+        <p:spPr>
+          <a:xfrm>
+            <a:off x="6371996" y="2681021"/>
+            <a:ext cx="261518" cy="261518"/>
+          </a:xfrm>
+          <a:prstGeom prst="rect">
+            <a:avLst/>
+          </a:prstGeom>
+        </p:spPr>
+      </p:pic>
+      <p:sp>
+        <p:nvSpPr>
+          <p:cNvPr id="24" name="texto-231"/>
+          <p:cNvSpPr txBox="1"/>
+          <p:nvPr/>
+        </p:nvSpPr>
+        <p:spPr>
+          <a:xfrm>
+            <a:off x="6982816" y="2523744"/>
+            <a:ext cx="4568800" cy="1051560"/>
+          </a:xfrm>
+          <a:prstGeom prst="rect">
+            <a:avLst/>
+          </a:prstGeom>
+          <a:noFill/>
+          <a:ln/>
+        </p:spPr>
+        <p:txBody>
+          <a:bodyPr wrap="square" lIns="0" tIns="0" rIns="0" bIns="0" rtlCol="0" anchor="t"/>
+          <a:lstStyle/>
+          <a:p>
+            <a:pPr indent="0" marL="0">
+              <a:spcAft>
+                <a:spcPts val="300"/>
+              </a:spcAft>
+              <a:buNone/>
+            </a:pPr>
+            <a:r>
+              <a:rPr lang="en-US" sz="1600" b="1" dirty="0">
+                <a:solidFill>
+                  <a:schemeClr val="tx1"/>
+                </a:solidFill>
+              </a:rPr>
+              <a:t>Chrome Web Store</a:t>
+            </a:r>
+            <a:endParaRPr lang="en-US" sz="1600" dirty="0"/>
+          </a:p>
+          <a:p>
+            <a:pPr indent="0" marL="0">
+              <a:buNone/>
+            </a:pPr>
+            <a:r>
+              <a:rPr lang="en-US" sz="1400" dirty="0">
+                <a:solidFill>
+                  <a:schemeClr val="accent6"/>
+                </a:solidFill>
+              </a:rPr>
+              <a:t>La versión 1.0 («Mando») está en revisión. Al aprobarse, se sube la 1.1 con el nombre Presentazo.</a:t>
+            </a:r>
+            <a:endParaRPr lang="en-US" sz="1600" dirty="0"/>
+          </a:p>
+        </p:txBody>
+      </p:sp>
+      <p:sp>
+        <p:nvSpPr>
+          <p:cNvPr id="25" name="icono-fondo-232"/>
+          <p:cNvSpPr/>
+          <p:nvPr/>
+        </p:nvSpPr>
+        <p:spPr>
+          <a:xfrm>
+            <a:off x="6251296" y="3547872"/>
+            <a:ext cx="502920" cy="502920"/>
+          </a:xfrm>
+          <a:prstGeom prst="roundRect">
+            <a:avLst>
+              <a:gd name="adj" fmla="val 26000"/>
+            </a:avLst>
+          </a:prstGeom>
+          <a:solidFill>
+            <a:schemeClr val="accent1"/>
+          </a:solidFill>
+          <a:ln/>
+        </p:spPr>
+      </p:sp>
+      <p:pic>
+        <p:nvPicPr>
+          <p:cNvPr id="26" name="icono-LuBadgeCheck-233" descr="preencoded.png">    </p:cNvPr>
+          <p:cNvPicPr>
+            <a:picLocks noChangeAspect="1"/>
+          </p:cNvPicPr>
+          <p:nvPr/>
+        </p:nvPicPr>
+        <p:blipFill>
+          <a:blip r:embed="rId7"/>
+          <a:stretch>
+            <a:fillRect/>
+          </a:stretch>
+        </p:blipFill>
+        <p:spPr>
+          <a:xfrm>
+            <a:off x="6371996" y="3668573"/>
+            <a:ext cx="261518" cy="261518"/>
+          </a:xfrm>
+          <a:prstGeom prst="rect">
+            <a:avLst/>
+          </a:prstGeom>
+        </p:spPr>
+      </p:pic>
+      <p:sp>
+        <p:nvSpPr>
+          <p:cNvPr id="27" name="texto-234"/>
+          <p:cNvSpPr txBox="1"/>
+          <p:nvPr/>
+        </p:nvSpPr>
+        <p:spPr>
+          <a:xfrm>
+            <a:off x="6982816" y="3511296"/>
+            <a:ext cx="4568800" cy="1051560"/>
+          </a:xfrm>
+          <a:prstGeom prst="rect">
+            <a:avLst/>
+          </a:prstGeom>
+          <a:noFill/>
+          <a:ln/>
+        </p:spPr>
+        <p:txBody>
+          <a:bodyPr wrap="square" lIns="0" tIns="0" rIns="0" bIns="0" rtlCol="0" anchor="t"/>
+          <a:lstStyle/>
+          <a:p>
+            <a:pPr indent="0" marL="0">
+              <a:spcAft>
+                <a:spcPts val="300"/>
+              </a:spcAft>
+              <a:buNone/>
+            </a:pPr>
+            <a:r>
+              <a:rPr lang="en-US" sz="1600" b="1" dirty="0">
+                <a:solidFill>
+                  <a:schemeClr val="tx1"/>
+                </a:solidFill>
+              </a:rPr>
+              <a:t>Firma de Apple y Microsoft</a:t>
+            </a:r>
+            <a:endParaRPr lang="en-US" sz="1600" dirty="0"/>
+          </a:p>
+          <a:p>
+            <a:pPr indent="0" marL="0">
+              <a:buNone/>
+            </a:pPr>
+            <a:r>
+              <a:rPr lang="en-US" sz="1400" dirty="0">
+                <a:solidFill>
+                  <a:schemeClr val="accent6"/>
+                </a:solidFill>
+              </a:rPr>
+              <a:t>Firmar los instaladores para que no aparezca el aviso de seguridad al abrirlos.</a:t>
+            </a:r>
+            <a:endParaRPr lang="en-US" sz="1600" dirty="0"/>
+          </a:p>
+        </p:txBody>
+      </p:sp>
+      <p:sp>
+        <p:nvSpPr>
+          <p:cNvPr id="28" name="icono-fondo-235"/>
+          <p:cNvSpPr/>
+          <p:nvPr/>
+        </p:nvSpPr>
+        <p:spPr>
+          <a:xfrm>
+            <a:off x="6251296" y="4535424"/>
+            <a:ext cx="502920" cy="502920"/>
+          </a:xfrm>
+          <a:prstGeom prst="roundRect">
+            <a:avLst>
+              <a:gd name="adj" fmla="val 26000"/>
+            </a:avLst>
+          </a:prstGeom>
+          <a:solidFill>
+            <a:schemeClr val="accent1"/>
+          </a:solidFill>
+          <a:ln/>
+        </p:spPr>
+      </p:sp>
+      <p:pic>
+        <p:nvPicPr>
+          <p:cNvPr id="29" name="icono-LuWatch-236" descr="preencoded.png">    </p:cNvPr>
+          <p:cNvPicPr>
+            <a:picLocks noChangeAspect="1"/>
+          </p:cNvPicPr>
+          <p:nvPr/>
+        </p:nvPicPr>
+        <p:blipFill>
+          <a:blip r:embed="rId8"/>
+          <a:stretch>
+            <a:fillRect/>
+          </a:stretch>
+        </p:blipFill>
+        <p:spPr>
+          <a:xfrm>
+            <a:off x="6371996" y="4656125"/>
+            <a:ext cx="261518" cy="261518"/>
+          </a:xfrm>
+          <a:prstGeom prst="rect">
+            <a:avLst/>
+          </a:prstGeom>
+        </p:spPr>
+      </p:pic>
+      <p:sp>
+        <p:nvSpPr>
+          <p:cNvPr id="30" name="texto-237"/>
+          <p:cNvSpPr txBox="1"/>
+          <p:nvPr/>
+        </p:nvSpPr>
+        <p:spPr>
+          <a:xfrm>
+            <a:off x="6982816" y="4498848"/>
+            <a:ext cx="4568800" cy="1051560"/>
+          </a:xfrm>
+          <a:prstGeom prst="rect">
+            <a:avLst/>
+          </a:prstGeom>
+          <a:noFill/>
+          <a:ln/>
+        </p:spPr>
+        <p:txBody>
+          <a:bodyPr wrap="square" lIns="0" tIns="0" rIns="0" bIns="0" rtlCol="0" anchor="t"/>
+          <a:lstStyle/>
+          <a:p>
+            <a:pPr indent="0" marL="0">
+              <a:spcAft>
+                <a:spcPts val="300"/>
+              </a:spcAft>
+              <a:buNone/>
+            </a:pPr>
+            <a:r>
+              <a:rPr lang="en-US" sz="1600" b="1" dirty="0">
+                <a:solidFill>
+                  <a:schemeClr val="tx1"/>
+                </a:solidFill>
+              </a:rPr>
+              <a:t>App para Apple Watch</a:t>
+            </a:r>
+            <a:endParaRPr lang="en-US" sz="1600" dirty="0"/>
+          </a:p>
+          <a:p>
+            <a:pPr indent="0" marL="0">
+              <a:buNone/>
+            </a:pPr>
+            <a:r>
+              <a:rPr lang="en-US" sz="1400" dirty="0">
+                <a:solidFill>
+                  <a:schemeClr val="accent6"/>
+                </a:solidFill>
+              </a:rPr>
+              <a:t>Evaluar una app nativa que use el iPhone como puente.</a:t>
+            </a:r>
+            <a:endParaRPr lang="en-US" sz="1600" dirty="0"/>
+          </a:p>
+        </p:txBody>
+      </p:sp>
+      <p:pic>
+        <p:nvPicPr>
+          <p:cNvPr id="31" name="limites-icono" descr="preencoded.png">    </p:cNvPr>
+          <p:cNvPicPr>
+            <a:picLocks noChangeAspect="1"/>
+          </p:cNvPicPr>
+          <p:nvPr/>
+        </p:nvPicPr>
+        <p:blipFill>
+          <a:blip r:embed="rId9"/>
+          <a:stretch>
+            <a:fillRect/>
+          </a:stretch>
+        </p:blipFill>
+        <p:spPr>
+          <a:xfrm>
+            <a:off x="640080" y="5788152"/>
+            <a:ext cx="256032" cy="256032"/>
+          </a:xfrm>
+          <a:prstGeom prst="rect">
+            <a:avLst/>
+          </a:prstGeom>
+        </p:spPr>
+      </p:pic>
+      <p:sp>
+        <p:nvSpPr>
+          <p:cNvPr id="32" name="limites"/>
+          <p:cNvSpPr txBox="1"/>
+          <p:nvPr/>
+        </p:nvSpPr>
+        <p:spPr>
+          <a:xfrm>
+            <a:off x="1024128" y="5715000"/>
+            <a:ext cx="10527487" cy="411480"/>
+          </a:xfrm>
+          <a:prstGeom prst="rect">
+            <a:avLst/>
+          </a:prstGeom>
+          <a:noFill/>
+          <a:ln/>
+        </p:spPr>
+        <p:txBody>
+          <a:bodyPr wrap="square" lIns="0" tIns="0" rIns="0" bIns="0" rtlCol="0" anchor="ctr"/>
+          <a:lstStyle/>
+          <a:p>
+            <a:pPr indent="0" marL="0">
+              <a:buNone/>
+            </a:pPr>
+            <a:r>
+              <a:rPr lang="en-US" sz="1300" b="1" dirty="0">
+                <a:solidFill>
+                  <a:schemeClr val="tx1"/>
+                </a:solidFill>
+              </a:rPr>
+              <a:t>Límites que se mantienen: </a:t>
+            </a:r>
+            <a:pPr indent="0" marL="0">
+              <a:buNone/>
+            </a:pPr>
+            <a:r>
+              <a:rPr lang="en-US" sz="1300" dirty="0">
+                <a:solidFill>
+                  <a:schemeClr val="accent6"/>
+                </a:solidFill>
+              </a:rPr>
+              <a:t>necesita internet para enlazar los dispositivos, y la extensión no funciona en las páginas internas de Chrome.</a:t>
+            </a:r>
+            <a:endParaRPr lang="en-US" sz="1300" dirty="0"/>
+          </a:p>
+        </p:txBody>
+      </p:sp>
+      <p:sp>
+        <p:nvSpPr>
+          <p:cNvPr id="25" name="Slide Number Placeholder 0"/>
+          <p:cNvSpPr>
+            <a:spLocks noGrp="1"/>
+          </p:cNvSpPr>
+          <p:nvPr>
+            <p:ph type="sldNum" sz="quarter" idx="4294967295"/>
+          </p:nvPr>
+        </p:nvSpPr>
+        <p:spPr>
+          <a:xfrm>
+            <a:off x="10820095" y="6382512"/>
+            <a:ext cx="731520" cy="256032"/>
+          </a:xfrm>
+          <a:prstGeom prst="rect">
+            <a:avLst/>
+          </a:prstGeom>
+          <a:extLst>
+            <a:ext uri="{C572A759-6A51-4108-AA02-DFA0A04FC94B}">
+              <ma14:wrappingTextBoxFlag xmlns:ma14="http://schemas.microsoft.com/office/mac/drawingml/2011/main" val="0"/>
+            </a:ext>
+          </a:extLst>
+        </p:spPr>
+        <p:txBody>
+          <a:bodyPr lIns="0" tIns="0" rIns="0" bIns="0"/>
+          <a:lstStyle>
+            <a:lvl1pPr>
+              <a:defRPr sz="1000">
+                <a:solidFill>
+                  <a:schemeClr val="accent6"/>
+                </a:solidFill>
+              </a:defRPr>
+            </a:lvl1pPr>
+          </a:lstStyle>
+          <a:p>
+            <a:pPr algn="r"/>
+            <a:fld id="{F7021451-1387-4CA6-816F-3879F97B5CBC}" type="slidenum">
+              <a:rPr b="0" lang="en-US"/>
+              <a:t>14</a:t>
+            </a:fld>
+            <a:endParaRPr lang="en-US"/>
           </a:p>
         </p:txBody>
       </p:sp>
@@ -6829,7 +7445,7 @@
       </p:grpSpPr>
       <p:pic>
         <p:nvPicPr>
-          <p:cNvPr id="2" name="logo-final" descr="Logo de Presentazo">    </p:cNvPr>
+          <p:cNvPr id="2" name="logo-cierre" descr="Logo de Presentazo">    </p:cNvPr>
           <p:cNvPicPr>
             <a:picLocks noChangeAspect="1"/>
           </p:cNvPicPr>
@@ -6843,8 +7459,8 @@
         </p:blipFill>
         <p:spPr>
           <a:xfrm>
-            <a:off x="680314" y="1417320"/>
-            <a:ext cx="1143000" cy="1143000"/>
+            <a:off x="497434" y="685800"/>
+            <a:ext cx="914400" cy="914400"/>
           </a:xfrm>
           <a:prstGeom prst="rect">
             <a:avLst/>
@@ -6861,8 +7477,8 @@
         </p:nvSpPr>
         <p:spPr>
           <a:xfrm>
-            <a:off x="822960" y="2788920"/>
-            <a:ext cx="5257800" cy="1051560"/>
+            <a:off x="640080" y="1874520"/>
+            <a:ext cx="6949440" cy="914400"/>
           </a:xfrm>
           <a:prstGeom prst="rect">
             <a:avLst/>
@@ -6878,14 +7494,14 @@
               <a:buNone/>
             </a:pPr>
             <a:r>
-              <a:rPr lang="en-US" sz="6000" b="1" dirty="0">
+              <a:rPr lang="en-US" sz="5200" b="1" dirty="0">
                 <a:solidFill>
                   <a:schemeClr val="bg1"/>
                 </a:solidFill>
               </a:rPr>
-              <a:t>Gracias</a:t>
-            </a:r>
-            <a:endParaRPr lang="en-US" sz="6000" dirty="0"/>
+              <a:t>Presenta con libertad</a:t>
+            </a:r>
+            <a:endParaRPr lang="en-US" sz="5200" dirty="0"/>
           </a:p>
         </p:txBody>
       </p:sp>
@@ -6899,6 +7515,393 @@
         </p:nvSpPr>
         <p:spPr>
           <a:xfrm>
+            <a:off x="640080" y="2926080"/>
+            <a:ext cx="6949440" cy="548640"/>
+          </a:xfrm>
+          <a:prstGeom prst="rect">
+            <a:avLst/>
+          </a:prstGeom>
+          <a:noFill/>
+          <a:ln/>
+        </p:spPr>
+        <p:txBody>
+          <a:bodyPr wrap="square" lIns="0" tIns="0" rIns="0" bIns="0" rtlCol="0" anchor="t"/>
+          <a:lstStyle/>
+          <a:p>
+            <a:pPr algn="l" indent="0" marL="0">
+              <a:buNone/>
+            </a:pPr>
+            <a:r>
+              <a:rPr lang="en-US" sz="2000" dirty="0">
+                <a:solidFill>
+                  <a:schemeClr val="accent5"/>
+                </a:solidFill>
+              </a:rPr>
+              <a:t>Escanea, conecta y presenta desde tu celular.</a:t>
+            </a:r>
+            <a:endParaRPr lang="en-US" sz="2000" dirty="0"/>
+          </a:p>
+        </p:txBody>
+      </p:sp>
+      <p:pic>
+        <p:nvPicPr>
+          <p:cNvPr id="5" name="enlace-icono-238" descr="preencoded.png">    </p:cNvPr>
+          <p:cNvPicPr>
+            <a:picLocks noChangeAspect="1"/>
+          </p:cNvPicPr>
+          <p:nvPr/>
+        </p:nvPicPr>
+        <p:blipFill>
+          <a:blip r:embed="rId2"/>
+          <a:stretch>
+            <a:fillRect/>
+          </a:stretch>
+        </p:blipFill>
+        <p:spPr>
+          <a:xfrm>
+            <a:off x="640080" y="3995928"/>
+            <a:ext cx="292608" cy="292608"/>
+          </a:xfrm>
+          <a:prstGeom prst="rect">
+            <a:avLst/>
+          </a:prstGeom>
+        </p:spPr>
+      </p:pic>
+      <p:sp>
+        <p:nvSpPr>
+          <p:cNvPr id="6" name="enlace-239"/>
+          <p:cNvSpPr txBox="1"/>
+          <p:nvPr/>
+        </p:nvSpPr>
+        <p:spPr>
+          <a:xfrm>
+            <a:off x="1097280" y="3931920"/>
+            <a:ext cx="5486400" cy="420624"/>
+          </a:xfrm>
+          <a:prstGeom prst="rect">
+            <a:avLst/>
+          </a:prstGeom>
+          <a:noFill/>
+          <a:ln/>
+        </p:spPr>
+        <p:txBody>
+          <a:bodyPr wrap="square" lIns="0" tIns="0" rIns="0" bIns="0" rtlCol="0" anchor="ctr"/>
+          <a:lstStyle/>
+          <a:p>
+            <a:pPr indent="0" marL="0">
+              <a:buNone/>
+            </a:pPr>
+            <a:r>
+              <a:rPr lang="en-US" sz="1600" dirty="0">
+                <a:solidFill>
+                  <a:schemeClr val="bg1"/>
+                </a:solidFill>
+              </a:rPr>
+              <a:t>mjmc4498.github.io/mando</a:t>
+            </a:r>
+            <a:endParaRPr lang="en-US" sz="1600" dirty="0"/>
+          </a:p>
+        </p:txBody>
+      </p:sp>
+      <p:pic>
+        <p:nvPicPr>
+          <p:cNvPr id="7" name="enlace-icono-240" descr="preencoded.png">    </p:cNvPr>
+          <p:cNvPicPr>
+            <a:picLocks noChangeAspect="1"/>
+          </p:cNvPicPr>
+          <p:nvPr/>
+        </p:nvPicPr>
+        <p:blipFill>
+          <a:blip r:embed="rId3"/>
+          <a:stretch>
+            <a:fillRect/>
+          </a:stretch>
+        </p:blipFill>
+        <p:spPr>
+          <a:xfrm>
+            <a:off x="640080" y="4562856"/>
+            <a:ext cx="292608" cy="292608"/>
+          </a:xfrm>
+          <a:prstGeom prst="rect">
+            <a:avLst/>
+          </a:prstGeom>
+        </p:spPr>
+      </p:pic>
+      <p:sp>
+        <p:nvSpPr>
+          <p:cNvPr id="8" name="enlace-241"/>
+          <p:cNvSpPr txBox="1"/>
+          <p:nvPr/>
+        </p:nvSpPr>
+        <p:spPr>
+          <a:xfrm>
+            <a:off x="1097280" y="4498848"/>
+            <a:ext cx="5486400" cy="420624"/>
+          </a:xfrm>
+          <a:prstGeom prst="rect">
+            <a:avLst/>
+          </a:prstGeom>
+          <a:noFill/>
+          <a:ln/>
+        </p:spPr>
+        <p:txBody>
+          <a:bodyPr wrap="square" lIns="0" tIns="0" rIns="0" bIns="0" rtlCol="0" anchor="ctr"/>
+          <a:lstStyle/>
+          <a:p>
+            <a:pPr indent="0" marL="0">
+              <a:buNone/>
+            </a:pPr>
+            <a:r>
+              <a:rPr lang="en-US" sz="1600" dirty="0">
+                <a:solidFill>
+                  <a:schemeClr val="bg1"/>
+                </a:solidFill>
+              </a:rPr>
+              <a:t>github.com/mjmc4498/mando</a:t>
+            </a:r>
+            <a:endParaRPr lang="en-US" sz="1600" dirty="0"/>
+          </a:p>
+        </p:txBody>
+      </p:sp>
+      <p:pic>
+        <p:nvPicPr>
+          <p:cNvPr id="9" name="enlace-icono-242" descr="preencoded.png">    </p:cNvPr>
+          <p:cNvPicPr>
+            <a:picLocks noChangeAspect="1"/>
+          </p:cNvPicPr>
+          <p:nvPr/>
+        </p:nvPicPr>
+        <p:blipFill>
+          <a:blip r:embed="rId4"/>
+          <a:stretch>
+            <a:fillRect/>
+          </a:stretch>
+        </p:blipFill>
+        <p:spPr>
+          <a:xfrm>
+            <a:off x="640080" y="5129784"/>
+            <a:ext cx="292608" cy="292608"/>
+          </a:xfrm>
+          <a:prstGeom prst="rect">
+            <a:avLst/>
+          </a:prstGeom>
+        </p:spPr>
+      </p:pic>
+      <p:sp>
+        <p:nvSpPr>
+          <p:cNvPr id="10" name="enlace-243"/>
+          <p:cNvSpPr txBox="1"/>
+          <p:nvPr/>
+        </p:nvSpPr>
+        <p:spPr>
+          <a:xfrm>
+            <a:off x="1097280" y="5065776"/>
+            <a:ext cx="5486400" cy="420624"/>
+          </a:xfrm>
+          <a:prstGeom prst="rect">
+            <a:avLst/>
+          </a:prstGeom>
+          <a:noFill/>
+          <a:ln/>
+        </p:spPr>
+        <p:txBody>
+          <a:bodyPr wrap="square" lIns="0" tIns="0" rIns="0" bIns="0" rtlCol="0" anchor="ctr"/>
+          <a:lstStyle/>
+          <a:p>
+            <a:pPr indent="0" marL="0">
+              <a:buNone/>
+            </a:pPr>
+            <a:r>
+              <a:rPr lang="en-US" sz="1600" dirty="0">
+                <a:solidFill>
+                  <a:schemeClr val="bg1"/>
+                </a:solidFill>
+              </a:rPr>
+              <a:t>Miguel Mogrovejo</a:t>
+            </a:r>
+            <a:endParaRPr lang="en-US" sz="1600" dirty="0"/>
+          </a:p>
+        </p:txBody>
+      </p:sp>
+      <p:sp>
+        <p:nvSpPr>
+          <p:cNvPr id="11" name="qr-tarjeta"/>
+          <p:cNvSpPr/>
+          <p:nvPr/>
+        </p:nvSpPr>
+        <p:spPr>
+          <a:xfrm>
+            <a:off x="8458200" y="1783080"/>
+            <a:ext cx="3090672" cy="3703320"/>
+          </a:xfrm>
+          <a:prstGeom prst="roundRect">
+            <a:avLst>
+              <a:gd name="adj" fmla="val 6509"/>
+            </a:avLst>
+          </a:prstGeom>
+          <a:solidFill>
+            <a:schemeClr val="bg1"/>
+          </a:solidFill>
+          <a:ln/>
+        </p:spPr>
+      </p:sp>
+      <p:pic>
+        <p:nvPicPr>
+          <p:cNvPr id="12" name="qr" descr="Código QR al repositorio de Presentazo en GitHub">    </p:cNvPr>
+          <p:cNvPicPr>
+            <a:picLocks noChangeAspect="1"/>
+          </p:cNvPicPr>
+          <p:nvPr/>
+        </p:nvPicPr>
+        <p:blipFill>
+          <a:blip r:embed="rId5"/>
+          <a:stretch>
+            <a:fillRect/>
+          </a:stretch>
+        </p:blipFill>
+        <p:spPr>
+          <a:xfrm>
+            <a:off x="8814816" y="2103120"/>
+            <a:ext cx="2377440" cy="2377440"/>
+          </a:xfrm>
+          <a:prstGeom prst="rect">
+            <a:avLst/>
+          </a:prstGeom>
+        </p:spPr>
+      </p:pic>
+      <p:sp>
+        <p:nvSpPr>
+          <p:cNvPr id="13" name="qr-texto"/>
+          <p:cNvSpPr txBox="1"/>
+          <p:nvPr/>
+        </p:nvSpPr>
+        <p:spPr>
+          <a:xfrm>
+            <a:off x="8641080" y="4709160"/>
+            <a:ext cx="2724912" cy="457200"/>
+          </a:xfrm>
+          <a:prstGeom prst="rect">
+            <a:avLst/>
+          </a:prstGeom>
+          <a:noFill/>
+          <a:ln/>
+        </p:spPr>
+        <p:txBody>
+          <a:bodyPr wrap="square" lIns="0" tIns="0" rIns="0" bIns="0" rtlCol="0" anchor="ctr"/>
+          <a:lstStyle/>
+          <a:p>
+            <a:pPr algn="ctr" indent="0" marL="0">
+              <a:buNone/>
+            </a:pPr>
+            <a:r>
+              <a:rPr lang="en-US" sz="1400" b="1" dirty="0">
+                <a:solidFill>
+                  <a:schemeClr val="tx1"/>
+                </a:solidFill>
+              </a:rPr>
+              <a:t>Escanea para ver el proyecto</a:t>
+            </a:r>
+            <a:endParaRPr lang="en-US" sz="1400" dirty="0"/>
+          </a:p>
+        </p:txBody>
+      </p:sp>
+    </p:spTree>
+  </p:cSld>
+  <p:clrMapOvr>
+    <a:masterClrMapping/>
+  </p:clrMapOvr>
+</p:sld>
+</file>
+
+<file path=ppt/slides/slide16.xml><?xml version="1.0" encoding="utf-8"?>
+<p:sld xmlns:a="http://schemas.openxmlformats.org/drawingml/2006/main" xmlns:r="http://schemas.openxmlformats.org/officeDocument/2006/relationships" xmlns:p="http://schemas.openxmlformats.org/presentationml/2006/main">
+  <p:cSld name="Slide 16">
+    <p:spTree>
+      <p:nvGrpSpPr>
+        <p:cNvPr id="1" name=""/>
+        <p:cNvGrpSpPr/>
+        <p:nvPr/>
+      </p:nvGrpSpPr>
+      <p:grpSpPr>
+        <a:xfrm>
+          <a:off x="0" y="0"/>
+          <a:ext cx="0" cy="0"/>
+          <a:chOff x="0" y="0"/>
+          <a:chExt cx="0" cy="0"/>
+        </a:xfrm>
+      </p:grpSpPr>
+      <p:pic>
+        <p:nvPicPr>
+          <p:cNvPr id="2" name="logo-final" descr="Logo de Presentazo">    </p:cNvPr>
+          <p:cNvPicPr>
+            <a:picLocks noChangeAspect="1"/>
+          </p:cNvPicPr>
+          <p:nvPr/>
+        </p:nvPicPr>
+        <p:blipFill>
+          <a:blip r:embed="rId1"/>
+          <a:stretch>
+            <a:fillRect/>
+          </a:stretch>
+        </p:blipFill>
+        <p:spPr>
+          <a:xfrm>
+            <a:off x="680314" y="1417320"/>
+            <a:ext cx="1143000" cy="1143000"/>
+          </a:xfrm>
+          <a:prstGeom prst="rect">
+            <a:avLst/>
+          </a:prstGeom>
+        </p:spPr>
+      </p:pic>
+      <p:sp>
+        <p:nvSpPr>
+          <p:cNvPr id="3" name="Text 0"/>
+          <p:cNvSpPr/>
+          <p:nvPr>
+            <p:ph idx="100" type="title" hasCustomPrompt="1"/>
+          </p:nvPr>
+        </p:nvSpPr>
+        <p:spPr>
+          <a:xfrm>
+            <a:off x="822960" y="2788920"/>
+            <a:ext cx="5257800" cy="1051560"/>
+          </a:xfrm>
+          <a:prstGeom prst="rect">
+            <a:avLst/>
+          </a:prstGeom>
+          <a:noFill/>
+          <a:ln/>
+        </p:spPr>
+        <p:txBody>
+          <a:bodyPr wrap="square" lIns="0" tIns="0" rIns="0" bIns="0" rtlCol="0" anchor="b"/>
+          <a:lstStyle/>
+          <a:p>
+            <a:pPr algn="l" indent="0" marL="0">
+              <a:buNone/>
+            </a:pPr>
+            <a:r>
+              <a:rPr lang="en-US" sz="6000" b="1" dirty="0">
+                <a:solidFill>
+                  <a:schemeClr val="bg1"/>
+                </a:solidFill>
+              </a:rPr>
+              <a:t>Gracias</a:t>
+            </a:r>
+            <a:endParaRPr lang="en-US" sz="6000" dirty="0"/>
+          </a:p>
+        </p:txBody>
+      </p:sp>
+      <p:sp>
+        <p:nvSpPr>
+          <p:cNvPr id="4" name="Text 0"/>
+          <p:cNvSpPr/>
+          <p:nvPr>
+            <p:ph idx="101" type="body" hasCustomPrompt="1"/>
+          </p:nvPr>
+        </p:nvSpPr>
+        <p:spPr>
+          <a:xfrm>
             <a:off x="822960" y="3977640"/>
             <a:ext cx="5120640" cy="914400"/>
           </a:xfrm>
@@ -6967,7 +7970,7 @@
       </p:sp>
       <p:sp>
         <p:nvSpPr>
-          <p:cNvPr id="6" name="marco-222"/>
+          <p:cNvPr id="6" name="marco-244"/>
           <p:cNvSpPr/>
           <p:nvPr/>
         </p:nvSpPr>
@@ -6992,7 +7995,7 @@
       </p:sp>
       <p:pic>
         <p:nvPicPr>
-          <p:cNvPr id="7" name="captura-223" descr="Diapositiva con anotaciones del lápiz de Presentazo">    </p:cNvPr>
+          <p:cNvPr id="7" name="captura-245" descr="Diapositiva con anotaciones del lápiz de Presentazo">    </p:cNvPr>
           <p:cNvPicPr>
             <a:picLocks noChangeAspect="1"/>
           </p:cNvPicPr>
@@ -7016,7 +8019,7 @@
       </p:pic>
       <p:pic>
         <p:nvPicPr>
-          <p:cNvPr id="8" name="celular-224" descr="Pantalla del lápiz en el control">    </p:cNvPr>
+          <p:cNvPr id="8" name="celular-246" descr="Pantalla del lápiz en el control">    </p:cNvPr>
           <p:cNvPicPr>
             <a:picLocks noChangeAspect="1"/>
           </p:cNvPicPr>
@@ -12696,7 +13699,7 @@
                   <a:schemeClr val="tx1"/>
                 </a:solidFill>
               </a:rPr>
-              <a:t>Computadora con Google Chrome</a:t>
+              <a:t>Computadora</a:t>
             </a:r>
             <a:endParaRPr lang="en-US" sz="1600" dirty="0"/>
           </a:p>
@@ -12710,7 +13713,7 @@
                   <a:schemeClr val="accent6"/>
                 </a:solidFill>
               </a:rPr>
-              <a:t>Versión 116 o superior en Windows, Mac, Linux y ChromeOS.</a:t>
+              <a:t>Extensión para Chrome 116 o superior, o la app para Windows y Mac (Intel y chip M).</a:t>
             </a:r>
             <a:endParaRPr lang="en-US" sz="1600" dirty="0"/>
           </a:p>
